--- a/投資家向け企画書.pptx
+++ b/投資家向け企画書.pptx
@@ -125,6 +125,281 @@
 </file>
 
 <file path=ppt/charts/chart1.xml><?xml version="1.0" encoding="utf-8"?>
+<c:chartSpace xmlns:c="http://schemas.openxmlformats.org/drawingml/2006/chart" xmlns:a="http://schemas.openxmlformats.org/drawingml/2006/main" xmlns:r="http://schemas.openxmlformats.org/officeDocument/2006/relationships">
+  <c:date1904 val="0"/>
+  <c:roundedCorners val="1"/>
+  <c:chart>
+    <c:autoTitleDeleted val="1"/>
+    <c:plotArea>
+      <c:layout/>
+      <c:barChart>
+        <c:barDir val="bar"/>
+        <c:grouping val="clustered"/>
+        <c:varyColors val="0"/>
+        <c:ser>
+          <c:idx val="0"/>
+          <c:order val="0"/>
+          <c:tx>
+            <c:strRef>
+              <c:f>Sheet1!$B$1</c:f>
+              <c:strCache>
+                <c:ptCount val="1"/>
+                <c:pt idx="0">
+                  <c:v>市場規模(億円)</c:v>
+                </c:pt>
+              </c:strCache>
+            </c:strRef>
+          </c:tx>
+          <c:spPr>
+            <a:solidFill>
+              <a:srgbClr val="2A3563"/>
+            </a:solidFill>
+            <a:effectLst/>
+          </c:spPr>
+          <c:invertIfNegative val="0"/>
+          <c:dLbls>
+            <c:numFmt formatCode="#,##0.#&quot;億円&quot;" sourceLinked="0"/>
+            <c:txPr>
+              <a:bodyPr/>
+              <a:lstStyle/>
+              <a:p>
+                <a:pPr>
+                  <a:defRPr b="0" i="0" strike="noStrike" sz="1100" u="none">
+                    <a:solidFill>
+                      <a:srgbClr val="16161A"/>
+                    </a:solidFill>
+                    <a:latin typeface="Meiryo"/>
+                  </a:defRPr>
+                </a:pPr>
+              </a:p>
+            </c:txPr>
+            <c:showLegendKey val="0"/>
+            <c:showVal val="1"/>
+            <c:showCatName val="0"/>
+            <c:showSerName val="0"/>
+            <c:showPercent val="0"/>
+            <c:showBubbleSize val="0"/>
+            <c:showLeaderLines val="0"/>
+          </c:dLbls>
+          <c:dPt>
+            <c:idx val="0"/>
+            <c:invertIfNegative val="0"/>
+            <c:bubble3D val="0"/>
+            <c:spPr>
+              <a:solidFill>
+                <a:srgbClr val="2A3563"/>
+              </a:solidFill>
+              <a:effectLst/>
+            </c:spPr>
+          </c:dPt>
+          <c:dPt>
+            <c:idx val="1"/>
+            <c:invertIfNegative val="0"/>
+            <c:bubble3D val="0"/>
+            <c:spPr>
+              <a:solidFill>
+                <a:srgbClr val="B3121B"/>
+              </a:solidFill>
+              <a:effectLst/>
+            </c:spPr>
+          </c:dPt>
+          <c:dPt>
+            <c:idx val="2"/>
+            <c:invertIfNegative val="0"/>
+            <c:bubble3D val="0"/>
+            <c:spPr>
+              <a:solidFill>
+                <a:srgbClr val="C9962C"/>
+              </a:solidFill>
+              <a:effectLst/>
+            </c:spPr>
+          </c:dPt>
+          <c:cat>
+            <c:multiLvlStrRef>
+              <c:f>Sheet1!$A$2:$A$4</c:f>
+              <c:multiLvlStrCache>
+                <c:ptCount val="3"/>
+                <c:lvl>
+                  <c:pt idx="0">
+                    <c:v>TAM 日本の映像制作市場</c:v>
+                  </c:pt>
+                  <c:pt idx="1">
+                    <c:v>SAM 構造的に狙える範囲</c:v>
+                  </c:pt>
+                  <c:pt idx="2">
+                    <c:v>SOM 3年後の当社売上</c:v>
+                  </c:pt>
+                </c:lvl>
+              </c:multiLvlStrCache>
+            </c:multiLvlStrRef>
+          </c:cat>
+          <c:val>
+            <c:numRef>
+              <c:f>Sheet1!$B$2:$B$4</c:f>
+              <c:numCache>
+                <c:formatCode>General</c:formatCode>
+                <c:ptCount val="3"/>
+                <c:pt idx="0">
+                  <c:v>4580</c:v>
+                </c:pt>
+                <c:pt idx="1">
+                  <c:v>1370</c:v>
+                </c:pt>
+                <c:pt idx="2">
+                  <c:v>2.5</c:v>
+                </c:pt>
+              </c:numCache>
+            </c:numRef>
+          </c:val>
+        </c:ser>
+        <c:dLbls>
+          <c:numFmt formatCode="#,##0.#&quot;億円&quot;" sourceLinked="0"/>
+          <c:txPr>
+            <a:bodyPr/>
+            <a:lstStyle/>
+            <a:p>
+              <a:pPr>
+                <a:defRPr b="0" i="0" strike="noStrike" sz="1100" u="none">
+                  <a:solidFill>
+                    <a:srgbClr val="16161A"/>
+                  </a:solidFill>
+                  <a:latin typeface="Meiryo"/>
+                </a:defRPr>
+              </a:pPr>
+            </a:p>
+          </c:txPr>
+          <c:showLegendKey val="0"/>
+          <c:showVal val="1"/>
+          <c:showCatName val="0"/>
+          <c:showSerName val="0"/>
+          <c:showPercent val="0"/>
+          <c:showBubbleSize val="0"/>
+          <c:showLeaderLines val="0"/>
+        </c:dLbls>
+        <c:gapWidth val="150"/>
+        <c:overlap val="0"/>
+        <c:axId val="2094734554"/>
+        <c:axId val="2094734552"/>
+        <c:axId val="2094734556"/>
+      </c:barChart>
+      <c:catAx>
+        <c:axId val="2094734554"/>
+        <c:scaling>
+          <c:orientation val="minMax"/>
+        </c:scaling>
+        <c:delete val="0"/>
+        <c:axPos val="l"/>
+        <c:numFmt formatCode="General" sourceLinked="1"/>
+        <c:majorTickMark val="out"/>
+        <c:minorTickMark val="none"/>
+        <c:tickLblPos val="nextTo"/>
+        <c:spPr>
+          <a:ln w="12700" cap="flat">
+            <a:solidFill>
+              <a:srgbClr val="888888"/>
+            </a:solidFill>
+            <a:prstDash val="solid"/>
+            <a:round/>
+          </a:ln>
+        </c:spPr>
+        <c:txPr>
+          <a:bodyPr/>
+          <a:lstStyle/>
+          <a:p>
+            <a:pPr>
+              <a:defRPr sz="1000" b="0" i="0" u="none" strike="noStrike">
+                <a:solidFill>
+                  <a:srgbClr val="3A3A42"/>
+                </a:solidFill>
+                <a:latin typeface="Meiryo"/>
+              </a:defRPr>
+            </a:pPr>
+            <a:endParaRPr lang="en-US"/>
+          </a:p>
+        </c:txPr>
+        <c:crossAx val="2094734552"/>
+        <c:crosses val="autoZero"/>
+        <c:auto val="1"/>
+        <c:lblAlgn val="ctr"/>
+        <c:noMultiLvlLbl val="1"/>
+      </c:catAx>
+      <c:valAx>
+        <c:axId val="2094734552"/>
+        <c:scaling>
+          <c:orientation val="minMax"/>
+          <c:max val="5200"/>
+          <c:min val="0"/>
+        </c:scaling>
+        <c:delete val="0"/>
+        <c:axPos val="b"/>
+        <c:majorGridlines>
+          <c:spPr>
+            <a:ln w="12700" cap="flat">
+              <a:solidFill>
+                <a:srgbClr val="DCD9D4"/>
+              </a:solidFill>
+              <a:prstDash val="solid"/>
+              <a:round/>
+            </a:ln>
+          </c:spPr>
+        </c:majorGridlines>
+        <c:numFmt formatCode="General" sourceLinked="0"/>
+        <c:majorTickMark val="out"/>
+        <c:minorTickMark val="none"/>
+        <c:tickLblPos val="low"/>
+        <c:spPr>
+          <a:ln w="12700" cap="flat">
+            <a:solidFill>
+              <a:srgbClr val="888888"/>
+            </a:solidFill>
+            <a:prstDash val="solid"/>
+            <a:round/>
+          </a:ln>
+        </c:spPr>
+        <c:txPr>
+          <a:bodyPr/>
+          <a:lstStyle/>
+          <a:p>
+            <a:pPr>
+              <a:defRPr sz="900" b="0" i="0" u="none" strike="noStrike">
+                <a:solidFill>
+                  <a:srgbClr val="6E6E76"/>
+                </a:solidFill>
+                <a:latin typeface="Meiryo"/>
+              </a:defRPr>
+            </a:pPr>
+            <a:endParaRPr lang="en-US"/>
+          </a:p>
+        </c:txPr>
+        <c:crossAx val="2094734554"/>
+        <c:crosses val="autoZero"/>
+        <c:crossBetween val="between"/>
+      </c:valAx>
+      <c:spPr>
+        <a:noFill/>
+        <a:ln>
+          <a:noFill/>
+        </a:ln>
+        <a:effectLst/>
+      </c:spPr>
+    </c:plotArea>
+    <c:plotVisOnly val="1"/>
+    <c:dispBlanksAs val="span"/>
+  </c:chart>
+  <c:spPr>
+    <a:noFill/>
+    <a:ln>
+      <a:noFill/>
+    </a:ln>
+    <a:effectLst/>
+  </c:spPr>
+  <c:externalData r:id="rId1">
+    <c:autoUpdate val="0"/>
+  </c:externalData>
+</c:chartSpace>
+</file>
+
+<file path=ppt/charts/chart2.xml><?xml version="1.0" encoding="utf-8"?>
 <c:chartSpace xmlns:c="http://schemas.openxmlformats.org/drawingml/2006/chart" xmlns:a="http://schemas.openxmlformats.org/drawingml/2006/main" xmlns:r="http://schemas.openxmlformats.org/officeDocument/2006/relationships">
   <c:date1904 val="0"/>
   <c:roundedCorners val="1"/>
@@ -426,281 +701,6 @@
         <c:majorTickMark val="out"/>
         <c:minorTickMark val="none"/>
         <c:tickLblPos val="nextTo"/>
-        <c:spPr>
-          <a:ln w="12700" cap="flat">
-            <a:solidFill>
-              <a:srgbClr val="888888"/>
-            </a:solidFill>
-            <a:prstDash val="solid"/>
-            <a:round/>
-          </a:ln>
-        </c:spPr>
-        <c:txPr>
-          <a:bodyPr/>
-          <a:lstStyle/>
-          <a:p>
-            <a:pPr>
-              <a:defRPr sz="900" b="0" i="0" u="none" strike="noStrike">
-                <a:solidFill>
-                  <a:srgbClr val="6E6E76"/>
-                </a:solidFill>
-                <a:latin typeface="Meiryo"/>
-              </a:defRPr>
-            </a:pPr>
-            <a:endParaRPr lang="en-US"/>
-          </a:p>
-        </c:txPr>
-        <c:crossAx val="2094734554"/>
-        <c:crosses val="autoZero"/>
-        <c:crossBetween val="between"/>
-      </c:valAx>
-      <c:spPr>
-        <a:noFill/>
-        <a:ln>
-          <a:noFill/>
-        </a:ln>
-        <a:effectLst/>
-      </c:spPr>
-    </c:plotArea>
-    <c:plotVisOnly val="1"/>
-    <c:dispBlanksAs val="span"/>
-  </c:chart>
-  <c:spPr>
-    <a:noFill/>
-    <a:ln>
-      <a:noFill/>
-    </a:ln>
-    <a:effectLst/>
-  </c:spPr>
-  <c:externalData r:id="rId1">
-    <c:autoUpdate val="0"/>
-  </c:externalData>
-</c:chartSpace>
-</file>
-
-<file path=ppt/charts/chart2.xml><?xml version="1.0" encoding="utf-8"?>
-<c:chartSpace xmlns:c="http://schemas.openxmlformats.org/drawingml/2006/chart" xmlns:a="http://schemas.openxmlformats.org/drawingml/2006/main" xmlns:r="http://schemas.openxmlformats.org/officeDocument/2006/relationships">
-  <c:date1904 val="0"/>
-  <c:roundedCorners val="1"/>
-  <c:chart>
-    <c:autoTitleDeleted val="1"/>
-    <c:plotArea>
-      <c:layout/>
-      <c:barChart>
-        <c:barDir val="bar"/>
-        <c:grouping val="clustered"/>
-        <c:varyColors val="0"/>
-        <c:ser>
-          <c:idx val="0"/>
-          <c:order val="0"/>
-          <c:tx>
-            <c:strRef>
-              <c:f>Sheet1!$B$1</c:f>
-              <c:strCache>
-                <c:ptCount val="1"/>
-                <c:pt idx="0">
-                  <c:v>市場規模(億円)</c:v>
-                </c:pt>
-              </c:strCache>
-            </c:strRef>
-          </c:tx>
-          <c:spPr>
-            <a:solidFill>
-              <a:srgbClr val="2A3563"/>
-            </a:solidFill>
-            <a:effectLst/>
-          </c:spPr>
-          <c:invertIfNegative val="0"/>
-          <c:dLbls>
-            <c:numFmt formatCode="#,##0.#&quot;億円&quot;" sourceLinked="0"/>
-            <c:txPr>
-              <a:bodyPr/>
-              <a:lstStyle/>
-              <a:p>
-                <a:pPr>
-                  <a:defRPr b="0" i="0" strike="noStrike" sz="1100" u="none">
-                    <a:solidFill>
-                      <a:srgbClr val="16161A"/>
-                    </a:solidFill>
-                    <a:latin typeface="Meiryo"/>
-                  </a:defRPr>
-                </a:pPr>
-              </a:p>
-            </c:txPr>
-            <c:showLegendKey val="0"/>
-            <c:showVal val="1"/>
-            <c:showCatName val="0"/>
-            <c:showSerName val="0"/>
-            <c:showPercent val="0"/>
-            <c:showBubbleSize val="0"/>
-            <c:showLeaderLines val="0"/>
-          </c:dLbls>
-          <c:dPt>
-            <c:idx val="0"/>
-            <c:invertIfNegative val="0"/>
-            <c:bubble3D val="0"/>
-            <c:spPr>
-              <a:solidFill>
-                <a:srgbClr val="2A3563"/>
-              </a:solidFill>
-              <a:effectLst/>
-            </c:spPr>
-          </c:dPt>
-          <c:dPt>
-            <c:idx val="1"/>
-            <c:invertIfNegative val="0"/>
-            <c:bubble3D val="0"/>
-            <c:spPr>
-              <a:solidFill>
-                <a:srgbClr val="B3121B"/>
-              </a:solidFill>
-              <a:effectLst/>
-            </c:spPr>
-          </c:dPt>
-          <c:dPt>
-            <c:idx val="2"/>
-            <c:invertIfNegative val="0"/>
-            <c:bubble3D val="0"/>
-            <c:spPr>
-              <a:solidFill>
-                <a:srgbClr val="C9962C"/>
-              </a:solidFill>
-              <a:effectLst/>
-            </c:spPr>
-          </c:dPt>
-          <c:cat>
-            <c:multiLvlStrRef>
-              <c:f>Sheet1!$A$2:$A$4</c:f>
-              <c:multiLvlStrCache>
-                <c:ptCount val="3"/>
-                <c:lvl>
-                  <c:pt idx="0">
-                    <c:v>TAM 日本の映像制作市場</c:v>
-                  </c:pt>
-                  <c:pt idx="1">
-                    <c:v>SAM 構造的に狙える範囲</c:v>
-                  </c:pt>
-                  <c:pt idx="2">
-                    <c:v>SOM 3年後の当社売上</c:v>
-                  </c:pt>
-                </c:lvl>
-              </c:multiLvlStrCache>
-            </c:multiLvlStrRef>
-          </c:cat>
-          <c:val>
-            <c:numRef>
-              <c:f>Sheet1!$B$2:$B$4</c:f>
-              <c:numCache>
-                <c:formatCode>General</c:formatCode>
-                <c:ptCount val="3"/>
-                <c:pt idx="0">
-                  <c:v>4580</c:v>
-                </c:pt>
-                <c:pt idx="1">
-                  <c:v>1370</c:v>
-                </c:pt>
-                <c:pt idx="2">
-                  <c:v>2.5</c:v>
-                </c:pt>
-              </c:numCache>
-            </c:numRef>
-          </c:val>
-        </c:ser>
-        <c:dLbls>
-          <c:numFmt formatCode="#,##0.#&quot;億円&quot;" sourceLinked="0"/>
-          <c:txPr>
-            <a:bodyPr/>
-            <a:lstStyle/>
-            <a:p>
-              <a:pPr>
-                <a:defRPr b="0" i="0" strike="noStrike" sz="1100" u="none">
-                  <a:solidFill>
-                    <a:srgbClr val="16161A"/>
-                  </a:solidFill>
-                  <a:latin typeface="Meiryo"/>
-                </a:defRPr>
-              </a:pPr>
-            </a:p>
-          </c:txPr>
-          <c:showLegendKey val="0"/>
-          <c:showVal val="1"/>
-          <c:showCatName val="0"/>
-          <c:showSerName val="0"/>
-          <c:showPercent val="0"/>
-          <c:showBubbleSize val="0"/>
-          <c:showLeaderLines val="0"/>
-        </c:dLbls>
-        <c:gapWidth val="150"/>
-        <c:overlap val="0"/>
-        <c:axId val="2094734554"/>
-        <c:axId val="2094734552"/>
-        <c:axId val="2094734556"/>
-      </c:barChart>
-      <c:catAx>
-        <c:axId val="2094734554"/>
-        <c:scaling>
-          <c:orientation val="minMax"/>
-        </c:scaling>
-        <c:delete val="0"/>
-        <c:axPos val="l"/>
-        <c:numFmt formatCode="General" sourceLinked="1"/>
-        <c:majorTickMark val="out"/>
-        <c:minorTickMark val="none"/>
-        <c:tickLblPos val="nextTo"/>
-        <c:spPr>
-          <a:ln w="12700" cap="flat">
-            <a:solidFill>
-              <a:srgbClr val="888888"/>
-            </a:solidFill>
-            <a:prstDash val="solid"/>
-            <a:round/>
-          </a:ln>
-        </c:spPr>
-        <c:txPr>
-          <a:bodyPr/>
-          <a:lstStyle/>
-          <a:p>
-            <a:pPr>
-              <a:defRPr sz="1000" b="0" i="0" u="none" strike="noStrike">
-                <a:solidFill>
-                  <a:srgbClr val="3A3A42"/>
-                </a:solidFill>
-                <a:latin typeface="Meiryo"/>
-              </a:defRPr>
-            </a:pPr>
-            <a:endParaRPr lang="en-US"/>
-          </a:p>
-        </c:txPr>
-        <c:crossAx val="2094734552"/>
-        <c:crosses val="autoZero"/>
-        <c:auto val="1"/>
-        <c:lblAlgn val="ctr"/>
-        <c:noMultiLvlLbl val="1"/>
-      </c:catAx>
-      <c:valAx>
-        <c:axId val="2094734552"/>
-        <c:scaling>
-          <c:orientation val="minMax"/>
-          <c:max val="5200"/>
-          <c:min val="0"/>
-        </c:scaling>
-        <c:delete val="0"/>
-        <c:axPos val="b"/>
-        <c:majorGridlines>
-          <c:spPr>
-            <a:ln w="12700" cap="flat">
-              <a:solidFill>
-                <a:srgbClr val="DCD9D4"/>
-              </a:solidFill>
-              <a:prstDash val="solid"/>
-              <a:round/>
-            </a:ln>
-          </c:spPr>
-        </c:majorGridlines>
-        <c:numFmt formatCode="General" sourceLinked="0"/>
-        <c:majorTickMark val="out"/>
-        <c:minorTickMark val="none"/>
-        <c:tickLblPos val="low"/>
         <c:spPr>
           <a:ln w="12700" cap="flat">
             <a:solidFill>
@@ -6858,7 +6858,7 @@
                 <a:ea typeface="Meiryo" pitchFamily="34" charset="-122"/>
                 <a:cs typeface="Meiryo" pitchFamily="34" charset="-120"/>
               </a:rPr>
-              <a:t>単月黒字化は日本側8〜10名になる3年目。それまでは投資期間です</a:t>
+              <a:t>単月黒字化は3年目。各年が上場のどのゲートに当たるかを下段に併記しています</a:t>
             </a:r>
             <a:endParaRPr lang="en-US" sz="1250" dirty="0"/>
           </a:p>
@@ -6872,7 +6872,7 @@
         </p:nvGraphicFramePr>
         <p:xfrm>
           <a:off x="594360" y="1572768"/>
-          <a:ext cx="6858000" cy="3840480"/>
+          <a:ext cx="6858000" cy="3703320"/>
         </p:xfrm>
         <a:graphic xmlns:a="http://schemas.openxmlformats.org/drawingml/2006/main">
           <a:graphicData uri="http://schemas.openxmlformats.org/drawingml/2006/chart">
@@ -6888,8 +6888,8 @@
         </p:nvSpPr>
         <p:spPr>
           <a:xfrm>
-            <a:off x="7772400" y="1572768"/>
-            <a:ext cx="3822192" cy="1481328"/>
+            <a:off x="7772400" y="1536192"/>
+            <a:ext cx="3822192" cy="1417320"/>
           </a:xfrm>
           <a:prstGeom prst="rect">
             <a:avLst/>
@@ -6908,7 +6908,7 @@
         </p:nvSpPr>
         <p:spPr>
           <a:xfrm>
-            <a:off x="8010144" y="1847088"/>
+            <a:off x="8010144" y="1810512"/>
             <a:ext cx="118872" cy="118872"/>
           </a:xfrm>
           <a:prstGeom prst="rect">
@@ -6928,7 +6928,7 @@
         </p:nvSpPr>
         <p:spPr>
           <a:xfrm>
-            <a:off x="8247888" y="1755648"/>
+            <a:off x="8247888" y="1719072"/>
             <a:ext cx="3108960" cy="310896"/>
           </a:xfrm>
           <a:prstGeom prst="rect">
@@ -6967,8 +6967,8 @@
         </p:nvSpPr>
         <p:spPr>
           <a:xfrm>
-            <a:off x="8247888" y="2121408"/>
-            <a:ext cx="3108960" cy="749808"/>
+            <a:off x="8247888" y="2084832"/>
+            <a:ext cx="3108960" cy="685800"/>
           </a:xfrm>
           <a:prstGeom prst="rect">
             <a:avLst/>
@@ -7049,8 +7049,8 @@
         </p:nvSpPr>
         <p:spPr>
           <a:xfrm>
-            <a:off x="7772400" y="3200400"/>
-            <a:ext cx="3822192" cy="1481328"/>
+            <a:off x="7772400" y="3054096"/>
+            <a:ext cx="3822192" cy="1417320"/>
           </a:xfrm>
           <a:prstGeom prst="rect">
             <a:avLst/>
@@ -7069,7 +7069,7 @@
         </p:nvSpPr>
         <p:spPr>
           <a:xfrm>
-            <a:off x="8010144" y="3474720"/>
+            <a:off x="8010144" y="3328416"/>
             <a:ext cx="118872" cy="118872"/>
           </a:xfrm>
           <a:prstGeom prst="rect">
@@ -7089,7 +7089,7 @@
         </p:nvSpPr>
         <p:spPr>
           <a:xfrm>
-            <a:off x="8247888" y="3383280"/>
+            <a:off x="8247888" y="3236976"/>
             <a:ext cx="3108960" cy="310896"/>
           </a:xfrm>
           <a:prstGeom prst="rect">
@@ -7128,8 +7128,8 @@
         </p:nvSpPr>
         <p:spPr>
           <a:xfrm>
-            <a:off x="8247888" y="3749040"/>
-            <a:ext cx="3108960" cy="749808"/>
+            <a:off x="8247888" y="3602736"/>
+            <a:ext cx="3108960" cy="685800"/>
           </a:xfrm>
           <a:prstGeom prst="rect">
             <a:avLst/>
@@ -7210,8 +7210,8 @@
         </p:nvSpPr>
         <p:spPr>
           <a:xfrm>
-            <a:off x="7772400" y="4828032"/>
-            <a:ext cx="3822192" cy="868680"/>
+            <a:off x="7772400" y="4572000"/>
+            <a:ext cx="3822192" cy="731520"/>
           </a:xfrm>
           <a:prstGeom prst="rect">
             <a:avLst/>
@@ -7230,7 +7230,7 @@
         </p:nvSpPr>
         <p:spPr>
           <a:xfrm>
-            <a:off x="8010144" y="5102352"/>
+            <a:off x="8010144" y="4846320"/>
             <a:ext cx="118872" cy="118872"/>
           </a:xfrm>
           <a:prstGeom prst="rect">
@@ -7250,7 +7250,7 @@
         </p:nvSpPr>
         <p:spPr>
           <a:xfrm>
-            <a:off x="8247888" y="5010912"/>
+            <a:off x="8247888" y="4754880"/>
             <a:ext cx="3108960" cy="310896"/>
           </a:xfrm>
           <a:prstGeom prst="rect">
@@ -7289,8 +7289,8 @@
         </p:nvSpPr>
         <p:spPr>
           <a:xfrm>
-            <a:off x="8247888" y="5376672"/>
-            <a:ext cx="3108960" cy="137160"/>
+            <a:off x="8247888" y="5120640"/>
+            <a:ext cx="3108960" cy="0"/>
           </a:xfrm>
           <a:prstGeom prst="rect">
             <a:avLst/>
@@ -7325,7 +7325,512 @@
       </p:sp>
       <p:sp>
         <p:nvSpPr>
-          <p:cNvPr id="19" name="Text 16"/>
+          <p:cNvPr id="19" name="Shape 16"/>
+          <p:cNvSpPr/>
+          <p:nvPr/>
+        </p:nvSpPr>
+        <p:spPr>
+          <a:xfrm>
+            <a:off x="594360" y="5468112"/>
+            <a:ext cx="2126894" cy="676656"/>
+          </a:xfrm>
+          <a:prstGeom prst="rect">
+            <a:avLst/>
+          </a:prstGeom>
+          <a:solidFill>
+            <a:srgbClr val="F4F2EF"/>
+          </a:solidFill>
+          <a:ln/>
+        </p:spPr>
+      </p:sp>
+      <p:sp>
+        <p:nvSpPr>
+          <p:cNvPr id="20" name="Text 17"/>
+          <p:cNvSpPr txBox="1"/>
+          <p:nvPr/>
+        </p:nvSpPr>
+        <p:spPr>
+          <a:xfrm>
+            <a:off x="740664" y="5513832"/>
+            <a:ext cx="1834286" cy="219456"/>
+          </a:xfrm>
+          <a:prstGeom prst="rect">
+            <a:avLst/>
+          </a:prstGeom>
+          <a:noFill/>
+          <a:ln/>
+        </p:spPr>
+        <p:txBody>
+          <a:bodyPr wrap="square" lIns="0" tIns="0" rIns="0" bIns="0" rtlCol="0" anchor="ctr"/>
+          <a:lstStyle/>
+          <a:p>
+            <a:pPr indent="0" marL="0">
+              <a:buNone/>
+            </a:pPr>
+            <a:r>
+              <a:rPr lang="en-US" sz="950" b="1" dirty="0">
+                <a:solidFill>
+                  <a:srgbClr val="B3121B"/>
+                </a:solidFill>
+                <a:latin typeface="Meiryo" pitchFamily="34" charset="0"/>
+                <a:ea typeface="Meiryo" pitchFamily="34" charset="-122"/>
+                <a:cs typeface="Meiryo" pitchFamily="34" charset="-120"/>
+              </a:rPr>
+              <a:t>1年目</a:t>
+            </a:r>
+            <a:endParaRPr lang="en-US" sz="950" dirty="0"/>
+          </a:p>
+        </p:txBody>
+      </p:sp>
+      <p:sp>
+        <p:nvSpPr>
+          <p:cNvPr id="21" name="Text 18"/>
+          <p:cNvSpPr txBox="1"/>
+          <p:nvPr/>
+        </p:nvSpPr>
+        <p:spPr>
+          <a:xfrm>
+            <a:off x="740664" y="5724144"/>
+            <a:ext cx="1834286" cy="384048"/>
+          </a:xfrm>
+          <a:prstGeom prst="rect">
+            <a:avLst/>
+          </a:prstGeom>
+          <a:noFill/>
+          <a:ln/>
+        </p:spPr>
+        <p:txBody>
+          <a:bodyPr wrap="square" lIns="0" tIns="0" rIns="0" bIns="0" rtlCol="0" anchor="ctr"/>
+          <a:lstStyle/>
+          <a:p>
+            <a:pPr indent="0" marL="0">
+              <a:lnSpc>
+                <a:spcPct val="110000"/>
+              </a:lnSpc>
+              <a:buNone/>
+            </a:pPr>
+            <a:r>
+              <a:rPr lang="en-US" sz="850" dirty="0">
+                <a:solidFill>
+                  <a:srgbClr val="3A3A42"/>
+                </a:solidFill>
+                <a:latin typeface="Meiryo" pitchFamily="34" charset="0"/>
+                <a:ea typeface="Meiryo" pitchFamily="34" charset="-122"/>
+                <a:cs typeface="Meiryo" pitchFamily="34" charset="-120"/>
+              </a:rPr>
+              <a:t>P2ゲート / 累計5本・粗利率55%</a:t>
+            </a:r>
+            <a:endParaRPr lang="en-US" sz="850" dirty="0"/>
+          </a:p>
+        </p:txBody>
+      </p:sp>
+      <p:sp>
+        <p:nvSpPr>
+          <p:cNvPr id="22" name="Shape 19"/>
+          <p:cNvSpPr/>
+          <p:nvPr/>
+        </p:nvSpPr>
+        <p:spPr>
+          <a:xfrm>
+            <a:off x="2812694" y="5468112"/>
+            <a:ext cx="2126894" cy="676656"/>
+          </a:xfrm>
+          <a:prstGeom prst="rect">
+            <a:avLst/>
+          </a:prstGeom>
+          <a:solidFill>
+            <a:srgbClr val="F4F2EF"/>
+          </a:solidFill>
+          <a:ln/>
+        </p:spPr>
+      </p:sp>
+      <p:sp>
+        <p:nvSpPr>
+          <p:cNvPr id="23" name="Text 20"/>
+          <p:cNvSpPr txBox="1"/>
+          <p:nvPr/>
+        </p:nvSpPr>
+        <p:spPr>
+          <a:xfrm>
+            <a:off x="2958998" y="5513832"/>
+            <a:ext cx="1834286" cy="219456"/>
+          </a:xfrm>
+          <a:prstGeom prst="rect">
+            <a:avLst/>
+          </a:prstGeom>
+          <a:noFill/>
+          <a:ln/>
+        </p:spPr>
+        <p:txBody>
+          <a:bodyPr wrap="square" lIns="0" tIns="0" rIns="0" bIns="0" rtlCol="0" anchor="ctr"/>
+          <a:lstStyle/>
+          <a:p>
+            <a:pPr indent="0" marL="0">
+              <a:buNone/>
+            </a:pPr>
+            <a:r>
+              <a:rPr lang="en-US" sz="950" b="1" dirty="0">
+                <a:solidFill>
+                  <a:srgbClr val="B3121B"/>
+                </a:solidFill>
+                <a:latin typeface="Meiryo" pitchFamily="34" charset="0"/>
+                <a:ea typeface="Meiryo" pitchFamily="34" charset="-122"/>
+                <a:cs typeface="Meiryo" pitchFamily="34" charset="-120"/>
+              </a:rPr>
+              <a:t>2年目</a:t>
+            </a:r>
+            <a:endParaRPr lang="en-US" sz="950" dirty="0"/>
+          </a:p>
+        </p:txBody>
+      </p:sp>
+      <p:sp>
+        <p:nvSpPr>
+          <p:cNvPr id="24" name="Text 21"/>
+          <p:cNvSpPr txBox="1"/>
+          <p:nvPr/>
+        </p:nvSpPr>
+        <p:spPr>
+          <a:xfrm>
+            <a:off x="2958998" y="5724144"/>
+            <a:ext cx="1834286" cy="384048"/>
+          </a:xfrm>
+          <a:prstGeom prst="rect">
+            <a:avLst/>
+          </a:prstGeom>
+          <a:noFill/>
+          <a:ln/>
+        </p:spPr>
+        <p:txBody>
+          <a:bodyPr wrap="square" lIns="0" tIns="0" rIns="0" bIns="0" rtlCol="0" anchor="ctr"/>
+          <a:lstStyle/>
+          <a:p>
+            <a:pPr indent="0" marL="0">
+              <a:lnSpc>
+                <a:spcPct val="110000"/>
+              </a:lnSpc>
+              <a:buNone/>
+            </a:pPr>
+            <a:r>
+              <a:rPr lang="en-US" sz="850" dirty="0">
+                <a:solidFill>
+                  <a:srgbClr val="3A3A42"/>
+                </a:solidFill>
+                <a:latin typeface="Meiryo" pitchFamily="34" charset="0"/>
+                <a:ea typeface="Meiryo" pitchFamily="34" charset="-122"/>
+                <a:cs typeface="Meiryo" pitchFamily="34" charset="-120"/>
+              </a:rPr>
+              <a:t>P3ゲート / 年商1億・リピート30%</a:t>
+            </a:r>
+            <a:endParaRPr lang="en-US" sz="850" dirty="0"/>
+          </a:p>
+        </p:txBody>
+      </p:sp>
+      <p:sp>
+        <p:nvSpPr>
+          <p:cNvPr id="25" name="Shape 22"/>
+          <p:cNvSpPr/>
+          <p:nvPr/>
+        </p:nvSpPr>
+        <p:spPr>
+          <a:xfrm>
+            <a:off x="5031029" y="5468112"/>
+            <a:ext cx="2126894" cy="676656"/>
+          </a:xfrm>
+          <a:prstGeom prst="rect">
+            <a:avLst/>
+          </a:prstGeom>
+          <a:solidFill>
+            <a:srgbClr val="F4F2EF"/>
+          </a:solidFill>
+          <a:ln/>
+        </p:spPr>
+      </p:sp>
+      <p:sp>
+        <p:nvSpPr>
+          <p:cNvPr id="26" name="Text 23"/>
+          <p:cNvSpPr txBox="1"/>
+          <p:nvPr/>
+        </p:nvSpPr>
+        <p:spPr>
+          <a:xfrm>
+            <a:off x="5177333" y="5513832"/>
+            <a:ext cx="1834286" cy="219456"/>
+          </a:xfrm>
+          <a:prstGeom prst="rect">
+            <a:avLst/>
+          </a:prstGeom>
+          <a:noFill/>
+          <a:ln/>
+        </p:spPr>
+        <p:txBody>
+          <a:bodyPr wrap="square" lIns="0" tIns="0" rIns="0" bIns="0" rtlCol="0" anchor="ctr"/>
+          <a:lstStyle/>
+          <a:p>
+            <a:pPr indent="0" marL="0">
+              <a:buNone/>
+            </a:pPr>
+            <a:r>
+              <a:rPr lang="en-US" sz="950" b="1" dirty="0">
+                <a:solidFill>
+                  <a:srgbClr val="B3121B"/>
+                </a:solidFill>
+                <a:latin typeface="Meiryo" pitchFamily="34" charset="0"/>
+                <a:ea typeface="Meiryo" pitchFamily="34" charset="-122"/>
+                <a:cs typeface="Meiryo" pitchFamily="34" charset="-120"/>
+              </a:rPr>
+              <a:t>3年目</a:t>
+            </a:r>
+            <a:endParaRPr lang="en-US" sz="950" dirty="0"/>
+          </a:p>
+        </p:txBody>
+      </p:sp>
+      <p:sp>
+        <p:nvSpPr>
+          <p:cNvPr id="27" name="Text 24"/>
+          <p:cNvSpPr txBox="1"/>
+          <p:nvPr/>
+        </p:nvSpPr>
+        <p:spPr>
+          <a:xfrm>
+            <a:off x="5177333" y="5724144"/>
+            <a:ext cx="1834286" cy="384048"/>
+          </a:xfrm>
+          <a:prstGeom prst="rect">
+            <a:avLst/>
+          </a:prstGeom>
+          <a:noFill/>
+          <a:ln/>
+        </p:spPr>
+        <p:txBody>
+          <a:bodyPr wrap="square" lIns="0" tIns="0" rIns="0" bIns="0" rtlCol="0" anchor="ctr"/>
+          <a:lstStyle/>
+          <a:p>
+            <a:pPr indent="0" marL="0">
+              <a:lnSpc>
+                <a:spcPct val="110000"/>
+              </a:lnSpc>
+              <a:buNone/>
+            </a:pPr>
+            <a:r>
+              <a:rPr lang="en-US" sz="850" dirty="0">
+                <a:solidFill>
+                  <a:srgbClr val="3A3A42"/>
+                </a:solidFill>
+                <a:latin typeface="Meiryo" pitchFamily="34" charset="0"/>
+                <a:ea typeface="Meiryo" pitchFamily="34" charset="-122"/>
+                <a:cs typeface="Meiryo" pitchFamily="34" charset="-120"/>
+              </a:rPr>
+              <a:t>単月黒字化 / 日本側8〜10名</a:t>
+            </a:r>
+            <a:endParaRPr lang="en-US" sz="850" dirty="0"/>
+          </a:p>
+        </p:txBody>
+      </p:sp>
+      <p:sp>
+        <p:nvSpPr>
+          <p:cNvPr id="28" name="Shape 25"/>
+          <p:cNvSpPr/>
+          <p:nvPr/>
+        </p:nvSpPr>
+        <p:spPr>
+          <a:xfrm>
+            <a:off x="7249363" y="5468112"/>
+            <a:ext cx="2126894" cy="676656"/>
+          </a:xfrm>
+          <a:prstGeom prst="rect">
+            <a:avLst/>
+          </a:prstGeom>
+          <a:solidFill>
+            <a:srgbClr val="F4F2EF"/>
+          </a:solidFill>
+          <a:ln/>
+        </p:spPr>
+      </p:sp>
+      <p:sp>
+        <p:nvSpPr>
+          <p:cNvPr id="29" name="Text 26"/>
+          <p:cNvSpPr txBox="1"/>
+          <p:nvPr/>
+        </p:nvSpPr>
+        <p:spPr>
+          <a:xfrm>
+            <a:off x="7395667" y="5513832"/>
+            <a:ext cx="1834286" cy="219456"/>
+          </a:xfrm>
+          <a:prstGeom prst="rect">
+            <a:avLst/>
+          </a:prstGeom>
+          <a:noFill/>
+          <a:ln/>
+        </p:spPr>
+        <p:txBody>
+          <a:bodyPr wrap="square" lIns="0" tIns="0" rIns="0" bIns="0" rtlCol="0" anchor="ctr"/>
+          <a:lstStyle/>
+          <a:p>
+            <a:pPr indent="0" marL="0">
+              <a:buNone/>
+            </a:pPr>
+            <a:r>
+              <a:rPr lang="en-US" sz="950" b="1" dirty="0">
+                <a:solidFill>
+                  <a:srgbClr val="B3121B"/>
+                </a:solidFill>
+                <a:latin typeface="Meiryo" pitchFamily="34" charset="0"/>
+                <a:ea typeface="Meiryo" pitchFamily="34" charset="-122"/>
+                <a:cs typeface="Meiryo" pitchFamily="34" charset="-120"/>
+              </a:rPr>
+              <a:t>4年目</a:t>
+            </a:r>
+            <a:endParaRPr lang="en-US" sz="950" dirty="0"/>
+          </a:p>
+        </p:txBody>
+      </p:sp>
+      <p:sp>
+        <p:nvSpPr>
+          <p:cNvPr id="30" name="Text 27"/>
+          <p:cNvSpPr txBox="1"/>
+          <p:nvPr/>
+        </p:nvSpPr>
+        <p:spPr>
+          <a:xfrm>
+            <a:off x="7395667" y="5724144"/>
+            <a:ext cx="1834286" cy="384048"/>
+          </a:xfrm>
+          <a:prstGeom prst="rect">
+            <a:avLst/>
+          </a:prstGeom>
+          <a:noFill/>
+          <a:ln/>
+        </p:spPr>
+        <p:txBody>
+          <a:bodyPr wrap="square" lIns="0" tIns="0" rIns="0" bIns="0" rtlCol="0" anchor="ctr"/>
+          <a:lstStyle/>
+          <a:p>
+            <a:pPr indent="0" marL="0">
+              <a:lnSpc>
+                <a:spcPct val="110000"/>
+              </a:lnSpc>
+              <a:buNone/>
+            </a:pPr>
+            <a:r>
+              <a:rPr lang="en-US" sz="850" dirty="0">
+                <a:solidFill>
+                  <a:srgbClr val="3A3A42"/>
+                </a:solidFill>
+                <a:latin typeface="Meiryo" pitchFamily="34" charset="0"/>
+                <a:ea typeface="Meiryo" pitchFamily="34" charset="-122"/>
+                <a:cs typeface="Meiryo" pitchFamily="34" charset="-120"/>
+              </a:rPr>
+              <a:t>P4ゲート / プロダクト比率10%</a:t>
+            </a:r>
+            <a:endParaRPr lang="en-US" sz="850" dirty="0"/>
+          </a:p>
+        </p:txBody>
+      </p:sp>
+      <p:sp>
+        <p:nvSpPr>
+          <p:cNvPr id="31" name="Shape 28"/>
+          <p:cNvSpPr/>
+          <p:nvPr/>
+        </p:nvSpPr>
+        <p:spPr>
+          <a:xfrm>
+            <a:off x="9467698" y="5468112"/>
+            <a:ext cx="2126894" cy="676656"/>
+          </a:xfrm>
+          <a:prstGeom prst="rect">
+            <a:avLst/>
+          </a:prstGeom>
+          <a:solidFill>
+            <a:srgbClr val="16161A"/>
+          </a:solidFill>
+          <a:ln/>
+        </p:spPr>
+      </p:sp>
+      <p:sp>
+        <p:nvSpPr>
+          <p:cNvPr id="32" name="Text 29"/>
+          <p:cNvSpPr txBox="1"/>
+          <p:nvPr/>
+        </p:nvSpPr>
+        <p:spPr>
+          <a:xfrm>
+            <a:off x="9614002" y="5513832"/>
+            <a:ext cx="1834286" cy="219456"/>
+          </a:xfrm>
+          <a:prstGeom prst="rect">
+            <a:avLst/>
+          </a:prstGeom>
+          <a:noFill/>
+          <a:ln/>
+        </p:spPr>
+        <p:txBody>
+          <a:bodyPr wrap="square" lIns="0" tIns="0" rIns="0" bIns="0" rtlCol="0" anchor="ctr"/>
+          <a:lstStyle/>
+          <a:p>
+            <a:pPr indent="0" marL="0">
+              <a:buNone/>
+            </a:pPr>
+            <a:r>
+              <a:rPr lang="en-US" sz="950" b="1" dirty="0">
+                <a:solidFill>
+                  <a:srgbClr val="C9962C"/>
+                </a:solidFill>
+                <a:latin typeface="Meiryo" pitchFamily="34" charset="0"/>
+                <a:ea typeface="Meiryo" pitchFamily="34" charset="-122"/>
+                <a:cs typeface="Meiryo" pitchFamily="34" charset="-120"/>
+              </a:rPr>
+              <a:t>5年目 → 上場申請</a:t>
+            </a:r>
+            <a:endParaRPr lang="en-US" sz="950" dirty="0"/>
+          </a:p>
+        </p:txBody>
+      </p:sp>
+      <p:sp>
+        <p:nvSpPr>
+          <p:cNvPr id="33" name="Text 30"/>
+          <p:cNvSpPr txBox="1"/>
+          <p:nvPr/>
+        </p:nvSpPr>
+        <p:spPr>
+          <a:xfrm>
+            <a:off x="9614002" y="5724144"/>
+            <a:ext cx="1834286" cy="384048"/>
+          </a:xfrm>
+          <a:prstGeom prst="rect">
+            <a:avLst/>
+          </a:prstGeom>
+          <a:noFill/>
+          <a:ln/>
+        </p:spPr>
+        <p:txBody>
+          <a:bodyPr wrap="square" lIns="0" tIns="0" rIns="0" bIns="0" rtlCol="0" anchor="ctr"/>
+          <a:lstStyle/>
+          <a:p>
+            <a:pPr indent="0" marL="0">
+              <a:lnSpc>
+                <a:spcPct val="110000"/>
+              </a:lnSpc>
+              <a:buNone/>
+            </a:pPr>
+            <a:r>
+              <a:rPr lang="en-US" sz="850" dirty="0">
+                <a:solidFill>
+                  <a:srgbClr val="EDEBE7"/>
+                </a:solidFill>
+                <a:latin typeface="Meiryo" pitchFamily="34" charset="0"/>
+                <a:ea typeface="Meiryo" pitchFamily="34" charset="-122"/>
+                <a:cs typeface="Meiryo" pitchFamily="34" charset="-120"/>
+              </a:rPr>
+              <a:t>流通株式時価総額5億円 / 比率25%</a:t>
+            </a:r>
+            <a:endParaRPr lang="en-US" sz="850" dirty="0"/>
+          </a:p>
+        </p:txBody>
+      </p:sp>
+      <p:sp>
+        <p:nvSpPr>
+          <p:cNvPr id="34" name="Text 31"/>
           <p:cNvSpPr txBox="1"/>
           <p:nvPr/>
         </p:nvSpPr>
@@ -7356,7 +7861,7 @@
                 <a:ea typeface="Meiryo" pitchFamily="34" charset="-122"/>
                 <a:cs typeface="Meiryo" pitchFamily="34" charset="-120"/>
               </a:rPr>
-              <a:t>計画値。ROADMAP の各フェーズのゲート条件と対応。詳細な資金繰りは budget_model.xlsx(263数式)で連動計算しています。</a:t>
+              <a:t>売上の各年が、次頁「上場までの流れ」のどのゲートに当たるかを下段に併記。詳細な資金繰りは budget_model.xlsx(263数式)で連動計算しています。</a:t>
             </a:r>
             <a:endParaRPr lang="en-US" sz="850" dirty="0"/>
           </a:p>
@@ -7364,7 +7869,7 @@
       </p:sp>
       <p:sp>
         <p:nvSpPr>
-          <p:cNvPr id="20" name="Text 17"/>
+          <p:cNvPr id="35" name="Text 32"/>
           <p:cNvSpPr txBox="1"/>
           <p:nvPr/>
         </p:nvSpPr>
@@ -13256,8 +13761,90 @@
         </p:nvSpPr>
         <p:spPr>
           <a:xfrm>
-            <a:off x="594360" y="1481328"/>
-            <a:ext cx="3483864" cy="1417320"/>
+            <a:off x="594360" y="1417320"/>
+            <a:ext cx="50292" cy="786384"/>
+          </a:xfrm>
+          <a:prstGeom prst="rect">
+            <a:avLst/>
+          </a:prstGeom>
+          <a:solidFill>
+            <a:srgbClr val="B3121B"/>
+          </a:solidFill>
+          <a:ln/>
+        </p:spPr>
+      </p:sp>
+      <p:sp>
+        <p:nvSpPr>
+          <p:cNvPr id="7" name="Text 5"/>
+          <p:cNvSpPr txBox="1"/>
+          <p:nvPr/>
+        </p:nvSpPr>
+        <p:spPr>
+          <a:xfrm>
+            <a:off x="822960" y="1417320"/>
+            <a:ext cx="10771632" cy="786384"/>
+          </a:xfrm>
+          <a:prstGeom prst="rect">
+            <a:avLst/>
+          </a:prstGeom>
+          <a:noFill/>
+          <a:ln/>
+        </p:spPr>
+        <p:txBody>
+          <a:bodyPr wrap="square" lIns="0" tIns="0" rIns="0" bIns="0" rtlCol="0" anchor="ctr"/>
+          <a:lstStyle/>
+          <a:p>
+            <a:pPr indent="0" marL="0">
+              <a:lnSpc>
+                <a:spcPct val="132000"/>
+              </a:lnSpc>
+              <a:buNone/>
+            </a:pPr>
+            <a:r>
+              <a:rPr lang="en-US" sz="1650" b="1" dirty="0">
+                <a:solidFill>
+                  <a:srgbClr val="B3121B"/>
+                </a:solidFill>
+                <a:latin typeface="Meiryo" pitchFamily="34" charset="0"/>
+                <a:ea typeface="Meiryo" pitchFamily="34" charset="-122"/>
+                <a:cs typeface="Meiryo" pitchFamily="34" charset="-120"/>
+              </a:rPr>
+              <a:t>5年後、東証グロース市場への上場を目指す。</a:t>
+            </a:r>
+            <a:endParaRPr lang="en-US" sz="1650" dirty="0"/>
+          </a:p>
+          <a:p>
+            <a:pPr indent="0" marL="0">
+              <a:lnSpc>
+                <a:spcPct val="132000"/>
+              </a:lnSpc>
+              <a:buNone/>
+            </a:pPr>
+            <a:r>
+              <a:rPr lang="en-US" sz="1650" b="1" dirty="0">
+                <a:solidFill>
+                  <a:srgbClr val="16161A"/>
+                </a:solidFill>
+                <a:latin typeface="Meiryo" pitchFamily="34" charset="0"/>
+                <a:ea typeface="Meiryo" pitchFamily="34" charset="-122"/>
+                <a:cs typeface="Meiryo" pitchFamily="34" charset="-120"/>
+              </a:rPr>
+              <a:t>受託で稼ぐ3年のうちに、中国の制作力を自社の技術資産に置き換える。</a:t>
+            </a:r>
+            <a:endParaRPr lang="en-US" sz="1650" dirty="0"/>
+          </a:p>
+        </p:txBody>
+      </p:sp>
+      <p:sp>
+        <p:nvSpPr>
+          <p:cNvPr id="8" name="Shape 6"/>
+          <p:cNvSpPr/>
+          <p:nvPr/>
+        </p:nvSpPr>
+        <p:spPr>
+          <a:xfrm>
+            <a:off x="594360" y="2395728"/>
+            <a:ext cx="3483864" cy="1298448"/>
           </a:xfrm>
           <a:prstGeom prst="rect">
             <a:avLst/>
@@ -13270,13 +13857,13 @@
       </p:sp>
       <p:sp>
         <p:nvSpPr>
-          <p:cNvPr id="7" name="Text 5"/>
-          <p:cNvSpPr txBox="1"/>
-          <p:nvPr/>
-        </p:nvSpPr>
-        <p:spPr>
-          <a:xfrm>
-            <a:off x="850392" y="1682496"/>
+          <p:cNvPr id="9" name="Text 7"/>
+          <p:cNvSpPr txBox="1"/>
+          <p:nvPr/>
+        </p:nvSpPr>
+        <p:spPr>
+          <a:xfrm>
+            <a:off x="850392" y="2596896"/>
             <a:ext cx="2971800" cy="658368"/>
           </a:xfrm>
           <a:prstGeom prst="rect">
@@ -13309,13 +13896,13 @@
       </p:sp>
       <p:sp>
         <p:nvSpPr>
-          <p:cNvPr id="8" name="Text 6"/>
-          <p:cNvSpPr txBox="1"/>
-          <p:nvPr/>
-        </p:nvSpPr>
-        <p:spPr>
-          <a:xfrm>
-            <a:off x="850392" y="2359152"/>
+          <p:cNvPr id="10" name="Text 8"/>
+          <p:cNvSpPr txBox="1"/>
+          <p:nvPr/>
+        </p:nvSpPr>
+        <p:spPr>
+          <a:xfrm>
+            <a:off x="850392" y="3273552"/>
             <a:ext cx="2971800" cy="274320"/>
           </a:xfrm>
           <a:prstGeom prst="rect">
@@ -13348,14 +13935,14 @@
       </p:sp>
       <p:sp>
         <p:nvSpPr>
-          <p:cNvPr id="9" name="Text 7"/>
-          <p:cNvSpPr txBox="1"/>
-          <p:nvPr/>
-        </p:nvSpPr>
-        <p:spPr>
-          <a:xfrm>
-            <a:off x="850392" y="2633472"/>
-            <a:ext cx="2971800" cy="118872"/>
+          <p:cNvPr id="11" name="Text 9"/>
+          <p:cNvSpPr txBox="1"/>
+          <p:nvPr/>
+        </p:nvSpPr>
+        <p:spPr>
+          <a:xfrm>
+            <a:off x="850392" y="3547872"/>
+            <a:ext cx="2971800" cy="0"/>
           </a:xfrm>
           <a:prstGeom prst="rect">
             <a:avLst/>
@@ -13387,14 +13974,14 @@
       </p:sp>
       <p:sp>
         <p:nvSpPr>
-          <p:cNvPr id="10" name="Shape 8"/>
+          <p:cNvPr id="12" name="Shape 10"/>
           <p:cNvSpPr/>
           <p:nvPr/>
         </p:nvSpPr>
         <p:spPr>
           <a:xfrm>
-            <a:off x="4352544" y="1481328"/>
-            <a:ext cx="3483864" cy="1417320"/>
+            <a:off x="4352544" y="2395728"/>
+            <a:ext cx="3483864" cy="1298448"/>
           </a:xfrm>
           <a:prstGeom prst="rect">
             <a:avLst/>
@@ -13407,13 +13994,13 @@
       </p:sp>
       <p:sp>
         <p:nvSpPr>
-          <p:cNvPr id="11" name="Text 9"/>
-          <p:cNvSpPr txBox="1"/>
-          <p:nvPr/>
-        </p:nvSpPr>
-        <p:spPr>
-          <a:xfrm>
-            <a:off x="4608576" y="1682496"/>
+          <p:cNvPr id="13" name="Text 11"/>
+          <p:cNvSpPr txBox="1"/>
+          <p:nvPr/>
+        </p:nvSpPr>
+        <p:spPr>
+          <a:xfrm>
+            <a:off x="4608576" y="2596896"/>
             <a:ext cx="2971800" cy="658368"/>
           </a:xfrm>
           <a:prstGeom prst="rect">
@@ -13446,13 +14033,13 @@
       </p:sp>
       <p:sp>
         <p:nvSpPr>
-          <p:cNvPr id="12" name="Text 10"/>
-          <p:cNvSpPr txBox="1"/>
-          <p:nvPr/>
-        </p:nvSpPr>
-        <p:spPr>
-          <a:xfrm>
-            <a:off x="4608576" y="2359152"/>
+          <p:cNvPr id="14" name="Text 12"/>
+          <p:cNvSpPr txBox="1"/>
+          <p:nvPr/>
+        </p:nvSpPr>
+        <p:spPr>
+          <a:xfrm>
+            <a:off x="4608576" y="3273552"/>
             <a:ext cx="2971800" cy="274320"/>
           </a:xfrm>
           <a:prstGeom prst="rect">
@@ -13485,14 +14072,14 @@
       </p:sp>
       <p:sp>
         <p:nvSpPr>
-          <p:cNvPr id="13" name="Text 11"/>
-          <p:cNvSpPr txBox="1"/>
-          <p:nvPr/>
-        </p:nvSpPr>
-        <p:spPr>
-          <a:xfrm>
-            <a:off x="4608576" y="2633472"/>
-            <a:ext cx="2971800" cy="118872"/>
+          <p:cNvPr id="15" name="Text 13"/>
+          <p:cNvSpPr txBox="1"/>
+          <p:nvPr/>
+        </p:nvSpPr>
+        <p:spPr>
+          <a:xfrm>
+            <a:off x="4608576" y="3547872"/>
+            <a:ext cx="2971800" cy="0"/>
           </a:xfrm>
           <a:prstGeom prst="rect">
             <a:avLst/>
@@ -13524,14 +14111,14 @@
       </p:sp>
       <p:sp>
         <p:nvSpPr>
-          <p:cNvPr id="14" name="Shape 12"/>
+          <p:cNvPr id="16" name="Shape 14"/>
           <p:cNvSpPr/>
           <p:nvPr/>
         </p:nvSpPr>
         <p:spPr>
           <a:xfrm>
-            <a:off x="8110728" y="1481328"/>
-            <a:ext cx="3483864" cy="1417320"/>
+            <a:off x="8110728" y="2395728"/>
+            <a:ext cx="3483864" cy="1298448"/>
           </a:xfrm>
           <a:prstGeom prst="rect">
             <a:avLst/>
@@ -13544,13 +14131,13 @@
       </p:sp>
       <p:sp>
         <p:nvSpPr>
-          <p:cNvPr id="15" name="Text 13"/>
-          <p:cNvSpPr txBox="1"/>
-          <p:nvPr/>
-        </p:nvSpPr>
-        <p:spPr>
-          <a:xfrm>
-            <a:off x="8366760" y="1682496"/>
+          <p:cNvPr id="17" name="Text 15"/>
+          <p:cNvSpPr txBox="1"/>
+          <p:nvPr/>
+        </p:nvSpPr>
+        <p:spPr>
+          <a:xfrm>
+            <a:off x="8366760" y="2596896"/>
             <a:ext cx="2971800" cy="658368"/>
           </a:xfrm>
           <a:prstGeom prst="rect">
@@ -13583,13 +14170,13 @@
       </p:sp>
       <p:sp>
         <p:nvSpPr>
-          <p:cNvPr id="16" name="Text 14"/>
-          <p:cNvSpPr txBox="1"/>
-          <p:nvPr/>
-        </p:nvSpPr>
-        <p:spPr>
-          <a:xfrm>
-            <a:off x="8366760" y="2359152"/>
+          <p:cNvPr id="18" name="Text 16"/>
+          <p:cNvSpPr txBox="1"/>
+          <p:nvPr/>
+        </p:nvSpPr>
+        <p:spPr>
+          <a:xfrm>
+            <a:off x="8366760" y="3273552"/>
             <a:ext cx="2971800" cy="274320"/>
           </a:xfrm>
           <a:prstGeom prst="rect">
@@ -13622,14 +14209,14 @@
       </p:sp>
       <p:sp>
         <p:nvSpPr>
-          <p:cNvPr id="17" name="Text 15"/>
-          <p:cNvSpPr txBox="1"/>
-          <p:nvPr/>
-        </p:nvSpPr>
-        <p:spPr>
-          <a:xfrm>
-            <a:off x="8366760" y="2633472"/>
-            <a:ext cx="2971800" cy="118872"/>
+          <p:cNvPr id="19" name="Text 17"/>
+          <p:cNvSpPr txBox="1"/>
+          <p:nvPr/>
+        </p:nvSpPr>
+        <p:spPr>
+          <a:xfrm>
+            <a:off x="8366760" y="3547872"/>
+            <a:ext cx="2971800" cy="0"/>
           </a:xfrm>
           <a:prstGeom prst="rect">
             <a:avLst/>
@@ -13661,14 +14248,14 @@
       </p:sp>
       <p:sp>
         <p:nvSpPr>
-          <p:cNvPr id="18" name="Shape 16"/>
+          <p:cNvPr id="20" name="Shape 18"/>
           <p:cNvSpPr/>
           <p:nvPr/>
         </p:nvSpPr>
         <p:spPr>
           <a:xfrm>
-            <a:off x="594360" y="3154680"/>
-            <a:ext cx="3483864" cy="2514600"/>
+            <a:off x="594360" y="3822192"/>
+            <a:ext cx="3483864" cy="2121408"/>
           </a:xfrm>
           <a:prstGeom prst="rect">
             <a:avLst/>
@@ -13681,13 +14268,13 @@
       </p:sp>
       <p:sp>
         <p:nvSpPr>
-          <p:cNvPr id="19" name="Shape 17"/>
+          <p:cNvPr id="21" name="Shape 19"/>
           <p:cNvSpPr/>
           <p:nvPr/>
         </p:nvSpPr>
         <p:spPr>
           <a:xfrm>
-            <a:off x="832104" y="3429000"/>
+            <a:off x="832104" y="4096512"/>
             <a:ext cx="118872" cy="118872"/>
           </a:xfrm>
           <a:prstGeom prst="rect">
@@ -13701,13 +14288,13 @@
       </p:sp>
       <p:sp>
         <p:nvSpPr>
-          <p:cNvPr id="20" name="Text 18"/>
-          <p:cNvSpPr txBox="1"/>
-          <p:nvPr/>
-        </p:nvSpPr>
-        <p:spPr>
-          <a:xfrm>
-            <a:off x="1069848" y="3337560"/>
+          <p:cNvPr id="22" name="Text 20"/>
+          <p:cNvSpPr txBox="1"/>
+          <p:nvPr/>
+        </p:nvSpPr>
+        <p:spPr>
+          <a:xfrm>
+            <a:off x="1069848" y="4005072"/>
             <a:ext cx="2770632" cy="310896"/>
           </a:xfrm>
           <a:prstGeom prst="rect">
@@ -13740,14 +14327,14 @@
       </p:sp>
       <p:sp>
         <p:nvSpPr>
-          <p:cNvPr id="21" name="Text 19"/>
-          <p:cNvSpPr txBox="1"/>
-          <p:nvPr/>
-        </p:nvSpPr>
-        <p:spPr>
-          <a:xfrm>
-            <a:off x="1069848" y="3703320"/>
-            <a:ext cx="2770632" cy="1783080"/>
+          <p:cNvPr id="23" name="Text 21"/>
+          <p:cNvSpPr txBox="1"/>
+          <p:nvPr/>
+        </p:nvSpPr>
+        <p:spPr>
+          <a:xfrm>
+            <a:off x="1069848" y="4370832"/>
+            <a:ext cx="2770632" cy="1389888"/>
           </a:xfrm>
           <a:prstGeom prst="rect">
             <a:avLst/>
@@ -13774,7 +14361,7 @@
                 <a:ea typeface="Meiryo" pitchFamily="34" charset="-122"/>
                 <a:cs typeface="Meiryo" pitchFamily="34" charset="-120"/>
               </a:rPr>
-              <a:t>日本企業のAI映像を受注し、中国の個人</a:t>
+              <a:t>日本企業のAI映像を受注し、中国の個人クリエイター20名の体制で制作する。</a:t>
             </a:r>
             <a:endParaRPr lang="en-US" sz="1050" dirty="0"/>
           </a:p>
@@ -13794,7 +14381,7 @@
                 <a:ea typeface="Meiryo" pitchFamily="34" charset="-122"/>
                 <a:cs typeface="Meiryo" pitchFamily="34" charset="-120"/>
               </a:rPr>
-              <a:t>クリエイター20名の体制で制作する。</a:t>
+              <a:t>日本IPを利用した作品制作。国内IPホルダーと組み、中国の制作力で映像化する。</a:t>
             </a:r>
             <a:endParaRPr lang="en-US" sz="1050" dirty="0"/>
           </a:p>
@@ -13814,10 +14401,111 @@
                 <a:ea typeface="Meiryo" pitchFamily="34" charset="-122"/>
                 <a:cs typeface="Meiryo" pitchFamily="34" charset="-120"/>
               </a:rPr>
-              <a:t>AIで原価は9割下がったが、日本の発注</a:t>
+              <a:t>生成AI関連の特許取得。制作工程そのものを権利化する。</a:t>
             </a:r>
             <a:endParaRPr lang="en-US" sz="1050" dirty="0"/>
           </a:p>
+        </p:txBody>
+      </p:sp>
+      <p:sp>
+        <p:nvSpPr>
+          <p:cNvPr id="24" name="Shape 22"/>
+          <p:cNvSpPr/>
+          <p:nvPr/>
+        </p:nvSpPr>
+        <p:spPr>
+          <a:xfrm>
+            <a:off x="4352544" y="3822192"/>
+            <a:ext cx="3483864" cy="2121408"/>
+          </a:xfrm>
+          <a:prstGeom prst="rect">
+            <a:avLst/>
+          </a:prstGeom>
+          <a:solidFill>
+            <a:srgbClr val="F4F2EF"/>
+          </a:solidFill>
+          <a:ln/>
+        </p:spPr>
+      </p:sp>
+      <p:sp>
+        <p:nvSpPr>
+          <p:cNvPr id="25" name="Shape 23"/>
+          <p:cNvSpPr/>
+          <p:nvPr/>
+        </p:nvSpPr>
+        <p:spPr>
+          <a:xfrm>
+            <a:off x="4590288" y="4096512"/>
+            <a:ext cx="118872" cy="118872"/>
+          </a:xfrm>
+          <a:prstGeom prst="rect">
+            <a:avLst/>
+          </a:prstGeom>
+          <a:solidFill>
+            <a:srgbClr val="2A3563"/>
+          </a:solidFill>
+          <a:ln/>
+        </p:spPr>
+      </p:sp>
+      <p:sp>
+        <p:nvSpPr>
+          <p:cNvPr id="26" name="Text 24"/>
+          <p:cNvSpPr txBox="1"/>
+          <p:nvPr/>
+        </p:nvSpPr>
+        <p:spPr>
+          <a:xfrm>
+            <a:off x="4828032" y="4005072"/>
+            <a:ext cx="2770632" cy="310896"/>
+          </a:xfrm>
+          <a:prstGeom prst="rect">
+            <a:avLst/>
+          </a:prstGeom>
+          <a:noFill/>
+          <a:ln/>
+        </p:spPr>
+        <p:txBody>
+          <a:bodyPr wrap="square" lIns="0" tIns="0" rIns="0" bIns="0" rtlCol="0" anchor="ctr"/>
+          <a:lstStyle/>
+          <a:p>
+            <a:pPr indent="0" marL="0">
+              <a:buNone/>
+            </a:pPr>
+            <a:r>
+              <a:rPr lang="en-US" sz="1350" b="1" dirty="0">
+                <a:solidFill>
+                  <a:srgbClr val="16161A"/>
+                </a:solidFill>
+                <a:latin typeface="Meiryo" pitchFamily="34" charset="0"/>
+                <a:ea typeface="Meiryo" pitchFamily="34" charset="-122"/>
+                <a:cs typeface="Meiryo" pitchFamily="34" charset="-120"/>
+              </a:rPr>
+              <a:t>なぜ勝てるか</a:t>
+            </a:r>
+            <a:endParaRPr lang="en-US" sz="1350" dirty="0"/>
+          </a:p>
+        </p:txBody>
+      </p:sp>
+      <p:sp>
+        <p:nvSpPr>
+          <p:cNvPr id="27" name="Text 25"/>
+          <p:cNvSpPr txBox="1"/>
+          <p:nvPr/>
+        </p:nvSpPr>
+        <p:spPr>
+          <a:xfrm>
+            <a:off x="4828032" y="4370832"/>
+            <a:ext cx="2770632" cy="1389888"/>
+          </a:xfrm>
+          <a:prstGeom prst="rect">
+            <a:avLst/>
+          </a:prstGeom>
+          <a:noFill/>
+          <a:ln/>
+        </p:spPr>
+        <p:txBody>
+          <a:bodyPr wrap="square" lIns="0" tIns="0" rIns="0" bIns="0" rtlCol="0" anchor="t"/>
+          <a:lstStyle/>
           <a:p>
             <a:pPr indent="0" marL="0">
               <a:lnSpc>
@@ -13834,22 +14522,42 @@
                 <a:ea typeface="Meiryo" pitchFamily="34" charset="-122"/>
                 <a:cs typeface="Meiryo" pitchFamily="34" charset="-120"/>
               </a:rPr>
-              <a:t>価格は下がっていない。この差が粗利。</a:t>
+              <a:t>日本に、中国資本のBtoB映像制作会社が見当たらない。日本に来ている中国勢はBtoC配信専業で、受託する法人格を持たない。</a:t>
             </a:r>
             <a:endParaRPr lang="en-US" sz="1050" dirty="0"/>
           </a:p>
-        </p:txBody>
-      </p:sp>
-      <p:sp>
-        <p:nvSpPr>
-          <p:cNvPr id="22" name="Shape 20"/>
+          <a:p>
+            <a:pPr indent="0" marL="0">
+              <a:lnSpc>
+                <a:spcPct val="128000"/>
+              </a:lnSpc>
+              <a:buNone/>
+            </a:pPr>
+            <a:r>
+              <a:rPr lang="en-US" sz="1050" dirty="0">
+                <a:solidFill>
+                  <a:srgbClr val="3A3A42"/>
+                </a:solidFill>
+                <a:latin typeface="Meiryo" pitchFamily="34" charset="0"/>
+                <a:ea typeface="Meiryo" pitchFamily="34" charset="-122"/>
+                <a:cs typeface="Meiryo" pitchFamily="34" charset="-120"/>
+              </a:rPr>
+              <a:t>日本企業は中国へ直接発注できない。稟議・与信・反社チェック・下請法が壁になる。</a:t>
+            </a:r>
+            <a:endParaRPr lang="en-US" sz="1050" dirty="0"/>
+          </a:p>
+        </p:txBody>
+      </p:sp>
+      <p:sp>
+        <p:nvSpPr>
+          <p:cNvPr id="28" name="Shape 26"/>
           <p:cNvSpPr/>
           <p:nvPr/>
         </p:nvSpPr>
         <p:spPr>
           <a:xfrm>
-            <a:off x="4352544" y="3154680"/>
-            <a:ext cx="3483864" cy="2514600"/>
+            <a:off x="8110728" y="3822192"/>
+            <a:ext cx="3483864" cy="2121408"/>
           </a:xfrm>
           <a:prstGeom prst="rect">
             <a:avLst/>
@@ -13862,33 +14570,33 @@
       </p:sp>
       <p:sp>
         <p:nvSpPr>
-          <p:cNvPr id="23" name="Shape 21"/>
+          <p:cNvPr id="29" name="Shape 27"/>
           <p:cNvSpPr/>
           <p:nvPr/>
         </p:nvSpPr>
         <p:spPr>
           <a:xfrm>
-            <a:off x="4590288" y="3429000"/>
+            <a:off x="8348472" y="4096512"/>
             <a:ext cx="118872" cy="118872"/>
           </a:xfrm>
           <a:prstGeom prst="rect">
             <a:avLst/>
           </a:prstGeom>
           <a:solidFill>
-            <a:srgbClr val="2A3563"/>
+            <a:srgbClr val="C9962C"/>
           </a:solidFill>
           <a:ln/>
         </p:spPr>
       </p:sp>
       <p:sp>
         <p:nvSpPr>
-          <p:cNvPr id="24" name="Text 22"/>
-          <p:cNvSpPr txBox="1"/>
-          <p:nvPr/>
-        </p:nvSpPr>
-        <p:spPr>
-          <a:xfrm>
-            <a:off x="4828032" y="3337560"/>
+          <p:cNvPr id="30" name="Text 28"/>
+          <p:cNvSpPr txBox="1"/>
+          <p:nvPr/>
+        </p:nvSpPr>
+        <p:spPr>
+          <a:xfrm>
+            <a:off x="8586216" y="4005072"/>
             <a:ext cx="2770632" cy="310896"/>
           </a:xfrm>
           <a:prstGeom prst="rect">
@@ -13913,7 +14621,7 @@
                 <a:ea typeface="Meiryo" pitchFamily="34" charset="-122"/>
                 <a:cs typeface="Meiryo" pitchFamily="34" charset="-120"/>
               </a:rPr>
-              <a:t>なぜ勝てるか</a:t>
+              <a:t>どこへ向かうか</a:t>
             </a:r>
             <a:endParaRPr lang="en-US" sz="1350" dirty="0"/>
           </a:p>
@@ -13921,14 +14629,14 @@
       </p:sp>
       <p:sp>
         <p:nvSpPr>
-          <p:cNvPr id="25" name="Text 23"/>
-          <p:cNvSpPr txBox="1"/>
-          <p:nvPr/>
-        </p:nvSpPr>
-        <p:spPr>
-          <a:xfrm>
-            <a:off x="4828032" y="3703320"/>
-            <a:ext cx="2770632" cy="1783080"/>
+          <p:cNvPr id="31" name="Text 29"/>
+          <p:cNvSpPr txBox="1"/>
+          <p:nvPr/>
+        </p:nvSpPr>
+        <p:spPr>
+          <a:xfrm>
+            <a:off x="8586216" y="4370832"/>
+            <a:ext cx="2770632" cy="1389888"/>
           </a:xfrm>
           <a:prstGeom prst="rect">
             <a:avLst/>
@@ -13955,7 +14663,7 @@
                 <a:ea typeface="Meiryo" pitchFamily="34" charset="-122"/>
                 <a:cs typeface="Meiryo" pitchFamily="34" charset="-120"/>
               </a:rPr>
-              <a:t>日本企業は中国へ直接発注できない。</a:t>
+              <a:t>受託で稼ぐ期間は3年と見ている。その間に工程を内製化し、特許とプロダクトへ移す。</a:t>
             </a:r>
             <a:endParaRPr lang="en-US" sz="1050" dirty="0"/>
           </a:p>
@@ -13975,236 +14683,15 @@
                 <a:ea typeface="Meiryo" pitchFamily="34" charset="-122"/>
                 <a:cs typeface="Meiryo" pitchFamily="34" charset="-120"/>
               </a:rPr>
-              <a:t>言語・稟議・与信・下請法が壁になる。</a:t>
+              <a:t>自動車産業が4年で国産化したのと同じ道筋。</a:t>
             </a:r>
             <a:endParaRPr lang="en-US" sz="1050" dirty="0"/>
           </a:p>
-          <a:p>
-            <a:pPr indent="0" marL="0">
-              <a:lnSpc>
-                <a:spcPct val="128000"/>
-              </a:lnSpc>
-              <a:buNone/>
-            </a:pPr>
-            <a:r>
-              <a:rPr lang="en-US" sz="1050" dirty="0">
-                <a:solidFill>
-                  <a:srgbClr val="3A3A42"/>
-                </a:solidFill>
-                <a:latin typeface="Meiryo" pitchFamily="34" charset="0"/>
-                <a:ea typeface="Meiryo" pitchFamily="34" charset="-122"/>
-                <a:cs typeface="Meiryo" pitchFamily="34" charset="-120"/>
-              </a:rPr>
-              <a:t>中国側に余っているのは制作力で、</a:t>
-            </a:r>
-            <a:endParaRPr lang="en-US" sz="1050" dirty="0"/>
-          </a:p>
-          <a:p>
-            <a:pPr indent="0" marL="0">
-              <a:lnSpc>
-                <a:spcPct val="128000"/>
-              </a:lnSpc>
-              <a:buNone/>
-            </a:pPr>
-            <a:r>
-              <a:rPr lang="en-US" sz="1050" dirty="0">
-                <a:solidFill>
-                  <a:srgbClr val="3A3A42"/>
-                </a:solidFill>
-                <a:latin typeface="Meiryo" pitchFamily="34" charset="0"/>
-                <a:ea typeface="Meiryo" pitchFamily="34" charset="-122"/>
-                <a:cs typeface="Meiryo" pitchFamily="34" charset="-120"/>
-              </a:rPr>
-              <a:t>足りないのは日本市場を売る力。</a:t>
-            </a:r>
-            <a:endParaRPr lang="en-US" sz="1050" dirty="0"/>
-          </a:p>
-        </p:txBody>
-      </p:sp>
-      <p:sp>
-        <p:nvSpPr>
-          <p:cNvPr id="26" name="Shape 24"/>
-          <p:cNvSpPr/>
-          <p:nvPr/>
-        </p:nvSpPr>
-        <p:spPr>
-          <a:xfrm>
-            <a:off x="8110728" y="3154680"/>
-            <a:ext cx="3483864" cy="2514600"/>
-          </a:xfrm>
-          <a:prstGeom prst="rect">
-            <a:avLst/>
-          </a:prstGeom>
-          <a:solidFill>
-            <a:srgbClr val="F4F2EF"/>
-          </a:solidFill>
-          <a:ln/>
-        </p:spPr>
-      </p:sp>
-      <p:sp>
-        <p:nvSpPr>
-          <p:cNvPr id="27" name="Shape 25"/>
-          <p:cNvSpPr/>
-          <p:nvPr/>
-        </p:nvSpPr>
-        <p:spPr>
-          <a:xfrm>
-            <a:off x="8348472" y="3429000"/>
-            <a:ext cx="118872" cy="118872"/>
-          </a:xfrm>
-          <a:prstGeom prst="rect">
-            <a:avLst/>
-          </a:prstGeom>
-          <a:solidFill>
-            <a:srgbClr val="C9962C"/>
-          </a:solidFill>
-          <a:ln/>
-        </p:spPr>
-      </p:sp>
-      <p:sp>
-        <p:nvSpPr>
-          <p:cNvPr id="28" name="Text 26"/>
-          <p:cNvSpPr txBox="1"/>
-          <p:nvPr/>
-        </p:nvSpPr>
-        <p:spPr>
-          <a:xfrm>
-            <a:off x="8586216" y="3337560"/>
-            <a:ext cx="2770632" cy="310896"/>
-          </a:xfrm>
-          <a:prstGeom prst="rect">
-            <a:avLst/>
-          </a:prstGeom>
-          <a:noFill/>
-          <a:ln/>
-        </p:spPr>
-        <p:txBody>
-          <a:bodyPr wrap="square" lIns="0" tIns="0" rIns="0" bIns="0" rtlCol="0" anchor="ctr"/>
-          <a:lstStyle/>
-          <a:p>
-            <a:pPr indent="0" marL="0">
-              <a:buNone/>
-            </a:pPr>
-            <a:r>
-              <a:rPr lang="en-US" sz="1350" b="1" dirty="0">
-                <a:solidFill>
-                  <a:srgbClr val="16161A"/>
-                </a:solidFill>
-                <a:latin typeface="Meiryo" pitchFamily="34" charset="0"/>
-                <a:ea typeface="Meiryo" pitchFamily="34" charset="-122"/>
-                <a:cs typeface="Meiryo" pitchFamily="34" charset="-120"/>
-              </a:rPr>
-              <a:t>どこへ向かうか</a:t>
-            </a:r>
-            <a:endParaRPr lang="en-US" sz="1350" dirty="0"/>
-          </a:p>
-        </p:txBody>
-      </p:sp>
-      <p:sp>
-        <p:nvSpPr>
-          <p:cNvPr id="29" name="Text 27"/>
-          <p:cNvSpPr txBox="1"/>
-          <p:nvPr/>
-        </p:nvSpPr>
-        <p:spPr>
-          <a:xfrm>
-            <a:off x="8586216" y="3703320"/>
-            <a:ext cx="2770632" cy="1783080"/>
-          </a:xfrm>
-          <a:prstGeom prst="rect">
-            <a:avLst/>
-          </a:prstGeom>
-          <a:noFill/>
-          <a:ln/>
-        </p:spPr>
-        <p:txBody>
-          <a:bodyPr wrap="square" lIns="0" tIns="0" rIns="0" bIns="0" rtlCol="0" anchor="t"/>
-          <a:lstStyle/>
-          <a:p>
-            <a:pPr indent="0" marL="0">
-              <a:lnSpc>
-                <a:spcPct val="128000"/>
-              </a:lnSpc>
-              <a:buNone/>
-            </a:pPr>
-            <a:r>
-              <a:rPr lang="en-US" sz="1050" dirty="0">
-                <a:solidFill>
-                  <a:srgbClr val="3A3A42"/>
-                </a:solidFill>
-                <a:latin typeface="Meiryo" pitchFamily="34" charset="0"/>
-                <a:ea typeface="Meiryo" pitchFamily="34" charset="-122"/>
-                <a:cs typeface="Meiryo" pitchFamily="34" charset="-120"/>
-              </a:rPr>
-              <a:t>受託で稼ぐ期間は3年と見ている。</a:t>
-            </a:r>
-            <a:endParaRPr lang="en-US" sz="1050" dirty="0"/>
-          </a:p>
-          <a:p>
-            <a:pPr indent="0" marL="0">
-              <a:lnSpc>
-                <a:spcPct val="128000"/>
-              </a:lnSpc>
-              <a:buNone/>
-            </a:pPr>
-            <a:r>
-              <a:rPr lang="en-US" sz="1050" dirty="0">
-                <a:solidFill>
-                  <a:srgbClr val="3A3A42"/>
-                </a:solidFill>
-                <a:latin typeface="Meiryo" pitchFamily="34" charset="0"/>
-                <a:ea typeface="Meiryo" pitchFamily="34" charset="-122"/>
-                <a:cs typeface="Meiryo" pitchFamily="34" charset="-120"/>
-              </a:rPr>
-              <a:t>その間に工程を内製化し、特許と</a:t>
-            </a:r>
-            <a:endParaRPr lang="en-US" sz="1050" dirty="0"/>
-          </a:p>
-          <a:p>
-            <a:pPr indent="0" marL="0">
-              <a:lnSpc>
-                <a:spcPct val="128000"/>
-              </a:lnSpc>
-              <a:buNone/>
-            </a:pPr>
-            <a:r>
-              <a:rPr lang="en-US" sz="1050" dirty="0">
-                <a:solidFill>
-                  <a:srgbClr val="3A3A42"/>
-                </a:solidFill>
-                <a:latin typeface="Meiryo" pitchFamily="34" charset="0"/>
-                <a:ea typeface="Meiryo" pitchFamily="34" charset="-122"/>
-                <a:cs typeface="Meiryo" pitchFamily="34" charset="-120"/>
-              </a:rPr>
-              <a:t>プロダクトへ移す。自動車産業が</a:t>
-            </a:r>
-            <a:endParaRPr lang="en-US" sz="1050" dirty="0"/>
-          </a:p>
-          <a:p>
-            <a:pPr indent="0" marL="0">
-              <a:lnSpc>
-                <a:spcPct val="128000"/>
-              </a:lnSpc>
-              <a:buNone/>
-            </a:pPr>
-            <a:r>
-              <a:rPr lang="en-US" sz="1050" dirty="0">
-                <a:solidFill>
-                  <a:srgbClr val="3A3A42"/>
-                </a:solidFill>
-                <a:latin typeface="Meiryo" pitchFamily="34" charset="0"/>
-                <a:ea typeface="Meiryo" pitchFamily="34" charset="-122"/>
-                <a:cs typeface="Meiryo" pitchFamily="34" charset="-120"/>
-              </a:rPr>
-              <a:t>4年で国産化したのと同じ道筋。</a:t>
-            </a:r>
-            <a:endParaRPr lang="en-US" sz="1050" dirty="0"/>
-          </a:p>
-        </p:txBody>
-      </p:sp>
-      <p:sp>
-        <p:nvSpPr>
-          <p:cNvPr id="30" name="Text 28"/>
+        </p:txBody>
+      </p:sp>
+      <p:sp>
+        <p:nvSpPr>
+          <p:cNvPr id="32" name="Text 30"/>
           <p:cNvSpPr txBox="1"/>
           <p:nvPr/>
         </p:nvSpPr>
@@ -14243,7 +14730,7 @@
       </p:sp>
       <p:sp>
         <p:nvSpPr>
-          <p:cNvPr id="31" name="Text 29"/>
+          <p:cNvPr id="33" name="Text 31"/>
           <p:cNvSpPr txBox="1"/>
           <p:nvPr/>
         </p:nvSpPr>
@@ -14458,7 +14945,7 @@
         <p:spPr>
           <a:xfrm>
             <a:off x="594360" y="1572768"/>
-            <a:ext cx="2578608" cy="4279392"/>
+            <a:ext cx="2578608" cy="2852928"/>
           </a:xfrm>
           <a:prstGeom prst="rect">
             <a:avLst/>
@@ -14556,7 +15043,7 @@
         <p:spPr>
           <a:xfrm>
             <a:off x="868680" y="3200400"/>
-            <a:ext cx="2029968" cy="2359152"/>
+            <a:ext cx="2029968" cy="932688"/>
           </a:xfrm>
           <a:prstGeom prst="rect">
             <a:avLst/>
@@ -14598,7 +15085,7 @@
         <p:spPr>
           <a:xfrm>
             <a:off x="3401568" y="1572768"/>
-            <a:ext cx="2578608" cy="4279392"/>
+            <a:ext cx="2578608" cy="2852928"/>
           </a:xfrm>
           <a:prstGeom prst="rect">
             <a:avLst/>
@@ -14696,7 +15183,7 @@
         <p:spPr>
           <a:xfrm>
             <a:off x="3675888" y="3200400"/>
-            <a:ext cx="2029968" cy="2359152"/>
+            <a:ext cx="2029968" cy="932688"/>
           </a:xfrm>
           <a:prstGeom prst="rect">
             <a:avLst/>
@@ -14738,7 +15225,7 @@
         <p:spPr>
           <a:xfrm>
             <a:off x="6208776" y="1572768"/>
-            <a:ext cx="2578608" cy="4279392"/>
+            <a:ext cx="2578608" cy="2852928"/>
           </a:xfrm>
           <a:prstGeom prst="rect">
             <a:avLst/>
@@ -14836,7 +15323,7 @@
         <p:spPr>
           <a:xfrm>
             <a:off x="6483096" y="3200400"/>
-            <a:ext cx="2029968" cy="2359152"/>
+            <a:ext cx="2029968" cy="932688"/>
           </a:xfrm>
           <a:prstGeom prst="rect">
             <a:avLst/>
@@ -14878,7 +15365,7 @@
         <p:spPr>
           <a:xfrm>
             <a:off x="9015984" y="1572768"/>
-            <a:ext cx="2578608" cy="4279392"/>
+            <a:ext cx="2578608" cy="2852928"/>
           </a:xfrm>
           <a:prstGeom prst="rect">
             <a:avLst/>
@@ -14976,7 +15463,7 @@
         <p:spPr>
           <a:xfrm>
             <a:off x="9290304" y="3200400"/>
-            <a:ext cx="2029968" cy="2359152"/>
+            <a:ext cx="2029968" cy="932688"/>
           </a:xfrm>
           <a:prstGeom prst="rect">
             <a:avLst/>
@@ -15011,7 +15498,422 @@
       </p:sp>
       <p:sp>
         <p:nvSpPr>
-          <p:cNvPr id="22" name="Text 20"/>
+          <p:cNvPr id="22" name="Shape 20"/>
+          <p:cNvSpPr/>
+          <p:nvPr/>
+        </p:nvSpPr>
+        <p:spPr>
+          <a:xfrm>
+            <a:off x="594360" y="4553712"/>
+            <a:ext cx="11000232" cy="1389888"/>
+          </a:xfrm>
+          <a:prstGeom prst="rect">
+            <a:avLst/>
+          </a:prstGeom>
+          <a:solidFill>
+            <a:srgbClr val="F4F2EF"/>
+          </a:solidFill>
+          <a:ln/>
+        </p:spPr>
+      </p:sp>
+      <p:sp>
+        <p:nvSpPr>
+          <p:cNvPr id="23" name="Text 21"/>
+          <p:cNvSpPr txBox="1"/>
+          <p:nvPr/>
+        </p:nvSpPr>
+        <p:spPr>
+          <a:xfrm>
+            <a:off x="886968" y="4700016"/>
+            <a:ext cx="4937760" cy="256032"/>
+          </a:xfrm>
+          <a:prstGeom prst="rect">
+            <a:avLst/>
+          </a:prstGeom>
+          <a:noFill/>
+          <a:ln/>
+        </p:spPr>
+        <p:txBody>
+          <a:bodyPr wrap="square" lIns="0" tIns="0" rIns="0" bIns="0" rtlCol="0" anchor="ctr"/>
+          <a:lstStyle/>
+          <a:p>
+            <a:pPr indent="0" marL="0">
+              <a:buNone/>
+            </a:pPr>
+            <a:r>
+              <a:rPr lang="en-US" sz="1050" b="1" dirty="0">
+                <a:solidFill>
+                  <a:srgbClr val="16161A"/>
+                </a:solidFill>
+                <a:latin typeface="Meiryo" pitchFamily="34" charset="0"/>
+                <a:ea typeface="Meiryo" pitchFamily="34" charset="-122"/>
+                <a:cs typeface="Meiryo" pitchFamily="34" charset="-120"/>
+              </a:rPr>
+              <a:t>中国のAI漫劇 制作会社数(活躍承制方)</a:t>
+            </a:r>
+            <a:endParaRPr lang="en-US" sz="1050" dirty="0"/>
+          </a:p>
+        </p:txBody>
+      </p:sp>
+      <p:sp>
+        <p:nvSpPr>
+          <p:cNvPr id="24" name="Text 22"/>
+          <p:cNvSpPr txBox="1"/>
+          <p:nvPr/>
+        </p:nvSpPr>
+        <p:spPr>
+          <a:xfrm>
+            <a:off x="886968" y="5010912"/>
+            <a:ext cx="868680" cy="256032"/>
+          </a:xfrm>
+          <a:prstGeom prst="rect">
+            <a:avLst/>
+          </a:prstGeom>
+          <a:noFill/>
+          <a:ln/>
+        </p:spPr>
+        <p:txBody>
+          <a:bodyPr wrap="square" lIns="0" tIns="0" rIns="0" bIns="0" rtlCol="0" anchor="ctr"/>
+          <a:lstStyle/>
+          <a:p>
+            <a:pPr indent="0" marL="0">
+              <a:buNone/>
+            </a:pPr>
+            <a:r>
+              <a:rPr lang="en-US" sz="900" dirty="0">
+                <a:solidFill>
+                  <a:srgbClr val="6E6E76"/>
+                </a:solidFill>
+                <a:latin typeface="Meiryo" pitchFamily="34" charset="0"/>
+                <a:ea typeface="Meiryo" pitchFamily="34" charset="-122"/>
+                <a:cs typeface="Meiryo" pitchFamily="34" charset="-120"/>
+              </a:rPr>
+              <a:t>2025年 Q4</a:t>
+            </a:r>
+            <a:endParaRPr lang="en-US" sz="900" dirty="0"/>
+          </a:p>
+        </p:txBody>
+      </p:sp>
+      <p:sp>
+        <p:nvSpPr>
+          <p:cNvPr id="25" name="Shape 23"/>
+          <p:cNvSpPr/>
+          <p:nvPr/>
+        </p:nvSpPr>
+        <p:spPr>
+          <a:xfrm>
+            <a:off x="1819656" y="5038344"/>
+            <a:ext cx="4663440" cy="201168"/>
+          </a:xfrm>
+          <a:prstGeom prst="rect">
+            <a:avLst/>
+          </a:prstGeom>
+          <a:solidFill>
+            <a:srgbClr val="6E6E76"/>
+          </a:solidFill>
+          <a:ln/>
+        </p:spPr>
+      </p:sp>
+      <p:sp>
+        <p:nvSpPr>
+          <p:cNvPr id="26" name="Text 24"/>
+          <p:cNvSpPr txBox="1"/>
+          <p:nvPr/>
+        </p:nvSpPr>
+        <p:spPr>
+          <a:xfrm>
+            <a:off x="1911096" y="5038344"/>
+            <a:ext cx="1097280" cy="201168"/>
+          </a:xfrm>
+          <a:prstGeom prst="rect">
+            <a:avLst/>
+          </a:prstGeom>
+          <a:noFill/>
+          <a:ln/>
+        </p:spPr>
+        <p:txBody>
+          <a:bodyPr wrap="square" lIns="0" tIns="0" rIns="0" bIns="0" rtlCol="0" anchor="ctr"/>
+          <a:lstStyle/>
+          <a:p>
+            <a:pPr indent="0" marL="0">
+              <a:buNone/>
+            </a:pPr>
+            <a:r>
+              <a:rPr lang="en-US" sz="900" b="1" dirty="0">
+                <a:solidFill>
+                  <a:srgbClr val="FFFFFF"/>
+                </a:solidFill>
+                <a:latin typeface="Meiryo" pitchFamily="34" charset="0"/>
+                <a:ea typeface="Meiryo" pitchFamily="34" charset="-122"/>
+                <a:cs typeface="Meiryo" pitchFamily="34" charset="-120"/>
+              </a:rPr>
+              <a:t>1,216社</a:t>
+            </a:r>
+            <a:endParaRPr lang="en-US" sz="900" dirty="0"/>
+          </a:p>
+        </p:txBody>
+      </p:sp>
+      <p:sp>
+        <p:nvSpPr>
+          <p:cNvPr id="27" name="Text 25"/>
+          <p:cNvSpPr txBox="1"/>
+          <p:nvPr/>
+        </p:nvSpPr>
+        <p:spPr>
+          <a:xfrm>
+            <a:off x="886968" y="5321808"/>
+            <a:ext cx="868680" cy="256032"/>
+          </a:xfrm>
+          <a:prstGeom prst="rect">
+            <a:avLst/>
+          </a:prstGeom>
+          <a:noFill/>
+          <a:ln/>
+        </p:spPr>
+        <p:txBody>
+          <a:bodyPr wrap="square" lIns="0" tIns="0" rIns="0" bIns="0" rtlCol="0" anchor="ctr"/>
+          <a:lstStyle/>
+          <a:p>
+            <a:pPr indent="0" marL="0">
+              <a:buNone/>
+            </a:pPr>
+            <a:r>
+              <a:rPr lang="en-US" sz="900" dirty="0">
+                <a:solidFill>
+                  <a:srgbClr val="6E6E76"/>
+                </a:solidFill>
+                <a:latin typeface="Meiryo" pitchFamily="34" charset="0"/>
+                <a:ea typeface="Meiryo" pitchFamily="34" charset="-122"/>
+                <a:cs typeface="Meiryo" pitchFamily="34" charset="-120"/>
+              </a:rPr>
+              <a:t>2026年 Q1</a:t>
+            </a:r>
+            <a:endParaRPr lang="en-US" sz="900" dirty="0"/>
+          </a:p>
+        </p:txBody>
+      </p:sp>
+      <p:sp>
+        <p:nvSpPr>
+          <p:cNvPr id="28" name="Shape 26"/>
+          <p:cNvSpPr/>
+          <p:nvPr/>
+        </p:nvSpPr>
+        <p:spPr>
+          <a:xfrm>
+            <a:off x="1819656" y="5349240"/>
+            <a:ext cx="2679192" cy="201168"/>
+          </a:xfrm>
+          <a:prstGeom prst="rect">
+            <a:avLst/>
+          </a:prstGeom>
+          <a:solidFill>
+            <a:srgbClr val="B3121B"/>
+          </a:solidFill>
+          <a:ln/>
+        </p:spPr>
+      </p:sp>
+      <p:sp>
+        <p:nvSpPr>
+          <p:cNvPr id="29" name="Text 27"/>
+          <p:cNvSpPr txBox="1"/>
+          <p:nvPr/>
+        </p:nvSpPr>
+        <p:spPr>
+          <a:xfrm>
+            <a:off x="1911096" y="5349240"/>
+            <a:ext cx="1097280" cy="201168"/>
+          </a:xfrm>
+          <a:prstGeom prst="rect">
+            <a:avLst/>
+          </a:prstGeom>
+          <a:noFill/>
+          <a:ln/>
+        </p:spPr>
+        <p:txBody>
+          <a:bodyPr wrap="square" lIns="0" tIns="0" rIns="0" bIns="0" rtlCol="0" anchor="ctr"/>
+          <a:lstStyle/>
+          <a:p>
+            <a:pPr indent="0" marL="0">
+              <a:buNone/>
+            </a:pPr>
+            <a:r>
+              <a:rPr lang="en-US" sz="900" b="1" dirty="0">
+                <a:solidFill>
+                  <a:srgbClr val="FFFFFF"/>
+                </a:solidFill>
+                <a:latin typeface="Meiryo" pitchFamily="34" charset="0"/>
+                <a:ea typeface="Meiryo" pitchFamily="34" charset="-122"/>
+                <a:cs typeface="Meiryo" pitchFamily="34" charset="-120"/>
+              </a:rPr>
+              <a:t>698社</a:t>
+            </a:r>
+            <a:endParaRPr lang="en-US" sz="900" dirty="0"/>
+          </a:p>
+        </p:txBody>
+      </p:sp>
+      <p:sp>
+        <p:nvSpPr>
+          <p:cNvPr id="30" name="Text 28"/>
+          <p:cNvSpPr txBox="1"/>
+          <p:nvPr/>
+        </p:nvSpPr>
+        <p:spPr>
+          <a:xfrm>
+            <a:off x="886968" y="5632704"/>
+            <a:ext cx="5669280" cy="237744"/>
+          </a:xfrm>
+          <a:prstGeom prst="rect">
+            <a:avLst/>
+          </a:prstGeom>
+          <a:noFill/>
+          <a:ln/>
+        </p:spPr>
+        <p:txBody>
+          <a:bodyPr wrap="square" lIns="0" tIns="0" rIns="0" bIns="0" rtlCol="0" anchor="ctr"/>
+          <a:lstStyle/>
+          <a:p>
+            <a:pPr indent="0" marL="0">
+              <a:buNone/>
+            </a:pPr>
+            <a:r>
+              <a:rPr lang="en-US" sz="950" dirty="0">
+                <a:solidFill>
+                  <a:srgbClr val="6E6E76"/>
+                </a:solidFill>
+                <a:latin typeface="Meiryo" pitchFamily="34" charset="0"/>
+                <a:ea typeface="Meiryo" pitchFamily="34" charset="-122"/>
+                <a:cs typeface="Meiryo" pitchFamily="34" charset="-120"/>
+              </a:rPr>
+              <a:t>1四半期で ▲42%。制作力が市場に溢れ出しています。</a:t>
+            </a:r>
+            <a:endParaRPr lang="en-US" sz="950" dirty="0"/>
+          </a:p>
+        </p:txBody>
+      </p:sp>
+      <p:sp>
+        <p:nvSpPr>
+          <p:cNvPr id="31" name="Shape 29"/>
+          <p:cNvSpPr/>
+          <p:nvPr/>
+        </p:nvSpPr>
+        <p:spPr>
+          <a:xfrm>
+            <a:off x="7040880" y="4736592"/>
+            <a:ext cx="50292" cy="1024128"/>
+          </a:xfrm>
+          <a:prstGeom prst="rect">
+            <a:avLst/>
+          </a:prstGeom>
+          <a:solidFill>
+            <a:srgbClr val="B3121B"/>
+          </a:solidFill>
+          <a:ln/>
+        </p:spPr>
+      </p:sp>
+      <p:sp>
+        <p:nvSpPr>
+          <p:cNvPr id="32" name="Text 30"/>
+          <p:cNvSpPr txBox="1"/>
+          <p:nvPr/>
+        </p:nvSpPr>
+        <p:spPr>
+          <a:xfrm>
+            <a:off x="7251192" y="4736592"/>
+            <a:ext cx="1188720" cy="384048"/>
+          </a:xfrm>
+          <a:prstGeom prst="rect">
+            <a:avLst/>
+          </a:prstGeom>
+          <a:noFill/>
+          <a:ln/>
+        </p:spPr>
+        <p:txBody>
+          <a:bodyPr wrap="square" lIns="0" tIns="0" rIns="0" bIns="0" rtlCol="0" anchor="ctr"/>
+          <a:lstStyle/>
+          <a:p>
+            <a:pPr indent="0" marL="0">
+              <a:buNone/>
+            </a:pPr>
+            <a:r>
+              <a:rPr lang="en-US" sz="1900" b="1" dirty="0">
+                <a:solidFill>
+                  <a:srgbClr val="B3121B"/>
+                </a:solidFill>
+                <a:latin typeface="Meiryo" pitchFamily="34" charset="0"/>
+                <a:ea typeface="Meiryo" pitchFamily="34" charset="-122"/>
+                <a:cs typeface="Meiryo" pitchFamily="34" charset="-120"/>
+              </a:rPr>
+              <a:t>約90%</a:t>
+            </a:r>
+            <a:endParaRPr lang="en-US" sz="1900" dirty="0"/>
+          </a:p>
+        </p:txBody>
+      </p:sp>
+      <p:sp>
+        <p:nvSpPr>
+          <p:cNvPr id="33" name="Text 31"/>
+          <p:cNvSpPr txBox="1"/>
+          <p:nvPr/>
+        </p:nvSpPr>
+        <p:spPr>
+          <a:xfrm>
+            <a:off x="7251192" y="5175504"/>
+            <a:ext cx="4050792" cy="585216"/>
+          </a:xfrm>
+          <a:prstGeom prst="rect">
+            <a:avLst/>
+          </a:prstGeom>
+          <a:noFill/>
+          <a:ln/>
+        </p:spPr>
+        <p:txBody>
+          <a:bodyPr wrap="square" lIns="0" tIns="0" rIns="0" bIns="0" rtlCol="0" anchor="t"/>
+          <a:lstStyle/>
+          <a:p>
+            <a:pPr indent="0" marL="0">
+              <a:lnSpc>
+                <a:spcPct val="130000"/>
+              </a:lnSpc>
+              <a:buNone/>
+            </a:pPr>
+            <a:r>
+              <a:rPr lang="en-US" sz="1000" dirty="0">
+                <a:solidFill>
+                  <a:srgbClr val="3A3A42"/>
+                </a:solidFill>
+                <a:latin typeface="Meiryo" pitchFamily="34" charset="0"/>
+                <a:ea typeface="Meiryo" pitchFamily="34" charset="-122"/>
+                <a:cs typeface="Meiryo" pitchFamily="34" charset="-120"/>
+              </a:rPr>
+              <a:t>が赤字。最大コストは制作費ではなく広告出稿で全体の約70%。</a:t>
+            </a:r>
+            <a:endParaRPr lang="en-US" sz="1000" dirty="0"/>
+          </a:p>
+          <a:p>
+            <a:pPr indent="0" marL="0">
+              <a:lnSpc>
+                <a:spcPct val="130000"/>
+              </a:lnSpc>
+              <a:buNone/>
+            </a:pPr>
+            <a:r>
+              <a:rPr lang="en-US" sz="1000" dirty="0">
+                <a:solidFill>
+                  <a:srgbClr val="3A3A42"/>
+                </a:solidFill>
+                <a:latin typeface="Meiryo" pitchFamily="34" charset="0"/>
+                <a:ea typeface="Meiryo" pitchFamily="34" charset="-122"/>
+                <a:cs typeface="Meiryo" pitchFamily="34" charset="-120"/>
+              </a:rPr>
+              <a:t>彼らに足りないのは「作る力」ではなく「売る力」です。</a:t>
+            </a:r>
+            <a:endParaRPr lang="en-US" sz="1000" dirty="0"/>
+          </a:p>
+        </p:txBody>
+      </p:sp>
+      <p:sp>
+        <p:nvSpPr>
+          <p:cNvPr id="34" name="Text 32"/>
           <p:cNvSpPr txBox="1"/>
           <p:nvPr/>
         </p:nvSpPr>
@@ -15050,7 +15952,7 @@
       </p:sp>
       <p:sp>
         <p:nvSpPr>
-          <p:cNvPr id="23" name="Text 21"/>
+          <p:cNvPr id="35" name="Text 33"/>
           <p:cNvSpPr txBox="1"/>
           <p:nvPr/>
         </p:nvSpPr>
@@ -15264,7 +16166,7 @@
         </p:nvSpPr>
         <p:spPr>
           <a:xfrm>
-            <a:off x="731520" y="2395728"/>
+            <a:off x="731520" y="2212848"/>
             <a:ext cx="10085832" cy="0"/>
           </a:xfrm>
           <a:prstGeom prst="line">
@@ -15287,7 +16189,7 @@
         </p:nvSpPr>
         <p:spPr>
           <a:xfrm>
-            <a:off x="630936" y="2295144"/>
+            <a:off x="630936" y="2112264"/>
             <a:ext cx="201168" cy="201168"/>
           </a:xfrm>
           <a:prstGeom prst="ellipse">
@@ -15307,7 +16209,7 @@
         </p:nvSpPr>
         <p:spPr>
           <a:xfrm>
-            <a:off x="-45720" y="1682496"/>
+            <a:off x="-45720" y="1499616"/>
             <a:ext cx="1554480" cy="384048"/>
           </a:xfrm>
           <a:prstGeom prst="rect">
@@ -15346,7 +16248,7 @@
         </p:nvSpPr>
         <p:spPr>
           <a:xfrm>
-            <a:off x="-228600" y="2651760"/>
+            <a:off x="-228600" y="2468880"/>
             <a:ext cx="1920240" cy="1005840"/>
           </a:xfrm>
           <a:prstGeom prst="rect">
@@ -15388,7 +16290,7 @@
         </p:nvSpPr>
         <p:spPr>
           <a:xfrm>
-            <a:off x="3152394" y="2295144"/>
+            <a:off x="3152394" y="2112264"/>
             <a:ext cx="201168" cy="201168"/>
           </a:xfrm>
           <a:prstGeom prst="ellipse">
@@ -15408,7 +16310,7 @@
         </p:nvSpPr>
         <p:spPr>
           <a:xfrm>
-            <a:off x="2475738" y="1682496"/>
+            <a:off x="2475738" y="1499616"/>
             <a:ext cx="1554480" cy="384048"/>
           </a:xfrm>
           <a:prstGeom prst="rect">
@@ -15447,7 +16349,7 @@
         </p:nvSpPr>
         <p:spPr>
           <a:xfrm>
-            <a:off x="2292858" y="2651760"/>
+            <a:off x="2292858" y="2468880"/>
             <a:ext cx="1920240" cy="1005840"/>
           </a:xfrm>
           <a:prstGeom prst="rect">
@@ -15509,7 +16411,7 @@
         </p:nvSpPr>
         <p:spPr>
           <a:xfrm>
-            <a:off x="5673852" y="2295144"/>
+            <a:off x="5673852" y="2112264"/>
             <a:ext cx="201168" cy="201168"/>
           </a:xfrm>
           <a:prstGeom prst="ellipse">
@@ -15529,7 +16431,7 @@
         </p:nvSpPr>
         <p:spPr>
           <a:xfrm>
-            <a:off x="4997196" y="1682496"/>
+            <a:off x="4997196" y="1499616"/>
             <a:ext cx="1554480" cy="384048"/>
           </a:xfrm>
           <a:prstGeom prst="rect">
@@ -15568,7 +16470,7 @@
         </p:nvSpPr>
         <p:spPr>
           <a:xfrm>
-            <a:off x="4814316" y="2651760"/>
+            <a:off x="4814316" y="2468880"/>
             <a:ext cx="1920240" cy="1005840"/>
           </a:xfrm>
           <a:prstGeom prst="rect">
@@ -15610,7 +16512,7 @@
         </p:nvSpPr>
         <p:spPr>
           <a:xfrm>
-            <a:off x="8195310" y="2295144"/>
+            <a:off x="8195310" y="2112264"/>
             <a:ext cx="201168" cy="201168"/>
           </a:xfrm>
           <a:prstGeom prst="ellipse">
@@ -15630,7 +16532,7 @@
         </p:nvSpPr>
         <p:spPr>
           <a:xfrm>
-            <a:off x="7518654" y="1682496"/>
+            <a:off x="7518654" y="1499616"/>
             <a:ext cx="1554480" cy="384048"/>
           </a:xfrm>
           <a:prstGeom prst="rect">
@@ -15669,7 +16571,7 @@
         </p:nvSpPr>
         <p:spPr>
           <a:xfrm>
-            <a:off x="7335774" y="2651760"/>
+            <a:off x="7335774" y="2468880"/>
             <a:ext cx="1920240" cy="1005840"/>
           </a:xfrm>
           <a:prstGeom prst="rect">
@@ -15711,7 +16613,7 @@
         </p:nvSpPr>
         <p:spPr>
           <a:xfrm>
-            <a:off x="10716768" y="2295144"/>
+            <a:off x="10716768" y="2112264"/>
             <a:ext cx="201168" cy="201168"/>
           </a:xfrm>
           <a:prstGeom prst="ellipse">
@@ -15731,7 +16633,7 @@
         </p:nvSpPr>
         <p:spPr>
           <a:xfrm>
-            <a:off x="10040112" y="1682496"/>
+            <a:off x="10040112" y="1499616"/>
             <a:ext cx="1554480" cy="384048"/>
           </a:xfrm>
           <a:prstGeom prst="rect">
@@ -15770,7 +16672,7 @@
         </p:nvSpPr>
         <p:spPr>
           <a:xfrm>
-            <a:off x="9857232" y="2651760"/>
+            <a:off x="9857232" y="2468880"/>
             <a:ext cx="1920240" cy="1005840"/>
           </a:xfrm>
           <a:prstGeom prst="rect">
@@ -15812,8 +16714,427 @@
         </p:nvSpPr>
         <p:spPr>
           <a:xfrm>
-            <a:off x="594360" y="3822192"/>
-            <a:ext cx="11000232" cy="2194560"/>
+            <a:off x="594360" y="3401568"/>
+            <a:ext cx="11000232" cy="841248"/>
+          </a:xfrm>
+          <a:prstGeom prst="rect">
+            <a:avLst/>
+          </a:prstGeom>
+          <a:solidFill>
+            <a:srgbClr val="F4F2EF"/>
+          </a:solidFill>
+          <a:ln/>
+        </p:spPr>
+      </p:sp>
+      <p:sp>
+        <p:nvSpPr>
+          <p:cNvPr id="23" name="Text 21"/>
+          <p:cNvSpPr txBox="1"/>
+          <p:nvPr/>
+        </p:nvSpPr>
+        <p:spPr>
+          <a:xfrm>
+            <a:off x="868680" y="3401568"/>
+            <a:ext cx="1371600" cy="841248"/>
+          </a:xfrm>
+          <a:prstGeom prst="rect">
+            <a:avLst/>
+          </a:prstGeom>
+          <a:noFill/>
+          <a:ln/>
+        </p:spPr>
+        <p:txBody>
+          <a:bodyPr wrap="square" lIns="0" tIns="0" rIns="0" bIns="0" rtlCol="0" anchor="ctr"/>
+          <a:lstStyle/>
+          <a:p>
+            <a:pPr indent="0" marL="0">
+              <a:buNone/>
+            </a:pPr>
+            <a:r>
+              <a:rPr lang="en-US" sz="1150" b="1" dirty="0">
+                <a:solidFill>
+                  <a:srgbClr val="B3121B"/>
+                </a:solidFill>
+                <a:latin typeface="Meiryo" pitchFamily="34" charset="0"/>
+                <a:ea typeface="Meiryo" pitchFamily="34" charset="-122"/>
+                <a:cs typeface="Meiryo" pitchFamily="34" charset="-120"/>
+              </a:rPr>
+              <a:t>1952 → 1956</a:t>
+            </a:r>
+            <a:endParaRPr lang="en-US" sz="1150" dirty="0"/>
+          </a:p>
+        </p:txBody>
+      </p:sp>
+      <p:sp>
+        <p:nvSpPr>
+          <p:cNvPr id="24" name="Text 22"/>
+          <p:cNvSpPr txBox="1"/>
+          <p:nvPr/>
+        </p:nvSpPr>
+        <p:spPr>
+          <a:xfrm>
+            <a:off x="2377440" y="3547872"/>
+            <a:ext cx="2788920" cy="274320"/>
+          </a:xfrm>
+          <a:prstGeom prst="rect">
+            <a:avLst/>
+          </a:prstGeom>
+          <a:noFill/>
+          <a:ln/>
+        </p:spPr>
+        <p:txBody>
+          <a:bodyPr wrap="square" lIns="0" tIns="0" rIns="0" bIns="0" rtlCol="0" anchor="ctr"/>
+          <a:lstStyle/>
+          <a:p>
+            <a:pPr indent="0" marL="0">
+              <a:buNone/>
+            </a:pPr>
+            <a:r>
+              <a:rPr lang="en-US" sz="1100" dirty="0">
+                <a:solidFill>
+                  <a:srgbClr val="16161A"/>
+                </a:solidFill>
+                <a:latin typeface="Meiryo" pitchFamily="34" charset="0"/>
+                <a:ea typeface="Meiryo" pitchFamily="34" charset="-122"/>
+                <a:cs typeface="Meiryo" pitchFamily="34" charset="-120"/>
+              </a:rPr>
+              <a:t>オースチン(英)</a:t>
+            </a:r>
+            <a:endParaRPr lang="en-US" sz="1100" dirty="0"/>
+          </a:p>
+        </p:txBody>
+      </p:sp>
+      <p:sp>
+        <p:nvSpPr>
+          <p:cNvPr id="25" name="Text 23"/>
+          <p:cNvSpPr txBox="1"/>
+          <p:nvPr/>
+        </p:nvSpPr>
+        <p:spPr>
+          <a:xfrm>
+            <a:off x="2377440" y="3840480"/>
+            <a:ext cx="2788920" cy="256032"/>
+          </a:xfrm>
+          <a:prstGeom prst="rect">
+            <a:avLst/>
+          </a:prstGeom>
+          <a:noFill/>
+          <a:ln/>
+        </p:spPr>
+        <p:txBody>
+          <a:bodyPr wrap="square" lIns="0" tIns="0" rIns="0" bIns="0" rtlCol="0" anchor="ctr"/>
+          <a:lstStyle/>
+          <a:p>
+            <a:pPr indent="0" marL="0">
+              <a:buNone/>
+            </a:pPr>
+            <a:r>
+              <a:rPr lang="en-US" sz="880" dirty="0">
+                <a:solidFill>
+                  <a:srgbClr val="6E6E76"/>
+                </a:solidFill>
+                <a:latin typeface="Meiryo" pitchFamily="34" charset="0"/>
+                <a:ea typeface="Meiryo" pitchFamily="34" charset="-122"/>
+                <a:cs typeface="Meiryo" pitchFamily="34" charset="-120"/>
+              </a:rPr>
+              <a:t>完成した技術を持つ側</a:t>
+            </a:r>
+            <a:endParaRPr lang="en-US" sz="880" dirty="0"/>
+          </a:p>
+        </p:txBody>
+      </p:sp>
+      <p:sp>
+        <p:nvSpPr>
+          <p:cNvPr id="26" name="Text 24"/>
+          <p:cNvSpPr txBox="1"/>
+          <p:nvPr/>
+        </p:nvSpPr>
+        <p:spPr>
+          <a:xfrm>
+            <a:off x="5943600" y="3547872"/>
+            <a:ext cx="2788920" cy="274320"/>
+          </a:xfrm>
+          <a:prstGeom prst="rect">
+            <a:avLst/>
+          </a:prstGeom>
+          <a:noFill/>
+          <a:ln/>
+        </p:spPr>
+        <p:txBody>
+          <a:bodyPr wrap="square" lIns="0" tIns="0" rIns="0" bIns="0" rtlCol="0" anchor="ctr"/>
+          <a:lstStyle/>
+          <a:p>
+            <a:pPr indent="0" marL="0">
+              <a:buNone/>
+            </a:pPr>
+            <a:r>
+              <a:rPr lang="en-US" sz="1100" dirty="0">
+                <a:solidFill>
+                  <a:srgbClr val="16161A"/>
+                </a:solidFill>
+                <a:latin typeface="Meiryo" pitchFamily="34" charset="0"/>
+                <a:ea typeface="Meiryo" pitchFamily="34" charset="-122"/>
+                <a:cs typeface="Meiryo" pitchFamily="34" charset="-120"/>
+              </a:rPr>
+              <a:t>日産・日野・いすゞ</a:t>
+            </a:r>
+            <a:endParaRPr lang="en-US" sz="1100" dirty="0"/>
+          </a:p>
+        </p:txBody>
+      </p:sp>
+      <p:sp>
+        <p:nvSpPr>
+          <p:cNvPr id="27" name="Text 25"/>
+          <p:cNvSpPr txBox="1"/>
+          <p:nvPr/>
+        </p:nvSpPr>
+        <p:spPr>
+          <a:xfrm>
+            <a:off x="5943600" y="3840480"/>
+            <a:ext cx="2788920" cy="256032"/>
+          </a:xfrm>
+          <a:prstGeom prst="rect">
+            <a:avLst/>
+          </a:prstGeom>
+          <a:noFill/>
+          <a:ln/>
+        </p:spPr>
+        <p:txBody>
+          <a:bodyPr wrap="square" lIns="0" tIns="0" rIns="0" bIns="0" rtlCol="0" anchor="ctr"/>
+          <a:lstStyle/>
+          <a:p>
+            <a:pPr indent="0" marL="0">
+              <a:buNone/>
+            </a:pPr>
+            <a:r>
+              <a:rPr lang="en-US" sz="880" dirty="0">
+                <a:solidFill>
+                  <a:srgbClr val="6E6E76"/>
+                </a:solidFill>
+                <a:latin typeface="Meiryo" pitchFamily="34" charset="0"/>
+                <a:ea typeface="Meiryo" pitchFamily="34" charset="-122"/>
+                <a:cs typeface="Meiryo" pitchFamily="34" charset="-120"/>
+              </a:rPr>
+              <a:t>ノックダウン生産で修得</a:t>
+            </a:r>
+            <a:endParaRPr lang="en-US" sz="880" dirty="0"/>
+          </a:p>
+        </p:txBody>
+      </p:sp>
+      <p:sp>
+        <p:nvSpPr>
+          <p:cNvPr id="28" name="Text 26"/>
+          <p:cNvSpPr txBox="1"/>
+          <p:nvPr/>
+        </p:nvSpPr>
+        <p:spPr>
+          <a:xfrm>
+            <a:off x="9509760" y="3547872"/>
+            <a:ext cx="2057400" cy="274320"/>
+          </a:xfrm>
+          <a:prstGeom prst="rect">
+            <a:avLst/>
+          </a:prstGeom>
+          <a:noFill/>
+          <a:ln/>
+        </p:spPr>
+        <p:txBody>
+          <a:bodyPr wrap="square" lIns="0" tIns="0" rIns="0" bIns="0" rtlCol="0" anchor="ctr"/>
+          <a:lstStyle/>
+          <a:p>
+            <a:pPr indent="0" marL="0">
+              <a:buNone/>
+            </a:pPr>
+            <a:r>
+              <a:rPr lang="en-US" sz="1100" dirty="0">
+                <a:solidFill>
+                  <a:srgbClr val="16161A"/>
+                </a:solidFill>
+                <a:latin typeface="Meiryo" pitchFamily="34" charset="0"/>
+                <a:ea typeface="Meiryo" pitchFamily="34" charset="-122"/>
+                <a:cs typeface="Meiryo" pitchFamily="34" charset="-120"/>
+              </a:rPr>
+              <a:t>ダットサン110・210</a:t>
+            </a:r>
+            <a:endParaRPr lang="en-US" sz="1100" dirty="0"/>
+          </a:p>
+        </p:txBody>
+      </p:sp>
+      <p:sp>
+        <p:nvSpPr>
+          <p:cNvPr id="29" name="Text 27"/>
+          <p:cNvSpPr txBox="1"/>
+          <p:nvPr/>
+        </p:nvSpPr>
+        <p:spPr>
+          <a:xfrm>
+            <a:off x="9509760" y="3840480"/>
+            <a:ext cx="2057400" cy="256032"/>
+          </a:xfrm>
+          <a:prstGeom prst="rect">
+            <a:avLst/>
+          </a:prstGeom>
+          <a:noFill/>
+          <a:ln/>
+        </p:spPr>
+        <p:txBody>
+          <a:bodyPr wrap="square" lIns="0" tIns="0" rIns="0" bIns="0" rtlCol="0" anchor="ctr"/>
+          <a:lstStyle/>
+          <a:p>
+            <a:pPr indent="0" marL="0">
+              <a:buNone/>
+            </a:pPr>
+            <a:r>
+              <a:rPr lang="en-US" sz="880" dirty="0">
+                <a:solidFill>
+                  <a:srgbClr val="6E6E76"/>
+                </a:solidFill>
+                <a:latin typeface="Meiryo" pitchFamily="34" charset="0"/>
+                <a:ea typeface="Meiryo" pitchFamily="34" charset="-122"/>
+                <a:cs typeface="Meiryo" pitchFamily="34" charset="-120"/>
+              </a:rPr>
+              <a:t>完全国産化。のちに輸出産業へ</a:t>
+            </a:r>
+            <a:endParaRPr lang="en-US" sz="880" dirty="0"/>
+          </a:p>
+        </p:txBody>
+      </p:sp>
+      <p:sp>
+        <p:nvSpPr>
+          <p:cNvPr id="30" name="Shape 28"/>
+          <p:cNvSpPr/>
+          <p:nvPr/>
+        </p:nvSpPr>
+        <p:spPr>
+          <a:xfrm>
+            <a:off x="5276088" y="3730752"/>
+            <a:ext cx="475488" cy="0"/>
+          </a:xfrm>
+          <a:prstGeom prst="line">
+            <a:avLst/>
+          </a:prstGeom>
+          <a:noFill/>
+          <a:ln w="25400">
+            <a:solidFill>
+              <a:srgbClr val="B3121B"/>
+            </a:solidFill>
+            <a:prstDash val="solid"/>
+            <a:tailEnd type="triangle"/>
+          </a:ln>
+        </p:spPr>
+      </p:sp>
+      <p:sp>
+        <p:nvSpPr>
+          <p:cNvPr id="31" name="Text 29"/>
+          <p:cNvSpPr txBox="1"/>
+          <p:nvPr/>
+        </p:nvSpPr>
+        <p:spPr>
+          <a:xfrm>
+            <a:off x="5221224" y="3858768"/>
+            <a:ext cx="585216" cy="219456"/>
+          </a:xfrm>
+          <a:prstGeom prst="rect">
+            <a:avLst/>
+          </a:prstGeom>
+          <a:noFill/>
+          <a:ln/>
+        </p:spPr>
+        <p:txBody>
+          <a:bodyPr wrap="square" lIns="0" tIns="0" rIns="0" bIns="0" rtlCol="0" anchor="ctr"/>
+          <a:lstStyle/>
+          <a:p>
+            <a:pPr algn="ctr" indent="0" marL="0">
+              <a:buNone/>
+            </a:pPr>
+            <a:r>
+              <a:rPr lang="en-US" sz="800" dirty="0">
+                <a:solidFill>
+                  <a:srgbClr val="6E6E76"/>
+                </a:solidFill>
+                <a:latin typeface="Meiryo" pitchFamily="34" charset="0"/>
+                <a:ea typeface="Meiryo" pitchFamily="34" charset="-122"/>
+                <a:cs typeface="Meiryo" pitchFamily="34" charset="-120"/>
+              </a:rPr>
+              <a:t>技術</a:t>
+            </a:r>
+            <a:endParaRPr lang="en-US" sz="800" dirty="0"/>
+          </a:p>
+        </p:txBody>
+      </p:sp>
+      <p:sp>
+        <p:nvSpPr>
+          <p:cNvPr id="32" name="Shape 30"/>
+          <p:cNvSpPr/>
+          <p:nvPr/>
+        </p:nvSpPr>
+        <p:spPr>
+          <a:xfrm>
+            <a:off x="8823960" y="3730752"/>
+            <a:ext cx="475488" cy="0"/>
+          </a:xfrm>
+          <a:prstGeom prst="line">
+            <a:avLst/>
+          </a:prstGeom>
+          <a:noFill/>
+          <a:ln w="25400">
+            <a:solidFill>
+              <a:srgbClr val="B3121B"/>
+            </a:solidFill>
+            <a:prstDash val="solid"/>
+            <a:tailEnd type="triangle"/>
+          </a:ln>
+        </p:spPr>
+      </p:sp>
+      <p:sp>
+        <p:nvSpPr>
+          <p:cNvPr id="33" name="Text 31"/>
+          <p:cNvSpPr txBox="1"/>
+          <p:nvPr/>
+        </p:nvSpPr>
+        <p:spPr>
+          <a:xfrm>
+            <a:off x="8769096" y="3858768"/>
+            <a:ext cx="585216" cy="219456"/>
+          </a:xfrm>
+          <a:prstGeom prst="rect">
+            <a:avLst/>
+          </a:prstGeom>
+          <a:noFill/>
+          <a:ln/>
+        </p:spPr>
+        <p:txBody>
+          <a:bodyPr wrap="square" lIns="0" tIns="0" rIns="0" bIns="0" rtlCol="0" anchor="ctr"/>
+          <a:lstStyle/>
+          <a:p>
+            <a:pPr algn="ctr" indent="0" marL="0">
+              <a:buNone/>
+            </a:pPr>
+            <a:r>
+              <a:rPr lang="en-US" sz="800" dirty="0">
+                <a:solidFill>
+                  <a:srgbClr val="6E6E76"/>
+                </a:solidFill>
+                <a:latin typeface="Meiryo" pitchFamily="34" charset="0"/>
+                <a:ea typeface="Meiryo" pitchFamily="34" charset="-122"/>
+                <a:cs typeface="Meiryo" pitchFamily="34" charset="-120"/>
+              </a:rPr>
+              <a:t>4年</a:t>
+            </a:r>
+            <a:endParaRPr lang="en-US" sz="800" dirty="0"/>
+          </a:p>
+        </p:txBody>
+      </p:sp>
+      <p:sp>
+        <p:nvSpPr>
+          <p:cNvPr id="34" name="Shape 32"/>
+          <p:cNvSpPr/>
+          <p:nvPr/>
+        </p:nvSpPr>
+        <p:spPr>
+          <a:xfrm>
+            <a:off x="594360" y="4352544"/>
+            <a:ext cx="11000232" cy="841248"/>
           </a:xfrm>
           <a:prstGeom prst="rect">
             <a:avLst/>
@@ -15826,30 +17147,30 @@
       </p:sp>
       <p:sp>
         <p:nvSpPr>
-          <p:cNvPr id="23" name="Text 21"/>
-          <p:cNvSpPr txBox="1"/>
-          <p:nvPr/>
-        </p:nvSpPr>
-        <p:spPr>
-          <a:xfrm>
-            <a:off x="1005840" y="4114800"/>
-            <a:ext cx="5120640" cy="566928"/>
-          </a:xfrm>
-          <a:prstGeom prst="rect">
-            <a:avLst/>
-          </a:prstGeom>
-          <a:noFill/>
-          <a:ln/>
-        </p:spPr>
-        <p:txBody>
-          <a:bodyPr wrap="square" lIns="0" tIns="0" rIns="0" bIns="0" rtlCol="0" anchor="ctr"/>
-          <a:lstStyle/>
-          <a:p>
-            <a:pPr indent="0" marL="0">
-              <a:buNone/>
-            </a:pPr>
-            <a:r>
-              <a:rPr lang="en-US" sz="2400" b="1" dirty="0">
+          <p:cNvPr id="35" name="Text 33"/>
+          <p:cNvSpPr txBox="1"/>
+          <p:nvPr/>
+        </p:nvSpPr>
+        <p:spPr>
+          <a:xfrm>
+            <a:off x="868680" y="4352544"/>
+            <a:ext cx="1371600" cy="841248"/>
+          </a:xfrm>
+          <a:prstGeom prst="rect">
+            <a:avLst/>
+          </a:prstGeom>
+          <a:noFill/>
+          <a:ln/>
+        </p:spPr>
+        <p:txBody>
+          <a:bodyPr wrap="square" lIns="0" tIns="0" rIns="0" bIns="0" rtlCol="0" anchor="ctr"/>
+          <a:lstStyle/>
+          <a:p>
+            <a:pPr indent="0" marL="0">
+              <a:buNone/>
+            </a:pPr>
+            <a:r>
+              <a:rPr lang="en-US" sz="1150" b="1" dirty="0">
                 <a:solidFill>
                   <a:srgbClr val="C9962C"/>
                 </a:solidFill>
@@ -15857,41 +17178,457 @@
                 <a:ea typeface="Meiryo" pitchFamily="34" charset="-122"/>
                 <a:cs typeface="Meiryo" pitchFamily="34" charset="-120"/>
               </a:rPr>
-              <a:t>提携から完全国産化まで 4年</a:t>
-            </a:r>
-            <a:endParaRPr lang="en-US" sz="2400" dirty="0"/>
-          </a:p>
-        </p:txBody>
-      </p:sp>
-      <p:sp>
-        <p:nvSpPr>
-          <p:cNvPr id="24" name="Text 22"/>
-          <p:cNvSpPr txBox="1"/>
-          <p:nvPr/>
-        </p:nvSpPr>
-        <p:spPr>
-          <a:xfrm>
-            <a:off x="1005840" y="4791456"/>
-            <a:ext cx="10177272" cy="1005840"/>
-          </a:xfrm>
-          <a:prstGeom prst="rect">
-            <a:avLst/>
-          </a:prstGeom>
-          <a:noFill/>
-          <a:ln/>
-        </p:spPr>
-        <p:txBody>
-          <a:bodyPr wrap="square" lIns="0" tIns="0" rIns="0" bIns="0" rtlCol="0" anchor="t"/>
-          <a:lstStyle/>
-          <a:p>
-            <a:pPr indent="0" marL="0">
-              <a:lnSpc>
-                <a:spcPct val="135000"/>
-              </a:lnSpc>
-              <a:buNone/>
-            </a:pPr>
-            <a:r>
-              <a:rPr lang="en-US" sz="1150" b="1" dirty="0">
+              <a:t>2026 → 2029</a:t>
+            </a:r>
+            <a:endParaRPr lang="en-US" sz="1150" dirty="0"/>
+          </a:p>
+        </p:txBody>
+      </p:sp>
+      <p:sp>
+        <p:nvSpPr>
+          <p:cNvPr id="36" name="Text 34"/>
+          <p:cNvSpPr txBox="1"/>
+          <p:nvPr/>
+        </p:nvSpPr>
+        <p:spPr>
+          <a:xfrm>
+            <a:off x="2377440" y="4498848"/>
+            <a:ext cx="2788920" cy="274320"/>
+          </a:xfrm>
+          <a:prstGeom prst="rect">
+            <a:avLst/>
+          </a:prstGeom>
+          <a:noFill/>
+          <a:ln/>
+        </p:spPr>
+        <p:txBody>
+          <a:bodyPr wrap="square" lIns="0" tIns="0" rIns="0" bIns="0" rtlCol="0" anchor="ctr"/>
+          <a:lstStyle/>
+          <a:p>
+            <a:pPr indent="0" marL="0">
+              <a:buNone/>
+            </a:pPr>
+            <a:r>
+              <a:rPr lang="en-US" sz="1100" dirty="0">
+                <a:solidFill>
+                  <a:srgbClr val="FFFFFF"/>
+                </a:solidFill>
+                <a:latin typeface="Meiryo" pitchFamily="34" charset="0"/>
+                <a:ea typeface="Meiryo" pitchFamily="34" charset="-122"/>
+                <a:cs typeface="Meiryo" pitchFamily="34" charset="-120"/>
+              </a:rPr>
+              <a:t>中国の個人クリエイター</a:t>
+            </a:r>
+            <a:endParaRPr lang="en-US" sz="1100" dirty="0"/>
+          </a:p>
+        </p:txBody>
+      </p:sp>
+      <p:sp>
+        <p:nvSpPr>
+          <p:cNvPr id="37" name="Text 35"/>
+          <p:cNvSpPr txBox="1"/>
+          <p:nvPr/>
+        </p:nvSpPr>
+        <p:spPr>
+          <a:xfrm>
+            <a:off x="2377440" y="4791456"/>
+            <a:ext cx="2788920" cy="256032"/>
+          </a:xfrm>
+          <a:prstGeom prst="rect">
+            <a:avLst/>
+          </a:prstGeom>
+          <a:noFill/>
+          <a:ln/>
+        </p:spPr>
+        <p:txBody>
+          <a:bodyPr wrap="square" lIns="0" tIns="0" rIns="0" bIns="0" rtlCol="0" anchor="ctr"/>
+          <a:lstStyle/>
+          <a:p>
+            <a:pPr indent="0" marL="0">
+              <a:buNone/>
+            </a:pPr>
+            <a:r>
+              <a:rPr lang="en-US" sz="880" dirty="0">
+                <a:solidFill>
+                  <a:srgbClr val="A8A49D"/>
+                </a:solidFill>
+                <a:latin typeface="Meiryo" pitchFamily="34" charset="0"/>
+                <a:ea typeface="Meiryo" pitchFamily="34" charset="-122"/>
+                <a:cs typeface="Meiryo" pitchFamily="34" charset="-120"/>
+              </a:rPr>
+              <a:t>制作力が余っている側</a:t>
+            </a:r>
+            <a:endParaRPr lang="en-US" sz="880" dirty="0"/>
+          </a:p>
+        </p:txBody>
+      </p:sp>
+      <p:sp>
+        <p:nvSpPr>
+          <p:cNvPr id="38" name="Text 36"/>
+          <p:cNvSpPr txBox="1"/>
+          <p:nvPr/>
+        </p:nvSpPr>
+        <p:spPr>
+          <a:xfrm>
+            <a:off x="5943600" y="4498848"/>
+            <a:ext cx="2788920" cy="274320"/>
+          </a:xfrm>
+          <a:prstGeom prst="rect">
+            <a:avLst/>
+          </a:prstGeom>
+          <a:noFill/>
+          <a:ln/>
+        </p:spPr>
+        <p:txBody>
+          <a:bodyPr wrap="square" lIns="0" tIns="0" rIns="0" bIns="0" rtlCol="0" anchor="ctr"/>
+          <a:lstStyle/>
+          <a:p>
+            <a:pPr indent="0" marL="0">
+              <a:buNone/>
+            </a:pPr>
+            <a:r>
+              <a:rPr lang="en-US" sz="1100" dirty="0">
+                <a:solidFill>
+                  <a:srgbClr val="FFFFFF"/>
+                </a:solidFill>
+                <a:latin typeface="Meiryo" pitchFamily="34" charset="0"/>
+                <a:ea typeface="Meiryo" pitchFamily="34" charset="-122"/>
+                <a:cs typeface="Meiryo" pitchFamily="34" charset="-120"/>
+              </a:rPr>
+              <a:t>当社</a:t>
+            </a:r>
+            <a:endParaRPr lang="en-US" sz="1100" dirty="0"/>
+          </a:p>
+        </p:txBody>
+      </p:sp>
+      <p:sp>
+        <p:nvSpPr>
+          <p:cNvPr id="39" name="Text 37"/>
+          <p:cNvSpPr txBox="1"/>
+          <p:nvPr/>
+        </p:nvSpPr>
+        <p:spPr>
+          <a:xfrm>
+            <a:off x="5943600" y="4791456"/>
+            <a:ext cx="2788920" cy="256032"/>
+          </a:xfrm>
+          <a:prstGeom prst="rect">
+            <a:avLst/>
+          </a:prstGeom>
+          <a:noFill/>
+          <a:ln/>
+        </p:spPr>
+        <p:txBody>
+          <a:bodyPr wrap="square" lIns="0" tIns="0" rIns="0" bIns="0" rtlCol="0" anchor="ctr"/>
+          <a:lstStyle/>
+          <a:p>
+            <a:pPr indent="0" marL="0">
+              <a:buNone/>
+            </a:pPr>
+            <a:r>
+              <a:rPr lang="en-US" sz="880" dirty="0">
+                <a:solidFill>
+                  <a:srgbClr val="A8A49D"/>
+                </a:solidFill>
+                <a:latin typeface="Meiryo" pitchFamily="34" charset="0"/>
+                <a:ea typeface="Meiryo" pitchFamily="34" charset="-122"/>
+                <a:cs typeface="Meiryo" pitchFamily="34" charset="-120"/>
+              </a:rPr>
+              <a:t>受注・要件定義・品質保証で修得</a:t>
+            </a:r>
+            <a:endParaRPr lang="en-US" sz="880" dirty="0"/>
+          </a:p>
+        </p:txBody>
+      </p:sp>
+      <p:sp>
+        <p:nvSpPr>
+          <p:cNvPr id="40" name="Text 38"/>
+          <p:cNvSpPr txBox="1"/>
+          <p:nvPr/>
+        </p:nvSpPr>
+        <p:spPr>
+          <a:xfrm>
+            <a:off x="9509760" y="4498848"/>
+            <a:ext cx="2057400" cy="274320"/>
+          </a:xfrm>
+          <a:prstGeom prst="rect">
+            <a:avLst/>
+          </a:prstGeom>
+          <a:noFill/>
+          <a:ln/>
+        </p:spPr>
+        <p:txBody>
+          <a:bodyPr wrap="square" lIns="0" tIns="0" rIns="0" bIns="0" rtlCol="0" anchor="ctr"/>
+          <a:lstStyle/>
+          <a:p>
+            <a:pPr indent="0" marL="0">
+              <a:buNone/>
+            </a:pPr>
+            <a:r>
+              <a:rPr lang="en-US" sz="1100" dirty="0">
+                <a:solidFill>
+                  <a:srgbClr val="FFFFFF"/>
+                </a:solidFill>
+                <a:latin typeface="Meiryo" pitchFamily="34" charset="0"/>
+                <a:ea typeface="Meiryo" pitchFamily="34" charset="-122"/>
+                <a:cs typeface="Meiryo" pitchFamily="34" charset="-120"/>
+              </a:rPr>
+              <a:t>自社モデル・特許</a:t>
+            </a:r>
+            <a:endParaRPr lang="en-US" sz="1100" dirty="0"/>
+          </a:p>
+        </p:txBody>
+      </p:sp>
+      <p:sp>
+        <p:nvSpPr>
+          <p:cNvPr id="41" name="Text 39"/>
+          <p:cNvSpPr txBox="1"/>
+          <p:nvPr/>
+        </p:nvSpPr>
+        <p:spPr>
+          <a:xfrm>
+            <a:off x="9509760" y="4791456"/>
+            <a:ext cx="2057400" cy="256032"/>
+          </a:xfrm>
+          <a:prstGeom prst="rect">
+            <a:avLst/>
+          </a:prstGeom>
+          <a:noFill/>
+          <a:ln/>
+        </p:spPr>
+        <p:txBody>
+          <a:bodyPr wrap="square" lIns="0" tIns="0" rIns="0" bIns="0" rtlCol="0" anchor="ctr"/>
+          <a:lstStyle/>
+          <a:p>
+            <a:pPr indent="0" marL="0">
+              <a:buNone/>
+            </a:pPr>
+            <a:r>
+              <a:rPr lang="en-US" sz="880" dirty="0">
+                <a:solidFill>
+                  <a:srgbClr val="A8A49D"/>
+                </a:solidFill>
+                <a:latin typeface="Meiryo" pitchFamily="34" charset="0"/>
+                <a:ea typeface="Meiryo" pitchFamily="34" charset="-122"/>
+                <a:cs typeface="Meiryo" pitchFamily="34" charset="-120"/>
+              </a:rPr>
+              <a:t>内製化。プロダクトとして外販へ</a:t>
+            </a:r>
+            <a:endParaRPr lang="en-US" sz="880" dirty="0"/>
+          </a:p>
+        </p:txBody>
+      </p:sp>
+      <p:sp>
+        <p:nvSpPr>
+          <p:cNvPr id="42" name="Shape 40"/>
+          <p:cNvSpPr/>
+          <p:nvPr/>
+        </p:nvSpPr>
+        <p:spPr>
+          <a:xfrm>
+            <a:off x="5276088" y="4681728"/>
+            <a:ext cx="475488" cy="0"/>
+          </a:xfrm>
+          <a:prstGeom prst="line">
+            <a:avLst/>
+          </a:prstGeom>
+          <a:noFill/>
+          <a:ln w="25400">
+            <a:solidFill>
+              <a:srgbClr val="C9962C"/>
+            </a:solidFill>
+            <a:prstDash val="solid"/>
+            <a:tailEnd type="triangle"/>
+          </a:ln>
+        </p:spPr>
+      </p:sp>
+      <p:sp>
+        <p:nvSpPr>
+          <p:cNvPr id="43" name="Text 41"/>
+          <p:cNvSpPr txBox="1"/>
+          <p:nvPr/>
+        </p:nvSpPr>
+        <p:spPr>
+          <a:xfrm>
+            <a:off x="5221224" y="4809744"/>
+            <a:ext cx="585216" cy="219456"/>
+          </a:xfrm>
+          <a:prstGeom prst="rect">
+            <a:avLst/>
+          </a:prstGeom>
+          <a:noFill/>
+          <a:ln/>
+        </p:spPr>
+        <p:txBody>
+          <a:bodyPr wrap="square" lIns="0" tIns="0" rIns="0" bIns="0" rtlCol="0" anchor="ctr"/>
+          <a:lstStyle/>
+          <a:p>
+            <a:pPr algn="ctr" indent="0" marL="0">
+              <a:buNone/>
+            </a:pPr>
+            <a:r>
+              <a:rPr lang="en-US" sz="800" dirty="0">
+                <a:solidFill>
+                  <a:srgbClr val="A8A49D"/>
+                </a:solidFill>
+                <a:latin typeface="Meiryo" pitchFamily="34" charset="0"/>
+                <a:ea typeface="Meiryo" pitchFamily="34" charset="-122"/>
+                <a:cs typeface="Meiryo" pitchFamily="34" charset="-120"/>
+              </a:rPr>
+              <a:t>制作力</a:t>
+            </a:r>
+            <a:endParaRPr lang="en-US" sz="800" dirty="0"/>
+          </a:p>
+        </p:txBody>
+      </p:sp>
+      <p:sp>
+        <p:nvSpPr>
+          <p:cNvPr id="44" name="Shape 42"/>
+          <p:cNvSpPr/>
+          <p:nvPr/>
+        </p:nvSpPr>
+        <p:spPr>
+          <a:xfrm>
+            <a:off x="8823960" y="4681728"/>
+            <a:ext cx="475488" cy="0"/>
+          </a:xfrm>
+          <a:prstGeom prst="line">
+            <a:avLst/>
+          </a:prstGeom>
+          <a:noFill/>
+          <a:ln w="25400">
+            <a:solidFill>
+              <a:srgbClr val="C9962C"/>
+            </a:solidFill>
+            <a:prstDash val="solid"/>
+            <a:tailEnd type="triangle"/>
+          </a:ln>
+        </p:spPr>
+      </p:sp>
+      <p:sp>
+        <p:nvSpPr>
+          <p:cNvPr id="45" name="Text 43"/>
+          <p:cNvSpPr txBox="1"/>
+          <p:nvPr/>
+        </p:nvSpPr>
+        <p:spPr>
+          <a:xfrm>
+            <a:off x="8769096" y="4809744"/>
+            <a:ext cx="585216" cy="219456"/>
+          </a:xfrm>
+          <a:prstGeom prst="rect">
+            <a:avLst/>
+          </a:prstGeom>
+          <a:noFill/>
+          <a:ln/>
+        </p:spPr>
+        <p:txBody>
+          <a:bodyPr wrap="square" lIns="0" tIns="0" rIns="0" bIns="0" rtlCol="0" anchor="ctr"/>
+          <a:lstStyle/>
+          <a:p>
+            <a:pPr algn="ctr" indent="0" marL="0">
+              <a:buNone/>
+            </a:pPr>
+            <a:r>
+              <a:rPr lang="en-US" sz="800" dirty="0">
+                <a:solidFill>
+                  <a:srgbClr val="A8A49D"/>
+                </a:solidFill>
+                <a:latin typeface="Meiryo" pitchFamily="34" charset="0"/>
+                <a:ea typeface="Meiryo" pitchFamily="34" charset="-122"/>
+                <a:cs typeface="Meiryo" pitchFamily="34" charset="-120"/>
+              </a:rPr>
+              <a:t>3年</a:t>
+            </a:r>
+            <a:endParaRPr lang="en-US" sz="800" dirty="0"/>
+          </a:p>
+        </p:txBody>
+      </p:sp>
+      <p:sp>
+        <p:nvSpPr>
+          <p:cNvPr id="46" name="Shape 44"/>
+          <p:cNvSpPr/>
+          <p:nvPr/>
+        </p:nvSpPr>
+        <p:spPr>
+          <a:xfrm>
+            <a:off x="594360" y="5394960"/>
+            <a:ext cx="11000232" cy="786384"/>
+          </a:xfrm>
+          <a:prstGeom prst="rect">
+            <a:avLst/>
+          </a:prstGeom>
+          <a:solidFill>
+            <a:srgbClr val="16161A"/>
+          </a:solidFill>
+          <a:ln/>
+        </p:spPr>
+      </p:sp>
+      <p:sp>
+        <p:nvSpPr>
+          <p:cNvPr id="47" name="Text 45"/>
+          <p:cNvSpPr txBox="1"/>
+          <p:nvPr/>
+        </p:nvSpPr>
+        <p:spPr>
+          <a:xfrm>
+            <a:off x="960120" y="5468112"/>
+            <a:ext cx="10268712" cy="292608"/>
+          </a:xfrm>
+          <a:prstGeom prst="rect">
+            <a:avLst/>
+          </a:prstGeom>
+          <a:noFill/>
+          <a:ln/>
+        </p:spPr>
+        <p:txBody>
+          <a:bodyPr wrap="square" lIns="0" tIns="0" rIns="0" bIns="0" rtlCol="0" anchor="ctr"/>
+          <a:lstStyle/>
+          <a:p>
+            <a:pPr indent="0" marL="0">
+              <a:buNone/>
+            </a:pPr>
+            <a:r>
+              <a:rPr lang="en-US" sz="1300" b="1" dirty="0">
+                <a:solidFill>
+                  <a:srgbClr val="C9962C"/>
+                </a:solidFill>
+                <a:latin typeface="Meiryo" pitchFamily="34" charset="0"/>
+                <a:ea typeface="Meiryo" pitchFamily="34" charset="-122"/>
+                <a:cs typeface="Meiryo" pitchFamily="34" charset="-120"/>
+              </a:rPr>
+              <a:t>提携から完全国産化まで 4年 ―― 当社が見込む受託の優位期間は3年。ほぼ同じスケールです。</a:t>
+            </a:r>
+            <a:endParaRPr lang="en-US" sz="1300" dirty="0"/>
+          </a:p>
+        </p:txBody>
+      </p:sp>
+      <p:sp>
+        <p:nvSpPr>
+          <p:cNvPr id="48" name="Text 46"/>
+          <p:cNvSpPr txBox="1"/>
+          <p:nvPr/>
+        </p:nvSpPr>
+        <p:spPr>
+          <a:xfrm>
+            <a:off x="960120" y="5779008"/>
+            <a:ext cx="10268712" cy="292608"/>
+          </a:xfrm>
+          <a:prstGeom prst="rect">
+            <a:avLst/>
+          </a:prstGeom>
+          <a:noFill/>
+          <a:ln/>
+        </p:spPr>
+        <p:txBody>
+          <a:bodyPr wrap="square" lIns="0" tIns="0" rIns="0" bIns="0" rtlCol="0" anchor="ctr"/>
+          <a:lstStyle/>
+          <a:p>
+            <a:pPr indent="0" marL="0">
+              <a:buNone/>
+            </a:pPr>
+            <a:r>
+              <a:rPr lang="en-US" sz="1000" dirty="0">
                 <a:solidFill>
                   <a:srgbClr val="EDEBE7"/>
                 </a:solidFill>
@@ -15899,55 +17636,15 @@
                 <a:ea typeface="Meiryo" pitchFamily="34" charset="-122"/>
                 <a:cs typeface="Meiryo" pitchFamily="34" charset="-120"/>
               </a:rPr>
-              <a:t>当社が見込む受託の優位期間は3年。ほぼ同じスケールです。</a:t>
-            </a:r>
-            <a:endParaRPr lang="en-US" sz="1150" dirty="0"/>
-          </a:p>
-          <a:p>
-            <a:pPr indent="0" marL="0">
-              <a:lnSpc>
-                <a:spcPct val="135000"/>
-              </a:lnSpc>
-              <a:buNone/>
-            </a:pPr>
-            <a:r>
-              <a:rPr lang="en-US" sz="1150" dirty="0">
-                <a:solidFill>
-                  <a:srgbClr val="EDEBE7"/>
-                </a:solidFill>
-                <a:latin typeface="Meiryo" pitchFamily="34" charset="0"/>
-                <a:ea typeface="Meiryo" pitchFamily="34" charset="-122"/>
-                <a:cs typeface="Meiryo" pitchFamily="34" charset="-120"/>
-              </a:rPr>
-              <a:t>当時は政府の保護(輸入制限・関税・技術移転の後押し)がありました。今のAI映像にはありません。</a:t>
-            </a:r>
-            <a:endParaRPr lang="en-US" sz="1150" dirty="0"/>
-          </a:p>
-          <a:p>
-            <a:pPr indent="0" marL="0">
-              <a:lnSpc>
-                <a:spcPct val="135000"/>
-              </a:lnSpc>
-              <a:buNone/>
-            </a:pPr>
-            <a:r>
-              <a:rPr lang="en-US" sz="1150" dirty="0">
-                <a:solidFill>
-                  <a:srgbClr val="EDEBE7"/>
-                </a:solidFill>
-                <a:latin typeface="Meiryo" pitchFamily="34" charset="0"/>
-                <a:ea typeface="Meiryo" pitchFamily="34" charset="-122"/>
-                <a:cs typeface="Meiryo" pitchFamily="34" charset="-120"/>
-              </a:rPr>
-              <a:t>だから当社は、より短い時間で内製化まで到達する必要があります。</a:t>
-            </a:r>
-            <a:endParaRPr lang="en-US" sz="1150" dirty="0"/>
-          </a:p>
-        </p:txBody>
-      </p:sp>
-      <p:sp>
-        <p:nvSpPr>
-          <p:cNvPr id="25" name="Text 23"/>
+              <a:t>ただし当時は政府の保護(輸入制限・関税・技術移転の後押し)がありました。今のAI映像にはありません。だからより短い時間で内製化まで到達する必要があります。</a:t>
+            </a:r>
+            <a:endParaRPr lang="en-US" sz="1000" dirty="0"/>
+          </a:p>
+        </p:txBody>
+      </p:sp>
+      <p:sp>
+        <p:nvSpPr>
+          <p:cNvPr id="49" name="Text 47"/>
           <p:cNvSpPr txBox="1"/>
           <p:nvPr/>
         </p:nvSpPr>
@@ -15986,7 +17683,7 @@
       </p:sp>
       <p:sp>
         <p:nvSpPr>
-          <p:cNvPr id="26" name="Text 24"/>
+          <p:cNvPr id="50" name="Text 48"/>
           <p:cNvSpPr txBox="1"/>
           <p:nvPr/>
         </p:nvSpPr>
@@ -17166,7 +18863,7 @@
                 <a:ea typeface="Meiryo" pitchFamily="34" charset="-122"/>
                 <a:cs typeface="Meiryo" pitchFamily="34" charset="-120"/>
               </a:rPr>
-              <a:t>ビジネスモデル</a:t>
+              <a:t>市場規模</a:t>
             </a:r>
             <a:endParaRPr lang="en-US" sz="2700" dirty="0"/>
           </a:p>
@@ -17205,22 +18902,38 @@
                 <a:ea typeface="Meiryo" pitchFamily="34" charset="-122"/>
                 <a:cs typeface="Meiryo" pitchFamily="34" charset="-120"/>
               </a:rPr>
-              <a:t>日本語で受注し、中国語で発注し、日本語で承認を取る</a:t>
+              <a:t>市場は制約になりません。制約は営業・採用・中国側のキャパシティです</a:t>
             </a:r>
             <a:endParaRPr lang="en-US" sz="1250" dirty="0"/>
           </a:p>
         </p:txBody>
       </p:sp>
-      <p:sp>
-        <p:nvSpPr>
-          <p:cNvPr id="6" name="Shape 4"/>
+      <p:graphicFrame>
+        <p:nvGraphicFramePr>
+          <p:cNvPr id="6" name="Chart 0" descr=""/>
+          <p:cNvGraphicFramePr/>
+          <p:nvPr/>
+        </p:nvGraphicFramePr>
+        <p:xfrm>
+          <a:off x="594360" y="1600200"/>
+          <a:ext cx="6400800" cy="3063240"/>
+        </p:xfrm>
+        <a:graphic xmlns:a="http://schemas.openxmlformats.org/drawingml/2006/main">
+          <a:graphicData uri="http://schemas.openxmlformats.org/drawingml/2006/chart">
+            <c:chart xmlns:c="http://schemas.openxmlformats.org/drawingml/2006/chart" r:id="rId1"/>
+          </a:graphicData>
+        </a:graphic>
+      </p:graphicFrame>
+      <p:sp>
+        <p:nvSpPr>
+          <p:cNvPr id="7" name="Shape 4"/>
           <p:cNvSpPr/>
           <p:nvPr/>
         </p:nvSpPr>
         <p:spPr>
           <a:xfrm>
-            <a:off x="594360" y="1691640"/>
-            <a:ext cx="2880360" cy="1371600"/>
+            <a:off x="7315200" y="1600200"/>
+            <a:ext cx="4279392" cy="1444752"/>
           </a:xfrm>
           <a:prstGeom prst="rect">
             <a:avLst/>
@@ -17233,30 +18946,50 @@
       </p:sp>
       <p:sp>
         <p:nvSpPr>
-          <p:cNvPr id="7" name="Text 5"/>
-          <p:cNvSpPr txBox="1"/>
-          <p:nvPr/>
-        </p:nvSpPr>
-        <p:spPr>
-          <a:xfrm>
-            <a:off x="822960" y="1874520"/>
-            <a:ext cx="2423160" cy="566928"/>
-          </a:xfrm>
-          <a:prstGeom prst="rect">
-            <a:avLst/>
-          </a:prstGeom>
-          <a:noFill/>
-          <a:ln/>
-        </p:spPr>
-        <p:txBody>
-          <a:bodyPr wrap="square" lIns="0" tIns="0" rIns="0" bIns="0" rtlCol="0" anchor="ctr"/>
-          <a:lstStyle/>
-          <a:p>
-            <a:pPr indent="0" marL="0">
-              <a:buNone/>
-            </a:pPr>
-            <a:r>
-              <a:rPr lang="en-US" sz="1500" b="1" dirty="0">
+          <p:cNvPr id="8" name="Shape 5"/>
+          <p:cNvSpPr/>
+          <p:nvPr/>
+        </p:nvSpPr>
+        <p:spPr>
+          <a:xfrm>
+            <a:off x="7552944" y="1874520"/>
+            <a:ext cx="118872" cy="118872"/>
+          </a:xfrm>
+          <a:prstGeom prst="rect">
+            <a:avLst/>
+          </a:prstGeom>
+          <a:solidFill>
+            <a:srgbClr val="2A3563"/>
+          </a:solidFill>
+          <a:ln/>
+        </p:spPr>
+      </p:sp>
+      <p:sp>
+        <p:nvSpPr>
+          <p:cNvPr id="9" name="Text 6"/>
+          <p:cNvSpPr txBox="1"/>
+          <p:nvPr/>
+        </p:nvSpPr>
+        <p:spPr>
+          <a:xfrm>
+            <a:off x="7790688" y="1783080"/>
+            <a:ext cx="3566160" cy="310896"/>
+          </a:xfrm>
+          <a:prstGeom prst="rect">
+            <a:avLst/>
+          </a:prstGeom>
+          <a:noFill/>
+          <a:ln/>
+        </p:spPr>
+        <p:txBody>
+          <a:bodyPr wrap="square" lIns="0" tIns="0" rIns="0" bIns="0" rtlCol="0" anchor="ctr"/>
+          <a:lstStyle/>
+          <a:p>
+            <a:pPr indent="0" marL="0">
+              <a:buNone/>
+            </a:pPr>
+            <a:r>
+              <a:rPr lang="en-US" sz="1350" b="1" dirty="0">
                 <a:solidFill>
                   <a:srgbClr val="16161A"/>
                 </a:solidFill>
@@ -17264,22 +18997,22 @@
                 <a:ea typeface="Meiryo" pitchFamily="34" charset="-122"/>
                 <a:cs typeface="Meiryo" pitchFamily="34" charset="-120"/>
               </a:rPr>
-              <a:t>日本の発注者</a:t>
-            </a:r>
-            <a:endParaRPr lang="en-US" sz="1500" dirty="0"/>
-          </a:p>
-        </p:txBody>
-      </p:sp>
-      <p:sp>
-        <p:nvSpPr>
-          <p:cNvPr id="8" name="Text 6"/>
-          <p:cNvSpPr txBox="1"/>
-          <p:nvPr/>
-        </p:nvSpPr>
-        <p:spPr>
-          <a:xfrm>
-            <a:off x="822960" y="2441448"/>
-            <a:ext cx="2423160" cy="502920"/>
+              <a:t>追い風は実測できている</a:t>
+            </a:r>
+            <a:endParaRPr lang="en-US" sz="1350" dirty="0"/>
+          </a:p>
+        </p:txBody>
+      </p:sp>
+      <p:sp>
+        <p:nvSpPr>
+          <p:cNvPr id="10" name="Text 7"/>
+          <p:cNvSpPr txBox="1"/>
+          <p:nvPr/>
+        </p:nvSpPr>
+        <p:spPr>
+          <a:xfrm>
+            <a:off x="7790688" y="2148840"/>
+            <a:ext cx="3566160" cy="713232"/>
           </a:xfrm>
           <a:prstGeom prst="rect">
             <a:avLst/>
@@ -17293,272 +19026,75 @@
           <a:p>
             <a:pPr indent="0" marL="0">
               <a:lnSpc>
-                <a:spcPct val="125000"/>
+                <a:spcPct val="128000"/>
               </a:lnSpc>
               <a:buNone/>
             </a:pPr>
             <a:r>
               <a:rPr lang="en-US" sz="1050" dirty="0">
                 <a:solidFill>
-                  <a:srgbClr val="6E6E76"/>
-                </a:solidFill>
-                <a:latin typeface="Meiryo" pitchFamily="34" charset="0"/>
-                <a:ea typeface="Meiryo" pitchFamily="34" charset="-122"/>
-                <a:cs typeface="Meiryo" pitchFamily="34" charset="-120"/>
-              </a:rPr>
-              <a:t>事業会社・広告代理店</a:t>
+                  <a:srgbClr val="3A3A42"/>
+                </a:solidFill>
+                <a:latin typeface="Meiryo" pitchFamily="34" charset="0"/>
+                <a:ea typeface="Meiryo" pitchFamily="34" charset="-122"/>
+                <a:cs typeface="Meiryo" pitchFamily="34" charset="-120"/>
+              </a:rPr>
+              <a:t>動画広告市場  2025年 8,855億円</a:t>
             </a:r>
             <a:endParaRPr lang="en-US" sz="1050" dirty="0"/>
           </a:p>
           <a:p>
             <a:pPr indent="0" marL="0">
               <a:lnSpc>
-                <a:spcPct val="125000"/>
+                <a:spcPct val="128000"/>
               </a:lnSpc>
               <a:buNone/>
             </a:pPr>
             <a:r>
               <a:rPr lang="en-US" sz="1050" dirty="0">
                 <a:solidFill>
-                  <a:srgbClr val="6E6E76"/>
-                </a:solidFill>
-                <a:latin typeface="Meiryo" pitchFamily="34" charset="0"/>
-                <a:ea typeface="Meiryo" pitchFamily="34" charset="-122"/>
-                <a:cs typeface="Meiryo" pitchFamily="34" charset="-120"/>
-              </a:rPr>
-              <a:t>制作会社(2次受け)</a:t>
+                  <a:srgbClr val="3A3A42"/>
+                </a:solidFill>
+                <a:latin typeface="Meiryo" pitchFamily="34" charset="0"/>
+                <a:ea typeface="Meiryo" pitchFamily="34" charset="-122"/>
+                <a:cs typeface="Meiryo" pitchFamily="34" charset="-120"/>
+              </a:rPr>
+              <a:t>                    → 2026年 1兆437億円</a:t>
             </a:r>
             <a:endParaRPr lang="en-US" sz="1050" dirty="0"/>
           </a:p>
-        </p:txBody>
-      </p:sp>
-      <p:sp>
-        <p:nvSpPr>
-          <p:cNvPr id="9" name="Shape 7"/>
+          <a:p>
+            <a:pPr indent="0" marL="0">
+              <a:lnSpc>
+                <a:spcPct val="128000"/>
+              </a:lnSpc>
+              <a:buNone/>
+            </a:pPr>
+            <a:r>
+              <a:rPr lang="en-US" sz="1050" dirty="0">
+                <a:solidFill>
+                  <a:srgbClr val="3A3A42"/>
+                </a:solidFill>
+                <a:latin typeface="Meiryo" pitchFamily="34" charset="0"/>
+                <a:ea typeface="Meiryo" pitchFamily="34" charset="-122"/>
+                <a:cs typeface="Meiryo" pitchFamily="34" charset="-120"/>
+              </a:rPr>
+              <a:t>縦型動画広告は前年比 155.9%</a:t>
+            </a:r>
+            <a:endParaRPr lang="en-US" sz="1050" dirty="0"/>
+          </a:p>
+        </p:txBody>
+      </p:sp>
+      <p:sp>
+        <p:nvSpPr>
+          <p:cNvPr id="11" name="Shape 8"/>
           <p:cNvSpPr/>
           <p:nvPr/>
         </p:nvSpPr>
         <p:spPr>
           <a:xfrm>
-            <a:off x="3639312" y="2194560"/>
-            <a:ext cx="640080" cy="0"/>
-          </a:xfrm>
-          <a:prstGeom prst="line">
-            <a:avLst/>
-          </a:prstGeom>
-          <a:noFill/>
-          <a:ln w="28575">
-            <a:solidFill>
-              <a:srgbClr val="B3121B"/>
-            </a:solidFill>
-            <a:prstDash val="solid"/>
-            <a:tailEnd type="triangle"/>
-          </a:ln>
-        </p:spPr>
-      </p:sp>
-      <p:sp>
-        <p:nvSpPr>
-          <p:cNvPr id="10" name="Shape 8"/>
-          <p:cNvSpPr/>
-          <p:nvPr/>
-        </p:nvSpPr>
-        <p:spPr>
-          <a:xfrm>
-            <a:off x="3639312" y="2606040"/>
-            <a:ext cx="640080" cy="0"/>
-          </a:xfrm>
-          <a:prstGeom prst="line">
-            <a:avLst/>
-          </a:prstGeom>
-          <a:noFill/>
-          <a:ln w="28575">
-            <a:solidFill>
-              <a:srgbClr val="DCD9D4"/>
-            </a:solidFill>
-            <a:prstDash val="solid"/>
-            <a:headEnd type="triangle"/>
-          </a:ln>
-        </p:spPr>
-      </p:sp>
-      <p:sp>
-        <p:nvSpPr>
-          <p:cNvPr id="11" name="Shape 9"/>
-          <p:cNvSpPr/>
-          <p:nvPr/>
-        </p:nvSpPr>
-        <p:spPr>
-          <a:xfrm>
-            <a:off x="4434840" y="1691640"/>
-            <a:ext cx="2880360" cy="1371600"/>
-          </a:xfrm>
-          <a:prstGeom prst="rect">
-            <a:avLst/>
-          </a:prstGeom>
-          <a:solidFill>
-            <a:srgbClr val="16161A"/>
-          </a:solidFill>
-          <a:ln/>
-        </p:spPr>
-      </p:sp>
-      <p:sp>
-        <p:nvSpPr>
-          <p:cNvPr id="12" name="Text 10"/>
-          <p:cNvSpPr txBox="1"/>
-          <p:nvPr/>
-        </p:nvSpPr>
-        <p:spPr>
-          <a:xfrm>
-            <a:off x="4663440" y="1874520"/>
-            <a:ext cx="2423160" cy="566928"/>
-          </a:xfrm>
-          <a:prstGeom prst="rect">
-            <a:avLst/>
-          </a:prstGeom>
-          <a:noFill/>
-          <a:ln/>
-        </p:spPr>
-        <p:txBody>
-          <a:bodyPr wrap="square" lIns="0" tIns="0" rIns="0" bIns="0" rtlCol="0" anchor="ctr"/>
-          <a:lstStyle/>
-          <a:p>
-            <a:pPr indent="0" marL="0">
-              <a:buNone/>
-            </a:pPr>
-            <a:r>
-              <a:rPr lang="en-US" sz="1500" b="1" dirty="0">
-                <a:solidFill>
-                  <a:srgbClr val="FFFFFF"/>
-                </a:solidFill>
-                <a:latin typeface="Meiryo" pitchFamily="34" charset="0"/>
-                <a:ea typeface="Meiryo" pitchFamily="34" charset="-122"/>
-                <a:cs typeface="Meiryo" pitchFamily="34" charset="-120"/>
-              </a:rPr>
-              <a:t>当社</a:t>
-            </a:r>
-            <a:endParaRPr lang="en-US" sz="1500" dirty="0"/>
-          </a:p>
-        </p:txBody>
-      </p:sp>
-      <p:sp>
-        <p:nvSpPr>
-          <p:cNvPr id="13" name="Text 11"/>
-          <p:cNvSpPr txBox="1"/>
-          <p:nvPr/>
-        </p:nvSpPr>
-        <p:spPr>
-          <a:xfrm>
-            <a:off x="4663440" y="2441448"/>
-            <a:ext cx="2423160" cy="502920"/>
-          </a:xfrm>
-          <a:prstGeom prst="rect">
-            <a:avLst/>
-          </a:prstGeom>
-          <a:noFill/>
-          <a:ln/>
-        </p:spPr>
-        <p:txBody>
-          <a:bodyPr wrap="square" lIns="0" tIns="0" rIns="0" bIns="0" rtlCol="0" anchor="t"/>
-          <a:lstStyle/>
-          <a:p>
-            <a:pPr indent="0" marL="0">
-              <a:lnSpc>
-                <a:spcPct val="125000"/>
-              </a:lnSpc>
-              <a:buNone/>
-            </a:pPr>
-            <a:r>
-              <a:rPr lang="en-US" sz="1050" dirty="0">
-                <a:solidFill>
-                  <a:srgbClr val="EDEBE7"/>
-                </a:solidFill>
-                <a:latin typeface="Meiryo" pitchFamily="34" charset="0"/>
-                <a:ea typeface="Meiryo" pitchFamily="34" charset="-122"/>
-                <a:cs typeface="Meiryo" pitchFamily="34" charset="-120"/>
-              </a:rPr>
-              <a:t>要件定義・品質保証</a:t>
-            </a:r>
-            <a:endParaRPr lang="en-US" sz="1050" dirty="0"/>
-          </a:p>
-          <a:p>
-            <a:pPr indent="0" marL="0">
-              <a:lnSpc>
-                <a:spcPct val="125000"/>
-              </a:lnSpc>
-              <a:buNone/>
-            </a:pPr>
-            <a:r>
-              <a:rPr lang="en-US" sz="1050" dirty="0">
-                <a:solidFill>
-                  <a:srgbClr val="EDEBE7"/>
-                </a:solidFill>
-                <a:latin typeface="Meiryo" pitchFamily="34" charset="0"/>
-                <a:ea typeface="Meiryo" pitchFamily="34" charset="-122"/>
-                <a:cs typeface="Meiryo" pitchFamily="34" charset="-120"/>
-              </a:rPr>
-              <a:t>契約・与信・請求</a:t>
-            </a:r>
-            <a:endParaRPr lang="en-US" sz="1050" dirty="0"/>
-          </a:p>
-        </p:txBody>
-      </p:sp>
-      <p:sp>
-        <p:nvSpPr>
-          <p:cNvPr id="14" name="Shape 12"/>
-          <p:cNvSpPr/>
-          <p:nvPr/>
-        </p:nvSpPr>
-        <p:spPr>
-          <a:xfrm>
-            <a:off x="7479792" y="2194560"/>
-            <a:ext cx="640080" cy="0"/>
-          </a:xfrm>
-          <a:prstGeom prst="line">
-            <a:avLst/>
-          </a:prstGeom>
-          <a:noFill/>
-          <a:ln w="28575">
-            <a:solidFill>
-              <a:srgbClr val="B3121B"/>
-            </a:solidFill>
-            <a:prstDash val="solid"/>
-            <a:tailEnd type="triangle"/>
-          </a:ln>
-        </p:spPr>
-      </p:sp>
-      <p:sp>
-        <p:nvSpPr>
-          <p:cNvPr id="15" name="Shape 13"/>
-          <p:cNvSpPr/>
-          <p:nvPr/>
-        </p:nvSpPr>
-        <p:spPr>
-          <a:xfrm>
-            <a:off x="7479792" y="2606040"/>
-            <a:ext cx="640080" cy="0"/>
-          </a:xfrm>
-          <a:prstGeom prst="line">
-            <a:avLst/>
-          </a:prstGeom>
-          <a:noFill/>
-          <a:ln w="28575">
-            <a:solidFill>
-              <a:srgbClr val="DCD9D4"/>
-            </a:solidFill>
-            <a:prstDash val="solid"/>
-            <a:headEnd type="triangle"/>
-          </a:ln>
-        </p:spPr>
-      </p:sp>
-      <p:sp>
-        <p:nvSpPr>
-          <p:cNvPr id="16" name="Shape 14"/>
-          <p:cNvSpPr/>
-          <p:nvPr/>
-        </p:nvSpPr>
-        <p:spPr>
-          <a:xfrm>
-            <a:off x="8275320" y="1691640"/>
-            <a:ext cx="2880360" cy="1371600"/>
+            <a:off x="7315200" y="3218688"/>
+            <a:ext cx="4279392" cy="1444752"/>
           </a:xfrm>
           <a:prstGeom prst="rect">
             <a:avLst/>
@@ -17571,30 +19107,50 @@
       </p:sp>
       <p:sp>
         <p:nvSpPr>
-          <p:cNvPr id="17" name="Text 15"/>
-          <p:cNvSpPr txBox="1"/>
-          <p:nvPr/>
-        </p:nvSpPr>
-        <p:spPr>
-          <a:xfrm>
-            <a:off x="8503920" y="1874520"/>
-            <a:ext cx="2423160" cy="566928"/>
-          </a:xfrm>
-          <a:prstGeom prst="rect">
-            <a:avLst/>
-          </a:prstGeom>
-          <a:noFill/>
-          <a:ln/>
-        </p:spPr>
-        <p:txBody>
-          <a:bodyPr wrap="square" lIns="0" tIns="0" rIns="0" bIns="0" rtlCol="0" anchor="ctr"/>
-          <a:lstStyle/>
-          <a:p>
-            <a:pPr indent="0" marL="0">
-              <a:buNone/>
-            </a:pPr>
-            <a:r>
-              <a:rPr lang="en-US" sz="1500" b="1" dirty="0">
+          <p:cNvPr id="12" name="Shape 9"/>
+          <p:cNvSpPr/>
+          <p:nvPr/>
+        </p:nvSpPr>
+        <p:spPr>
+          <a:xfrm>
+            <a:off x="7552944" y="3493008"/>
+            <a:ext cx="118872" cy="118872"/>
+          </a:xfrm>
+          <a:prstGeom prst="rect">
+            <a:avLst/>
+          </a:prstGeom>
+          <a:solidFill>
+            <a:srgbClr val="C9962C"/>
+          </a:solidFill>
+          <a:ln/>
+        </p:spPr>
+      </p:sp>
+      <p:sp>
+        <p:nvSpPr>
+          <p:cNvPr id="13" name="Text 10"/>
+          <p:cNvSpPr txBox="1"/>
+          <p:nvPr/>
+        </p:nvSpPr>
+        <p:spPr>
+          <a:xfrm>
+            <a:off x="7790688" y="3401568"/>
+            <a:ext cx="3566160" cy="310896"/>
+          </a:xfrm>
+          <a:prstGeom prst="rect">
+            <a:avLst/>
+          </a:prstGeom>
+          <a:noFill/>
+          <a:ln/>
+        </p:spPr>
+        <p:txBody>
+          <a:bodyPr wrap="square" lIns="0" tIns="0" rIns="0" bIns="0" rtlCol="0" anchor="ctr"/>
+          <a:lstStyle/>
+          <a:p>
+            <a:pPr indent="0" marL="0">
+              <a:buNone/>
+            </a:pPr>
+            <a:r>
+              <a:rPr lang="en-US" sz="1350" b="1" dirty="0">
                 <a:solidFill>
                   <a:srgbClr val="16161A"/>
                 </a:solidFill>
@@ -17602,39 +19158,22 @@
                 <a:ea typeface="Meiryo" pitchFamily="34" charset="-122"/>
                 <a:cs typeface="Meiryo" pitchFamily="34" charset="-120"/>
               </a:rPr>
-              <a:t>中国の個人</a:t>
-            </a:r>
-            <a:endParaRPr lang="en-US" sz="1500" dirty="0"/>
-          </a:p>
-          <a:p>
-            <a:pPr indent="0" marL="0">
-              <a:buNone/>
-            </a:pPr>
-            <a:r>
-              <a:rPr lang="en-US" sz="1500" b="1" dirty="0">
-                <a:solidFill>
-                  <a:srgbClr val="16161A"/>
-                </a:solidFill>
-                <a:latin typeface="Meiryo" pitchFamily="34" charset="0"/>
-                <a:ea typeface="Meiryo" pitchFamily="34" charset="-122"/>
-                <a:cs typeface="Meiryo" pitchFamily="34" charset="-120"/>
-              </a:rPr>
-              <a:t>クリエイター</a:t>
-            </a:r>
-            <a:endParaRPr lang="en-US" sz="1500" dirty="0"/>
-          </a:p>
-        </p:txBody>
-      </p:sp>
-      <p:sp>
-        <p:nvSpPr>
-          <p:cNvPr id="18" name="Text 16"/>
-          <p:cNvSpPr txBox="1"/>
-          <p:nvPr/>
-        </p:nvSpPr>
-        <p:spPr>
-          <a:xfrm>
-            <a:off x="8503920" y="2441448"/>
-            <a:ext cx="2423160" cy="502920"/>
+              <a:t>3年後でもSAMの0.18%</a:t>
+            </a:r>
+            <a:endParaRPr lang="en-US" sz="1350" dirty="0"/>
+          </a:p>
+        </p:txBody>
+      </p:sp>
+      <p:sp>
+        <p:nvSpPr>
+          <p:cNvPr id="14" name="Text 11"/>
+          <p:cNvSpPr txBox="1"/>
+          <p:nvPr/>
+        </p:nvSpPr>
+        <p:spPr>
+          <a:xfrm>
+            <a:off x="7790688" y="3767328"/>
+            <a:ext cx="3566160" cy="713232"/>
           </a:xfrm>
           <a:prstGeom prst="rect">
             <a:avLst/>
@@ -17648,211 +19187,75 @@
           <a:p>
             <a:pPr indent="0" marL="0">
               <a:lnSpc>
-                <a:spcPct val="125000"/>
+                <a:spcPct val="128000"/>
               </a:lnSpc>
               <a:buNone/>
             </a:pPr>
             <a:r>
               <a:rPr lang="en-US" sz="1050" dirty="0">
                 <a:solidFill>
-                  <a:srgbClr val="6E6E76"/>
-                </a:solidFill>
-                <a:latin typeface="Meiryo" pitchFamily="34" charset="0"/>
-                <a:ea typeface="Meiryo" pitchFamily="34" charset="-122"/>
-                <a:cs typeface="Meiryo" pitchFamily="34" charset="-120"/>
-              </a:rPr>
-              <a:t>登録20〜25名</a:t>
+                  <a:srgbClr val="3A3A42"/>
+                </a:solidFill>
+                <a:latin typeface="Meiryo" pitchFamily="34" charset="0"/>
+                <a:ea typeface="Meiryo" pitchFamily="34" charset="-122"/>
+                <a:cs typeface="Meiryo" pitchFamily="34" charset="-120"/>
+              </a:rPr>
+              <a:t>5年後に年商10億へ届いても0.7%。</a:t>
             </a:r>
             <a:endParaRPr lang="en-US" sz="1050" dirty="0"/>
           </a:p>
           <a:p>
             <a:pPr indent="0" marL="0">
               <a:lnSpc>
-                <a:spcPct val="125000"/>
+                <a:spcPct val="128000"/>
               </a:lnSpc>
               <a:buNone/>
             </a:pPr>
             <a:r>
               <a:rPr lang="en-US" sz="1050" dirty="0">
                 <a:solidFill>
-                  <a:srgbClr val="6E6E76"/>
-                </a:solidFill>
-                <a:latin typeface="Meiryo" pitchFamily="34" charset="0"/>
-                <a:ea typeface="Meiryo" pitchFamily="34" charset="-122"/>
-                <a:cs typeface="Meiryo" pitchFamily="34" charset="-120"/>
-              </a:rPr>
-              <a:t>稼働14名 / 月3本</a:t>
+                  <a:srgbClr val="3A3A42"/>
+                </a:solidFill>
+                <a:latin typeface="Meiryo" pitchFamily="34" charset="0"/>
+                <a:ea typeface="Meiryo" pitchFamily="34" charset="-122"/>
+                <a:cs typeface="Meiryo" pitchFamily="34" charset="-120"/>
+              </a:rPr>
+              <a:t>市場の奪い合いにはなりません。</a:t>
             </a:r>
             <a:endParaRPr lang="en-US" sz="1050" dirty="0"/>
           </a:p>
-        </p:txBody>
-      </p:sp>
-      <p:sp>
-        <p:nvSpPr>
-          <p:cNvPr id="19" name="Text 17"/>
-          <p:cNvSpPr txBox="1"/>
-          <p:nvPr/>
-        </p:nvSpPr>
-        <p:spPr>
-          <a:xfrm>
-            <a:off x="3566160" y="1746504"/>
-            <a:ext cx="822960" cy="274320"/>
-          </a:xfrm>
-          <a:prstGeom prst="rect">
-            <a:avLst/>
-          </a:prstGeom>
-          <a:noFill/>
-          <a:ln/>
-        </p:spPr>
-        <p:txBody>
-          <a:bodyPr wrap="square" lIns="0" tIns="0" rIns="0" bIns="0" rtlCol="0" anchor="ctr"/>
-          <a:lstStyle/>
-          <a:p>
-            <a:pPr algn="ctr" indent="0" marL="0">
-              <a:buNone/>
-            </a:pPr>
-            <a:r>
-              <a:rPr lang="en-US" sz="900" dirty="0">
-                <a:solidFill>
-                  <a:srgbClr val="B3121B"/>
-                </a:solidFill>
-                <a:latin typeface="Meiryo" pitchFamily="34" charset="0"/>
-                <a:ea typeface="Meiryo" pitchFamily="34" charset="-122"/>
-                <a:cs typeface="Meiryo" pitchFamily="34" charset="-120"/>
-              </a:rPr>
-              <a:t>発注 →</a:t>
-            </a:r>
-            <a:endParaRPr lang="en-US" sz="900" dirty="0"/>
-          </a:p>
-        </p:txBody>
-      </p:sp>
-      <p:sp>
-        <p:nvSpPr>
-          <p:cNvPr id="20" name="Text 18"/>
-          <p:cNvSpPr txBox="1"/>
-          <p:nvPr/>
-        </p:nvSpPr>
-        <p:spPr>
-          <a:xfrm>
-            <a:off x="3566160" y="2752344"/>
-            <a:ext cx="822960" cy="274320"/>
-          </a:xfrm>
-          <a:prstGeom prst="rect">
-            <a:avLst/>
-          </a:prstGeom>
-          <a:noFill/>
-          <a:ln/>
-        </p:spPr>
-        <p:txBody>
-          <a:bodyPr wrap="square" lIns="0" tIns="0" rIns="0" bIns="0" rtlCol="0" anchor="ctr"/>
-          <a:lstStyle/>
-          <a:p>
-            <a:pPr algn="ctr" indent="0" marL="0">
-              <a:buNone/>
-            </a:pPr>
-            <a:r>
-              <a:rPr lang="en-US" sz="900" dirty="0">
-                <a:solidFill>
-                  <a:srgbClr val="6E6E76"/>
-                </a:solidFill>
-                <a:latin typeface="Meiryo" pitchFamily="34" charset="0"/>
-                <a:ea typeface="Meiryo" pitchFamily="34" charset="-122"/>
-                <a:cs typeface="Meiryo" pitchFamily="34" charset="-120"/>
-              </a:rPr>
-              <a:t>← 納品</a:t>
-            </a:r>
-            <a:endParaRPr lang="en-US" sz="900" dirty="0"/>
-          </a:p>
-        </p:txBody>
-      </p:sp>
-      <p:sp>
-        <p:nvSpPr>
-          <p:cNvPr id="21" name="Text 19"/>
-          <p:cNvSpPr txBox="1"/>
-          <p:nvPr/>
-        </p:nvSpPr>
-        <p:spPr>
-          <a:xfrm>
-            <a:off x="7406640" y="1746504"/>
-            <a:ext cx="822960" cy="274320"/>
-          </a:xfrm>
-          <a:prstGeom prst="rect">
-            <a:avLst/>
-          </a:prstGeom>
-          <a:noFill/>
-          <a:ln/>
-        </p:spPr>
-        <p:txBody>
-          <a:bodyPr wrap="square" lIns="0" tIns="0" rIns="0" bIns="0" rtlCol="0" anchor="ctr"/>
-          <a:lstStyle/>
-          <a:p>
-            <a:pPr algn="ctr" indent="0" marL="0">
-              <a:buNone/>
-            </a:pPr>
-            <a:r>
-              <a:rPr lang="en-US" sz="900" dirty="0">
-                <a:solidFill>
-                  <a:srgbClr val="B3121B"/>
-                </a:solidFill>
-                <a:latin typeface="Meiryo" pitchFamily="34" charset="0"/>
-                <a:ea typeface="Meiryo" pitchFamily="34" charset="-122"/>
-                <a:cs typeface="Meiryo" pitchFamily="34" charset="-120"/>
-              </a:rPr>
-              <a:t>発注 →</a:t>
-            </a:r>
-            <a:endParaRPr lang="en-US" sz="900" dirty="0"/>
-          </a:p>
-        </p:txBody>
-      </p:sp>
-      <p:sp>
-        <p:nvSpPr>
-          <p:cNvPr id="22" name="Text 20"/>
-          <p:cNvSpPr txBox="1"/>
-          <p:nvPr/>
-        </p:nvSpPr>
-        <p:spPr>
-          <a:xfrm>
-            <a:off x="7406640" y="2752344"/>
-            <a:ext cx="822960" cy="274320"/>
-          </a:xfrm>
-          <a:prstGeom prst="rect">
-            <a:avLst/>
-          </a:prstGeom>
-          <a:noFill/>
-          <a:ln/>
-        </p:spPr>
-        <p:txBody>
-          <a:bodyPr wrap="square" lIns="0" tIns="0" rIns="0" bIns="0" rtlCol="0" anchor="ctr"/>
-          <a:lstStyle/>
-          <a:p>
-            <a:pPr algn="ctr" indent="0" marL="0">
-              <a:buNone/>
-            </a:pPr>
-            <a:r>
-              <a:rPr lang="en-US" sz="900" dirty="0">
-                <a:solidFill>
-                  <a:srgbClr val="6E6E76"/>
-                </a:solidFill>
-                <a:latin typeface="Meiryo" pitchFamily="34" charset="0"/>
-                <a:ea typeface="Meiryo" pitchFamily="34" charset="-122"/>
-                <a:cs typeface="Meiryo" pitchFamily="34" charset="-120"/>
-              </a:rPr>
-              <a:t>← 納品</a:t>
-            </a:r>
-            <a:endParaRPr lang="en-US" sz="900" dirty="0"/>
-          </a:p>
-        </p:txBody>
-      </p:sp>
-      <p:sp>
-        <p:nvSpPr>
-          <p:cNvPr id="23" name="Shape 21"/>
+          <a:p>
+            <a:pPr indent="0" marL="0">
+              <a:lnSpc>
+                <a:spcPct val="128000"/>
+              </a:lnSpc>
+              <a:buNone/>
+            </a:pPr>
+            <a:r>
+              <a:rPr lang="en-US" sz="1050" dirty="0">
+                <a:solidFill>
+                  <a:srgbClr val="3A3A42"/>
+                </a:solidFill>
+                <a:latin typeface="Meiryo" pitchFamily="34" charset="0"/>
+                <a:ea typeface="Meiryo" pitchFamily="34" charset="-122"/>
+                <a:cs typeface="Meiryo" pitchFamily="34" charset="-120"/>
+              </a:rPr>
+              <a:t>伸び方を決めるのは自社の実行力です。</a:t>
+            </a:r>
+            <a:endParaRPr lang="en-US" sz="1050" dirty="0"/>
+          </a:p>
+        </p:txBody>
+      </p:sp>
+      <p:sp>
+        <p:nvSpPr>
+          <p:cNvPr id="15" name="Shape 12"/>
           <p:cNvSpPr/>
           <p:nvPr/>
         </p:nvSpPr>
         <p:spPr>
           <a:xfrm>
-            <a:off x="594360" y="3401568"/>
-            <a:ext cx="3483864" cy="2084832"/>
+            <a:off x="594360" y="4864608"/>
+            <a:ext cx="11000232" cy="1170432"/>
           </a:xfrm>
           <a:prstGeom prst="rect">
             <a:avLst/>
@@ -17865,73 +19268,53 @@
       </p:sp>
       <p:sp>
         <p:nvSpPr>
-          <p:cNvPr id="24" name="Shape 22"/>
-          <p:cNvSpPr/>
-          <p:nvPr/>
-        </p:nvSpPr>
-        <p:spPr>
-          <a:xfrm>
-            <a:off x="832104" y="3675888"/>
-            <a:ext cx="118872" cy="118872"/>
-          </a:xfrm>
-          <a:prstGeom prst="rect">
-            <a:avLst/>
-          </a:prstGeom>
-          <a:solidFill>
-            <a:srgbClr val="B3121B"/>
-          </a:solidFill>
-          <a:ln/>
-        </p:spPr>
-      </p:sp>
-      <p:sp>
-        <p:nvSpPr>
-          <p:cNvPr id="25" name="Text 23"/>
-          <p:cNvSpPr txBox="1"/>
-          <p:nvPr/>
-        </p:nvSpPr>
-        <p:spPr>
-          <a:xfrm>
-            <a:off x="1069848" y="3584448"/>
-            <a:ext cx="2770632" cy="310896"/>
-          </a:xfrm>
-          <a:prstGeom prst="rect">
-            <a:avLst/>
-          </a:prstGeom>
-          <a:noFill/>
-          <a:ln/>
-        </p:spPr>
-        <p:txBody>
-          <a:bodyPr wrap="square" lIns="0" tIns="0" rIns="0" bIns="0" rtlCol="0" anchor="ctr"/>
-          <a:lstStyle/>
-          <a:p>
-            <a:pPr indent="0" marL="0">
-              <a:buNone/>
-            </a:pPr>
-            <a:r>
-              <a:rPr lang="en-US" sz="1350" b="1" dirty="0">
-                <a:solidFill>
-                  <a:srgbClr val="16161A"/>
-                </a:solidFill>
-                <a:latin typeface="Meiryo" pitchFamily="34" charset="0"/>
-                <a:ea typeface="Meiryo" pitchFamily="34" charset="-122"/>
-                <a:cs typeface="Meiryo" pitchFamily="34" charset="-120"/>
-              </a:rPr>
-              <a:t>R1・R2  受託制作</a:t>
-            </a:r>
-            <a:endParaRPr lang="en-US" sz="1350" dirty="0"/>
-          </a:p>
-        </p:txBody>
-      </p:sp>
-      <p:sp>
-        <p:nvSpPr>
-          <p:cNvPr id="26" name="Text 24"/>
-          <p:cNvSpPr txBox="1"/>
-          <p:nvPr/>
-        </p:nvSpPr>
-        <p:spPr>
-          <a:xfrm>
-            <a:off x="1069848" y="3950208"/>
-            <a:ext cx="2770632" cy="1353312"/>
+          <p:cNvPr id="16" name="Text 13"/>
+          <p:cNvSpPr txBox="1"/>
+          <p:nvPr/>
+        </p:nvSpPr>
+        <p:spPr>
+          <a:xfrm>
+            <a:off x="914400" y="5010912"/>
+            <a:ext cx="10360152" cy="292608"/>
+          </a:xfrm>
+          <a:prstGeom prst="rect">
+            <a:avLst/>
+          </a:prstGeom>
+          <a:noFill/>
+          <a:ln/>
+        </p:spPr>
+        <p:txBody>
+          <a:bodyPr wrap="square" lIns="0" tIns="0" rIns="0" bIns="0" rtlCol="0" anchor="ctr"/>
+          <a:lstStyle/>
+          <a:p>
+            <a:pPr indent="0" marL="0">
+              <a:buNone/>
+            </a:pPr>
+            <a:r>
+              <a:rPr lang="en-US" sz="1200" b="1" dirty="0">
+                <a:solidFill>
+                  <a:srgbClr val="B3121B"/>
+                </a:solidFill>
+                <a:latin typeface="Meiryo" pitchFamily="34" charset="0"/>
+                <a:ea typeface="Meiryo" pitchFamily="34" charset="-122"/>
+                <a:cs typeface="Meiryo" pitchFamily="34" charset="-120"/>
+              </a:rPr>
+              <a:t>⚠  ただし「原価は下がったが発注価格は下がっていない」という前提には時限があります。</a:t>
+            </a:r>
+            <a:endParaRPr lang="en-US" sz="1200" dirty="0"/>
+          </a:p>
+        </p:txBody>
+      </p:sp>
+      <p:sp>
+        <p:nvSpPr>
+          <p:cNvPr id="17" name="Text 14"/>
+          <p:cNvSpPr txBox="1"/>
+          <p:nvPr/>
+        </p:nvSpPr>
+        <p:spPr>
+          <a:xfrm>
+            <a:off x="914400" y="5321808"/>
+            <a:ext cx="10360152" cy="566928"/>
           </a:xfrm>
           <a:prstGeom prst="rect">
             <a:avLst/>
@@ -17945,7 +19328,7 @@
           <a:p>
             <a:pPr indent="0" marL="0">
               <a:lnSpc>
-                <a:spcPct val="128000"/>
+                <a:spcPct val="130000"/>
               </a:lnSpc>
               <a:buNone/>
             </a:pPr>
@@ -17958,417 +19341,15 @@
                 <a:ea typeface="Meiryo" pitchFamily="34" charset="-122"/>
                 <a:cs typeface="Meiryo" pitchFamily="34" charset="-120"/>
               </a:rPr>
-              <a:t>事業会社・代理店から受注。</a:t>
+              <a:t>米国では企業動画の制作費中央値がAI導入で $4,200 → $2,500/分 に下落済み。自己サービス型ツールは1本 $1〜30。見立ては3年程度で日本にも来ます。だから受託で稼ぐ期間に内製化とプロダクトへ移します(第5章・第8章)。</a:t>
             </a:r>
             <a:endParaRPr lang="en-US" sz="1050" dirty="0"/>
           </a:p>
-          <a:p>
-            <a:pPr indent="0" marL="0">
-              <a:lnSpc>
-                <a:spcPct val="128000"/>
-              </a:lnSpc>
-              <a:buNone/>
-            </a:pPr>
-            <a:r>
-              <a:rPr lang="en-US" sz="1050" dirty="0">
-                <a:solidFill>
-                  <a:srgbClr val="3A3A42"/>
-                </a:solidFill>
-                <a:latin typeface="Meiryo" pitchFamily="34" charset="0"/>
-                <a:ea typeface="Meiryo" pitchFamily="34" charset="-122"/>
-                <a:cs typeface="Meiryo" pitchFamily="34" charset="-120"/>
-              </a:rPr>
-              <a:t>1年目は代理店の2次受けを主軸に置く。</a:t>
-            </a:r>
-            <a:endParaRPr lang="en-US" sz="1050" dirty="0"/>
-          </a:p>
-          <a:p>
-            <a:pPr indent="0" marL="0">
-              <a:lnSpc>
-                <a:spcPct val="128000"/>
-              </a:lnSpc>
-              <a:buNone/>
-            </a:pPr>
-            <a:r>
-              <a:rPr lang="en-US" sz="1050" dirty="0">
-                <a:solidFill>
-                  <a:srgbClr val="3A3A42"/>
-                </a:solidFill>
-                <a:latin typeface="Meiryo" pitchFamily="34" charset="0"/>
-                <a:ea typeface="Meiryo" pitchFamily="34" charset="-122"/>
-                <a:cs typeface="Meiryo" pitchFamily="34" charset="-120"/>
-              </a:rPr>
-              <a:t>営業1名が月12本(直販は月5本)。</a:t>
-            </a:r>
-            <a:endParaRPr lang="en-US" sz="1050" dirty="0"/>
-          </a:p>
-          <a:p>
-            <a:pPr indent="0" marL="0">
-              <a:lnSpc>
-                <a:spcPct val="128000"/>
-              </a:lnSpc>
-              <a:buNone/>
-            </a:pPr>
-            <a:r>
-              <a:rPr lang="en-US" sz="1050" dirty="0">
-                <a:solidFill>
-                  <a:srgbClr val="3A3A42"/>
-                </a:solidFill>
-                <a:latin typeface="Meiryo" pitchFamily="34" charset="0"/>
-                <a:ea typeface="Meiryo" pitchFamily="34" charset="-122"/>
-                <a:cs typeface="Meiryo" pitchFamily="34" charset="-120"/>
-              </a:rPr>
-              <a:t>リテイナー(月額)へ育てる。</a:t>
-            </a:r>
-            <a:endParaRPr lang="en-US" sz="1050" dirty="0"/>
-          </a:p>
-        </p:txBody>
-      </p:sp>
-      <p:sp>
-        <p:nvSpPr>
-          <p:cNvPr id="27" name="Shape 25"/>
-          <p:cNvSpPr/>
-          <p:nvPr/>
-        </p:nvSpPr>
-        <p:spPr>
-          <a:xfrm>
-            <a:off x="4352544" y="3401568"/>
-            <a:ext cx="3483864" cy="2084832"/>
-          </a:xfrm>
-          <a:prstGeom prst="rect">
-            <a:avLst/>
-          </a:prstGeom>
-          <a:solidFill>
-            <a:srgbClr val="F4F2EF"/>
-          </a:solidFill>
-          <a:ln/>
-        </p:spPr>
-      </p:sp>
-      <p:sp>
-        <p:nvSpPr>
-          <p:cNvPr id="28" name="Shape 26"/>
-          <p:cNvSpPr/>
-          <p:nvPr/>
-        </p:nvSpPr>
-        <p:spPr>
-          <a:xfrm>
-            <a:off x="4590288" y="3675888"/>
-            <a:ext cx="118872" cy="118872"/>
-          </a:xfrm>
-          <a:prstGeom prst="rect">
-            <a:avLst/>
-          </a:prstGeom>
-          <a:solidFill>
-            <a:srgbClr val="2A3563"/>
-          </a:solidFill>
-          <a:ln/>
-        </p:spPr>
-      </p:sp>
-      <p:sp>
-        <p:nvSpPr>
-          <p:cNvPr id="29" name="Text 27"/>
-          <p:cNvSpPr txBox="1"/>
-          <p:nvPr/>
-        </p:nvSpPr>
-        <p:spPr>
-          <a:xfrm>
-            <a:off x="4828032" y="3584448"/>
-            <a:ext cx="2770632" cy="310896"/>
-          </a:xfrm>
-          <a:prstGeom prst="rect">
-            <a:avLst/>
-          </a:prstGeom>
-          <a:noFill/>
-          <a:ln/>
-        </p:spPr>
-        <p:txBody>
-          <a:bodyPr wrap="square" lIns="0" tIns="0" rIns="0" bIns="0" rtlCol="0" anchor="ctr"/>
-          <a:lstStyle/>
-          <a:p>
-            <a:pPr indent="0" marL="0">
-              <a:buNone/>
-            </a:pPr>
-            <a:r>
-              <a:rPr lang="en-US" sz="1350" b="1" dirty="0">
-                <a:solidFill>
-                  <a:srgbClr val="16161A"/>
-                </a:solidFill>
-                <a:latin typeface="Meiryo" pitchFamily="34" charset="0"/>
-                <a:ea typeface="Meiryo" pitchFamily="34" charset="-122"/>
-                <a:cs typeface="Meiryo" pitchFamily="34" charset="-120"/>
-              </a:rPr>
-              <a:t>R3  個人向け</a:t>
-            </a:r>
-            <a:endParaRPr lang="en-US" sz="1350" dirty="0"/>
-          </a:p>
-        </p:txBody>
-      </p:sp>
-      <p:sp>
-        <p:nvSpPr>
-          <p:cNvPr id="30" name="Text 28"/>
-          <p:cNvSpPr txBox="1"/>
-          <p:nvPr/>
-        </p:nvSpPr>
-        <p:spPr>
-          <a:xfrm>
-            <a:off x="4828032" y="3950208"/>
-            <a:ext cx="2770632" cy="1353312"/>
-          </a:xfrm>
-          <a:prstGeom prst="rect">
-            <a:avLst/>
-          </a:prstGeom>
-          <a:noFill/>
-          <a:ln/>
-        </p:spPr>
-        <p:txBody>
-          <a:bodyPr wrap="square" lIns="0" tIns="0" rIns="0" bIns="0" rtlCol="0" anchor="t"/>
-          <a:lstStyle/>
-          <a:p>
-            <a:pPr indent="0" marL="0">
-              <a:lnSpc>
-                <a:spcPct val="128000"/>
-              </a:lnSpc>
-              <a:buNone/>
-            </a:pPr>
-            <a:r>
-              <a:rPr lang="en-US" sz="1050" dirty="0">
-                <a:solidFill>
-                  <a:srgbClr val="3A3A42"/>
-                </a:solidFill>
-                <a:latin typeface="Meiryo" pitchFamily="34" charset="0"/>
-                <a:ea typeface="Meiryo" pitchFamily="34" charset="-122"/>
-                <a:cs typeface="Meiryo" pitchFamily="34" charset="-120"/>
-              </a:rPr>
-              <a:t>ウエディング・終活など。</a:t>
-            </a:r>
-            <a:endParaRPr lang="en-US" sz="1050" dirty="0"/>
-          </a:p>
-          <a:p>
-            <a:pPr indent="0" marL="0">
-              <a:lnSpc>
-                <a:spcPct val="128000"/>
-              </a:lnSpc>
-              <a:buNone/>
-            </a:pPr>
-            <a:r>
-              <a:rPr lang="en-US" sz="1050" dirty="0">
-                <a:solidFill>
-                  <a:srgbClr val="3A3A42"/>
-                </a:solidFill>
-                <a:latin typeface="Meiryo" pitchFamily="34" charset="0"/>
-                <a:ea typeface="Meiryo" pitchFamily="34" charset="-122"/>
-                <a:cs typeface="Meiryo" pitchFamily="34" charset="-120"/>
-              </a:rPr>
-              <a:t>単価は低いが件数とデータが取れる。</a:t>
-            </a:r>
-            <a:endParaRPr lang="en-US" sz="1050" dirty="0"/>
-          </a:p>
-          <a:p>
-            <a:pPr indent="0" marL="0">
-              <a:lnSpc>
-                <a:spcPct val="128000"/>
-              </a:lnSpc>
-              <a:buNone/>
-            </a:pPr>
-            <a:r>
-              <a:rPr lang="en-US" sz="1050" dirty="0">
-                <a:solidFill>
-                  <a:srgbClr val="3A3A42"/>
-                </a:solidFill>
-                <a:latin typeface="Meiryo" pitchFamily="34" charset="0"/>
-                <a:ea typeface="Meiryo" pitchFamily="34" charset="-122"/>
-                <a:cs typeface="Meiryo" pitchFamily="34" charset="-120"/>
-              </a:rPr>
-              <a:t>2年目から。</a:t>
-            </a:r>
-            <a:endParaRPr lang="en-US" sz="1050" dirty="0"/>
-          </a:p>
-        </p:txBody>
-      </p:sp>
-      <p:sp>
-        <p:nvSpPr>
-          <p:cNvPr id="31" name="Shape 29"/>
-          <p:cNvSpPr/>
-          <p:nvPr/>
-        </p:nvSpPr>
-        <p:spPr>
-          <a:xfrm>
-            <a:off x="8110728" y="3401568"/>
-            <a:ext cx="3483864" cy="2084832"/>
-          </a:xfrm>
-          <a:prstGeom prst="rect">
-            <a:avLst/>
-          </a:prstGeom>
-          <a:solidFill>
-            <a:srgbClr val="F4F2EF"/>
-          </a:solidFill>
-          <a:ln/>
-        </p:spPr>
-      </p:sp>
-      <p:sp>
-        <p:nvSpPr>
-          <p:cNvPr id="32" name="Shape 30"/>
-          <p:cNvSpPr/>
-          <p:nvPr/>
-        </p:nvSpPr>
-        <p:spPr>
-          <a:xfrm>
-            <a:off x="8348472" y="3675888"/>
-            <a:ext cx="118872" cy="118872"/>
-          </a:xfrm>
-          <a:prstGeom prst="rect">
-            <a:avLst/>
-          </a:prstGeom>
-          <a:solidFill>
-            <a:srgbClr val="C9962C"/>
-          </a:solidFill>
-          <a:ln/>
-        </p:spPr>
-      </p:sp>
-      <p:sp>
-        <p:nvSpPr>
-          <p:cNvPr id="33" name="Text 31"/>
-          <p:cNvSpPr txBox="1"/>
-          <p:nvPr/>
-        </p:nvSpPr>
-        <p:spPr>
-          <a:xfrm>
-            <a:off x="8586216" y="3584448"/>
-            <a:ext cx="2770632" cy="310896"/>
-          </a:xfrm>
-          <a:prstGeom prst="rect">
-            <a:avLst/>
-          </a:prstGeom>
-          <a:noFill/>
-          <a:ln/>
-        </p:spPr>
-        <p:txBody>
-          <a:bodyPr wrap="square" lIns="0" tIns="0" rIns="0" bIns="0" rtlCol="0" anchor="ctr"/>
-          <a:lstStyle/>
-          <a:p>
-            <a:pPr indent="0" marL="0">
-              <a:buNone/>
-            </a:pPr>
-            <a:r>
-              <a:rPr lang="en-US" sz="1350" b="1" dirty="0">
-                <a:solidFill>
-                  <a:srgbClr val="16161A"/>
-                </a:solidFill>
-                <a:latin typeface="Meiryo" pitchFamily="34" charset="0"/>
-                <a:ea typeface="Meiryo" pitchFamily="34" charset="-122"/>
-                <a:cs typeface="Meiryo" pitchFamily="34" charset="-120"/>
-              </a:rPr>
-              <a:t>R4  プロダクト外販</a:t>
-            </a:r>
-            <a:endParaRPr lang="en-US" sz="1350" dirty="0"/>
-          </a:p>
-        </p:txBody>
-      </p:sp>
-      <p:sp>
-        <p:nvSpPr>
-          <p:cNvPr id="34" name="Text 32"/>
-          <p:cNvSpPr txBox="1"/>
-          <p:nvPr/>
-        </p:nvSpPr>
-        <p:spPr>
-          <a:xfrm>
-            <a:off x="8586216" y="3950208"/>
-            <a:ext cx="2770632" cy="1353312"/>
-          </a:xfrm>
-          <a:prstGeom prst="rect">
-            <a:avLst/>
-          </a:prstGeom>
-          <a:noFill/>
-          <a:ln/>
-        </p:spPr>
-        <p:txBody>
-          <a:bodyPr wrap="square" lIns="0" tIns="0" rIns="0" bIns="0" rtlCol="0" anchor="t"/>
-          <a:lstStyle/>
-          <a:p>
-            <a:pPr indent="0" marL="0">
-              <a:lnSpc>
-                <a:spcPct val="128000"/>
-              </a:lnSpc>
-              <a:buNone/>
-            </a:pPr>
-            <a:r>
-              <a:rPr lang="en-US" sz="1050" dirty="0">
-                <a:solidFill>
-                  <a:srgbClr val="3A3A42"/>
-                </a:solidFill>
-                <a:latin typeface="Meiryo" pitchFamily="34" charset="0"/>
-                <a:ea typeface="Meiryo" pitchFamily="34" charset="-122"/>
-                <a:cs typeface="Meiryo" pitchFamily="34" charset="-120"/>
-              </a:rPr>
-              <a:t>蓄積データで作ったツールを外販。</a:t>
-            </a:r>
-            <a:endParaRPr lang="en-US" sz="1050" dirty="0"/>
-          </a:p>
-          <a:p>
-            <a:pPr indent="0" marL="0">
-              <a:lnSpc>
-                <a:spcPct val="128000"/>
-              </a:lnSpc>
-              <a:buNone/>
-            </a:pPr>
-            <a:r>
-              <a:rPr lang="en-US" sz="1050" dirty="0">
-                <a:solidFill>
-                  <a:srgbClr val="3A3A42"/>
-                </a:solidFill>
-                <a:latin typeface="Meiryo" pitchFamily="34" charset="0"/>
-                <a:ea typeface="Meiryo" pitchFamily="34" charset="-122"/>
-                <a:cs typeface="Meiryo" pitchFamily="34" charset="-120"/>
-              </a:rPr>
-              <a:t>粗利率80%以上、人数に比例しない。</a:t>
-            </a:r>
-            <a:endParaRPr lang="en-US" sz="1050" dirty="0"/>
-          </a:p>
-          <a:p>
-            <a:pPr indent="0" marL="0">
-              <a:lnSpc>
-                <a:spcPct val="128000"/>
-              </a:lnSpc>
-              <a:buNone/>
-            </a:pPr>
-            <a:r>
-              <a:rPr lang="en-US" sz="1050" dirty="0">
-                <a:solidFill>
-                  <a:srgbClr val="3A3A42"/>
-                </a:solidFill>
-                <a:latin typeface="Meiryo" pitchFamily="34" charset="0"/>
-                <a:ea typeface="Meiryo" pitchFamily="34" charset="-122"/>
-                <a:cs typeface="Meiryo" pitchFamily="34" charset="-120"/>
-              </a:rPr>
-              <a:t>上場に必要な「読める収益」はここ。</a:t>
-            </a:r>
-            <a:endParaRPr lang="en-US" sz="1050" dirty="0"/>
-          </a:p>
-          <a:p>
-            <a:pPr indent="0" marL="0">
-              <a:lnSpc>
-                <a:spcPct val="128000"/>
-              </a:lnSpc>
-              <a:buNone/>
-            </a:pPr>
-            <a:r>
-              <a:rPr lang="en-US" sz="1050" dirty="0">
-                <a:solidFill>
-                  <a:srgbClr val="3A3A42"/>
-                </a:solidFill>
-                <a:latin typeface="Meiryo" pitchFamily="34" charset="0"/>
-                <a:ea typeface="Meiryo" pitchFamily="34" charset="-122"/>
-                <a:cs typeface="Meiryo" pitchFamily="34" charset="-120"/>
-              </a:rPr>
-              <a:t>3年目から。</a:t>
-            </a:r>
-            <a:endParaRPr lang="en-US" sz="1050" dirty="0"/>
-          </a:p>
-        </p:txBody>
-      </p:sp>
-      <p:sp>
-        <p:nvSpPr>
-          <p:cNvPr id="35" name="Text 33"/>
+        </p:txBody>
+      </p:sp>
+      <p:sp>
+        <p:nvSpPr>
+          <p:cNvPr id="18" name="Text 15"/>
           <p:cNvSpPr txBox="1"/>
           <p:nvPr/>
         </p:nvSpPr>
@@ -18399,7 +19380,7 @@
                 <a:ea typeface="Meiryo" pitchFamily="34" charset="-122"/>
                 <a:cs typeface="Meiryo" pitchFamily="34" charset="-120"/>
               </a:rPr>
-              <a:t>収益ラインの詳細は MARKET_SIZING / 中国側の調達設計は CHINA_SOURCING を参照</a:t>
+              <a:t>出所: サイバーエージェント 国内動画広告の市場調査 / Vidico・agent-media(米国相場)。SAM・SOMは [仮置き]</a:t>
             </a:r>
             <a:endParaRPr lang="en-US" sz="850" dirty="0"/>
           </a:p>
@@ -18407,7 +19388,7 @@
       </p:sp>
       <p:sp>
         <p:nvSpPr>
-          <p:cNvPr id="36" name="Text 34"/>
+          <p:cNvPr id="19" name="Text 16"/>
           <p:cNvSpPr txBox="1"/>
           <p:nvPr/>
         </p:nvSpPr>
@@ -18529,7 +19510,7 @@
                 <a:ea typeface="Meiryo" pitchFamily="34" charset="-122"/>
                 <a:cs typeface="Meiryo" pitchFamily="34" charset="-120"/>
               </a:rPr>
-              <a:t>2</a:t>
+              <a:t>3</a:t>
             </a:r>
             <a:endParaRPr lang="en-US" sz="1700" dirty="0"/>
           </a:p>
@@ -18568,7 +19549,7 @@
                 <a:ea typeface="Meiryo" pitchFamily="34" charset="-122"/>
                 <a:cs typeface="Meiryo" pitchFamily="34" charset="-120"/>
               </a:rPr>
-              <a:t>ユニットエコノミクス</a:t>
+              <a:t>ビジネスモデル</a:t>
             </a:r>
             <a:endParaRPr lang="en-US" sz="2700" dirty="0"/>
           </a:p>
@@ -18607,38 +19588,81 @@
                 <a:ea typeface="Meiryo" pitchFamily="34" charset="-122"/>
                 <a:cs typeface="Meiryo" pitchFamily="34" charset="-120"/>
               </a:rPr>
-              <a:t>1本あたりの内訳と、損益分岐に必要な本数</a:t>
+              <a:t>3つの軸で構成します。②が現在の主軸、①が売上の初速、③が企業価値の源泉です</a:t>
             </a:r>
             <a:endParaRPr lang="en-US" sz="1250" dirty="0"/>
           </a:p>
         </p:txBody>
       </p:sp>
-      <p:graphicFrame>
-        <p:nvGraphicFramePr>
-          <p:cNvPr id="6" name="Chart 0" descr=""/>
-          <p:cNvGraphicFramePr/>
-          <p:nvPr/>
-        </p:nvGraphicFramePr>
-        <p:xfrm>
-          <a:off x="594360" y="1572768"/>
-          <a:ext cx="5760720" cy="3794760"/>
-        </p:xfrm>
-        <a:graphic xmlns:a="http://schemas.openxmlformats.org/drawingml/2006/main">
-          <a:graphicData uri="http://schemas.openxmlformats.org/drawingml/2006/chart">
-            <c:chart xmlns:c="http://schemas.openxmlformats.org/drawingml/2006/chart" r:id="rId1"/>
-          </a:graphicData>
-        </a:graphic>
-      </p:graphicFrame>
-      <p:sp>
-        <p:nvSpPr>
-          <p:cNvPr id="7" name="Shape 4"/>
+      <p:sp>
+        <p:nvSpPr>
+          <p:cNvPr id="6" name="Shape 4"/>
           <p:cNvSpPr/>
           <p:nvPr/>
         </p:nvSpPr>
         <p:spPr>
           <a:xfrm>
-            <a:off x="6675120" y="1572768"/>
-            <a:ext cx="4919472" cy="1371600"/>
+            <a:off x="594360" y="1572768"/>
+            <a:ext cx="420624" cy="932688"/>
+          </a:xfrm>
+          <a:prstGeom prst="rect">
+            <a:avLst/>
+          </a:prstGeom>
+          <a:solidFill>
+            <a:srgbClr val="2A3563"/>
+          </a:solidFill>
+          <a:ln/>
+        </p:spPr>
+      </p:sp>
+      <p:sp>
+        <p:nvSpPr>
+          <p:cNvPr id="7" name="Text 5"/>
+          <p:cNvSpPr txBox="1"/>
+          <p:nvPr/>
+        </p:nvSpPr>
+        <p:spPr>
+          <a:xfrm>
+            <a:off x="594360" y="1572768"/>
+            <a:ext cx="420624" cy="932688"/>
+          </a:xfrm>
+          <a:prstGeom prst="rect">
+            <a:avLst/>
+          </a:prstGeom>
+          <a:noFill/>
+          <a:ln/>
+        </p:spPr>
+        <p:txBody>
+          <a:bodyPr wrap="square" lIns="0" tIns="0" rIns="0" bIns="0" rtlCol="0" anchor="ctr"/>
+          <a:lstStyle/>
+          <a:p>
+            <a:pPr algn="ctr" indent="0" marL="0">
+              <a:buNone/>
+            </a:pPr>
+            <a:r>
+              <a:rPr lang="en-US" sz="1100" b="1" dirty="0">
+                <a:solidFill>
+                  <a:srgbClr val="FFFFFF"/>
+                </a:solidFill>
+                <a:latin typeface="Meiryo" pitchFamily="34" charset="0"/>
+                <a:ea typeface="Meiryo" pitchFamily="34" charset="-122"/>
+                <a:cs typeface="Meiryo" pitchFamily="34" charset="-120"/>
+              </a:rPr>
+              <a:t>軸①</a:t>
+            </a:r>
+            <a:endParaRPr lang="en-US" sz="1100" dirty="0"/>
+          </a:p>
+        </p:txBody>
+      </p:sp>
+      <p:sp>
+        <p:nvSpPr>
+          <p:cNvPr id="8" name="Shape 6"/>
+          <p:cNvSpPr/>
+          <p:nvPr/>
+        </p:nvSpPr>
+        <p:spPr>
+          <a:xfrm>
+            <a:off x="1124712" y="1572768"/>
+            <a:ext cx="10469880" cy="932688"/>
           </a:xfrm>
           <a:prstGeom prst="rect">
             <a:avLst/>
@@ -18651,30 +19675,481 @@
       </p:sp>
       <p:sp>
         <p:nvSpPr>
-          <p:cNvPr id="8" name="Text 5"/>
-          <p:cNvSpPr txBox="1"/>
-          <p:nvPr/>
-        </p:nvSpPr>
-        <p:spPr>
-          <a:xfrm>
-            <a:off x="6931152" y="1773936"/>
-            <a:ext cx="4407408" cy="658368"/>
-          </a:xfrm>
-          <a:prstGeom prst="rect">
-            <a:avLst/>
-          </a:prstGeom>
-          <a:noFill/>
-          <a:ln/>
-        </p:spPr>
-        <p:txBody>
-          <a:bodyPr wrap="square" lIns="0" tIns="0" rIns="0" bIns="0" rtlCol="0" anchor="ctr"/>
-          <a:lstStyle/>
-          <a:p>
-            <a:pPr indent="0" marL="0">
-              <a:buNone/>
-            </a:pPr>
-            <a:r>
-              <a:rPr lang="en-US" sz="3000" b="1" dirty="0">
+          <p:cNvPr id="9" name="Text 7"/>
+          <p:cNvSpPr txBox="1"/>
+          <p:nvPr/>
+        </p:nvSpPr>
+        <p:spPr>
+          <a:xfrm>
+            <a:off x="1380744" y="1737360"/>
+            <a:ext cx="2743200" cy="274320"/>
+          </a:xfrm>
+          <a:prstGeom prst="rect">
+            <a:avLst/>
+          </a:prstGeom>
+          <a:noFill/>
+          <a:ln/>
+        </p:spPr>
+        <p:txBody>
+          <a:bodyPr wrap="square" lIns="0" tIns="0" rIns="0" bIns="0" rtlCol="0" anchor="ctr"/>
+          <a:lstStyle/>
+          <a:p>
+            <a:pPr indent="0" marL="0">
+              <a:buNone/>
+            </a:pPr>
+            <a:r>
+              <a:rPr lang="en-US" sz="1150" b="1" dirty="0">
+                <a:solidFill>
+                  <a:srgbClr val="16161A"/>
+                </a:solidFill>
+                <a:latin typeface="Meiryo" pitchFamily="34" charset="0"/>
+                <a:ea typeface="Meiryo" pitchFamily="34" charset="-122"/>
+                <a:cs typeface="Meiryo" pitchFamily="34" charset="-120"/>
+              </a:rPr>
+              <a:t>中国の完成作品</a:t>
+            </a:r>
+            <a:endParaRPr lang="en-US" sz="1150" dirty="0"/>
+          </a:p>
+        </p:txBody>
+      </p:sp>
+      <p:sp>
+        <p:nvSpPr>
+          <p:cNvPr id="10" name="Text 8"/>
+          <p:cNvSpPr txBox="1"/>
+          <p:nvPr/>
+        </p:nvSpPr>
+        <p:spPr>
+          <a:xfrm>
+            <a:off x="1380744" y="2029968"/>
+            <a:ext cx="2743200" cy="310896"/>
+          </a:xfrm>
+          <a:prstGeom prst="rect">
+            <a:avLst/>
+          </a:prstGeom>
+          <a:noFill/>
+          <a:ln/>
+        </p:spPr>
+        <p:txBody>
+          <a:bodyPr wrap="square" lIns="0" tIns="0" rIns="0" bIns="0" rtlCol="0" anchor="ctr"/>
+          <a:lstStyle/>
+          <a:p>
+            <a:pPr indent="0" marL="0">
+              <a:lnSpc>
+                <a:spcPct val="115000"/>
+              </a:lnSpc>
+              <a:buNone/>
+            </a:pPr>
+            <a:r>
+              <a:rPr lang="en-US" sz="880" dirty="0">
+                <a:solidFill>
+                  <a:srgbClr val="6E6E76"/>
+                </a:solidFill>
+                <a:latin typeface="Meiryo" pitchFamily="34" charset="0"/>
+                <a:ea typeface="Meiryo" pitchFamily="34" charset="-122"/>
+                <a:cs typeface="Meiryo" pitchFamily="34" charset="-120"/>
+              </a:rPr>
+              <a:t>短劇・アニメ・PR映像</a:t>
+            </a:r>
+            <a:endParaRPr lang="en-US" sz="880" dirty="0"/>
+          </a:p>
+        </p:txBody>
+      </p:sp>
+      <p:sp>
+        <p:nvSpPr>
+          <p:cNvPr id="11" name="Text 9"/>
+          <p:cNvSpPr txBox="1"/>
+          <p:nvPr/>
+        </p:nvSpPr>
+        <p:spPr>
+          <a:xfrm>
+            <a:off x="4818888" y="1737360"/>
+            <a:ext cx="3200400" cy="274320"/>
+          </a:xfrm>
+          <a:prstGeom prst="rect">
+            <a:avLst/>
+          </a:prstGeom>
+          <a:noFill/>
+          <a:ln/>
+        </p:spPr>
+        <p:txBody>
+          <a:bodyPr wrap="square" lIns="0" tIns="0" rIns="0" bIns="0" rtlCol="0" anchor="ctr"/>
+          <a:lstStyle/>
+          <a:p>
+            <a:pPr indent="0" marL="0">
+              <a:buNone/>
+            </a:pPr>
+            <a:r>
+              <a:rPr lang="en-US" sz="1150" b="1" dirty="0">
+                <a:solidFill>
+                  <a:srgbClr val="2A3563"/>
+                </a:solidFill>
+                <a:latin typeface="Meiryo" pitchFamily="34" charset="0"/>
+                <a:ea typeface="Meiryo" pitchFamily="34" charset="-122"/>
+                <a:cs typeface="Meiryo" pitchFamily="34" charset="-120"/>
+              </a:rPr>
+              <a:t>日本語化して販売</a:t>
+            </a:r>
+            <a:endParaRPr lang="en-US" sz="1150" dirty="0"/>
+          </a:p>
+        </p:txBody>
+      </p:sp>
+      <p:sp>
+        <p:nvSpPr>
+          <p:cNvPr id="12" name="Text 10"/>
+          <p:cNvSpPr txBox="1"/>
+          <p:nvPr/>
+        </p:nvSpPr>
+        <p:spPr>
+          <a:xfrm>
+            <a:off x="4818888" y="2029968"/>
+            <a:ext cx="3200400" cy="310896"/>
+          </a:xfrm>
+          <a:prstGeom prst="rect">
+            <a:avLst/>
+          </a:prstGeom>
+          <a:noFill/>
+          <a:ln/>
+        </p:spPr>
+        <p:txBody>
+          <a:bodyPr wrap="square" lIns="0" tIns="0" rIns="0" bIns="0" rtlCol="0" anchor="ctr"/>
+          <a:lstStyle/>
+          <a:p>
+            <a:pPr indent="0" marL="0">
+              <a:lnSpc>
+                <a:spcPct val="115000"/>
+              </a:lnSpc>
+              <a:buNone/>
+            </a:pPr>
+            <a:r>
+              <a:rPr lang="en-US" sz="880" dirty="0">
+                <a:solidFill>
+                  <a:srgbClr val="6E6E76"/>
+                </a:solidFill>
+                <a:latin typeface="Meiryo" pitchFamily="34" charset="0"/>
+                <a:ea typeface="Meiryo" pitchFamily="34" charset="-122"/>
+                <a:cs typeface="Meiryo" pitchFamily="34" charset="-120"/>
+              </a:rPr>
+              <a:t>翻訳・吹替・編集・権利処理・考査対応</a:t>
+            </a:r>
+            <a:endParaRPr lang="en-US" sz="880" dirty="0"/>
+          </a:p>
+        </p:txBody>
+      </p:sp>
+      <p:sp>
+        <p:nvSpPr>
+          <p:cNvPr id="13" name="Text 11"/>
+          <p:cNvSpPr txBox="1"/>
+          <p:nvPr/>
+        </p:nvSpPr>
+        <p:spPr>
+          <a:xfrm>
+            <a:off x="8732520" y="1737360"/>
+            <a:ext cx="2651760" cy="274320"/>
+          </a:xfrm>
+          <a:prstGeom prst="rect">
+            <a:avLst/>
+          </a:prstGeom>
+          <a:noFill/>
+          <a:ln/>
+        </p:spPr>
+        <p:txBody>
+          <a:bodyPr wrap="square" lIns="0" tIns="0" rIns="0" bIns="0" rtlCol="0" anchor="ctr"/>
+          <a:lstStyle/>
+          <a:p>
+            <a:pPr indent="0" marL="0">
+              <a:buNone/>
+            </a:pPr>
+            <a:r>
+              <a:rPr lang="en-US" sz="1150" b="1" dirty="0">
+                <a:solidFill>
+                  <a:srgbClr val="16161A"/>
+                </a:solidFill>
+                <a:latin typeface="Meiryo" pitchFamily="34" charset="0"/>
+                <a:ea typeface="Meiryo" pitchFamily="34" charset="-122"/>
+                <a:cs typeface="Meiryo" pitchFamily="34" charset="-120"/>
+              </a:rPr>
+              <a:t>日本の配信・放送・企業</a:t>
+            </a:r>
+            <a:endParaRPr lang="en-US" sz="1150" dirty="0"/>
+          </a:p>
+        </p:txBody>
+      </p:sp>
+      <p:sp>
+        <p:nvSpPr>
+          <p:cNvPr id="14" name="Text 12"/>
+          <p:cNvSpPr txBox="1"/>
+          <p:nvPr/>
+        </p:nvSpPr>
+        <p:spPr>
+          <a:xfrm>
+            <a:off x="8732520" y="2029968"/>
+            <a:ext cx="2651760" cy="310896"/>
+          </a:xfrm>
+          <a:prstGeom prst="rect">
+            <a:avLst/>
+          </a:prstGeom>
+          <a:noFill/>
+          <a:ln/>
+        </p:spPr>
+        <p:txBody>
+          <a:bodyPr wrap="square" lIns="0" tIns="0" rIns="0" bIns="0" rtlCol="0" anchor="ctr"/>
+          <a:lstStyle/>
+          <a:p>
+            <a:pPr indent="0" marL="0">
+              <a:lnSpc>
+                <a:spcPct val="115000"/>
+              </a:lnSpc>
+              <a:buNone/>
+            </a:pPr>
+            <a:r>
+              <a:rPr lang="en-US" sz="880" dirty="0">
+                <a:solidFill>
+                  <a:srgbClr val="6E6E76"/>
+                </a:solidFill>
+                <a:latin typeface="Meiryo" pitchFamily="34" charset="0"/>
+                <a:ea typeface="Meiryo" pitchFamily="34" charset="-122"/>
+                <a:cs typeface="Meiryo" pitchFamily="34" charset="-120"/>
+              </a:rPr>
+              <a:t>ライセンス販売</a:t>
+            </a:r>
+            <a:endParaRPr lang="en-US" sz="880" dirty="0"/>
+          </a:p>
+        </p:txBody>
+      </p:sp>
+      <p:sp>
+        <p:nvSpPr>
+          <p:cNvPr id="15" name="Shape 13"/>
+          <p:cNvSpPr/>
+          <p:nvPr/>
+        </p:nvSpPr>
+        <p:spPr>
+          <a:xfrm>
+            <a:off x="4306824" y="2039112"/>
+            <a:ext cx="384048" cy="0"/>
+          </a:xfrm>
+          <a:prstGeom prst="line">
+            <a:avLst/>
+          </a:prstGeom>
+          <a:noFill/>
+          <a:ln w="22225">
+            <a:solidFill>
+              <a:srgbClr val="6E6E76"/>
+            </a:solidFill>
+            <a:prstDash val="solid"/>
+            <a:tailEnd type="triangle"/>
+          </a:ln>
+        </p:spPr>
+      </p:sp>
+      <p:sp>
+        <p:nvSpPr>
+          <p:cNvPr id="16" name="Shape 14"/>
+          <p:cNvSpPr/>
+          <p:nvPr/>
+        </p:nvSpPr>
+        <p:spPr>
+          <a:xfrm>
+            <a:off x="8220456" y="2039112"/>
+            <a:ext cx="384048" cy="0"/>
+          </a:xfrm>
+          <a:prstGeom prst="line">
+            <a:avLst/>
+          </a:prstGeom>
+          <a:noFill/>
+          <a:ln w="22225">
+            <a:solidFill>
+              <a:srgbClr val="6E6E76"/>
+            </a:solidFill>
+            <a:prstDash val="solid"/>
+            <a:tailEnd type="triangle"/>
+          </a:ln>
+        </p:spPr>
+      </p:sp>
+      <p:sp>
+        <p:nvSpPr>
+          <p:cNvPr id="17" name="Shape 15"/>
+          <p:cNvSpPr/>
+          <p:nvPr/>
+        </p:nvSpPr>
+        <p:spPr>
+          <a:xfrm>
+            <a:off x="594360" y="2633472"/>
+            <a:ext cx="420624" cy="932688"/>
+          </a:xfrm>
+          <a:prstGeom prst="rect">
+            <a:avLst/>
+          </a:prstGeom>
+          <a:solidFill>
+            <a:srgbClr val="B3121B"/>
+          </a:solidFill>
+          <a:ln/>
+        </p:spPr>
+      </p:sp>
+      <p:sp>
+        <p:nvSpPr>
+          <p:cNvPr id="18" name="Text 16"/>
+          <p:cNvSpPr txBox="1"/>
+          <p:nvPr/>
+        </p:nvSpPr>
+        <p:spPr>
+          <a:xfrm>
+            <a:off x="594360" y="2633472"/>
+            <a:ext cx="420624" cy="932688"/>
+          </a:xfrm>
+          <a:prstGeom prst="rect">
+            <a:avLst/>
+          </a:prstGeom>
+          <a:noFill/>
+          <a:ln/>
+        </p:spPr>
+        <p:txBody>
+          <a:bodyPr wrap="square" lIns="0" tIns="0" rIns="0" bIns="0" rtlCol="0" anchor="ctr"/>
+          <a:lstStyle/>
+          <a:p>
+            <a:pPr algn="ctr" indent="0" marL="0">
+              <a:buNone/>
+            </a:pPr>
+            <a:r>
+              <a:rPr lang="en-US" sz="1100" b="1" dirty="0">
+                <a:solidFill>
+                  <a:srgbClr val="FFFFFF"/>
+                </a:solidFill>
+                <a:latin typeface="Meiryo" pitchFamily="34" charset="0"/>
+                <a:ea typeface="Meiryo" pitchFamily="34" charset="-122"/>
+                <a:cs typeface="Meiryo" pitchFamily="34" charset="-120"/>
+              </a:rPr>
+              <a:t>軸②</a:t>
+            </a:r>
+            <a:endParaRPr lang="en-US" sz="1100" dirty="0"/>
+          </a:p>
+        </p:txBody>
+      </p:sp>
+      <p:sp>
+        <p:nvSpPr>
+          <p:cNvPr id="19" name="Shape 17"/>
+          <p:cNvSpPr/>
+          <p:nvPr/>
+        </p:nvSpPr>
+        <p:spPr>
+          <a:xfrm>
+            <a:off x="1124712" y="2633472"/>
+            <a:ext cx="10469880" cy="932688"/>
+          </a:xfrm>
+          <a:prstGeom prst="rect">
+            <a:avLst/>
+          </a:prstGeom>
+          <a:solidFill>
+            <a:srgbClr val="EAE7E2"/>
+          </a:solidFill>
+          <a:ln/>
+        </p:spPr>
+      </p:sp>
+      <p:sp>
+        <p:nvSpPr>
+          <p:cNvPr id="20" name="Text 18"/>
+          <p:cNvSpPr txBox="1"/>
+          <p:nvPr/>
+        </p:nvSpPr>
+        <p:spPr>
+          <a:xfrm>
+            <a:off x="1380744" y="2798064"/>
+            <a:ext cx="2743200" cy="274320"/>
+          </a:xfrm>
+          <a:prstGeom prst="rect">
+            <a:avLst/>
+          </a:prstGeom>
+          <a:noFill/>
+          <a:ln/>
+        </p:spPr>
+        <p:txBody>
+          <a:bodyPr wrap="square" lIns="0" tIns="0" rIns="0" bIns="0" rtlCol="0" anchor="ctr"/>
+          <a:lstStyle/>
+          <a:p>
+            <a:pPr indent="0" marL="0">
+              <a:buNone/>
+            </a:pPr>
+            <a:r>
+              <a:rPr lang="en-US" sz="1150" b="1" dirty="0">
+                <a:solidFill>
+                  <a:srgbClr val="16161A"/>
+                </a:solidFill>
+                <a:latin typeface="Meiryo" pitchFamily="34" charset="0"/>
+                <a:ea typeface="Meiryo" pitchFamily="34" charset="-122"/>
+                <a:cs typeface="Meiryo" pitchFamily="34" charset="-120"/>
+              </a:rPr>
+              <a:t>日本の発注者</a:t>
+            </a:r>
+            <a:endParaRPr lang="en-US" sz="1150" dirty="0"/>
+          </a:p>
+        </p:txBody>
+      </p:sp>
+      <p:sp>
+        <p:nvSpPr>
+          <p:cNvPr id="21" name="Text 19"/>
+          <p:cNvSpPr txBox="1"/>
+          <p:nvPr/>
+        </p:nvSpPr>
+        <p:spPr>
+          <a:xfrm>
+            <a:off x="1380744" y="3090672"/>
+            <a:ext cx="2743200" cy="310896"/>
+          </a:xfrm>
+          <a:prstGeom prst="rect">
+            <a:avLst/>
+          </a:prstGeom>
+          <a:noFill/>
+          <a:ln/>
+        </p:spPr>
+        <p:txBody>
+          <a:bodyPr wrap="square" lIns="0" tIns="0" rIns="0" bIns="0" rtlCol="0" anchor="ctr"/>
+          <a:lstStyle/>
+          <a:p>
+            <a:pPr indent="0" marL="0">
+              <a:lnSpc>
+                <a:spcPct val="115000"/>
+              </a:lnSpc>
+              <a:buNone/>
+            </a:pPr>
+            <a:r>
+              <a:rPr lang="en-US" sz="880" dirty="0">
+                <a:solidFill>
+                  <a:srgbClr val="6E6E76"/>
+                </a:solidFill>
+                <a:latin typeface="Meiryo" pitchFamily="34" charset="0"/>
+                <a:ea typeface="Meiryo" pitchFamily="34" charset="-122"/>
+                <a:cs typeface="Meiryo" pitchFamily="34" charset="-120"/>
+              </a:rPr>
+              <a:t>事業会社・広告代理店・制作会社(2次受け)</a:t>
+            </a:r>
+            <a:endParaRPr lang="en-US" sz="880" dirty="0"/>
+          </a:p>
+        </p:txBody>
+      </p:sp>
+      <p:sp>
+        <p:nvSpPr>
+          <p:cNvPr id="22" name="Text 20"/>
+          <p:cNvSpPr txBox="1"/>
+          <p:nvPr/>
+        </p:nvSpPr>
+        <p:spPr>
+          <a:xfrm>
+            <a:off x="4818888" y="2798064"/>
+            <a:ext cx="3200400" cy="274320"/>
+          </a:xfrm>
+          <a:prstGeom prst="rect">
+            <a:avLst/>
+          </a:prstGeom>
+          <a:noFill/>
+          <a:ln/>
+        </p:spPr>
+        <p:txBody>
+          <a:bodyPr wrap="square" lIns="0" tIns="0" rIns="0" bIns="0" rtlCol="0" anchor="ctr"/>
+          <a:lstStyle/>
+          <a:p>
+            <a:pPr indent="0" marL="0">
+              <a:buNone/>
+            </a:pPr>
+            <a:r>
+              <a:rPr lang="en-US" sz="1150" b="1" dirty="0">
                 <a:solidFill>
                   <a:srgbClr val="B3121B"/>
                 </a:solidFill>
@@ -18682,22 +20157,64 @@
                 <a:ea typeface="Meiryo" pitchFamily="34" charset="-122"/>
                 <a:cs typeface="Meiryo" pitchFamily="34" charset="-120"/>
               </a:rPr>
-              <a:t>54.2%</a:t>
-            </a:r>
-            <a:endParaRPr lang="en-US" sz="3000" dirty="0"/>
-          </a:p>
-        </p:txBody>
-      </p:sp>
-      <p:sp>
-        <p:nvSpPr>
-          <p:cNvPr id="9" name="Text 6"/>
-          <p:cNvSpPr txBox="1"/>
-          <p:nvPr/>
-        </p:nvSpPr>
-        <p:spPr>
-          <a:xfrm>
-            <a:off x="6931152" y="2450592"/>
-            <a:ext cx="4407408" cy="274320"/>
+              <a:t>受注制作</a:t>
+            </a:r>
+            <a:endParaRPr lang="en-US" sz="1150" dirty="0"/>
+          </a:p>
+        </p:txBody>
+      </p:sp>
+      <p:sp>
+        <p:nvSpPr>
+          <p:cNvPr id="23" name="Text 21"/>
+          <p:cNvSpPr txBox="1"/>
+          <p:nvPr/>
+        </p:nvSpPr>
+        <p:spPr>
+          <a:xfrm>
+            <a:off x="4818888" y="3090672"/>
+            <a:ext cx="3200400" cy="310896"/>
+          </a:xfrm>
+          <a:prstGeom prst="rect">
+            <a:avLst/>
+          </a:prstGeom>
+          <a:noFill/>
+          <a:ln/>
+        </p:spPr>
+        <p:txBody>
+          <a:bodyPr wrap="square" lIns="0" tIns="0" rIns="0" bIns="0" rtlCol="0" anchor="ctr"/>
+          <a:lstStyle/>
+          <a:p>
+            <a:pPr indent="0" marL="0">
+              <a:lnSpc>
+                <a:spcPct val="115000"/>
+              </a:lnSpc>
+              <a:buNone/>
+            </a:pPr>
+            <a:r>
+              <a:rPr lang="en-US" sz="880" dirty="0">
+                <a:solidFill>
+                  <a:srgbClr val="6E6E76"/>
+                </a:solidFill>
+                <a:latin typeface="Meiryo" pitchFamily="34" charset="0"/>
+                <a:ea typeface="Meiryo" pitchFamily="34" charset="-122"/>
+                <a:cs typeface="Meiryo" pitchFamily="34" charset="-120"/>
+              </a:rPr>
+              <a:t>要件定義・品質保証・契約・与信・請求</a:t>
+            </a:r>
+            <a:endParaRPr lang="en-US" sz="880" dirty="0"/>
+          </a:p>
+        </p:txBody>
+      </p:sp>
+      <p:sp>
+        <p:nvSpPr>
+          <p:cNvPr id="24" name="Text 22"/>
+          <p:cNvSpPr txBox="1"/>
+          <p:nvPr/>
+        </p:nvSpPr>
+        <p:spPr>
+          <a:xfrm>
+            <a:off x="8732520" y="2798064"/>
+            <a:ext cx="2651760" cy="274320"/>
           </a:xfrm>
           <a:prstGeom prst="rect">
             <a:avLst/>
@@ -18721,7 +20238,7 @@
                 <a:ea typeface="Meiryo" pitchFamily="34" charset="-122"/>
                 <a:cs typeface="Meiryo" pitchFamily="34" charset="-120"/>
               </a:rPr>
-              <a:t>粗利率</a:t>
+              <a:t>中国の個人クリエイター</a:t>
             </a:r>
             <a:endParaRPr lang="en-US" sz="1150" dirty="0"/>
           </a:p>
@@ -18729,30 +20246,33 @@
       </p:sp>
       <p:sp>
         <p:nvSpPr>
-          <p:cNvPr id="10" name="Text 7"/>
-          <p:cNvSpPr txBox="1"/>
-          <p:nvPr/>
-        </p:nvSpPr>
-        <p:spPr>
-          <a:xfrm>
-            <a:off x="6931152" y="2724912"/>
-            <a:ext cx="4407408" cy="73152"/>
-          </a:xfrm>
-          <a:prstGeom prst="rect">
-            <a:avLst/>
-          </a:prstGeom>
-          <a:noFill/>
-          <a:ln/>
-        </p:spPr>
-        <p:txBody>
-          <a:bodyPr wrap="square" lIns="0" tIns="0" rIns="0" bIns="0" rtlCol="0" anchor="t"/>
-          <a:lstStyle/>
-          <a:p>
-            <a:pPr indent="0" marL="0">
-              <a:buNone/>
-            </a:pPr>
-            <a:r>
-              <a:rPr lang="en-US" sz="950" dirty="0">
+          <p:cNvPr id="25" name="Text 23"/>
+          <p:cNvSpPr txBox="1"/>
+          <p:nvPr/>
+        </p:nvSpPr>
+        <p:spPr>
+          <a:xfrm>
+            <a:off x="8732520" y="3090672"/>
+            <a:ext cx="2651760" cy="310896"/>
+          </a:xfrm>
+          <a:prstGeom prst="rect">
+            <a:avLst/>
+          </a:prstGeom>
+          <a:noFill/>
+          <a:ln/>
+        </p:spPr>
+        <p:txBody>
+          <a:bodyPr wrap="square" lIns="0" tIns="0" rIns="0" bIns="0" rtlCol="0" anchor="ctr"/>
+          <a:lstStyle/>
+          <a:p>
+            <a:pPr indent="0" marL="0">
+              <a:lnSpc>
+                <a:spcPct val="115000"/>
+              </a:lnSpc>
+              <a:buNone/>
+            </a:pPr>
+            <a:r>
+              <a:rPr lang="en-US" sz="880" dirty="0">
                 <a:solidFill>
                   <a:srgbClr val="6E6E76"/>
                 </a:solidFill>
@@ -18760,22 +20280,129 @@
                 <a:ea typeface="Meiryo" pitchFamily="34" charset="-122"/>
                 <a:cs typeface="Meiryo" pitchFamily="34" charset="-120"/>
               </a:rPr>
-              <a:t>個人契約により55%→60%へ改善。計画では保守的に54%で置く</a:t>
-            </a:r>
-            <a:endParaRPr lang="en-US" sz="950" dirty="0"/>
-          </a:p>
-        </p:txBody>
-      </p:sp>
-      <p:sp>
-        <p:nvSpPr>
-          <p:cNvPr id="11" name="Shape 8"/>
+              <a:t>登録20〜25名 / 稼働14名・月3本</a:t>
+            </a:r>
+            <a:endParaRPr lang="en-US" sz="880" dirty="0"/>
+          </a:p>
+        </p:txBody>
+      </p:sp>
+      <p:sp>
+        <p:nvSpPr>
+          <p:cNvPr id="26" name="Shape 24"/>
           <p:cNvSpPr/>
           <p:nvPr/>
         </p:nvSpPr>
         <p:spPr>
           <a:xfrm>
-            <a:off x="6675120" y="3090672"/>
-            <a:ext cx="4919472" cy="1481328"/>
+            <a:off x="4306824" y="3099816"/>
+            <a:ext cx="384048" cy="0"/>
+          </a:xfrm>
+          <a:prstGeom prst="line">
+            <a:avLst/>
+          </a:prstGeom>
+          <a:noFill/>
+          <a:ln w="22225">
+            <a:solidFill>
+              <a:srgbClr val="6E6E76"/>
+            </a:solidFill>
+            <a:prstDash val="solid"/>
+            <a:tailEnd type="triangle"/>
+          </a:ln>
+        </p:spPr>
+      </p:sp>
+      <p:sp>
+        <p:nvSpPr>
+          <p:cNvPr id="27" name="Shape 25"/>
+          <p:cNvSpPr/>
+          <p:nvPr/>
+        </p:nvSpPr>
+        <p:spPr>
+          <a:xfrm>
+            <a:off x="8220456" y="3099816"/>
+            <a:ext cx="384048" cy="0"/>
+          </a:xfrm>
+          <a:prstGeom prst="line">
+            <a:avLst/>
+          </a:prstGeom>
+          <a:noFill/>
+          <a:ln w="22225">
+            <a:solidFill>
+              <a:srgbClr val="6E6E76"/>
+            </a:solidFill>
+            <a:prstDash val="solid"/>
+            <a:tailEnd type="triangle"/>
+          </a:ln>
+        </p:spPr>
+      </p:sp>
+      <p:sp>
+        <p:nvSpPr>
+          <p:cNvPr id="28" name="Shape 26"/>
+          <p:cNvSpPr/>
+          <p:nvPr/>
+        </p:nvSpPr>
+        <p:spPr>
+          <a:xfrm>
+            <a:off x="594360" y="3694176"/>
+            <a:ext cx="420624" cy="932688"/>
+          </a:xfrm>
+          <a:prstGeom prst="rect">
+            <a:avLst/>
+          </a:prstGeom>
+          <a:solidFill>
+            <a:srgbClr val="C9962C"/>
+          </a:solidFill>
+          <a:ln/>
+        </p:spPr>
+      </p:sp>
+      <p:sp>
+        <p:nvSpPr>
+          <p:cNvPr id="29" name="Text 27"/>
+          <p:cNvSpPr txBox="1"/>
+          <p:nvPr/>
+        </p:nvSpPr>
+        <p:spPr>
+          <a:xfrm>
+            <a:off x="594360" y="3694176"/>
+            <a:ext cx="420624" cy="932688"/>
+          </a:xfrm>
+          <a:prstGeom prst="rect">
+            <a:avLst/>
+          </a:prstGeom>
+          <a:noFill/>
+          <a:ln/>
+        </p:spPr>
+        <p:txBody>
+          <a:bodyPr wrap="square" lIns="0" tIns="0" rIns="0" bIns="0" rtlCol="0" anchor="ctr"/>
+          <a:lstStyle/>
+          <a:p>
+            <a:pPr algn="ctr" indent="0" marL="0">
+              <a:buNone/>
+            </a:pPr>
+            <a:r>
+              <a:rPr lang="en-US" sz="1100" b="1" dirty="0">
+                <a:solidFill>
+                  <a:srgbClr val="FFFFFF"/>
+                </a:solidFill>
+                <a:latin typeface="Meiryo" pitchFamily="34" charset="0"/>
+                <a:ea typeface="Meiryo" pitchFamily="34" charset="-122"/>
+                <a:cs typeface="Meiryo" pitchFamily="34" charset="-120"/>
+              </a:rPr>
+              <a:t>軸③</a:t>
+            </a:r>
+            <a:endParaRPr lang="en-US" sz="1100" dirty="0"/>
+          </a:p>
+        </p:txBody>
+      </p:sp>
+      <p:sp>
+        <p:nvSpPr>
+          <p:cNvPr id="30" name="Shape 28"/>
+          <p:cNvSpPr/>
+          <p:nvPr/>
+        </p:nvSpPr>
+        <p:spPr>
+          <a:xfrm>
+            <a:off x="1124712" y="3694176"/>
+            <a:ext cx="10469880" cy="932688"/>
           </a:xfrm>
           <a:prstGeom prst="rect">
             <a:avLst/>
@@ -18788,53 +20415,14 @@
       </p:sp>
       <p:sp>
         <p:nvSpPr>
-          <p:cNvPr id="12" name="Text 9"/>
-          <p:cNvSpPr txBox="1"/>
-          <p:nvPr/>
-        </p:nvSpPr>
-        <p:spPr>
-          <a:xfrm>
-            <a:off x="6931152" y="3291840"/>
-            <a:ext cx="4407408" cy="658368"/>
-          </a:xfrm>
-          <a:prstGeom prst="rect">
-            <a:avLst/>
-          </a:prstGeom>
-          <a:noFill/>
-          <a:ln/>
-        </p:spPr>
-        <p:txBody>
-          <a:bodyPr wrap="square" lIns="0" tIns="0" rIns="0" bIns="0" rtlCol="0" anchor="ctr"/>
-          <a:lstStyle/>
-          <a:p>
-            <a:pPr indent="0" marL="0">
-              <a:buNone/>
-            </a:pPr>
-            <a:r>
-              <a:rPr lang="en-US" sz="3000" b="1" dirty="0">
-                <a:solidFill>
-                  <a:srgbClr val="2A3563"/>
-                </a:solidFill>
-                <a:latin typeface="Meiryo" pitchFamily="34" charset="0"/>
-                <a:ea typeface="Meiryo" pitchFamily="34" charset="-122"/>
-                <a:cs typeface="Meiryo" pitchFamily="34" charset="-120"/>
-              </a:rPr>
-              <a:t>月10.6本</a:t>
-            </a:r>
-            <a:endParaRPr lang="en-US" sz="3000" dirty="0"/>
-          </a:p>
-        </p:txBody>
-      </p:sp>
-      <p:sp>
-        <p:nvSpPr>
-          <p:cNvPr id="13" name="Text 10"/>
-          <p:cNvSpPr txBox="1"/>
-          <p:nvPr/>
-        </p:nvSpPr>
-        <p:spPr>
-          <a:xfrm>
-            <a:off x="6931152" y="3968496"/>
-            <a:ext cx="4407408" cy="274320"/>
+          <p:cNvPr id="31" name="Text 29"/>
+          <p:cNvSpPr txBox="1"/>
+          <p:nvPr/>
+        </p:nvSpPr>
+        <p:spPr>
+          <a:xfrm>
+            <a:off x="1380744" y="3858768"/>
+            <a:ext cx="2743200" cy="274320"/>
           </a:xfrm>
           <a:prstGeom prst="rect">
             <a:avLst/>
@@ -18858,7 +20446,7 @@
                 <a:ea typeface="Meiryo" pitchFamily="34" charset="-122"/>
                 <a:cs typeface="Meiryo" pitchFamily="34" charset="-120"/>
               </a:rPr>
-              <a:t>損益分岐(フル体制)</a:t>
+              <a:t>①②で溜まる制作データ</a:t>
             </a:r>
             <a:endParaRPr lang="en-US" sz="1150" dirty="0"/>
           </a:p>
@@ -18866,14 +20454,345 @@
       </p:sp>
       <p:sp>
         <p:nvSpPr>
-          <p:cNvPr id="14" name="Text 11"/>
-          <p:cNvSpPr txBox="1"/>
-          <p:nvPr/>
-        </p:nvSpPr>
-        <p:spPr>
-          <a:xfrm>
-            <a:off x="6931152" y="4242816"/>
-            <a:ext cx="4407408" cy="182880"/>
+          <p:cNvPr id="32" name="Text 30"/>
+          <p:cNvSpPr txBox="1"/>
+          <p:nvPr/>
+        </p:nvSpPr>
+        <p:spPr>
+          <a:xfrm>
+            <a:off x="1380744" y="4151376"/>
+            <a:ext cx="2743200" cy="310896"/>
+          </a:xfrm>
+          <a:prstGeom prst="rect">
+            <a:avLst/>
+          </a:prstGeom>
+          <a:noFill/>
+          <a:ln/>
+        </p:spPr>
+        <p:txBody>
+          <a:bodyPr wrap="square" lIns="0" tIns="0" rIns="0" bIns="0" rtlCol="0" anchor="ctr"/>
+          <a:lstStyle/>
+          <a:p>
+            <a:pPr indent="0" marL="0">
+              <a:lnSpc>
+                <a:spcPct val="115000"/>
+              </a:lnSpc>
+              <a:buNone/>
+            </a:pPr>
+            <a:r>
+              <a:rPr lang="en-US" sz="880" dirty="0">
+                <a:solidFill>
+                  <a:srgbClr val="6E6E76"/>
+                </a:solidFill>
+                <a:latin typeface="Meiryo" pitchFamily="34" charset="0"/>
+                <a:ea typeface="Meiryo" pitchFamily="34" charset="-122"/>
+                <a:cs typeface="Meiryo" pitchFamily="34" charset="-120"/>
+              </a:rPr>
+              <a:t>指示→初稿→修正→承認のペア / 視聴維持率</a:t>
+            </a:r>
+            <a:endParaRPr lang="en-US" sz="880" dirty="0"/>
+          </a:p>
+        </p:txBody>
+      </p:sp>
+      <p:sp>
+        <p:nvSpPr>
+          <p:cNvPr id="33" name="Text 31"/>
+          <p:cNvSpPr txBox="1"/>
+          <p:nvPr/>
+        </p:nvSpPr>
+        <p:spPr>
+          <a:xfrm>
+            <a:off x="4818888" y="3858768"/>
+            <a:ext cx="3200400" cy="274320"/>
+          </a:xfrm>
+          <a:prstGeom prst="rect">
+            <a:avLst/>
+          </a:prstGeom>
+          <a:noFill/>
+          <a:ln/>
+        </p:spPr>
+        <p:txBody>
+          <a:bodyPr wrap="square" lIns="0" tIns="0" rIns="0" bIns="0" rtlCol="0" anchor="ctr"/>
+          <a:lstStyle/>
+          <a:p>
+            <a:pPr indent="0" marL="0">
+              <a:buNone/>
+            </a:pPr>
+            <a:r>
+              <a:rPr lang="en-US" sz="1150" b="1" dirty="0">
+                <a:solidFill>
+                  <a:srgbClr val="C9962C"/>
+                </a:solidFill>
+                <a:latin typeface="Meiryo" pitchFamily="34" charset="0"/>
+                <a:ea typeface="Meiryo" pitchFamily="34" charset="-122"/>
+                <a:cs typeface="Meiryo" pitchFamily="34" charset="-120"/>
+              </a:rPr>
+              <a:t>内製化してモデル開発</a:t>
+            </a:r>
+            <a:endParaRPr lang="en-US" sz="1150" dirty="0"/>
+          </a:p>
+        </p:txBody>
+      </p:sp>
+      <p:sp>
+        <p:nvSpPr>
+          <p:cNvPr id="34" name="Text 32"/>
+          <p:cNvSpPr txBox="1"/>
+          <p:nvPr/>
+        </p:nvSpPr>
+        <p:spPr>
+          <a:xfrm>
+            <a:off x="4818888" y="4151376"/>
+            <a:ext cx="3200400" cy="310896"/>
+          </a:xfrm>
+          <a:prstGeom prst="rect">
+            <a:avLst/>
+          </a:prstGeom>
+          <a:noFill/>
+          <a:ln/>
+        </p:spPr>
+        <p:txBody>
+          <a:bodyPr wrap="square" lIns="0" tIns="0" rIns="0" bIns="0" rtlCol="0" anchor="ctr"/>
+          <a:lstStyle/>
+          <a:p>
+            <a:pPr indent="0" marL="0">
+              <a:lnSpc>
+                <a:spcPct val="115000"/>
+              </a:lnSpc>
+              <a:buNone/>
+            </a:pPr>
+            <a:r>
+              <a:rPr lang="en-US" sz="880" dirty="0">
+                <a:solidFill>
+                  <a:srgbClr val="6E6E76"/>
+                </a:solidFill>
+                <a:latin typeface="Meiryo" pitchFamily="34" charset="0"/>
+                <a:ea typeface="Meiryo" pitchFamily="34" charset="-122"/>
+                <a:cs typeface="Meiryo" pitchFamily="34" charset="-120"/>
+              </a:rPr>
+              <a:t>工程のツール化・生成AI関連の特許取得</a:t>
+            </a:r>
+            <a:endParaRPr lang="en-US" sz="880" dirty="0"/>
+          </a:p>
+        </p:txBody>
+      </p:sp>
+      <p:sp>
+        <p:nvSpPr>
+          <p:cNvPr id="35" name="Text 33"/>
+          <p:cNvSpPr txBox="1"/>
+          <p:nvPr/>
+        </p:nvSpPr>
+        <p:spPr>
+          <a:xfrm>
+            <a:off x="8732520" y="3858768"/>
+            <a:ext cx="2651760" cy="274320"/>
+          </a:xfrm>
+          <a:prstGeom prst="rect">
+            <a:avLst/>
+          </a:prstGeom>
+          <a:noFill/>
+          <a:ln/>
+        </p:spPr>
+        <p:txBody>
+          <a:bodyPr wrap="square" lIns="0" tIns="0" rIns="0" bIns="0" rtlCol="0" anchor="ctr"/>
+          <a:lstStyle/>
+          <a:p>
+            <a:pPr indent="0" marL="0">
+              <a:buNone/>
+            </a:pPr>
+            <a:r>
+              <a:rPr lang="en-US" sz="1150" b="1" dirty="0">
+                <a:solidFill>
+                  <a:srgbClr val="16161A"/>
+                </a:solidFill>
+                <a:latin typeface="Meiryo" pitchFamily="34" charset="0"/>
+                <a:ea typeface="Meiryo" pitchFamily="34" charset="-122"/>
+                <a:cs typeface="Meiryo" pitchFamily="34" charset="-120"/>
+              </a:rPr>
+              <a:t>プロダクト外販(R4)</a:t>
+            </a:r>
+            <a:endParaRPr lang="en-US" sz="1150" dirty="0"/>
+          </a:p>
+        </p:txBody>
+      </p:sp>
+      <p:sp>
+        <p:nvSpPr>
+          <p:cNvPr id="36" name="Text 34"/>
+          <p:cNvSpPr txBox="1"/>
+          <p:nvPr/>
+        </p:nvSpPr>
+        <p:spPr>
+          <a:xfrm>
+            <a:off x="8732520" y="4151376"/>
+            <a:ext cx="2651760" cy="310896"/>
+          </a:xfrm>
+          <a:prstGeom prst="rect">
+            <a:avLst/>
+          </a:prstGeom>
+          <a:noFill/>
+          <a:ln/>
+        </p:spPr>
+        <p:txBody>
+          <a:bodyPr wrap="square" lIns="0" tIns="0" rIns="0" bIns="0" rtlCol="0" anchor="ctr"/>
+          <a:lstStyle/>
+          <a:p>
+            <a:pPr indent="0" marL="0">
+              <a:lnSpc>
+                <a:spcPct val="115000"/>
+              </a:lnSpc>
+              <a:buNone/>
+            </a:pPr>
+            <a:r>
+              <a:rPr lang="en-US" sz="880" dirty="0">
+                <a:solidFill>
+                  <a:srgbClr val="6E6E76"/>
+                </a:solidFill>
+                <a:latin typeface="Meiryo" pitchFamily="34" charset="0"/>
+                <a:ea typeface="Meiryo" pitchFamily="34" charset="-122"/>
+                <a:cs typeface="Meiryo" pitchFamily="34" charset="-120"/>
+              </a:rPr>
+              <a:t>粗利率80%以上・人数に比例しない</a:t>
+            </a:r>
+            <a:endParaRPr lang="en-US" sz="880" dirty="0"/>
+          </a:p>
+        </p:txBody>
+      </p:sp>
+      <p:sp>
+        <p:nvSpPr>
+          <p:cNvPr id="37" name="Shape 35"/>
+          <p:cNvSpPr/>
+          <p:nvPr/>
+        </p:nvSpPr>
+        <p:spPr>
+          <a:xfrm>
+            <a:off x="4306824" y="4160520"/>
+            <a:ext cx="384048" cy="0"/>
+          </a:xfrm>
+          <a:prstGeom prst="line">
+            <a:avLst/>
+          </a:prstGeom>
+          <a:noFill/>
+          <a:ln w="22225">
+            <a:solidFill>
+              <a:srgbClr val="6E6E76"/>
+            </a:solidFill>
+            <a:prstDash val="solid"/>
+            <a:tailEnd type="triangle"/>
+          </a:ln>
+        </p:spPr>
+      </p:sp>
+      <p:sp>
+        <p:nvSpPr>
+          <p:cNvPr id="38" name="Shape 36"/>
+          <p:cNvSpPr/>
+          <p:nvPr/>
+        </p:nvSpPr>
+        <p:spPr>
+          <a:xfrm>
+            <a:off x="8220456" y="4160520"/>
+            <a:ext cx="384048" cy="0"/>
+          </a:xfrm>
+          <a:prstGeom prst="line">
+            <a:avLst/>
+          </a:prstGeom>
+          <a:noFill/>
+          <a:ln w="22225">
+            <a:solidFill>
+              <a:srgbClr val="6E6E76"/>
+            </a:solidFill>
+            <a:prstDash val="solid"/>
+            <a:tailEnd type="triangle"/>
+          </a:ln>
+        </p:spPr>
+      </p:sp>
+      <p:sp>
+        <p:nvSpPr>
+          <p:cNvPr id="39" name="Shape 37"/>
+          <p:cNvSpPr/>
+          <p:nvPr/>
+        </p:nvSpPr>
+        <p:spPr>
+          <a:xfrm>
+            <a:off x="594360" y="4882896"/>
+            <a:ext cx="3483864" cy="914400"/>
+          </a:xfrm>
+          <a:prstGeom prst="rect">
+            <a:avLst/>
+          </a:prstGeom>
+          <a:solidFill>
+            <a:srgbClr val="F4F2EF"/>
+          </a:solidFill>
+          <a:ln/>
+        </p:spPr>
+      </p:sp>
+      <p:sp>
+        <p:nvSpPr>
+          <p:cNvPr id="40" name="Shape 38"/>
+          <p:cNvSpPr/>
+          <p:nvPr/>
+        </p:nvSpPr>
+        <p:spPr>
+          <a:xfrm>
+            <a:off x="832104" y="5157216"/>
+            <a:ext cx="118872" cy="118872"/>
+          </a:xfrm>
+          <a:prstGeom prst="rect">
+            <a:avLst/>
+          </a:prstGeom>
+          <a:solidFill>
+            <a:srgbClr val="2A3563"/>
+          </a:solidFill>
+          <a:ln/>
+        </p:spPr>
+      </p:sp>
+      <p:sp>
+        <p:nvSpPr>
+          <p:cNvPr id="41" name="Text 39"/>
+          <p:cNvSpPr txBox="1"/>
+          <p:nvPr/>
+        </p:nvSpPr>
+        <p:spPr>
+          <a:xfrm>
+            <a:off x="1069848" y="5065776"/>
+            <a:ext cx="2770632" cy="310896"/>
+          </a:xfrm>
+          <a:prstGeom prst="rect">
+            <a:avLst/>
+          </a:prstGeom>
+          <a:noFill/>
+          <a:ln/>
+        </p:spPr>
+        <p:txBody>
+          <a:bodyPr wrap="square" lIns="0" tIns="0" rIns="0" bIns="0" rtlCol="0" anchor="ctr"/>
+          <a:lstStyle/>
+          <a:p>
+            <a:pPr indent="0" marL="0">
+              <a:buNone/>
+            </a:pPr>
+            <a:r>
+              <a:rPr lang="en-US" sz="1350" b="1" dirty="0">
+                <a:solidFill>
+                  <a:srgbClr val="16161A"/>
+                </a:solidFill>
+                <a:latin typeface="Meiryo" pitchFamily="34" charset="0"/>
+                <a:ea typeface="Meiryo" pitchFamily="34" charset="-122"/>
+                <a:cs typeface="Meiryo" pitchFamily="34" charset="-120"/>
+              </a:rPr>
+              <a:t>軸① 中国作品の日本語化販売</a:t>
+            </a:r>
+            <a:endParaRPr lang="en-US" sz="1350" dirty="0"/>
+          </a:p>
+        </p:txBody>
+      </p:sp>
+      <p:sp>
+        <p:nvSpPr>
+          <p:cNvPr id="42" name="Text 40"/>
+          <p:cNvSpPr txBox="1"/>
+          <p:nvPr/>
+        </p:nvSpPr>
+        <p:spPr>
+          <a:xfrm>
+            <a:off x="1069848" y="5431536"/>
+            <a:ext cx="2770632" cy="182880"/>
           </a:xfrm>
           <a:prstGeom prst="rect">
             <a:avLst/>
@@ -18886,109 +20805,115 @@
           <a:lstStyle/>
           <a:p>
             <a:pPr indent="0" marL="0">
-              <a:buNone/>
-            </a:pPr>
-            <a:r>
-              <a:rPr lang="en-US" sz="950" dirty="0">
-                <a:solidFill>
-                  <a:srgbClr val="6E6E76"/>
-                </a:solidFill>
-                <a:latin typeface="Meiryo" pitchFamily="34" charset="0"/>
-                <a:ea typeface="Meiryo" pitchFamily="34" charset="-122"/>
-                <a:cs typeface="Meiryo" pitchFamily="34" charset="-120"/>
-              </a:rPr>
-              <a:t>月次固定費276万 ÷ 粗利率 ÷ 平均単価。</a:t>
-            </a:r>
-            <a:endParaRPr lang="en-US" sz="950" dirty="0"/>
-          </a:p>
-          <a:p>
-            <a:pPr indent="0" marL="0">
-              <a:buNone/>
-            </a:pPr>
-            <a:r>
-              <a:rPr lang="en-US" sz="950" dirty="0">
-                <a:solidFill>
-                  <a:srgbClr val="6E6E76"/>
-                </a:solidFill>
-                <a:latin typeface="Meiryo" pitchFamily="34" charset="0"/>
-                <a:ea typeface="Meiryo" pitchFamily="34" charset="-122"/>
-                <a:cs typeface="Meiryo" pitchFamily="34" charset="-120"/>
-              </a:rPr>
-              <a:t>自社チャンネル投資を除くと月8.9本</a:t>
-            </a:r>
-            <a:endParaRPr lang="en-US" sz="950" dirty="0"/>
-          </a:p>
-        </p:txBody>
-      </p:sp>
-      <p:sp>
-        <p:nvSpPr>
-          <p:cNvPr id="15" name="Shape 12"/>
+              <a:lnSpc>
+                <a:spcPct val="128000"/>
+              </a:lnSpc>
+              <a:buNone/>
+            </a:pPr>
+            <a:r>
+              <a:rPr lang="en-US" sz="1050" dirty="0">
+                <a:solidFill>
+                  <a:srgbClr val="3A3A42"/>
+                </a:solidFill>
+                <a:latin typeface="Meiryo" pitchFamily="34" charset="0"/>
+                <a:ea typeface="Meiryo" pitchFamily="34" charset="-122"/>
+                <a:cs typeface="Meiryo" pitchFamily="34" charset="-120"/>
+              </a:rPr>
+              <a:t>開始 2年目 / 初期投資は版権前払い。受託の粗利が出てから着手します。</a:t>
+            </a:r>
+            <a:endParaRPr lang="en-US" sz="1050" dirty="0"/>
+          </a:p>
+        </p:txBody>
+      </p:sp>
+      <p:sp>
+        <p:nvSpPr>
+          <p:cNvPr id="43" name="Shape 41"/>
           <p:cNvSpPr/>
           <p:nvPr/>
         </p:nvSpPr>
         <p:spPr>
           <a:xfrm>
-            <a:off x="6675120" y="4718304"/>
-            <a:ext cx="4919472" cy="896112"/>
+            <a:off x="4352544" y="4882896"/>
+            <a:ext cx="3483864" cy="914400"/>
           </a:xfrm>
           <a:prstGeom prst="rect">
             <a:avLst/>
           </a:prstGeom>
           <a:solidFill>
-            <a:srgbClr val="16161A"/>
+            <a:srgbClr val="F4F2EF"/>
           </a:solidFill>
           <a:ln/>
         </p:spPr>
       </p:sp>
       <p:sp>
         <p:nvSpPr>
-          <p:cNvPr id="16" name="Text 13"/>
-          <p:cNvSpPr txBox="1"/>
-          <p:nvPr/>
-        </p:nvSpPr>
-        <p:spPr>
-          <a:xfrm>
-            <a:off x="6931152" y="4846320"/>
-            <a:ext cx="4407408" cy="274320"/>
-          </a:xfrm>
-          <a:prstGeom prst="rect">
-            <a:avLst/>
-          </a:prstGeom>
-          <a:noFill/>
-          <a:ln/>
-        </p:spPr>
-        <p:txBody>
-          <a:bodyPr wrap="square" lIns="0" tIns="0" rIns="0" bIns="0" rtlCol="0" anchor="ctr"/>
-          <a:lstStyle/>
-          <a:p>
-            <a:pPr indent="0" marL="0">
-              <a:buNone/>
-            </a:pPr>
-            <a:r>
-              <a:rPr lang="en-US" sz="1150" b="1" dirty="0">
-                <a:solidFill>
-                  <a:srgbClr val="C9962C"/>
-                </a:solidFill>
-                <a:latin typeface="Meiryo" pitchFamily="34" charset="0"/>
-                <a:ea typeface="Meiryo" pitchFamily="34" charset="-122"/>
-                <a:cs typeface="Meiryo" pitchFamily="34" charset="-120"/>
-              </a:rPr>
-              <a:t>利益率を決めるのは制作原価ではなく営業効率です。</a:t>
-            </a:r>
-            <a:endParaRPr lang="en-US" sz="1150" dirty="0"/>
-          </a:p>
-        </p:txBody>
-      </p:sp>
-      <p:sp>
-        <p:nvSpPr>
-          <p:cNvPr id="17" name="Text 14"/>
-          <p:cNvSpPr txBox="1"/>
-          <p:nvPr/>
-        </p:nvSpPr>
-        <p:spPr>
-          <a:xfrm>
-            <a:off x="6931152" y="5138928"/>
-            <a:ext cx="4407408" cy="384048"/>
+          <p:cNvPr id="44" name="Shape 42"/>
+          <p:cNvSpPr/>
+          <p:nvPr/>
+        </p:nvSpPr>
+        <p:spPr>
+          <a:xfrm>
+            <a:off x="4590288" y="5157216"/>
+            <a:ext cx="118872" cy="118872"/>
+          </a:xfrm>
+          <a:prstGeom prst="rect">
+            <a:avLst/>
+          </a:prstGeom>
+          <a:solidFill>
+            <a:srgbClr val="B3121B"/>
+          </a:solidFill>
+          <a:ln/>
+        </p:spPr>
+      </p:sp>
+      <p:sp>
+        <p:nvSpPr>
+          <p:cNvPr id="45" name="Text 43"/>
+          <p:cNvSpPr txBox="1"/>
+          <p:nvPr/>
+        </p:nvSpPr>
+        <p:spPr>
+          <a:xfrm>
+            <a:off x="4828032" y="5065776"/>
+            <a:ext cx="2770632" cy="310896"/>
+          </a:xfrm>
+          <a:prstGeom prst="rect">
+            <a:avLst/>
+          </a:prstGeom>
+          <a:noFill/>
+          <a:ln/>
+        </p:spPr>
+        <p:txBody>
+          <a:bodyPr wrap="square" lIns="0" tIns="0" rIns="0" bIns="0" rtlCol="0" anchor="ctr"/>
+          <a:lstStyle/>
+          <a:p>
+            <a:pPr indent="0" marL="0">
+              <a:buNone/>
+            </a:pPr>
+            <a:r>
+              <a:rPr lang="en-US" sz="1350" b="1" dirty="0">
+                <a:solidFill>
+                  <a:srgbClr val="16161A"/>
+                </a:solidFill>
+                <a:latin typeface="Meiryo" pitchFamily="34" charset="0"/>
+                <a:ea typeface="Meiryo" pitchFamily="34" charset="-122"/>
+                <a:cs typeface="Meiryo" pitchFamily="34" charset="-120"/>
+              </a:rPr>
+              <a:t>軸② 日本企業からの受注制作</a:t>
+            </a:r>
+            <a:endParaRPr lang="en-US" sz="1350" dirty="0"/>
+          </a:p>
+        </p:txBody>
+      </p:sp>
+      <p:sp>
+        <p:nvSpPr>
+          <p:cNvPr id="46" name="Text 44"/>
+          <p:cNvSpPr txBox="1"/>
+          <p:nvPr/>
+        </p:nvSpPr>
+        <p:spPr>
+          <a:xfrm>
+            <a:off x="4828032" y="5431536"/>
+            <a:ext cx="2770632" cy="182880"/>
           </a:xfrm>
           <a:prstGeom prst="rect">
             <a:avLst/>
@@ -19002,28 +20927,149 @@
           <a:p>
             <a:pPr indent="0" marL="0">
               <a:lnSpc>
-                <a:spcPct val="125000"/>
+                <a:spcPct val="128000"/>
               </a:lnSpc>
               <a:buNone/>
             </a:pPr>
             <a:r>
-              <a:rPr lang="en-US" sz="1000" dirty="0">
-                <a:solidFill>
-                  <a:srgbClr val="EDEBE7"/>
-                </a:solidFill>
-                <a:latin typeface="Meiryo" pitchFamily="34" charset="0"/>
-                <a:ea typeface="Meiryo" pitchFamily="34" charset="-122"/>
-                <a:cs typeface="Meiryo" pitchFamily="34" charset="-120"/>
-              </a:rPr>
-              <a:t>外注原価は契約で固定できますが、1本の受注に営業が使う時間はリピート率で2倍以上変わります。</a:t>
-            </a:r>
-            <a:endParaRPr lang="en-US" sz="1000" dirty="0"/>
-          </a:p>
-        </p:txBody>
-      </p:sp>
-      <p:sp>
-        <p:nvSpPr>
-          <p:cNvPr id="18" name="Text 15"/>
+              <a:rPr lang="en-US" sz="1050" dirty="0">
+                <a:solidFill>
+                  <a:srgbClr val="3A3A42"/>
+                </a:solidFill>
+                <a:latin typeface="Meiryo" pitchFamily="34" charset="0"/>
+                <a:ea typeface="Meiryo" pitchFamily="34" charset="-122"/>
+                <a:cs typeface="Meiryo" pitchFamily="34" charset="-120"/>
+              </a:rPr>
+              <a:t>開始 1年目・主軸 / 単価48万・粗利率54%。1年目は代理店の2次受けが中心。</a:t>
+            </a:r>
+            <a:endParaRPr lang="en-US" sz="1050" dirty="0"/>
+          </a:p>
+        </p:txBody>
+      </p:sp>
+      <p:sp>
+        <p:nvSpPr>
+          <p:cNvPr id="47" name="Shape 45"/>
+          <p:cNvSpPr/>
+          <p:nvPr/>
+        </p:nvSpPr>
+        <p:spPr>
+          <a:xfrm>
+            <a:off x="8110728" y="4882896"/>
+            <a:ext cx="3483864" cy="914400"/>
+          </a:xfrm>
+          <a:prstGeom prst="rect">
+            <a:avLst/>
+          </a:prstGeom>
+          <a:solidFill>
+            <a:srgbClr val="F4F2EF"/>
+          </a:solidFill>
+          <a:ln/>
+        </p:spPr>
+      </p:sp>
+      <p:sp>
+        <p:nvSpPr>
+          <p:cNvPr id="48" name="Shape 46"/>
+          <p:cNvSpPr/>
+          <p:nvPr/>
+        </p:nvSpPr>
+        <p:spPr>
+          <a:xfrm>
+            <a:off x="8348472" y="5157216"/>
+            <a:ext cx="118872" cy="118872"/>
+          </a:xfrm>
+          <a:prstGeom prst="rect">
+            <a:avLst/>
+          </a:prstGeom>
+          <a:solidFill>
+            <a:srgbClr val="C9962C"/>
+          </a:solidFill>
+          <a:ln/>
+        </p:spPr>
+      </p:sp>
+      <p:sp>
+        <p:nvSpPr>
+          <p:cNvPr id="49" name="Text 47"/>
+          <p:cNvSpPr txBox="1"/>
+          <p:nvPr/>
+        </p:nvSpPr>
+        <p:spPr>
+          <a:xfrm>
+            <a:off x="8586216" y="5065776"/>
+            <a:ext cx="2770632" cy="310896"/>
+          </a:xfrm>
+          <a:prstGeom prst="rect">
+            <a:avLst/>
+          </a:prstGeom>
+          <a:noFill/>
+          <a:ln/>
+        </p:spPr>
+        <p:txBody>
+          <a:bodyPr wrap="square" lIns="0" tIns="0" rIns="0" bIns="0" rtlCol="0" anchor="ctr"/>
+          <a:lstStyle/>
+          <a:p>
+            <a:pPr indent="0" marL="0">
+              <a:buNone/>
+            </a:pPr>
+            <a:r>
+              <a:rPr lang="en-US" sz="1350" b="1" dirty="0">
+                <a:solidFill>
+                  <a:srgbClr val="16161A"/>
+                </a:solidFill>
+                <a:latin typeface="Meiryo" pitchFamily="34" charset="0"/>
+                <a:ea typeface="Meiryo" pitchFamily="34" charset="-122"/>
+                <a:cs typeface="Meiryo" pitchFamily="34" charset="-120"/>
+              </a:rPr>
+              <a:t>軸③ 内製化・モデル開発</a:t>
+            </a:r>
+            <a:endParaRPr lang="en-US" sz="1350" dirty="0"/>
+          </a:p>
+        </p:txBody>
+      </p:sp>
+      <p:sp>
+        <p:nvSpPr>
+          <p:cNvPr id="50" name="Text 48"/>
+          <p:cNvSpPr txBox="1"/>
+          <p:nvPr/>
+        </p:nvSpPr>
+        <p:spPr>
+          <a:xfrm>
+            <a:off x="8586216" y="5431536"/>
+            <a:ext cx="2770632" cy="182880"/>
+          </a:xfrm>
+          <a:prstGeom prst="rect">
+            <a:avLst/>
+          </a:prstGeom>
+          <a:noFill/>
+          <a:ln/>
+        </p:spPr>
+        <p:txBody>
+          <a:bodyPr wrap="square" lIns="0" tIns="0" rIns="0" bIns="0" rtlCol="0" anchor="t"/>
+          <a:lstStyle/>
+          <a:p>
+            <a:pPr indent="0" marL="0">
+              <a:lnSpc>
+                <a:spcPct val="128000"/>
+              </a:lnSpc>
+              <a:buNone/>
+            </a:pPr>
+            <a:r>
+              <a:rPr lang="en-US" sz="1050" dirty="0">
+                <a:solidFill>
+                  <a:srgbClr val="3A3A42"/>
+                </a:solidFill>
+                <a:latin typeface="Meiryo" pitchFamily="34" charset="0"/>
+                <a:ea typeface="Meiryo" pitchFamily="34" charset="-122"/>
+                <a:cs typeface="Meiryo" pitchFamily="34" charset="-120"/>
+              </a:rPr>
+              <a:t>開始 3年目 / 上場に必要な「読める収益」はここ。①②がデータの源。</a:t>
+            </a:r>
+            <a:endParaRPr lang="en-US" sz="1050" dirty="0"/>
+          </a:p>
+        </p:txBody>
+      </p:sp>
+      <p:sp>
+        <p:nvSpPr>
+          <p:cNvPr id="51" name="Text 49"/>
           <p:cNvSpPr txBox="1"/>
           <p:nvPr/>
         </p:nvSpPr>
@@ -19054,7 +21100,7 @@
                 <a:ea typeface="Meiryo" pitchFamily="34" charset="-122"/>
                 <a:cs typeface="Meiryo" pitchFamily="34" charset="-120"/>
               </a:rPr>
-              <a:t>すべて [仮置き]。P0の有償テストとP2の最初の3案件で実測して差し替えます。</a:t>
+              <a:t>収益ラインの詳細は MARKET_SIZING / 中国側の調達設計は CHINA_SOURCING を参照</a:t>
             </a:r>
             <a:endParaRPr lang="en-US" sz="850" dirty="0"/>
           </a:p>
@@ -19062,7 +21108,7 @@
       </p:sp>
       <p:sp>
         <p:nvSpPr>
-          <p:cNvPr id="19" name="Text 16"/>
+          <p:cNvPr id="52" name="Text 50"/>
           <p:cNvSpPr txBox="1"/>
           <p:nvPr/>
         </p:nvSpPr>
@@ -19223,7 +21269,7 @@
                 <a:ea typeface="Meiryo" pitchFamily="34" charset="-122"/>
                 <a:cs typeface="Meiryo" pitchFamily="34" charset="-120"/>
               </a:rPr>
-              <a:t>市場規模</a:t>
+              <a:t>ユニットエコノミクス</a:t>
             </a:r>
             <a:endParaRPr lang="en-US" sz="2700" dirty="0"/>
           </a:p>
@@ -19262,7 +21308,7 @@
                 <a:ea typeface="Meiryo" pitchFamily="34" charset="-122"/>
                 <a:cs typeface="Meiryo" pitchFamily="34" charset="-120"/>
               </a:rPr>
-              <a:t>市場は制約になりません。制約は営業・採用・中国側のキャパシティです</a:t>
+              <a:t>1本あたりの内訳と、損益分岐に必要な本数</a:t>
             </a:r>
             <a:endParaRPr lang="en-US" sz="1250" dirty="0"/>
           </a:p>
@@ -19275,8 +21321,8 @@
           <p:nvPr/>
         </p:nvGraphicFramePr>
         <p:xfrm>
-          <a:off x="594360" y="1600200"/>
-          <a:ext cx="6400800" cy="3063240"/>
+          <a:off x="594360" y="1572768"/>
+          <a:ext cx="5760720" cy="3794760"/>
         </p:xfrm>
         <a:graphic xmlns:a="http://schemas.openxmlformats.org/drawingml/2006/main">
           <a:graphicData uri="http://schemas.openxmlformats.org/drawingml/2006/chart">
@@ -19292,8 +21338,8 @@
         </p:nvSpPr>
         <p:spPr>
           <a:xfrm>
-            <a:off x="7315200" y="1600200"/>
-            <a:ext cx="4279392" cy="1444752"/>
+            <a:off x="6675120" y="1572768"/>
+            <a:ext cx="4919472" cy="1371600"/>
           </a:xfrm>
           <a:prstGeom prst="rect">
             <a:avLst/>
@@ -19306,23 +21352,42 @@
       </p:sp>
       <p:sp>
         <p:nvSpPr>
-          <p:cNvPr id="8" name="Shape 5"/>
-          <p:cNvSpPr/>
-          <p:nvPr/>
-        </p:nvSpPr>
-        <p:spPr>
-          <a:xfrm>
-            <a:off x="7552944" y="1874520"/>
-            <a:ext cx="118872" cy="118872"/>
-          </a:xfrm>
-          <a:prstGeom prst="rect">
-            <a:avLst/>
-          </a:prstGeom>
-          <a:solidFill>
-            <a:srgbClr val="2A3563"/>
-          </a:solidFill>
-          <a:ln/>
-        </p:spPr>
+          <p:cNvPr id="8" name="Text 5"/>
+          <p:cNvSpPr txBox="1"/>
+          <p:nvPr/>
+        </p:nvSpPr>
+        <p:spPr>
+          <a:xfrm>
+            <a:off x="6931152" y="1773936"/>
+            <a:ext cx="4407408" cy="658368"/>
+          </a:xfrm>
+          <a:prstGeom prst="rect">
+            <a:avLst/>
+          </a:prstGeom>
+          <a:noFill/>
+          <a:ln/>
+        </p:spPr>
+        <p:txBody>
+          <a:bodyPr wrap="square" lIns="0" tIns="0" rIns="0" bIns="0" rtlCol="0" anchor="ctr"/>
+          <a:lstStyle/>
+          <a:p>
+            <a:pPr indent="0" marL="0">
+              <a:buNone/>
+            </a:pPr>
+            <a:r>
+              <a:rPr lang="en-US" sz="3000" b="1" dirty="0">
+                <a:solidFill>
+                  <a:srgbClr val="B3121B"/>
+                </a:solidFill>
+                <a:latin typeface="Meiryo" pitchFamily="34" charset="0"/>
+                <a:ea typeface="Meiryo" pitchFamily="34" charset="-122"/>
+                <a:cs typeface="Meiryo" pitchFamily="34" charset="-120"/>
+              </a:rPr>
+              <a:t>54.2%</a:t>
+            </a:r>
+            <a:endParaRPr lang="en-US" sz="3000" dirty="0"/>
+          </a:p>
+        </p:txBody>
       </p:sp>
       <p:sp>
         <p:nvSpPr>
@@ -19332,24 +21397,24 @@
         </p:nvSpPr>
         <p:spPr>
           <a:xfrm>
-            <a:off x="7790688" y="1783080"/>
-            <a:ext cx="3566160" cy="310896"/>
-          </a:xfrm>
-          <a:prstGeom prst="rect">
-            <a:avLst/>
-          </a:prstGeom>
-          <a:noFill/>
-          <a:ln/>
-        </p:spPr>
-        <p:txBody>
-          <a:bodyPr wrap="square" lIns="0" tIns="0" rIns="0" bIns="0" rtlCol="0" anchor="ctr"/>
-          <a:lstStyle/>
-          <a:p>
-            <a:pPr indent="0" marL="0">
-              <a:buNone/>
-            </a:pPr>
-            <a:r>
-              <a:rPr lang="en-US" sz="1350" b="1" dirty="0">
+            <a:off x="6931152" y="2450592"/>
+            <a:ext cx="4407408" cy="274320"/>
+          </a:xfrm>
+          <a:prstGeom prst="rect">
+            <a:avLst/>
+          </a:prstGeom>
+          <a:noFill/>
+          <a:ln/>
+        </p:spPr>
+        <p:txBody>
+          <a:bodyPr wrap="square" lIns="0" tIns="0" rIns="0" bIns="0" rtlCol="0" anchor="ctr"/>
+          <a:lstStyle/>
+          <a:p>
+            <a:pPr indent="0" marL="0">
+              <a:buNone/>
+            </a:pPr>
+            <a:r>
+              <a:rPr lang="en-US" sz="1150" b="1" dirty="0">
                 <a:solidFill>
                   <a:srgbClr val="16161A"/>
                 </a:solidFill>
@@ -19357,9 +21422,9 @@
                 <a:ea typeface="Meiryo" pitchFamily="34" charset="-122"/>
                 <a:cs typeface="Meiryo" pitchFamily="34" charset="-120"/>
               </a:rPr>
-              <a:t>追い風は実測できている</a:t>
-            </a:r>
-            <a:endParaRPr lang="en-US" sz="1350" dirty="0"/>
+              <a:t>粗利率</a:t>
+            </a:r>
+            <a:endParaRPr lang="en-US" sz="1150" dirty="0"/>
           </a:p>
         </p:txBody>
       </p:sp>
@@ -19371,8 +21436,8 @@
         </p:nvSpPr>
         <p:spPr>
           <a:xfrm>
-            <a:off x="7790688" y="2148840"/>
-            <a:ext cx="3566160" cy="713232"/>
+            <a:off x="6931152" y="2724912"/>
+            <a:ext cx="4407408" cy="73152"/>
           </a:xfrm>
           <a:prstGeom prst="rect">
             <a:avLst/>
@@ -19385,63 +21450,20 @@
           <a:lstStyle/>
           <a:p>
             <a:pPr indent="0" marL="0">
-              <a:lnSpc>
-                <a:spcPct val="128000"/>
-              </a:lnSpc>
-              <a:buNone/>
-            </a:pPr>
-            <a:r>
-              <a:rPr lang="en-US" sz="1050" dirty="0">
-                <a:solidFill>
-                  <a:srgbClr val="3A3A42"/>
-                </a:solidFill>
-                <a:latin typeface="Meiryo" pitchFamily="34" charset="0"/>
-                <a:ea typeface="Meiryo" pitchFamily="34" charset="-122"/>
-                <a:cs typeface="Meiryo" pitchFamily="34" charset="-120"/>
-              </a:rPr>
-              <a:t>動画広告市場  2025年 8,855億円</a:t>
-            </a:r>
-            <a:endParaRPr lang="en-US" sz="1050" dirty="0"/>
-          </a:p>
-          <a:p>
-            <a:pPr indent="0" marL="0">
-              <a:lnSpc>
-                <a:spcPct val="128000"/>
-              </a:lnSpc>
-              <a:buNone/>
-            </a:pPr>
-            <a:r>
-              <a:rPr lang="en-US" sz="1050" dirty="0">
-                <a:solidFill>
-                  <a:srgbClr val="3A3A42"/>
-                </a:solidFill>
-                <a:latin typeface="Meiryo" pitchFamily="34" charset="0"/>
-                <a:ea typeface="Meiryo" pitchFamily="34" charset="-122"/>
-                <a:cs typeface="Meiryo" pitchFamily="34" charset="-120"/>
-              </a:rPr>
-              <a:t>                    → 2026年 1兆437億円</a:t>
-            </a:r>
-            <a:endParaRPr lang="en-US" sz="1050" dirty="0"/>
-          </a:p>
-          <a:p>
-            <a:pPr indent="0" marL="0">
-              <a:lnSpc>
-                <a:spcPct val="128000"/>
-              </a:lnSpc>
-              <a:buNone/>
-            </a:pPr>
-            <a:r>
-              <a:rPr lang="en-US" sz="1050" dirty="0">
-                <a:solidFill>
-                  <a:srgbClr val="3A3A42"/>
-                </a:solidFill>
-                <a:latin typeface="Meiryo" pitchFamily="34" charset="0"/>
-                <a:ea typeface="Meiryo" pitchFamily="34" charset="-122"/>
-                <a:cs typeface="Meiryo" pitchFamily="34" charset="-120"/>
-              </a:rPr>
-              <a:t>縦型動画広告は前年比 155.9%</a:t>
-            </a:r>
-            <a:endParaRPr lang="en-US" sz="1050" dirty="0"/>
+              <a:buNone/>
+            </a:pPr>
+            <a:r>
+              <a:rPr lang="en-US" sz="950" dirty="0">
+                <a:solidFill>
+                  <a:srgbClr val="6E6E76"/>
+                </a:solidFill>
+                <a:latin typeface="Meiryo" pitchFamily="34" charset="0"/>
+                <a:ea typeface="Meiryo" pitchFamily="34" charset="-122"/>
+                <a:cs typeface="Meiryo" pitchFamily="34" charset="-120"/>
+              </a:rPr>
+              <a:t>個人契約により55%→60%へ改善。計画では保守的に54%で置く</a:t>
+            </a:r>
+            <a:endParaRPr lang="en-US" sz="950" dirty="0"/>
           </a:p>
         </p:txBody>
       </p:sp>
@@ -19453,8 +21475,8 @@
         </p:nvSpPr>
         <p:spPr>
           <a:xfrm>
-            <a:off x="7315200" y="3218688"/>
-            <a:ext cx="4279392" cy="1444752"/>
+            <a:off x="6675120" y="3090672"/>
+            <a:ext cx="4919472" cy="1481328"/>
           </a:xfrm>
           <a:prstGeom prst="rect">
             <a:avLst/>
@@ -19467,23 +21489,42 @@
       </p:sp>
       <p:sp>
         <p:nvSpPr>
-          <p:cNvPr id="12" name="Shape 9"/>
-          <p:cNvSpPr/>
-          <p:nvPr/>
-        </p:nvSpPr>
-        <p:spPr>
-          <a:xfrm>
-            <a:off x="7552944" y="3493008"/>
-            <a:ext cx="118872" cy="118872"/>
-          </a:xfrm>
-          <a:prstGeom prst="rect">
-            <a:avLst/>
-          </a:prstGeom>
-          <a:solidFill>
-            <a:srgbClr val="C9962C"/>
-          </a:solidFill>
-          <a:ln/>
-        </p:spPr>
+          <p:cNvPr id="12" name="Text 9"/>
+          <p:cNvSpPr txBox="1"/>
+          <p:nvPr/>
+        </p:nvSpPr>
+        <p:spPr>
+          <a:xfrm>
+            <a:off x="6931152" y="3291840"/>
+            <a:ext cx="4407408" cy="658368"/>
+          </a:xfrm>
+          <a:prstGeom prst="rect">
+            <a:avLst/>
+          </a:prstGeom>
+          <a:noFill/>
+          <a:ln/>
+        </p:spPr>
+        <p:txBody>
+          <a:bodyPr wrap="square" lIns="0" tIns="0" rIns="0" bIns="0" rtlCol="0" anchor="ctr"/>
+          <a:lstStyle/>
+          <a:p>
+            <a:pPr indent="0" marL="0">
+              <a:buNone/>
+            </a:pPr>
+            <a:r>
+              <a:rPr lang="en-US" sz="3000" b="1" dirty="0">
+                <a:solidFill>
+                  <a:srgbClr val="2A3563"/>
+                </a:solidFill>
+                <a:latin typeface="Meiryo" pitchFamily="34" charset="0"/>
+                <a:ea typeface="Meiryo" pitchFamily="34" charset="-122"/>
+                <a:cs typeface="Meiryo" pitchFamily="34" charset="-120"/>
+              </a:rPr>
+              <a:t>月10.6本</a:t>
+            </a:r>
+            <a:endParaRPr lang="en-US" sz="3000" dirty="0"/>
+          </a:p>
+        </p:txBody>
       </p:sp>
       <p:sp>
         <p:nvSpPr>
@@ -19493,24 +21534,24 @@
         </p:nvSpPr>
         <p:spPr>
           <a:xfrm>
-            <a:off x="7790688" y="3401568"/>
-            <a:ext cx="3566160" cy="310896"/>
-          </a:xfrm>
-          <a:prstGeom prst="rect">
-            <a:avLst/>
-          </a:prstGeom>
-          <a:noFill/>
-          <a:ln/>
-        </p:spPr>
-        <p:txBody>
-          <a:bodyPr wrap="square" lIns="0" tIns="0" rIns="0" bIns="0" rtlCol="0" anchor="ctr"/>
-          <a:lstStyle/>
-          <a:p>
-            <a:pPr indent="0" marL="0">
-              <a:buNone/>
-            </a:pPr>
-            <a:r>
-              <a:rPr lang="en-US" sz="1350" b="1" dirty="0">
+            <a:off x="6931152" y="3968496"/>
+            <a:ext cx="4407408" cy="274320"/>
+          </a:xfrm>
+          <a:prstGeom prst="rect">
+            <a:avLst/>
+          </a:prstGeom>
+          <a:noFill/>
+          <a:ln/>
+        </p:spPr>
+        <p:txBody>
+          <a:bodyPr wrap="square" lIns="0" tIns="0" rIns="0" bIns="0" rtlCol="0" anchor="ctr"/>
+          <a:lstStyle/>
+          <a:p>
+            <a:pPr indent="0" marL="0">
+              <a:buNone/>
+            </a:pPr>
+            <a:r>
+              <a:rPr lang="en-US" sz="1150" b="1" dirty="0">
                 <a:solidFill>
                   <a:srgbClr val="16161A"/>
                 </a:solidFill>
@@ -19518,9 +21559,9 @@
                 <a:ea typeface="Meiryo" pitchFamily="34" charset="-122"/>
                 <a:cs typeface="Meiryo" pitchFamily="34" charset="-120"/>
               </a:rPr>
-              <a:t>3年後でもSAMの0.18%</a:t>
-            </a:r>
-            <a:endParaRPr lang="en-US" sz="1350" dirty="0"/>
+              <a:t>損益分岐(フル体制)</a:t>
+            </a:r>
+            <a:endParaRPr lang="en-US" sz="1150" dirty="0"/>
           </a:p>
         </p:txBody>
       </p:sp>
@@ -19532,8 +21573,8 @@
         </p:nvSpPr>
         <p:spPr>
           <a:xfrm>
-            <a:off x="7790688" y="3767328"/>
-            <a:ext cx="3566160" cy="713232"/>
+            <a:off x="6931152" y="4242816"/>
+            <a:ext cx="4407408" cy="182880"/>
           </a:xfrm>
           <a:prstGeom prst="rect">
             <a:avLst/>
@@ -19546,63 +21587,37 @@
           <a:lstStyle/>
           <a:p>
             <a:pPr indent="0" marL="0">
-              <a:lnSpc>
-                <a:spcPct val="128000"/>
-              </a:lnSpc>
-              <a:buNone/>
-            </a:pPr>
-            <a:r>
-              <a:rPr lang="en-US" sz="1050" dirty="0">
-                <a:solidFill>
-                  <a:srgbClr val="3A3A42"/>
-                </a:solidFill>
-                <a:latin typeface="Meiryo" pitchFamily="34" charset="0"/>
-                <a:ea typeface="Meiryo" pitchFamily="34" charset="-122"/>
-                <a:cs typeface="Meiryo" pitchFamily="34" charset="-120"/>
-              </a:rPr>
-              <a:t>5年後に年商10億へ届いても0.7%。</a:t>
-            </a:r>
-            <a:endParaRPr lang="en-US" sz="1050" dirty="0"/>
-          </a:p>
-          <a:p>
-            <a:pPr indent="0" marL="0">
-              <a:lnSpc>
-                <a:spcPct val="128000"/>
-              </a:lnSpc>
-              <a:buNone/>
-            </a:pPr>
-            <a:r>
-              <a:rPr lang="en-US" sz="1050" dirty="0">
-                <a:solidFill>
-                  <a:srgbClr val="3A3A42"/>
-                </a:solidFill>
-                <a:latin typeface="Meiryo" pitchFamily="34" charset="0"/>
-                <a:ea typeface="Meiryo" pitchFamily="34" charset="-122"/>
-                <a:cs typeface="Meiryo" pitchFamily="34" charset="-120"/>
-              </a:rPr>
-              <a:t>市場の奪い合いにはなりません。</a:t>
-            </a:r>
-            <a:endParaRPr lang="en-US" sz="1050" dirty="0"/>
-          </a:p>
-          <a:p>
-            <a:pPr indent="0" marL="0">
-              <a:lnSpc>
-                <a:spcPct val="128000"/>
-              </a:lnSpc>
-              <a:buNone/>
-            </a:pPr>
-            <a:r>
-              <a:rPr lang="en-US" sz="1050" dirty="0">
-                <a:solidFill>
-                  <a:srgbClr val="3A3A42"/>
-                </a:solidFill>
-                <a:latin typeface="Meiryo" pitchFamily="34" charset="0"/>
-                <a:ea typeface="Meiryo" pitchFamily="34" charset="-122"/>
-                <a:cs typeface="Meiryo" pitchFamily="34" charset="-120"/>
-              </a:rPr>
-              <a:t>伸び方を決めるのは自社の実行力です。</a:t>
-            </a:r>
-            <a:endParaRPr lang="en-US" sz="1050" dirty="0"/>
+              <a:buNone/>
+            </a:pPr>
+            <a:r>
+              <a:rPr lang="en-US" sz="950" dirty="0">
+                <a:solidFill>
+                  <a:srgbClr val="6E6E76"/>
+                </a:solidFill>
+                <a:latin typeface="Meiryo" pitchFamily="34" charset="0"/>
+                <a:ea typeface="Meiryo" pitchFamily="34" charset="-122"/>
+                <a:cs typeface="Meiryo" pitchFamily="34" charset="-120"/>
+              </a:rPr>
+              <a:t>月次固定費276万 ÷ 粗利率 ÷ 平均単価。</a:t>
+            </a:r>
+            <a:endParaRPr lang="en-US" sz="950" dirty="0"/>
+          </a:p>
+          <a:p>
+            <a:pPr indent="0" marL="0">
+              <a:buNone/>
+            </a:pPr>
+            <a:r>
+              <a:rPr lang="en-US" sz="950" dirty="0">
+                <a:solidFill>
+                  <a:srgbClr val="6E6E76"/>
+                </a:solidFill>
+                <a:latin typeface="Meiryo" pitchFamily="34" charset="0"/>
+                <a:ea typeface="Meiryo" pitchFamily="34" charset="-122"/>
+                <a:cs typeface="Meiryo" pitchFamily="34" charset="-120"/>
+              </a:rPr>
+              <a:t>自社チャンネル投資を除くと月8.9本</a:t>
+            </a:r>
+            <a:endParaRPr lang="en-US" sz="950" dirty="0"/>
           </a:p>
         </p:txBody>
       </p:sp>
@@ -19614,14 +21629,14 @@
         </p:nvSpPr>
         <p:spPr>
           <a:xfrm>
-            <a:off x="594360" y="4864608"/>
-            <a:ext cx="11000232" cy="1170432"/>
+            <a:off x="6675120" y="4718304"/>
+            <a:ext cx="4919472" cy="896112"/>
           </a:xfrm>
           <a:prstGeom prst="rect">
             <a:avLst/>
           </a:prstGeom>
           <a:solidFill>
-            <a:srgbClr val="F4F2EF"/>
+            <a:srgbClr val="16161A"/>
           </a:solidFill>
           <a:ln/>
         </p:spPr>
@@ -19634,34 +21649,34 @@
         </p:nvSpPr>
         <p:spPr>
           <a:xfrm>
-            <a:off x="914400" y="5010912"/>
-            <a:ext cx="10360152" cy="292608"/>
-          </a:xfrm>
-          <a:prstGeom prst="rect">
-            <a:avLst/>
-          </a:prstGeom>
-          <a:noFill/>
-          <a:ln/>
-        </p:spPr>
-        <p:txBody>
-          <a:bodyPr wrap="square" lIns="0" tIns="0" rIns="0" bIns="0" rtlCol="0" anchor="ctr"/>
-          <a:lstStyle/>
-          <a:p>
-            <a:pPr indent="0" marL="0">
-              <a:buNone/>
-            </a:pPr>
-            <a:r>
-              <a:rPr lang="en-US" sz="1200" b="1" dirty="0">
-                <a:solidFill>
-                  <a:srgbClr val="B3121B"/>
-                </a:solidFill>
-                <a:latin typeface="Meiryo" pitchFamily="34" charset="0"/>
-                <a:ea typeface="Meiryo" pitchFamily="34" charset="-122"/>
-                <a:cs typeface="Meiryo" pitchFamily="34" charset="-120"/>
-              </a:rPr>
-              <a:t>⚠  ただし「原価は下がったが発注価格は下がっていない」という前提には時限があります。</a:t>
-            </a:r>
-            <a:endParaRPr lang="en-US" sz="1200" dirty="0"/>
+            <a:off x="6931152" y="4846320"/>
+            <a:ext cx="4407408" cy="274320"/>
+          </a:xfrm>
+          <a:prstGeom prst="rect">
+            <a:avLst/>
+          </a:prstGeom>
+          <a:noFill/>
+          <a:ln/>
+        </p:spPr>
+        <p:txBody>
+          <a:bodyPr wrap="square" lIns="0" tIns="0" rIns="0" bIns="0" rtlCol="0" anchor="ctr"/>
+          <a:lstStyle/>
+          <a:p>
+            <a:pPr indent="0" marL="0">
+              <a:buNone/>
+            </a:pPr>
+            <a:r>
+              <a:rPr lang="en-US" sz="1150" b="1" dirty="0">
+                <a:solidFill>
+                  <a:srgbClr val="C9962C"/>
+                </a:solidFill>
+                <a:latin typeface="Meiryo" pitchFamily="34" charset="0"/>
+                <a:ea typeface="Meiryo" pitchFamily="34" charset="-122"/>
+                <a:cs typeface="Meiryo" pitchFamily="34" charset="-120"/>
+              </a:rPr>
+              <a:t>利益率を決めるのは制作原価ではなく営業効率です。</a:t>
+            </a:r>
+            <a:endParaRPr lang="en-US" sz="1150" dirty="0"/>
           </a:p>
         </p:txBody>
       </p:sp>
@@ -19673,8 +21688,8 @@
         </p:nvSpPr>
         <p:spPr>
           <a:xfrm>
-            <a:off x="914400" y="5321808"/>
-            <a:ext cx="10360152" cy="566928"/>
+            <a:off x="6931152" y="5138928"/>
+            <a:ext cx="4407408" cy="384048"/>
           </a:xfrm>
           <a:prstGeom prst="rect">
             <a:avLst/>
@@ -19688,22 +21703,22 @@
           <a:p>
             <a:pPr indent="0" marL="0">
               <a:lnSpc>
-                <a:spcPct val="130000"/>
+                <a:spcPct val="125000"/>
               </a:lnSpc>
               <a:buNone/>
             </a:pPr>
             <a:r>
-              <a:rPr lang="en-US" sz="1050" dirty="0">
-                <a:solidFill>
-                  <a:srgbClr val="3A3A42"/>
-                </a:solidFill>
-                <a:latin typeface="Meiryo" pitchFamily="34" charset="0"/>
-                <a:ea typeface="Meiryo" pitchFamily="34" charset="-122"/>
-                <a:cs typeface="Meiryo" pitchFamily="34" charset="-120"/>
-              </a:rPr>
-              <a:t>米国では企業動画の制作費中央値がAI導入で $4,200 → $2,500/分 に下落済み。自己サービス型ツールは1本 $1〜30。見立ては3年程度で日本にも来ます。だから受託で稼ぐ期間に内製化とプロダクトへ移します(第5章・第8章)。</a:t>
-            </a:r>
-            <a:endParaRPr lang="en-US" sz="1050" dirty="0"/>
+              <a:rPr lang="en-US" sz="1000" dirty="0">
+                <a:solidFill>
+                  <a:srgbClr val="EDEBE7"/>
+                </a:solidFill>
+                <a:latin typeface="Meiryo" pitchFamily="34" charset="0"/>
+                <a:ea typeface="Meiryo" pitchFamily="34" charset="-122"/>
+                <a:cs typeface="Meiryo" pitchFamily="34" charset="-120"/>
+              </a:rPr>
+              <a:t>外注原価は契約で固定できますが、1本の受注に営業が使う時間はリピート率で2倍以上変わります。</a:t>
+            </a:r>
+            <a:endParaRPr lang="en-US" sz="1000" dirty="0"/>
           </a:p>
         </p:txBody>
       </p:sp>
@@ -19740,7 +21755,7 @@
                 <a:ea typeface="Meiryo" pitchFamily="34" charset="-122"/>
                 <a:cs typeface="Meiryo" pitchFamily="34" charset="-120"/>
               </a:rPr>
-              <a:t>出所: サイバーエージェント 国内動画広告の市場調査 / Vidico・agent-media(米国相場)。SAM・SOMは [仮置き]</a:t>
+              <a:t>すべて [仮置き]。P0の有償テストとP2の最初の3案件で実測して差し替えます。</a:t>
             </a:r>
             <a:endParaRPr lang="en-US" sz="850" dirty="0"/>
           </a:p>

--- a/投資家向け企画書.pptx
+++ b/投資家向け企画書.pptx
@@ -779,7 +779,7 @@
                 </a:solidFill>
                 <a:latin typeface="Meiryo"/>
               </a:rPr>
-              <a:t>売上高と営業利益の推移(単位: 百万円 / 計画値)</a:t>
+              <a:t>売上高と営業利益の推移(単位: 百万円 / 楽観ケース)</a:t>
             </a:r>
           </a:p>
         </c:rich>
@@ -876,16 +876,16 @@
                 <c:formatCode>General</c:formatCode>
                 <c:ptCount val="5"/>
                 <c:pt idx="0">
-                  <c:v>14</c:v>
+                  <c:v>27</c:v>
                 </c:pt>
                 <c:pt idx="1">
-                  <c:v>100</c:v>
+                  <c:v>105</c:v>
                 </c:pt>
                 <c:pt idx="2">
                   <c:v>250</c:v>
                 </c:pt>
                 <c:pt idx="3">
-                  <c:v>500</c:v>
+                  <c:v>550</c:v>
                 </c:pt>
                 <c:pt idx="4">
                   <c:v>1000</c:v>
@@ -976,19 +976,19 @@
                 <c:formatCode>General</c:formatCode>
                 <c:ptCount val="5"/>
                 <c:pt idx="0">
-                  <c:v>-20</c:v>
+                  <c:v>-10</c:v>
                 </c:pt>
                 <c:pt idx="1">
-                  <c:v>-8</c:v>
+                  <c:v>11</c:v>
                 </c:pt>
                 <c:pt idx="2">
-                  <c:v>10</c:v>
+                  <c:v>30</c:v>
                 </c:pt>
                 <c:pt idx="3">
-                  <c:v>50</c:v>
+                  <c:v>80</c:v>
                 </c:pt>
                 <c:pt idx="4">
-                  <c:v>120</c:v>
+                  <c:v>180</c:v>
                 </c:pt>
               </c:numCache>
             </c:numRef>
@@ -1185,7 +1185,7 @@
                 </a:solidFill>
                 <a:latin typeface="Meiryo"/>
               </a:rPr>
-              <a:t>調達資金の使途(単位: 万円)</a:t>
+              <a:t>調達資金の使途(単位: 万円 / 合計5,000万)</a:t>
             </a:r>
           </a:p>
         </c:rich>
@@ -1529,25 +1529,25 @@
               <c:numCache>
                 <c:ptCount val="7"/>
                 <c:pt idx="0">
-                  <c:v>1400</c:v>
+                  <c:v>2000</c:v>
                 </c:pt>
                 <c:pt idx="1">
-                  <c:v>300</c:v>
+                  <c:v>450</c:v>
                 </c:pt>
                 <c:pt idx="2">
-                  <c:v>250</c:v>
+                  <c:v>300</c:v>
                 </c:pt>
                 <c:pt idx="3">
                   <c:v>150</c:v>
                 </c:pt>
                 <c:pt idx="4">
-                  <c:v>200</c:v>
+                  <c:v>250</c:v>
                 </c:pt>
                 <c:pt idx="5">
-                  <c:v>700</c:v>
+                  <c:v>900</c:v>
                 </c:pt>
                 <c:pt idx="6">
-                  <c:v>700</c:v>
+                  <c:v>950</c:v>
                 </c:pt>
               </c:numCache>
             </c:numRef>
@@ -6858,7 +6858,7 @@
                 <a:ea typeface="Meiryo" pitchFamily="34" charset="-122"/>
                 <a:cs typeface="Meiryo" pitchFamily="34" charset="-120"/>
               </a:rPr>
-              <a:t>単月黒字化は3年目。各年が上場のどのゲートに当たるかを下段に併記しています</a:t>
+              <a:t>楽観ケースを採用。単月黒字化は2年目、各年が上場のどのゲートに当たるかを下段に併記</a:t>
             </a:r>
             <a:endParaRPr lang="en-US" sz="1250" dirty="0"/>
           </a:p>
@@ -6995,7 +6995,7 @@
                 <a:ea typeface="Meiryo" pitchFamily="34" charset="-122"/>
                 <a:cs typeface="Meiryo" pitchFamily="34" charset="-120"/>
               </a:rPr>
-              <a:t>受注29本、売上1,400万。</a:t>
+              <a:t>受注54本・売上2,700万。</a:t>
             </a:r>
             <a:endParaRPr lang="en-US" sz="1050" dirty="0"/>
           </a:p>
@@ -7114,7 +7114,7 @@
                 <a:ea typeface="Meiryo" pitchFamily="34" charset="-122"/>
                 <a:cs typeface="Meiryo" pitchFamily="34" charset="-120"/>
               </a:rPr>
-              <a:t>3年目 ― 単月黒字化</a:t>
+              <a:t>2年目 ― 単月黒字化</a:t>
             </a:r>
             <a:endParaRPr lang="en-US" sz="1350" dirty="0"/>
           </a:p>
@@ -7156,7 +7156,7 @@
                 <a:ea typeface="Meiryo" pitchFamily="34" charset="-122"/>
                 <a:cs typeface="Meiryo" pitchFamily="34" charset="-120"/>
               </a:rPr>
-              <a:t>日本側8〜10名で損益分岐を越える。</a:t>
+              <a:t>受注190本・年商1億。</a:t>
             </a:r>
             <a:endParaRPr lang="en-US" sz="1050" dirty="0"/>
           </a:p>
@@ -7176,7 +7176,7 @@
                 <a:ea typeface="Meiryo" pitchFamily="34" charset="-122"/>
                 <a:cs typeface="Meiryo" pitchFamily="34" charset="-120"/>
               </a:rPr>
-              <a:t>年商1億を超え、リピートが受注の</a:t>
+              <a:t>日本側8名で損益分岐を越える。</a:t>
             </a:r>
             <a:endParaRPr lang="en-US" sz="1050" dirty="0"/>
           </a:p>
@@ -7196,7 +7196,7 @@
                 <a:ea typeface="Meiryo" pitchFamily="34" charset="-122"/>
                 <a:cs typeface="Meiryo" pitchFamily="34" charset="-120"/>
               </a:rPr>
-              <a:t>30%以上を占める状態を目指す。</a:t>
+              <a:t>リピートが受注の30%以上へ。</a:t>
             </a:r>
             <a:endParaRPr lang="en-US" sz="1050" dirty="0"/>
           </a:p>
@@ -7211,7 +7211,7 @@
         <p:spPr>
           <a:xfrm>
             <a:off x="7772400" y="4572000"/>
-            <a:ext cx="3822192" cy="731520"/>
+            <a:ext cx="3822192" cy="804672"/>
           </a:xfrm>
           <a:prstGeom prst="rect">
             <a:avLst/>
@@ -7290,7 +7290,7 @@
         <p:spPr>
           <a:xfrm>
             <a:off x="8247888" y="5120640"/>
-            <a:ext cx="3108960" cy="0"/>
+            <a:ext cx="3108960" cy="73152"/>
           </a:xfrm>
           <a:prstGeom prst="rect">
             <a:avLst/>
@@ -7317,7 +7317,7 @@
                 <a:ea typeface="Meiryo" pitchFamily="34" charset="-122"/>
                 <a:cs typeface="Meiryo" pitchFamily="34" charset="-120"/>
               </a:rPr>
-              <a:t>日本側35〜50名。プロダクト比率を上げる。</a:t>
+              <a:t>日本側35〜50名。上場申請の水準へ。</a:t>
             </a:r>
             <a:endParaRPr lang="en-US" sz="1050" dirty="0"/>
           </a:p>
@@ -7519,7 +7519,7 @@
                 <a:ea typeface="Meiryo" pitchFamily="34" charset="-122"/>
                 <a:cs typeface="Meiryo" pitchFamily="34" charset="-120"/>
               </a:rPr>
-              <a:t>P3ゲート / 年商1億・リピート30%</a:t>
+              <a:t>P3ゲート・単月黒字化 / 年商1億</a:t>
             </a:r>
             <a:endParaRPr lang="en-US" sz="850" dirty="0"/>
           </a:p>
@@ -7620,7 +7620,7 @@
                 <a:ea typeface="Meiryo" pitchFamily="34" charset="-122"/>
                 <a:cs typeface="Meiryo" pitchFamily="34" charset="-120"/>
               </a:rPr>
-              <a:t>単月黒字化 / 日本側8〜10名</a:t>
+              <a:t>P4ゲート / プロダクト比率10%</a:t>
             </a:r>
             <a:endParaRPr lang="en-US" sz="850" dirty="0"/>
           </a:p>
@@ -7679,7 +7679,7 @@
                 <a:ea typeface="Meiryo" pitchFamily="34" charset="-122"/>
                 <a:cs typeface="Meiryo" pitchFamily="34" charset="-120"/>
               </a:rPr>
-              <a:t>4年目</a:t>
+              <a:t>4〜5年目</a:t>
             </a:r>
             <a:endParaRPr lang="en-US" sz="950" dirty="0"/>
           </a:p>
@@ -7721,7 +7721,7 @@
                 <a:ea typeface="Meiryo" pitchFamily="34" charset="-122"/>
                 <a:cs typeface="Meiryo" pitchFamily="34" charset="-120"/>
               </a:rPr>
-              <a:t>P4ゲート / プロダクト比率10%</a:t>
+              <a:t>N-2期の監査開始 / 内部管理体制</a:t>
             </a:r>
             <a:endParaRPr lang="en-US" sz="850" dirty="0"/>
           </a:p>
@@ -7780,7 +7780,7 @@
                 <a:ea typeface="Meiryo" pitchFamily="34" charset="-122"/>
                 <a:cs typeface="Meiryo" pitchFamily="34" charset="-120"/>
               </a:rPr>
-              <a:t>5年目 → 上場申請</a:t>
+              <a:t>7年目(2033年) → 上場</a:t>
             </a:r>
             <a:endParaRPr lang="en-US" sz="950" dirty="0"/>
           </a:p>
@@ -7861,7 +7861,7 @@
                 <a:ea typeface="Meiryo" pitchFamily="34" charset="-122"/>
                 <a:cs typeface="Meiryo" pitchFamily="34" charset="-120"/>
               </a:rPr>
-              <a:t>売上の各年が、次頁「上場までの流れ」のどのゲートに当たるかを下段に併記。詳細な資金繰りは budget_model.xlsx(263数式)で連動計算しています。</a:t>
+              <a:t>楽観ケースを採用(MARKET_SIZING 9-1 の受注本数54/190/420本を基礎)。保守ケースは1年目29本・売上1,400万で、単月黒字化は3年目にずれます。</a:t>
             </a:r>
             <a:endParaRPr lang="en-US" sz="850" dirty="0"/>
           </a:p>
@@ -11087,7 +11087,7 @@
                 <a:ea typeface="Meiryo" pitchFamily="34" charset="-122"/>
                 <a:cs typeface="Meiryo" pitchFamily="34" charset="-120"/>
               </a:rPr>
-              <a:t>調達目標 3,700万円。1年目末に固定費2ヶ月分を残す設計です</a:t>
+              <a:t>調達目標 5,000万円。デットで立ち上げ、実績が出てからエクイティを入れます</a:t>
             </a:r>
             <a:endParaRPr lang="en-US" sz="1250" dirty="0"/>
           </a:p>
@@ -11101,7 +11101,7 @@
         </p:nvGraphicFramePr>
         <p:xfrm>
           <a:off x="594360" y="1600200"/>
-          <a:ext cx="5029200" cy="3794760"/>
+          <a:ext cx="5029200" cy="4023360"/>
         </p:xfrm>
         <a:graphic xmlns:a="http://schemas.openxmlformats.org/drawingml/2006/main">
           <a:graphicData uri="http://schemas.openxmlformats.org/drawingml/2006/chart">
@@ -11118,7 +11118,7 @@
         <p:spPr>
           <a:xfrm>
             <a:off x="5943600" y="1600200"/>
-            <a:ext cx="2688336" cy="1371600"/>
+            <a:ext cx="2688336" cy="1481328"/>
           </a:xfrm>
           <a:prstGeom prst="rect">
             <a:avLst/>
@@ -11216,7 +11216,7 @@
         <p:spPr>
           <a:xfrm>
             <a:off x="6199632" y="2752344"/>
-            <a:ext cx="2176272" cy="73152"/>
+            <a:ext cx="2176272" cy="182880"/>
           </a:xfrm>
           <a:prstGeom prst="rect">
             <a:avLst/>
@@ -11255,7 +11255,7 @@
         <p:spPr>
           <a:xfrm>
             <a:off x="8906256" y="1600200"/>
-            <a:ext cx="2688336" cy="1371600"/>
+            <a:ext cx="2688336" cy="1481328"/>
           </a:xfrm>
           <a:prstGeom prst="rect">
             <a:avLst/>
@@ -11353,7 +11353,7 @@
         <p:spPr>
           <a:xfrm>
             <a:off x="9162288" y="2752344"/>
-            <a:ext cx="2176272" cy="73152"/>
+            <a:ext cx="2176272" cy="182880"/>
           </a:xfrm>
           <a:prstGeom prst="rect">
             <a:avLst/>
@@ -11377,7 +11377,7 @@
                 <a:ea typeface="Meiryo" pitchFamily="34" charset="-122"/>
                 <a:cs typeface="Meiryo" pitchFamily="34" charset="-120"/>
               </a:rPr>
-              <a:t>公庫1,200万 + 東京都制度融資1,000万の協調</a:t>
+              <a:t>公庫1,200万 + 制度融資1,000万の協調</a:t>
             </a:r>
             <a:endParaRPr lang="en-US" sz="950" dirty="0"/>
           </a:p>
@@ -11391,8 +11391,8 @@
         </p:nvSpPr>
         <p:spPr>
           <a:xfrm>
-            <a:off x="5943600" y="3127248"/>
-            <a:ext cx="5650992" cy="1901952"/>
+            <a:off x="5943600" y="3218688"/>
+            <a:ext cx="5650992" cy="1417320"/>
           </a:xfrm>
           <a:prstGeom prst="rect">
             <a:avLst/>
@@ -11405,13 +11405,150 @@
       </p:sp>
       <p:sp>
         <p:nvSpPr>
-          <p:cNvPr id="16" name="Shape 13"/>
+          <p:cNvPr id="16" name="Text 13"/>
+          <p:cNvSpPr txBox="1"/>
+          <p:nvPr/>
+        </p:nvSpPr>
+        <p:spPr>
+          <a:xfrm>
+            <a:off x="6199632" y="3419856"/>
+            <a:ext cx="5138928" cy="658368"/>
+          </a:xfrm>
+          <a:prstGeom prst="rect">
+            <a:avLst/>
+          </a:prstGeom>
+          <a:noFill/>
+          <a:ln/>
+        </p:spPr>
+        <p:txBody>
+          <a:bodyPr wrap="square" lIns="0" tIns="0" rIns="0" bIns="0" rtlCol="0" anchor="ctr"/>
+          <a:lstStyle/>
+          <a:p>
+            <a:pPr indent="0" marL="0">
+              <a:buNone/>
+            </a:pPr>
+            <a:r>
+              <a:rPr lang="en-US" sz="3000" b="1" dirty="0">
+                <a:solidFill>
+                  <a:srgbClr val="C9962C"/>
+                </a:solidFill>
+                <a:latin typeface="Meiryo" pitchFamily="34" charset="0"/>
+                <a:ea typeface="Meiryo" pitchFamily="34" charset="-122"/>
+                <a:cs typeface="Meiryo" pitchFamily="34" charset="-120"/>
+              </a:rPr>
+              <a:t>2,000万</a:t>
+            </a:r>
+            <a:endParaRPr lang="en-US" sz="3000" dirty="0"/>
+          </a:p>
+        </p:txBody>
+      </p:sp>
+      <p:sp>
+        <p:nvSpPr>
+          <p:cNvPr id="17" name="Text 14"/>
+          <p:cNvSpPr txBox="1"/>
+          <p:nvPr/>
+        </p:nvSpPr>
+        <p:spPr>
+          <a:xfrm>
+            <a:off x="6199632" y="4096512"/>
+            <a:ext cx="5138928" cy="274320"/>
+          </a:xfrm>
+          <a:prstGeom prst="rect">
+            <a:avLst/>
+          </a:prstGeom>
+          <a:noFill/>
+          <a:ln/>
+        </p:spPr>
+        <p:txBody>
+          <a:bodyPr wrap="square" lIns="0" tIns="0" rIns="0" bIns="0" rtlCol="0" anchor="ctr"/>
+          <a:lstStyle/>
+          <a:p>
+            <a:pPr indent="0" marL="0">
+              <a:buNone/>
+            </a:pPr>
+            <a:r>
+              <a:rPr lang="en-US" sz="1150" b="1" dirty="0">
+                <a:solidFill>
+                  <a:srgbClr val="16161A"/>
+                </a:solidFill>
+                <a:latin typeface="Meiryo" pitchFamily="34" charset="0"/>
+                <a:ea typeface="Meiryo" pitchFamily="34" charset="-122"/>
+                <a:cs typeface="Meiryo" pitchFamily="34" charset="-120"/>
+              </a:rPr>
+              <a:t>シード(エクイティ)</a:t>
+            </a:r>
+            <a:endParaRPr lang="en-US" sz="1150" dirty="0"/>
+          </a:p>
+        </p:txBody>
+      </p:sp>
+      <p:sp>
+        <p:nvSpPr>
+          <p:cNvPr id="18" name="Text 15"/>
+          <p:cNvSpPr txBox="1"/>
+          <p:nvPr/>
+        </p:nvSpPr>
+        <p:spPr>
+          <a:xfrm>
+            <a:off x="6199632" y="4370832"/>
+            <a:ext cx="5138928" cy="118872"/>
+          </a:xfrm>
+          <a:prstGeom prst="rect">
+            <a:avLst/>
+          </a:prstGeom>
+          <a:noFill/>
+          <a:ln/>
+        </p:spPr>
+        <p:txBody>
+          <a:bodyPr wrap="square" lIns="0" tIns="0" rIns="0" bIns="0" rtlCol="0" anchor="t"/>
+          <a:lstStyle/>
+          <a:p>
+            <a:pPr indent="0" marL="0">
+              <a:buNone/>
+            </a:pPr>
+            <a:r>
+              <a:rPr lang="en-US" sz="950" dirty="0">
+                <a:solidFill>
+                  <a:srgbClr val="6E6E76"/>
+                </a:solidFill>
+                <a:latin typeface="Meiryo" pitchFamily="34" charset="0"/>
+                <a:ea typeface="Meiryo" pitchFamily="34" charset="-122"/>
+                <a:cs typeface="Meiryo" pitchFamily="34" charset="-120"/>
+              </a:rPr>
+              <a:t>2027年春・P2のゲート達成後に実施。放出20〜25%を想定します</a:t>
+            </a:r>
+            <a:endParaRPr lang="en-US" sz="950" dirty="0"/>
+          </a:p>
+        </p:txBody>
+      </p:sp>
+      <p:sp>
+        <p:nvSpPr>
+          <p:cNvPr id="19" name="Shape 16"/>
           <p:cNvSpPr/>
           <p:nvPr/>
         </p:nvSpPr>
         <p:spPr>
           <a:xfrm>
-            <a:off x="6181344" y="3401568"/>
+            <a:off x="5943600" y="4754880"/>
+            <a:ext cx="5650992" cy="1060704"/>
+          </a:xfrm>
+          <a:prstGeom prst="rect">
+            <a:avLst/>
+          </a:prstGeom>
+          <a:solidFill>
+            <a:srgbClr val="F4F2EF"/>
+          </a:solidFill>
+          <a:ln/>
+        </p:spPr>
+      </p:sp>
+      <p:sp>
+        <p:nvSpPr>
+          <p:cNvPr id="20" name="Shape 17"/>
+          <p:cNvSpPr/>
+          <p:nvPr/>
+        </p:nvSpPr>
+        <p:spPr>
+          <a:xfrm>
+            <a:off x="6181344" y="5029200"/>
             <a:ext cx="118872" cy="118872"/>
           </a:xfrm>
           <a:prstGeom prst="rect">
@@ -11425,13 +11562,13 @@
       </p:sp>
       <p:sp>
         <p:nvSpPr>
-          <p:cNvPr id="17" name="Text 14"/>
-          <p:cNvSpPr txBox="1"/>
-          <p:nvPr/>
-        </p:nvSpPr>
-        <p:spPr>
-          <a:xfrm>
-            <a:off x="6419088" y="3310128"/>
+          <p:cNvPr id="21" name="Text 18"/>
+          <p:cNvSpPr txBox="1"/>
+          <p:nvPr/>
+        </p:nvSpPr>
+        <p:spPr>
+          <a:xfrm>
+            <a:off x="6419088" y="4937760"/>
             <a:ext cx="4937760" cy="310896"/>
           </a:xfrm>
           <a:prstGeom prst="rect">
@@ -11464,14 +11601,14 @@
       </p:sp>
       <p:sp>
         <p:nvSpPr>
-          <p:cNvPr id="18" name="Text 15"/>
-          <p:cNvSpPr txBox="1"/>
-          <p:nvPr/>
-        </p:nvSpPr>
-        <p:spPr>
-          <a:xfrm>
-            <a:off x="6419088" y="3675888"/>
-            <a:ext cx="4937760" cy="1170432"/>
+          <p:cNvPr id="22" name="Text 19"/>
+          <p:cNvSpPr txBox="1"/>
+          <p:nvPr/>
+        </p:nvSpPr>
+        <p:spPr>
+          <a:xfrm>
+            <a:off x="6419088" y="5303520"/>
+            <a:ext cx="4937760" cy="329184"/>
           </a:xfrm>
           <a:prstGeom prst="rect">
             <a:avLst/>
@@ -11498,7 +11635,7 @@
                 <a:ea typeface="Meiryo" pitchFamily="34" charset="-122"/>
                 <a:cs typeface="Meiryo" pitchFamily="34" charset="-120"/>
               </a:rPr>
-              <a:t>フェーズ1〜2はデットで通します。実績がない時点でエクイティを</a:t>
+              <a:t>フェーズ1〜2はデットで通す。実績がない時点のエクイティは安く売ることになる。</a:t>
             </a:r>
             <a:endParaRPr lang="en-US" sz="1050" dirty="0"/>
           </a:p>
@@ -11518,156 +11655,54 @@
                 <a:ea typeface="Meiryo" pitchFamily="34" charset="-122"/>
                 <a:cs typeface="Meiryo" pitchFamily="34" charset="-120"/>
               </a:rPr>
-              <a:t>入れると、安く売ることになるためです。</a:t>
+              <a:t>自己出資があれば放出20〜25%、なければJ-KISSで価格決定を先送り。</a:t>
             </a:r>
             <a:endParaRPr lang="en-US" sz="1050" dirty="0"/>
           </a:p>
-          <a:p>
-            <a:pPr indent="0" marL="0">
-              <a:lnSpc>
-                <a:spcPct val="128000"/>
-              </a:lnSpc>
-              <a:buNone/>
-            </a:pPr>
-            <a:r>
-              <a:rPr lang="en-US" sz="1050" dirty="0">
-                <a:solidFill>
-                  <a:srgbClr val="3A3A42"/>
-                </a:solidFill>
-                <a:latin typeface="Meiryo" pitchFamily="34" charset="0"/>
-                <a:ea typeface="Meiryo" pitchFamily="34" charset="-122"/>
-                <a:cs typeface="Meiryo" pitchFamily="34" charset="-120"/>
-              </a:rPr>
-              <a:t>エクイティはP2のゲート達成後(2027年春以降)に回します。</a:t>
+        </p:txBody>
+      </p:sp>
+      <p:sp>
+        <p:nvSpPr>
+          <p:cNvPr id="23" name="Text 20"/>
+          <p:cNvSpPr txBox="1"/>
+          <p:nvPr/>
+        </p:nvSpPr>
+        <p:spPr>
+          <a:xfrm>
+            <a:off x="594360" y="5943600"/>
+            <a:ext cx="11000232" cy="274320"/>
+          </a:xfrm>
+          <a:prstGeom prst="rect">
+            <a:avLst/>
+          </a:prstGeom>
+          <a:noFill/>
+          <a:ln/>
+        </p:spPr>
+        <p:txBody>
+          <a:bodyPr wrap="square" lIns="0" tIns="0" rIns="0" bIns="0" rtlCol="0" anchor="ctr"/>
+          <a:lstStyle/>
+          <a:p>
+            <a:pPr indent="0" marL="0">
+              <a:buNone/>
+            </a:pPr>
+            <a:r>
+              <a:rPr lang="en-US" sz="1050" b="1" dirty="0">
+                <a:solidFill>
+                  <a:srgbClr val="B3121B"/>
+                </a:solidFill>
+                <a:latin typeface="Meiryo" pitchFamily="34" charset="0"/>
+                <a:ea typeface="Meiryo" pitchFamily="34" charset="-122"/>
+                <a:cs typeface="Meiryo" pitchFamily="34" charset="-120"/>
+              </a:rPr>
+              <a:t>⚠ 補助金は資金計画に算入していません。すべて後払い(精算払い)で入金は1年以上先のため、資金繰りの前提にはしません。</a:t>
             </a:r>
             <a:endParaRPr lang="en-US" sz="1050" dirty="0"/>
           </a:p>
-          <a:p>
-            <a:pPr indent="0" marL="0">
-              <a:lnSpc>
-                <a:spcPct val="128000"/>
-              </a:lnSpc>
-              <a:buNone/>
-            </a:pPr>
-            <a:r>
-              <a:rPr lang="en-US" sz="1050" dirty="0">
-                <a:solidFill>
-                  <a:srgbClr val="3A3A42"/>
-                </a:solidFill>
-                <a:latin typeface="Meiryo" pitchFamily="34" charset="0"/>
-                <a:ea typeface="Meiryo" pitchFamily="34" charset="-122"/>
-                <a:cs typeface="Meiryo" pitchFamily="34" charset="-120"/>
-              </a:rPr>
-              <a:t>自己出資があれば放出20〜25%、なければJ-KISSで価格決定を先送り。</a:t>
-            </a:r>
-            <a:endParaRPr lang="en-US" sz="1050" dirty="0"/>
-          </a:p>
-        </p:txBody>
-      </p:sp>
-      <p:sp>
-        <p:nvSpPr>
-          <p:cNvPr id="19" name="Shape 16"/>
-          <p:cNvSpPr/>
-          <p:nvPr/>
-        </p:nvSpPr>
-        <p:spPr>
-          <a:xfrm>
-            <a:off x="5943600" y="5175504"/>
-            <a:ext cx="5650992" cy="932688"/>
-          </a:xfrm>
-          <a:prstGeom prst="rect">
-            <a:avLst/>
-          </a:prstGeom>
-          <a:solidFill>
-            <a:srgbClr val="16161A"/>
-          </a:solidFill>
-          <a:ln/>
-        </p:spPr>
-      </p:sp>
-      <p:sp>
-        <p:nvSpPr>
-          <p:cNvPr id="20" name="Text 17"/>
-          <p:cNvSpPr txBox="1"/>
-          <p:nvPr/>
-        </p:nvSpPr>
-        <p:spPr>
-          <a:xfrm>
-            <a:off x="6217920" y="5303520"/>
-            <a:ext cx="5102352" cy="292608"/>
-          </a:xfrm>
-          <a:prstGeom prst="rect">
-            <a:avLst/>
-          </a:prstGeom>
-          <a:noFill/>
-          <a:ln/>
-        </p:spPr>
-        <p:txBody>
-          <a:bodyPr wrap="square" lIns="0" tIns="0" rIns="0" bIns="0" rtlCol="0" anchor="ctr"/>
-          <a:lstStyle/>
-          <a:p>
-            <a:pPr indent="0" marL="0">
-              <a:buNone/>
-            </a:pPr>
-            <a:r>
-              <a:rPr lang="en-US" sz="1200" b="1" dirty="0">
-                <a:solidFill>
-                  <a:srgbClr val="C9962C"/>
-                </a:solidFill>
-                <a:latin typeface="Meiryo" pitchFamily="34" charset="0"/>
-                <a:ea typeface="Meiryo" pitchFamily="34" charset="-122"/>
-                <a:cs typeface="Meiryo" pitchFamily="34" charset="-120"/>
-              </a:rPr>
-              <a:t>補助金は資金計画に算入していません</a:t>
-            </a:r>
-            <a:endParaRPr lang="en-US" sz="1200" dirty="0"/>
-          </a:p>
-        </p:txBody>
-      </p:sp>
-      <p:sp>
-        <p:nvSpPr>
-          <p:cNvPr id="21" name="Text 18"/>
-          <p:cNvSpPr txBox="1"/>
-          <p:nvPr/>
-        </p:nvSpPr>
-        <p:spPr>
-          <a:xfrm>
-            <a:off x="6217920" y="5596128"/>
-            <a:ext cx="5102352" cy="402336"/>
-          </a:xfrm>
-          <a:prstGeom prst="rect">
-            <a:avLst/>
-          </a:prstGeom>
-          <a:noFill/>
-          <a:ln/>
-        </p:spPr>
-        <p:txBody>
-          <a:bodyPr wrap="square" lIns="0" tIns="0" rIns="0" bIns="0" rtlCol="0" anchor="t"/>
-          <a:lstStyle/>
-          <a:p>
-            <a:pPr indent="0" marL="0">
-              <a:lnSpc>
-                <a:spcPct val="125000"/>
-              </a:lnSpc>
-              <a:buNone/>
-            </a:pPr>
-            <a:r>
-              <a:rPr lang="en-US" sz="1000" dirty="0">
-                <a:solidFill>
-                  <a:srgbClr val="EDEBE7"/>
-                </a:solidFill>
-                <a:latin typeface="Meiryo" pitchFamily="34" charset="0"/>
-                <a:ea typeface="Meiryo" pitchFamily="34" charset="-122"/>
-                <a:cs typeface="Meiryo" pitchFamily="34" charset="-120"/>
-              </a:rPr>
-              <a:t>すべて後払い(精算払い)で入金は1年以上先です。狙う制度は特定していますが、資金繰りの前提にはしません。</a:t>
-            </a:r>
-            <a:endParaRPr lang="en-US" sz="1000" dirty="0"/>
-          </a:p>
-        </p:txBody>
-      </p:sp>
-      <p:sp>
-        <p:nvSpPr>
-          <p:cNvPr id="22" name="Text 19"/>
+        </p:txBody>
+      </p:sp>
+      <p:sp>
+        <p:nvSpPr>
+          <p:cNvPr id="24" name="Text 21"/>
           <p:cNvSpPr txBox="1"/>
           <p:nvPr/>
         </p:nvSpPr>
@@ -11706,7 +11741,7 @@
       </p:sp>
       <p:sp>
         <p:nvSpPr>
-          <p:cNvPr id="23" name="Text 20"/>
+          <p:cNvPr id="25" name="Text 22"/>
           <p:cNvSpPr txBox="1"/>
           <p:nvPr/>
         </p:nvSpPr>
@@ -13343,7 +13378,7 @@
                 <a:ea typeface="Meiryo" pitchFamily="34" charset="-122"/>
                 <a:cs typeface="Meiryo" pitchFamily="34" charset="-120"/>
               </a:rPr>
-              <a:t>3,700万円</a:t>
+              <a:t>5,000万円</a:t>
             </a:r>
             <a:endParaRPr lang="en-US" sz="2400" dirty="0"/>
           </a:p>
@@ -13539,7 +13574,7 @@
                 <a:ea typeface="Meiryo" pitchFamily="34" charset="-122"/>
                 <a:cs typeface="Meiryo" pitchFamily="34" charset="-120"/>
               </a:rPr>
-              <a:t>2033年前後</a:t>
+              <a:t>2033年</a:t>
             </a:r>
             <a:endParaRPr lang="en-US" sz="2400" dirty="0"/>
           </a:p>
@@ -13809,7 +13844,7 @@
                 <a:ea typeface="Meiryo" pitchFamily="34" charset="-122"/>
                 <a:cs typeface="Meiryo" pitchFamily="34" charset="-120"/>
               </a:rPr>
-              <a:t>5年後、東証グロース市場への上場を目指す。</a:t>
+              <a:t>2033年、東証グロース市場への上場を目指す。</a:t>
             </a:r>
             <a:endParaRPr lang="en-US" sz="1650" dirty="0"/>
           </a:p>
@@ -14162,7 +14197,7 @@
                 <a:ea typeface="Meiryo" pitchFamily="34" charset="-122"/>
                 <a:cs typeface="Meiryo" pitchFamily="34" charset="-120"/>
               </a:rPr>
-              <a:t>3,700万円</a:t>
+              <a:t>5,000万円</a:t>
             </a:r>
             <a:endParaRPr lang="en-US" sz="3000" dirty="0"/>
           </a:p>
@@ -14240,7 +14275,7 @@
                 <a:ea typeface="Meiryo" pitchFamily="34" charset="-122"/>
                 <a:cs typeface="Meiryo" pitchFamily="34" charset="-120"/>
               </a:rPr>
-              <a:t>資本金800万 + 融資2,200万 + 増資</a:t>
+              <a:t>資本金800万 + 創業融資2,200万 + シード2,000万</a:t>
             </a:r>
             <a:endParaRPr lang="en-US" sz="950" dirty="0"/>
           </a:p>

--- a/投資家向け企画書.pptx
+++ b/投資家向け企画書.pptx
@@ -28587,7 +28587,7 @@
                 <a:ea typeface="Yu Gothic" pitchFamily="34" charset="-122"/>
                 <a:cs typeface="Yu Gothic" pitchFamily="34" charset="-120"/>
               </a:rPr>
-              <a:t>分配の原資を「広告」ではなく「課金」に置きます。理由は下段の試算です</a:t>
+              <a:t>1話の解放を「待つ／広告／課金」の3択にします。国内1位の BUMP と同じ形です</a:t>
             </a:r>
             <a:endParaRPr lang="en-US" sz="1200" dirty="0"/>
           </a:p>
@@ -29649,7 +29649,7 @@
                       <a:r>
                         <a:rPr lang="en-US" sz="1000" b="1" dirty="0">
                           <a:solidFill>
-                            <a:srgbClr val="6E6E76"/>
+                            <a:srgbClr val="1F6F63"/>
                           </a:solidFill>
                           <a:latin typeface="Yu Gothic" pitchFamily="34" charset="0"/>
                           <a:ea typeface="Yu Gothic" pitchFamily="34" charset="-122"/>
@@ -29722,7 +29722,7 @@
                           <a:ea typeface="Yu Gothic" pitchFamily="34" charset="-122"/>
                           <a:cs typeface="Yu Gothic" pitchFamily="34" charset="-120"/>
                         </a:rPr>
-                        <a:t>広告収益</a:t>
+                        <a:t>広告収益（リワードで1話アンロック）</a:t>
                       </a:r>
                       <a:endParaRPr lang="en-US" sz="1000" dirty="0">
                         <a:latin typeface="Yu Gothic" charset="0"/>
@@ -29848,7 +29848,7 @@
                         <a:buNone/>
                       </a:pPr>
                       <a:r>
-                        <a:rPr lang="en-US" sz="1000" dirty="0">
+                        <a:rPr lang="en-US" sz="1000" b="1" dirty="0">
                           <a:solidFill>
                             <a:srgbClr val="3A3A42"/>
                           </a:solidFill>
@@ -29856,7 +29856,7 @@
                           <a:ea typeface="Yu Gothic" pitchFamily="34" charset="-122"/>
                           <a:cs typeface="Yu Gothic" pitchFamily="34" charset="-120"/>
                         </a:rPr>
-                        <a:t>2年目〜</a:t>
+                        <a:t>6ヶ月目〜</a:t>
                       </a:r>
                       <a:endParaRPr lang="en-US" sz="1000" dirty="0">
                         <a:latin typeface="Yu Gothic" charset="0"/>
@@ -29923,7 +29923,7 @@
                           <a:ea typeface="Yu Gothic" pitchFamily="34" charset="-122"/>
                           <a:cs typeface="Yu Gothic" pitchFamily="34" charset="-120"/>
                         </a:rPr>
-                        <a:t>補助的に置く。主にしない理由は下段</a:t>
+                        <a:t>非課金層の収益化。実効eCPM ¥1,200。BUMPと同型</a:t>
                       </a:r>
                       <a:endParaRPr lang="en-US" sz="1000" dirty="0">
                         <a:latin typeface="Yu Gothic" charset="0"/>
@@ -30330,7 +30330,7 @@
             <a:avLst/>
           </a:prstGeom>
           <a:solidFill>
-            <a:srgbClr val="FBF1F1"/>
+            <a:srgbClr val="F4F2EF"/>
           </a:solidFill>
           <a:ln/>
         </p:spPr>
@@ -30343,14 +30343,14 @@
         </p:nvSpPr>
         <p:spPr>
           <a:xfrm>
-            <a:off x="594360" y="3639312"/>
-            <a:ext cx="45720" cy="2194560"/>
+            <a:off x="813816" y="3895344"/>
+            <a:ext cx="109728" cy="109728"/>
           </a:xfrm>
           <a:prstGeom prst="rect">
             <a:avLst/>
           </a:prstGeom>
           <a:solidFill>
-            <a:srgbClr val="B3121B"/>
+            <a:srgbClr val="1F6F63"/>
           </a:solidFill>
           <a:ln/>
         </p:spPr>
@@ -30363,8 +30363,8 @@
         </p:nvSpPr>
         <p:spPr>
           <a:xfrm>
-            <a:off x="850392" y="3785616"/>
-            <a:ext cx="4905756" cy="274320"/>
+            <a:off x="1033272" y="3803904"/>
+            <a:ext cx="4704588" cy="292608"/>
           </a:xfrm>
           <a:prstGeom prst="rect">
             <a:avLst/>
@@ -30380,17 +30380,17 @@
               <a:buNone/>
             </a:pPr>
             <a:r>
-              <a:rPr lang="en-US" sz="1200" b="1" dirty="0">
-                <a:solidFill>
-                  <a:srgbClr val="B3121B"/>
-                </a:solidFill>
-                <a:latin typeface="Yu Gothic" pitchFamily="34" charset="0"/>
-                <a:ea typeface="Yu Gothic" pitchFamily="34" charset="-122"/>
-                <a:cs typeface="Yu Gothic" pitchFamily="34" charset="-120"/>
-              </a:rPr>
-              <a:t>⚠ 広告分配だと、再生が伸びるほど赤字が膨らみうる</a:t>
-            </a:r>
-            <a:endParaRPr lang="en-US" sz="1200" dirty="0"/>
+              <a:rPr lang="en-US" sz="1250" b="1" dirty="0">
+                <a:solidFill>
+                  <a:srgbClr val="16161A"/>
+                </a:solidFill>
+                <a:latin typeface="Yu Gothic" pitchFamily="34" charset="0"/>
+                <a:ea typeface="Yu Gothic" pitchFamily="34" charset="-122"/>
+                <a:cs typeface="Yu Gothic" pitchFamily="34" charset="-120"/>
+              </a:rPr>
+              <a:t>1話の解放は3択にします（BUMP型）</a:t>
+            </a:r>
+            <a:endParaRPr lang="en-US" sz="1250" dirty="0"/>
           </a:p>
         </p:txBody>
       </p:sp>
@@ -30402,8 +30402,8 @@
         </p:nvSpPr>
         <p:spPr>
           <a:xfrm>
-            <a:off x="850392" y="4114800"/>
-            <a:ext cx="4905756" cy="1572768"/>
+            <a:off x="1033272" y="4151376"/>
+            <a:ext cx="4704588" cy="1499616"/>
           </a:xfrm>
           <a:prstGeom prst="rect">
             <a:avLst/>
@@ -30422,7 +30422,7 @@
               <a:buNone/>
             </a:pPr>
             <a:r>
-              <a:rPr lang="en-US" sz="1000" dirty="0">
+              <a:rPr lang="en-US" sz="1050" dirty="0">
                 <a:solidFill>
                   <a:srgbClr val="3A3A42"/>
                 </a:solidFill>
@@ -30430,9 +30430,9 @@
                 <a:ea typeface="Yu Gothic" pitchFamily="34" charset="-122"/>
                 <a:cs typeface="Yu Gothic" pitchFamily="34" charset="-120"/>
               </a:rPr>
-              <a:t>1再生あたりの配信コスト（縦型1分・約20MB）… 0.06〜0.24円</a:t>
-            </a:r>
-            <a:endParaRPr lang="en-US" sz="1000" dirty="0"/>
+              <a:t>① 待つ　　　24時間で1話無料。収益はゼロだが、離脱を止める</a:t>
+            </a:r>
+            <a:endParaRPr lang="en-US" sz="1050" dirty="0"/>
           </a:p>
           <a:p>
             <a:pPr indent="0" marL="0">
@@ -30442,7 +30442,7 @@
               <a:buNone/>
             </a:pPr>
             <a:r>
-              <a:rPr lang="en-US" sz="1000" dirty="0">
+              <a:rPr lang="en-US" sz="1050" dirty="0">
                 <a:solidFill>
                   <a:srgbClr val="3A3A42"/>
                 </a:solidFill>
@@ -30450,9 +30450,9 @@
                 <a:ea typeface="Yu Gothic" pitchFamily="34" charset="-122"/>
                 <a:cs typeface="Yu Gothic" pitchFamily="34" charset="-120"/>
               </a:rPr>
-              <a:t>1再生あたりの広告収益（ショートRPM ¥20〜80）… 0.02〜0.08円</a:t>
-            </a:r>
-            <a:endParaRPr lang="en-US" sz="1000" dirty="0"/>
+              <a:t>② 広告を見る　リワード広告1本で1話。1日3回まで。実効eCPM ¥1,200</a:t>
+            </a:r>
+            <a:endParaRPr lang="en-US" sz="1050" dirty="0"/>
           </a:p>
           <a:p>
             <a:pPr indent="0" marL="0">
@@ -30462,7 +30462,7 @@
               <a:buNone/>
             </a:pPr>
             <a:r>
-              <a:rPr lang="en-US" sz="1000" dirty="0">
+              <a:rPr lang="en-US" sz="1050" dirty="0">
                 <a:solidFill>
                   <a:srgbClr val="3A3A42"/>
                 </a:solidFill>
@@ -30470,111 +30470,10 @@
                 <a:ea typeface="Yu Gothic" pitchFamily="34" charset="-122"/>
                 <a:cs typeface="Yu Gothic" pitchFamily="34" charset="-120"/>
               </a:rPr>
-              <a:t>広告単価が配信コストを下回る領域があります。だから課金を主に置きます。</a:t>
-            </a:r>
-            <a:endParaRPr lang="en-US" sz="1000" dirty="0"/>
-          </a:p>
-        </p:txBody>
-      </p:sp>
-      <p:sp>
-        <p:nvSpPr>
-          <p:cNvPr id="11" name="Shape 8"/>
-          <p:cNvSpPr/>
-          <p:nvPr/>
-        </p:nvSpPr>
-        <p:spPr>
-          <a:xfrm>
-            <a:off x="6231636" y="3639312"/>
-            <a:ext cx="5362956" cy="2194560"/>
-          </a:xfrm>
-          <a:prstGeom prst="rect">
-            <a:avLst/>
-          </a:prstGeom>
-          <a:solidFill>
-            <a:srgbClr val="F4F2EF"/>
-          </a:solidFill>
-          <a:ln/>
-        </p:spPr>
-      </p:sp>
-      <p:sp>
-        <p:nvSpPr>
-          <p:cNvPr id="12" name="Shape 9"/>
-          <p:cNvSpPr/>
-          <p:nvPr/>
-        </p:nvSpPr>
-        <p:spPr>
-          <a:xfrm>
-            <a:off x="6451092" y="3895344"/>
-            <a:ext cx="109728" cy="109728"/>
-          </a:xfrm>
-          <a:prstGeom prst="rect">
-            <a:avLst/>
-          </a:prstGeom>
-          <a:solidFill>
-            <a:srgbClr val="2A3563"/>
-          </a:solidFill>
-          <a:ln/>
-        </p:spPr>
-      </p:sp>
-      <p:sp>
-        <p:nvSpPr>
-          <p:cNvPr id="13" name="Text 10"/>
-          <p:cNvSpPr txBox="1"/>
-          <p:nvPr/>
-        </p:nvSpPr>
-        <p:spPr>
-          <a:xfrm>
-            <a:off x="6670548" y="3803904"/>
-            <a:ext cx="4704588" cy="292608"/>
-          </a:xfrm>
-          <a:prstGeom prst="rect">
-            <a:avLst/>
-          </a:prstGeom>
-          <a:noFill/>
-          <a:ln/>
-        </p:spPr>
-        <p:txBody>
-          <a:bodyPr wrap="square" lIns="0" tIns="0" rIns="0" bIns="0" rtlCol="0" anchor="ctr"/>
-          <a:lstStyle/>
-          <a:p>
-            <a:pPr indent="0" marL="0">
-              <a:buNone/>
-            </a:pPr>
-            <a:r>
-              <a:rPr lang="en-US" sz="1250" b="1" dirty="0">
-                <a:solidFill>
-                  <a:srgbClr val="16161A"/>
-                </a:solidFill>
-                <a:latin typeface="Yu Gothic" pitchFamily="34" charset="0"/>
-                <a:ea typeface="Yu Gothic" pitchFamily="34" charset="-122"/>
-                <a:cs typeface="Yu Gothic" pitchFamily="34" charset="-120"/>
-              </a:rPr>
-              <a:t>先行例も、分配開始には時間をかけている</a:t>
-            </a:r>
-            <a:endParaRPr lang="en-US" sz="1250" dirty="0"/>
-          </a:p>
-        </p:txBody>
-      </p:sp>
-      <p:sp>
-        <p:nvSpPr>
-          <p:cNvPr id="14" name="Text 11"/>
-          <p:cNvSpPr txBox="1"/>
-          <p:nvPr/>
-        </p:nvSpPr>
-        <p:spPr>
-          <a:xfrm>
-            <a:off x="6670548" y="4151376"/>
-            <a:ext cx="4704588" cy="1499616"/>
-          </a:xfrm>
-          <a:prstGeom prst="rect">
-            <a:avLst/>
-          </a:prstGeom>
-          <a:noFill/>
-          <a:ln/>
-        </p:spPr>
-        <p:txBody>
-          <a:bodyPr wrap="square" lIns="0" tIns="0" rIns="0" bIns="0" rtlCol="0" anchor="t"/>
-          <a:lstStyle/>
+              <a:t>③ 課金する　　1話97円／コイン。ARPPU ¥3,000/月。ここが主力</a:t>
+            </a:r>
+            <a:endParaRPr lang="en-US" sz="1050" dirty="0"/>
+          </a:p>
           <a:p>
             <a:pPr indent="0" marL="0">
               <a:lnSpc>
@@ -30582,17 +30481,6 @@
               </a:lnSpc>
               <a:buNone/>
             </a:pPr>
-            <a:r>
-              <a:rPr lang="en-US" sz="1050" dirty="0">
-                <a:solidFill>
-                  <a:srgbClr val="3A3A42"/>
-                </a:solidFill>
-                <a:latin typeface="Yu Gothic" pitchFamily="34" charset="0"/>
-                <a:ea typeface="Yu Gothic" pitchFamily="34" charset="-122"/>
-                <a:cs typeface="Yu Gothic" pitchFamily="34" charset="-120"/>
-              </a:rPr>
-              <a:t>YouTube 2005年創業 → 2007年 にパートナープログラム開始（2年後）</a:t>
-            </a:r>
             <a:endParaRPr lang="en-US" sz="1050" dirty="0"/>
           </a:p>
           <a:p>
@@ -30611,10 +30499,111 @@
                 <a:ea typeface="Yu Gothic" pitchFamily="34" charset="-122"/>
                 <a:cs typeface="Yu Gothic" pitchFamily="34" charset="-120"/>
               </a:rPr>
-              <a:t>TikTok Creator Fund は $2億のコミット で立ち上げ</a:t>
+              <a:t>国内1位の BUMP（累計400万DL）が、すでにこの形で成立しています。</a:t>
             </a:r>
             <a:endParaRPr lang="en-US" sz="1050" dirty="0"/>
           </a:p>
+        </p:txBody>
+      </p:sp>
+      <p:sp>
+        <p:nvSpPr>
+          <p:cNvPr id="11" name="Shape 8"/>
+          <p:cNvSpPr/>
+          <p:nvPr/>
+        </p:nvSpPr>
+        <p:spPr>
+          <a:xfrm>
+            <a:off x="6231636" y="3639312"/>
+            <a:ext cx="5362956" cy="2194560"/>
+          </a:xfrm>
+          <a:prstGeom prst="rect">
+            <a:avLst/>
+          </a:prstGeom>
+          <a:solidFill>
+            <a:srgbClr val="F4F2EF"/>
+          </a:solidFill>
+          <a:ln/>
+        </p:spPr>
+      </p:sp>
+      <p:sp>
+        <p:nvSpPr>
+          <p:cNvPr id="12" name="Shape 9"/>
+          <p:cNvSpPr/>
+          <p:nvPr/>
+        </p:nvSpPr>
+        <p:spPr>
+          <a:xfrm>
+            <a:off x="6451092" y="3895344"/>
+            <a:ext cx="109728" cy="109728"/>
+          </a:xfrm>
+          <a:prstGeom prst="rect">
+            <a:avLst/>
+          </a:prstGeom>
+          <a:solidFill>
+            <a:srgbClr val="C9962C"/>
+          </a:solidFill>
+          <a:ln/>
+        </p:spPr>
+      </p:sp>
+      <p:sp>
+        <p:nvSpPr>
+          <p:cNvPr id="13" name="Text 10"/>
+          <p:cNvSpPr txBox="1"/>
+          <p:nvPr/>
+        </p:nvSpPr>
+        <p:spPr>
+          <a:xfrm>
+            <a:off x="6670548" y="3803904"/>
+            <a:ext cx="4704588" cy="292608"/>
+          </a:xfrm>
+          <a:prstGeom prst="rect">
+            <a:avLst/>
+          </a:prstGeom>
+          <a:noFill/>
+          <a:ln/>
+        </p:spPr>
+        <p:txBody>
+          <a:bodyPr wrap="square" lIns="0" tIns="0" rIns="0" bIns="0" rtlCol="0" anchor="ctr"/>
+          <a:lstStyle/>
+          <a:p>
+            <a:pPr indent="0" marL="0">
+              <a:buNone/>
+            </a:pPr>
+            <a:r>
+              <a:rPr lang="en-US" sz="1250" b="1" dirty="0">
+                <a:solidFill>
+                  <a:srgbClr val="16161A"/>
+                </a:solidFill>
+                <a:latin typeface="Yu Gothic" pitchFamily="34" charset="0"/>
+                <a:ea typeface="Yu Gothic" pitchFamily="34" charset="-122"/>
+                <a:cs typeface="Yu Gothic" pitchFamily="34" charset="-120"/>
+              </a:rPr>
+              <a:t>1MAUあたりの当社収益が +43%</a:t>
+            </a:r>
+            <a:endParaRPr lang="en-US" sz="1250" dirty="0"/>
+          </a:p>
+        </p:txBody>
+      </p:sp>
+      <p:sp>
+        <p:nvSpPr>
+          <p:cNvPr id="14" name="Text 11"/>
+          <p:cNvSpPr txBox="1"/>
+          <p:nvPr/>
+        </p:nvSpPr>
+        <p:spPr>
+          <a:xfrm>
+            <a:off x="6670548" y="4151376"/>
+            <a:ext cx="4704588" cy="1499616"/>
+          </a:xfrm>
+          <a:prstGeom prst="rect">
+            <a:avLst/>
+          </a:prstGeom>
+          <a:noFill/>
+          <a:ln/>
+        </p:spPr>
+        <p:txBody>
+          <a:bodyPr wrap="square" lIns="0" tIns="0" rIns="0" bIns="0" rtlCol="0" anchor="t"/>
+          <a:lstStyle/>
           <a:p>
             <a:pPr indent="0" marL="0">
               <a:lnSpc>
@@ -30623,7 +30612,7 @@
               <a:buNone/>
             </a:pPr>
             <a:r>
-              <a:rPr lang="en-US" sz="1050" dirty="0">
+              <a:rPr lang="en-US" sz="950" dirty="0">
                 <a:solidFill>
                   <a:srgbClr val="3A3A42"/>
                 </a:solidFill>
@@ -30631,9 +30620,98 @@
                 <a:ea typeface="Yu Gothic" pitchFamily="34" charset="-122"/>
                 <a:cs typeface="Yu Gothic" pitchFamily="34" charset="-120"/>
               </a:rPr>
-              <a:t>だから当社は、分配原資を調達額に明示的に積んでいます（第10章）。</a:t>
-            </a:r>
-            <a:endParaRPr lang="en-US" sz="1050" dirty="0"/>
+              <a:t>課金のみの設計 ¥324/年 → BUMP型 ¥464/年</a:t>
+            </a:r>
+            <a:endParaRPr lang="en-US" sz="950" dirty="0"/>
+          </a:p>
+          <a:p>
+            <a:pPr indent="0" marL="0">
+              <a:lnSpc>
+                <a:spcPct val="126000"/>
+              </a:lnSpc>
+              <a:buNone/>
+            </a:pPr>
+            <a:r>
+              <a:rPr lang="en-US" sz="950" dirty="0">
+                <a:solidFill>
+                  <a:srgbClr val="3A3A42"/>
+                </a:solidFill>
+                <a:latin typeface="Yu Gothic" pitchFamily="34" charset="0"/>
+                <a:ea typeface="Yu Gothic" pitchFamily="34" charset="-122"/>
+                <a:cs typeface="Yu Gothic" pitchFamily="34" charset="-120"/>
+              </a:rPr>
+              <a:t>損益分岐となる「流量投放 ÷ 課金GMV」が 40% → 50% に上がります。</a:t>
+            </a:r>
+            <a:endParaRPr lang="en-US" sz="950" dirty="0"/>
+          </a:p>
+          <a:p>
+            <a:pPr indent="0" marL="0">
+              <a:lnSpc>
+                <a:spcPct val="126000"/>
+              </a:lnSpc>
+              <a:buNone/>
+            </a:pPr>
+            <a:r>
+              <a:rPr lang="en-US" sz="950" dirty="0">
+                <a:solidFill>
+                  <a:srgbClr val="3A3A42"/>
+                </a:solidFill>
+                <a:latin typeface="Yu Gothic" pitchFamily="34" charset="0"/>
+                <a:ea typeface="Yu Gothic" pitchFamily="34" charset="-122"/>
+                <a:cs typeface="Yu Gothic" pitchFamily="34" charset="-120"/>
+              </a:rPr>
+              <a:t>リワード広告は、既にアプリにいる非課金層から取るため追加の獲得費用がゼロです。</a:t>
+            </a:r>
+            <a:endParaRPr lang="en-US" sz="950" dirty="0"/>
+          </a:p>
+          <a:p>
+            <a:pPr indent="0" marL="0">
+              <a:lnSpc>
+                <a:spcPct val="126000"/>
+              </a:lnSpc>
+              <a:buNone/>
+            </a:pPr>
+            <a:endParaRPr lang="en-US" sz="950" dirty="0"/>
+          </a:p>
+          <a:p>
+            <a:pPr indent="0" marL="0">
+              <a:lnSpc>
+                <a:spcPct val="126000"/>
+              </a:lnSpc>
+              <a:buNone/>
+            </a:pPr>
+            <a:r>
+              <a:rPr lang="en-US" sz="950" dirty="0">
+                <a:solidFill>
+                  <a:srgbClr val="3A3A42"/>
+                </a:solidFill>
+                <a:latin typeface="Yu Gothic" pitchFamily="34" charset="0"/>
+                <a:ea typeface="Yu Gothic" pitchFamily="34" charset="-122"/>
+                <a:cs typeface="Yu Gothic" pitchFamily="34" charset="-120"/>
+              </a:rPr>
+              <a:t>⚠ フィード型広告（RPM ¥20〜80＝1話 0.02〜0.08円）なら配信原価 0.225円/話 に負けます。</a:t>
+            </a:r>
+            <a:endParaRPr lang="en-US" sz="950" dirty="0"/>
+          </a:p>
+          <a:p>
+            <a:pPr indent="0" marL="0">
+              <a:lnSpc>
+                <a:spcPct val="126000"/>
+              </a:lnSpc>
+              <a:buNone/>
+            </a:pPr>
+            <a:r>
+              <a:rPr lang="en-US" sz="950" dirty="0">
+                <a:solidFill>
+                  <a:srgbClr val="3A3A42"/>
+                </a:solidFill>
+                <a:latin typeface="Yu Gothic" pitchFamily="34" charset="0"/>
+                <a:ea typeface="Yu Gothic" pitchFamily="34" charset="-122"/>
+                <a:cs typeface="Yu Gothic" pitchFamily="34" charset="-120"/>
+              </a:rPr>
+              <a:t>　 リワード型（1話 0.60円＝原価の2.7倍）だから成立します。</a:t>
+            </a:r>
+            <a:endParaRPr lang="en-US" sz="950" dirty="0"/>
           </a:p>
         </p:txBody>
       </p:sp>
@@ -30670,7 +30748,7 @@
                 <a:ea typeface="Yu Gothic" pitchFamily="34" charset="-122"/>
                 <a:cs typeface="Yu Gothic" pitchFamily="34" charset="-120"/>
               </a:rPr>
-              <a:t>配信コストは CDN $0.02〜0.08/GB からの概算［仮置き］。課金率・ARPPU は未実測で、1年目に実測して差し替えます</a:t>
+              <a:t>出所: BUMP公式（emole）／ Playio・Tenjin 2026年eCPMベンチマーク（日本のリワードeCPMは $17.35）。実効eCPM・課金率・カニバリ率は未実測です</a:t>
             </a:r>
             <a:endParaRPr lang="en-US" sz="850" dirty="0"/>
           </a:p>

--- a/投資家向け企画書.pptx
+++ b/投資家向け企画書.pptx
@@ -253,16 +253,16 @@
                   <c:v>30</c:v>
                 </c:pt>
                 <c:pt idx="1">
-                  <c:v>180</c:v>
+                  <c:v>190</c:v>
                 </c:pt>
                 <c:pt idx="2">
-                  <c:v>500</c:v>
+                  <c:v>530</c:v>
                 </c:pt>
                 <c:pt idx="3">
-                  <c:v>1500</c:v>
+                  <c:v>1670</c:v>
                 </c:pt>
                 <c:pt idx="4">
-                  <c:v>3300</c:v>
+                  <c:v>3700</c:v>
                 </c:pt>
               </c:numCache>
             </c:numRef>
@@ -350,16 +350,16 @@
                   <c:v>-113</c:v>
                 </c:pt>
                 <c:pt idx="1">
-                  <c:v>-140</c:v>
+                  <c:v>-134</c:v>
                 </c:pt>
                 <c:pt idx="2">
-                  <c:v>-80</c:v>
+                  <c:v>-54</c:v>
                 </c:pt>
                 <c:pt idx="3">
-                  <c:v>100</c:v>
+                  <c:v>250</c:v>
                 </c:pt>
                 <c:pt idx="4">
-                  <c:v>500</c:v>
+                  <c:v>900</c:v>
                 </c:pt>
               </c:numCache>
             </c:numRef>
@@ -444,7 +444,7 @@
         <c:axId val="2094734552"/>
         <c:scaling>
           <c:orientation val="minMax"/>
-          <c:max val="3400"/>
+          <c:max val="3800"/>
           <c:min val="-200"/>
         </c:scaling>
         <c:delete val="0"/>
@@ -8868,7 +8868,7 @@
                 <a:ea typeface="Yu Gothic" pitchFamily="34" charset="-122"/>
                 <a:cs typeface="Yu Gothic" pitchFamily="34" charset="-120"/>
               </a:rPr>
-              <a:t>4期に単月黒字化、5期に年商33億・営業利益5億。時価総額100億の水準へ。</a:t>
+              <a:t>4期に単月黒字化、5期に年商37億・営業利益9億。時価総額140億の水準へ。</a:t>
             </a:r>
             <a:endParaRPr lang="en-US" sz="950" dirty="0"/>
           </a:p>
@@ -9999,7 +9999,7 @@
                           <a:ea typeface="Yu Gothic" pitchFamily="34" charset="-122"/>
                           <a:cs typeface="Yu Gothic" pitchFamily="34" charset="-120"/>
                         </a:rPr>
-                        <a:t>年商33億・営業利益5億</a:t>
+                        <a:t>年商37億・営業利益9億</a:t>
                       </a:r>
                       <a:endParaRPr lang="en-US" sz="1000" dirty="0">
                         <a:latin typeface="Yu Gothic" charset="0"/>
@@ -10066,7 +10066,7 @@
                           <a:ea typeface="Yu Gothic" pitchFamily="34" charset="-122"/>
                           <a:cs typeface="Yu Gothic" pitchFamily="34" charset="-120"/>
                         </a:rPr>
-                        <a:t>想定時価総額100億円</a:t>
+                        <a:t>想定時価総額140億円</a:t>
                       </a:r>
                       <a:endParaRPr lang="en-US" sz="1000" dirty="0">
                         <a:latin typeface="Yu Gothic" charset="0"/>
@@ -11973,7 +11973,7 @@
                 <a:ea typeface="Yu Gothic" pitchFamily="34" charset="-122"/>
                 <a:cs typeface="Yu Gothic" pitchFamily="34" charset="-120"/>
               </a:rPr>
-              <a:t>5期の売上33億・営業利益5億を前提に、3手法で試算しています</a:t>
+              <a:t>5期の売上37億・営業利益9億を前提に、3手法で試算しています</a:t>
             </a:r>
             <a:endParaRPr lang="en-US" sz="1200" dirty="0"/>
           </a:p>
@@ -12024,7 +12024,7 @@
               <a:buNone/>
             </a:pPr>
             <a:r>
-              <a:rPr lang="en-US" sz="2500" b="1" dirty="0">
+              <a:rPr lang="en-US" sz="2400" b="1" dirty="0">
                 <a:solidFill>
                   <a:srgbClr val="B3121B"/>
                 </a:solidFill>
@@ -12032,9 +12032,9 @@
                 <a:ea typeface="Yu Gothic" pitchFamily="34" charset="-122"/>
                 <a:cs typeface="Yu Gothic" pitchFamily="34" charset="-120"/>
               </a:rPr>
-              <a:t>67〜134億</a:t>
-            </a:r>
-            <a:endParaRPr lang="en-US" sz="2500" dirty="0"/>
+              <a:t>121〜241億</a:t>
+            </a:r>
+            <a:endParaRPr lang="en-US" sz="2400" dirty="0"/>
           </a:p>
         </p:txBody>
       </p:sp>
@@ -12113,7 +12113,7 @@
                 <a:ea typeface="Yu Gothic" pitchFamily="34" charset="-122"/>
                 <a:cs typeface="Yu Gothic" pitchFamily="34" charset="-120"/>
               </a:rPr>
-              <a:t>当期純利益 約3.3億（実効税率33%）× PER 20〜40倍</a:t>
+              <a:t>当期純利益 約6.0億（実効税率33%）× PER 20〜40倍</a:t>
             </a:r>
             <a:endParaRPr lang="en-US" sz="900" dirty="0"/>
           </a:p>
@@ -12164,7 +12164,7 @@
               <a:buNone/>
             </a:pPr>
             <a:r>
-              <a:rPr lang="en-US" sz="2500" b="1" dirty="0">
+              <a:rPr lang="en-US" sz="2400" b="1" dirty="0">
                 <a:solidFill>
                   <a:srgbClr val="2A3563"/>
                 </a:solidFill>
@@ -12172,9 +12172,9 @@
                 <a:ea typeface="Yu Gothic" pitchFamily="34" charset="-122"/>
                 <a:cs typeface="Yu Gothic" pitchFamily="34" charset="-120"/>
               </a:rPr>
-              <a:t>66〜165億</a:t>
-            </a:r>
-            <a:endParaRPr lang="en-US" sz="2500" dirty="0"/>
+              <a:t>74〜185億</a:t>
+            </a:r>
+            <a:endParaRPr lang="en-US" sz="2400" dirty="0"/>
           </a:p>
         </p:txBody>
       </p:sp>
@@ -12253,7 +12253,7 @@
                 <a:ea typeface="Yu Gothic" pitchFamily="34" charset="-122"/>
                 <a:cs typeface="Yu Gothic" pitchFamily="34" charset="-120"/>
               </a:rPr>
-              <a:t>売上33億 × PSR 2〜5倍。プラットフォーム型はこちらで見られやすい</a:t>
+              <a:t>売上37億 × PSR 2〜5倍。プラットフォーム型はこちらで見られやすい</a:t>
             </a:r>
             <a:endParaRPr lang="en-US" sz="900" dirty="0"/>
           </a:p>
@@ -12304,7 +12304,7 @@
               <a:buNone/>
             </a:pPr>
             <a:r>
-              <a:rPr lang="en-US" sz="2500" b="1" dirty="0">
+              <a:rPr lang="en-US" sz="2400" b="1" dirty="0">
                 <a:solidFill>
                   <a:srgbClr val="C9962C"/>
                 </a:solidFill>
@@ -12312,9 +12312,9 @@
                 <a:ea typeface="Yu Gothic" pitchFamily="34" charset="-122"/>
                 <a:cs typeface="Yu Gothic" pitchFamily="34" charset="-120"/>
               </a:rPr>
-              <a:t>58〜98億</a:t>
-            </a:r>
-            <a:endParaRPr lang="en-US" sz="2500" dirty="0"/>
+              <a:t>93〜158億</a:t>
+            </a:r>
+            <a:endParaRPr lang="en-US" sz="2400" dirty="0"/>
           </a:p>
         </p:txBody>
       </p:sp>
@@ -12393,7 +12393,7 @@
                 <a:ea typeface="Yu Gothic" pitchFamily="34" charset="-122"/>
                 <a:cs typeface="Yu Gothic" pitchFamily="34" charset="-120"/>
               </a:rPr>
-              <a:t>EBITDA 約6.5億 × 8.9〜15倍（情報通信業の中央値8.9倍）</a:t>
+              <a:t>EBITDA 約10.5億 × 8.9〜15倍（情報通信業の中央値8.9倍）</a:t>
             </a:r>
             <a:endParaRPr lang="en-US" sz="900" dirty="0"/>
           </a:p>
@@ -12452,7 +12452,7 @@
                 <a:ea typeface="Yu Gothic" pitchFamily="34" charset="-122"/>
                 <a:cs typeface="Yu Gothic" pitchFamily="34" charset="-120"/>
               </a:rPr>
-              <a:t>中心値は 時価総額 100億円 ─ グロースの上場維持基準「上場5年経過後に100億円以上」から逆算しています</a:t>
+              <a:t>中心値は 時価総額 140億円 ─ グロースの上場維持基準（上場5年経過後に100億円以上）に対し 40% のバッファ</a:t>
             </a:r>
             <a:endParaRPr lang="en-US" sz="1250" dirty="0"/>
           </a:p>
@@ -12573,7 +12573,7 @@
                 <a:ea typeface="Yu Gothic" pitchFamily="34" charset="-122"/>
                 <a:cs typeface="Yu Gothic" pitchFamily="34" charset="-120"/>
               </a:rPr>
-              <a:t>3期（売上5億・赤字）… 10〜30億。買い手が評価するのはクリエイターネットワークと技術。</a:t>
+              <a:t>3期（売上5.3億・赤字）… 10〜30億。買い手が評価するのはクリエイターネットワークと技術。</a:t>
             </a:r>
             <a:endParaRPr lang="en-US" sz="1000" dirty="0"/>
           </a:p>
@@ -12593,7 +12593,7 @@
                 <a:ea typeface="Yu Gothic" pitchFamily="34" charset="-122"/>
                 <a:cs typeface="Yu Gothic" pitchFamily="34" charset="-120"/>
               </a:rPr>
-              <a:t>4期（売上15億・営業利益1億）… 25〜55億 ／ 5期（売上33億）… 58〜98億。</a:t>
+              <a:t>4期（売上16.7億・営業利益2.5億）… 35〜70億 ／ 5期（売上37億）… 93〜158億。</a:t>
             </a:r>
             <a:endParaRPr lang="en-US" sz="1000" dirty="0"/>
           </a:p>
@@ -12734,7 +12734,7 @@
                 <a:ea typeface="Yu Gothic" pitchFamily="34" charset="-122"/>
                 <a:cs typeface="Yu Gothic" pitchFamily="34" charset="-120"/>
               </a:rPr>
-              <a:t>上場時の創業者持分は 35%前後 を想定（CAP_TABLE.md）。時価総額100億なら評価額 約35億。</a:t>
+              <a:t>上場時の創業者持分は 35%前後 を想定（CAP_TABLE.md）。時価総額140億なら評価額 約51億。</a:t>
             </a:r>
             <a:endParaRPr lang="en-US" sz="1000" dirty="0"/>
           </a:p>
@@ -14737,7 +14737,7 @@
                           <a:ea typeface="Yu Gothic" pitchFamily="34" charset="-122"/>
                           <a:cs typeface="Yu Gothic" pitchFamily="34" charset="-120"/>
                         </a:rPr>
-                        <a:t>年商33億・営業利益5億／時価総額100億</a:t>
+                        <a:t>年商37億・営業利益9億／時価総額140億</a:t>
                       </a:r>
                       <a:endParaRPr lang="en-US" sz="1050" dirty="0">
                         <a:latin typeface="Yu Gothic" charset="0"/>
@@ -19917,7 +19917,7 @@
                 <a:ea typeface="Yu Gothic" pitchFamily="34" charset="-122"/>
                 <a:cs typeface="Yu Gothic" pitchFamily="34" charset="-120"/>
               </a:rPr>
-              <a:t>4年目に単月黒字化、5年目に年商33億・営業利益5億。</a:t>
+              <a:t>4年目に単月黒字化、5年目に年商37億・営業利益9億。</a:t>
             </a:r>
             <a:endParaRPr lang="en-US" sz="1000" dirty="0"/>
           </a:p>
@@ -30620,7 +30620,7 @@
                 <a:ea typeface="Yu Gothic" pitchFamily="34" charset="-122"/>
                 <a:cs typeface="Yu Gothic" pitchFamily="34" charset="-120"/>
               </a:rPr>
-              <a:t>課金のみの設計 ¥324/年 → BUMP型 ¥464/年</a:t>
+              <a:t>課金のみの設計 ¥324/年 → BUMP型 ¥464/年。この上振れは計画に計上済みです（5期 売上33億→37億）。</a:t>
             </a:r>
             <a:endParaRPr lang="en-US" sz="950" dirty="0"/>
           </a:p>

--- a/投資家向け企画書.pptx
+++ b/投資家向け企画書.pptx
@@ -3322,1680 +3322,728 @@
           </a:p>
         </p:txBody>
       </p:sp>
-      <p:graphicFrame>
-        <p:nvGraphicFramePr>
-          <p:cNvPr id="11" name="Table 0"/>
-          <p:cNvGraphicFramePr>
-            <a:graphicFrameLocks noGrp="1"/>
-          </p:cNvGraphicFramePr>
-          <p:nvPr>
-            <p:extLst>
-              <p:ext uri="{D42A27DB-BD31-4B8C-83A1-F6EECF244321}">
-                <p14:modId xmlns:p14="http://schemas.microsoft.com/office/powerpoint/2010/main" val="1579011935"/>
-              </p:ext>
-            </p:extLst>
-          </p:nvPr>
-        </p:nvGraphicFramePr>
-        <p:xfrm>
-          <a:off x="594360" y="1426464"/>
-          <a:ext cx="11000232" cy="914400"/>
-        </p:xfrm>
-        <a:graphic>
-          <a:graphicData uri="http://schemas.openxmlformats.org/drawingml/2006/table">
-            <a:tbl>
-              <a:tblPr/>
-              <a:tblGrid>
-                <a:gridCol w="2011680"/>
-                <a:gridCol w="4206240"/>
-                <a:gridCol w="2377440"/>
-                <a:gridCol w="2404872"/>
-              </a:tblGrid>
-              <a:tr h="384048">
-                <a:tc>
-                  <a:txBody>
-                    <a:bodyPr/>
-                    <a:lstStyle/>
-                    <a:p>
-                      <a:pPr indent="0" marL="0">
-                        <a:buNone/>
-                      </a:pPr>
-                      <a:r>
-                        <a:rPr lang="en-US" sz="950" b="1" dirty="0">
-                          <a:solidFill>
-                            <a:srgbClr val="FFFFFF"/>
-                          </a:solidFill>
-                          <a:latin typeface="Yu Gothic" pitchFamily="34" charset="0"/>
-                          <a:ea typeface="Yu Gothic" pitchFamily="34" charset="-122"/>
-                          <a:cs typeface="Yu Gothic" pitchFamily="34" charset="-120"/>
-                        </a:rPr>
-                        <a:t>プラットフォーム</a:t>
-                      </a:r>
-                      <a:endParaRPr lang="en-US" sz="950" dirty="0">
-                        <a:latin typeface="Yu Gothic" charset="0"/>
-                        <a:ea typeface="Yu Gothic"/>
-                        <a:cs typeface="Yu Gothic"/>
-                        <a:ea typeface="Yu Gothic" charset="0"/>
-                        <a:cs typeface="Yu Gothic" charset="0"/>
-                      </a:endParaRPr>
-                    </a:p>
-                  </a:txBody>
-                  <a:tcPr marL="88900" marR="88900" marT="50800" marB="50800" anchor="ctr">
-                    <a:lnL w="7620" cap="flat" cmpd="sng" algn="ctr">
-                      <a:solidFill>
-                        <a:srgbClr val="DCD9D4"/>
-                      </a:solidFill>
-                      <a:prstDash val="solid"/>
-                      <a:round/>
-                      <a:headEnd type="none" w="med" len="med"/>
-                      <a:tailEnd type="none" w="med" len="med"/>
-                    </a:lnL>
-                    <a:lnR w="7620" cap="flat" cmpd="sng" algn="ctr">
-                      <a:solidFill>
-                        <a:srgbClr val="DCD9D4"/>
-                      </a:solidFill>
-                      <a:prstDash val="solid"/>
-                      <a:round/>
-                      <a:headEnd type="none" w="med" len="med"/>
-                      <a:tailEnd type="none" w="med" len="med"/>
-                    </a:lnR>
-                    <a:lnT w="7620" cap="flat" cmpd="sng" algn="ctr">
-                      <a:solidFill>
-                        <a:srgbClr val="DCD9D4"/>
-                      </a:solidFill>
-                      <a:prstDash val="solid"/>
-                      <a:round/>
-                      <a:headEnd type="none" w="med" len="med"/>
-                      <a:tailEnd type="none" w="med" len="med"/>
-                    </a:lnT>
-                    <a:lnB w="7620" cap="flat" cmpd="sng" algn="ctr">
-                      <a:solidFill>
-                        <a:srgbClr val="DCD9D4"/>
-                      </a:solidFill>
-                      <a:prstDash val="solid"/>
-                      <a:round/>
-                      <a:headEnd type="none" w="med" len="med"/>
-                      <a:tailEnd type="none" w="med" len="med"/>
-                    </a:lnB>
-                    <a:solidFill>
-                      <a:srgbClr val="D9601A"/>
-                    </a:solidFill>
-                  </a:tcPr>
-                </a:tc>
-                <a:tc>
-                  <a:txBody>
-                    <a:bodyPr/>
-                    <a:lstStyle/>
-                    <a:p>
-                      <a:pPr indent="0" marL="0">
-                        <a:buNone/>
-                      </a:pPr>
-                      <a:r>
-                        <a:rPr lang="en-US" sz="950" b="1" dirty="0">
-                          <a:solidFill>
-                            <a:srgbClr val="FFFFFF"/>
-                          </a:solidFill>
-                          <a:latin typeface="Yu Gothic" pitchFamily="34" charset="0"/>
-                          <a:ea typeface="Yu Gothic" pitchFamily="34" charset="-122"/>
-                          <a:cs typeface="Yu Gothic" pitchFamily="34" charset="-120"/>
-                        </a:rPr>
-                        <a:t>プログラム</a:t>
-                      </a:r>
-                      <a:endParaRPr lang="en-US" sz="950" dirty="0">
-                        <a:latin typeface="Yu Gothic" charset="0"/>
-                        <a:ea typeface="Yu Gothic"/>
-                        <a:cs typeface="Yu Gothic"/>
-                        <a:ea typeface="Yu Gothic" charset="0"/>
-                        <a:cs typeface="Yu Gothic" charset="0"/>
-                      </a:endParaRPr>
-                    </a:p>
-                  </a:txBody>
-                  <a:tcPr marL="88900" marR="88900" marT="50800" marB="50800" anchor="ctr">
-                    <a:lnL w="7620" cap="flat" cmpd="sng" algn="ctr">
-                      <a:solidFill>
-                        <a:srgbClr val="DCD9D4"/>
-                      </a:solidFill>
-                      <a:prstDash val="solid"/>
-                      <a:round/>
-                      <a:headEnd type="none" w="med" len="med"/>
-                      <a:tailEnd type="none" w="med" len="med"/>
-                    </a:lnL>
-                    <a:lnR w="7620" cap="flat" cmpd="sng" algn="ctr">
-                      <a:solidFill>
-                        <a:srgbClr val="DCD9D4"/>
-                      </a:solidFill>
-                      <a:prstDash val="solid"/>
-                      <a:round/>
-                      <a:headEnd type="none" w="med" len="med"/>
-                      <a:tailEnd type="none" w="med" len="med"/>
-                    </a:lnR>
-                    <a:lnT w="7620" cap="flat" cmpd="sng" algn="ctr">
-                      <a:solidFill>
-                        <a:srgbClr val="DCD9D4"/>
-                      </a:solidFill>
-                      <a:prstDash val="solid"/>
-                      <a:round/>
-                      <a:headEnd type="none" w="med" len="med"/>
-                      <a:tailEnd type="none" w="med" len="med"/>
-                    </a:lnT>
-                    <a:lnB w="7620" cap="flat" cmpd="sng" algn="ctr">
-                      <a:solidFill>
-                        <a:srgbClr val="DCD9D4"/>
-                      </a:solidFill>
-                      <a:prstDash val="solid"/>
-                      <a:round/>
-                      <a:headEnd type="none" w="med" len="med"/>
-                      <a:tailEnd type="none" w="med" len="med"/>
-                    </a:lnB>
-                    <a:solidFill>
-                      <a:srgbClr val="D9601A"/>
-                    </a:solidFill>
-                  </a:tcPr>
-                </a:tc>
-                <a:tc>
-                  <a:txBody>
-                    <a:bodyPr/>
-                    <a:lstStyle/>
-                    <a:p>
-                      <a:pPr indent="0" marL="0">
-                        <a:buNone/>
-                      </a:pPr>
-                      <a:r>
-                        <a:rPr lang="en-US" sz="950" b="1" dirty="0">
-                          <a:solidFill>
-                            <a:srgbClr val="FFFFFF"/>
-                          </a:solidFill>
-                          <a:latin typeface="Yu Gothic" pitchFamily="34" charset="0"/>
-                          <a:ea typeface="Yu Gothic" pitchFamily="34" charset="-122"/>
-                          <a:cs typeface="Yu Gothic" pitchFamily="34" charset="-120"/>
-                        </a:rPr>
-                        <a:t>分成率</a:t>
-                      </a:r>
-                      <a:endParaRPr lang="en-US" sz="950" dirty="0">
-                        <a:latin typeface="Yu Gothic" charset="0"/>
-                        <a:ea typeface="Yu Gothic"/>
-                        <a:cs typeface="Yu Gothic"/>
-                        <a:ea typeface="Yu Gothic" charset="0"/>
-                        <a:cs typeface="Yu Gothic" charset="0"/>
-                      </a:endParaRPr>
-                    </a:p>
-                  </a:txBody>
-                  <a:tcPr marL="88900" marR="88900" marT="50800" marB="50800" anchor="ctr">
-                    <a:lnL w="7620" cap="flat" cmpd="sng" algn="ctr">
-                      <a:solidFill>
-                        <a:srgbClr val="DCD9D4"/>
-                      </a:solidFill>
-                      <a:prstDash val="solid"/>
-                      <a:round/>
-                      <a:headEnd type="none" w="med" len="med"/>
-                      <a:tailEnd type="none" w="med" len="med"/>
-                    </a:lnL>
-                    <a:lnR w="7620" cap="flat" cmpd="sng" algn="ctr">
-                      <a:solidFill>
-                        <a:srgbClr val="DCD9D4"/>
-                      </a:solidFill>
-                      <a:prstDash val="solid"/>
-                      <a:round/>
-                      <a:headEnd type="none" w="med" len="med"/>
-                      <a:tailEnd type="none" w="med" len="med"/>
-                    </a:lnR>
-                    <a:lnT w="7620" cap="flat" cmpd="sng" algn="ctr">
-                      <a:solidFill>
-                        <a:srgbClr val="DCD9D4"/>
-                      </a:solidFill>
-                      <a:prstDash val="solid"/>
-                      <a:round/>
-                      <a:headEnd type="none" w="med" len="med"/>
-                      <a:tailEnd type="none" w="med" len="med"/>
-                    </a:lnT>
-                    <a:lnB w="7620" cap="flat" cmpd="sng" algn="ctr">
-                      <a:solidFill>
-                        <a:srgbClr val="DCD9D4"/>
-                      </a:solidFill>
-                      <a:prstDash val="solid"/>
-                      <a:round/>
-                      <a:headEnd type="none" w="med" len="med"/>
-                      <a:tailEnd type="none" w="med" len="med"/>
-                    </a:lnB>
-                    <a:solidFill>
-                      <a:srgbClr val="D9601A"/>
-                    </a:solidFill>
-                  </a:tcPr>
-                </a:tc>
-                <a:tc>
-                  <a:txBody>
-                    <a:bodyPr/>
-                    <a:lstStyle/>
-                    <a:p>
-                      <a:pPr indent="0" marL="0">
-                        <a:buNone/>
-                      </a:pPr>
-                      <a:r>
-                        <a:rPr lang="en-US" sz="950" b="1" dirty="0">
-                          <a:solidFill>
-                            <a:srgbClr val="FFFFFF"/>
-                          </a:solidFill>
-                          <a:latin typeface="Yu Gothic" pitchFamily="34" charset="0"/>
-                          <a:ea typeface="Yu Gothic" pitchFamily="34" charset="-122"/>
-                          <a:cs typeface="Yu Gothic" pitchFamily="34" charset="-120"/>
-                        </a:rPr>
-                        <a:t>トラフィック支援</a:t>
-                      </a:r>
-                      <a:endParaRPr lang="en-US" sz="950" dirty="0">
-                        <a:latin typeface="Yu Gothic" charset="0"/>
-                        <a:ea typeface="Yu Gothic"/>
-                        <a:cs typeface="Yu Gothic"/>
-                        <a:ea typeface="Yu Gothic" charset="0"/>
-                        <a:cs typeface="Yu Gothic" charset="0"/>
-                      </a:endParaRPr>
-                    </a:p>
-                  </a:txBody>
-                  <a:tcPr marL="88900" marR="88900" marT="50800" marB="50800" anchor="ctr">
-                    <a:lnL w="7620" cap="flat" cmpd="sng" algn="ctr">
-                      <a:solidFill>
-                        <a:srgbClr val="DCD9D4"/>
-                      </a:solidFill>
-                      <a:prstDash val="solid"/>
-                      <a:round/>
-                      <a:headEnd type="none" w="med" len="med"/>
-                      <a:tailEnd type="none" w="med" len="med"/>
-                    </a:lnL>
-                    <a:lnR w="7620" cap="flat" cmpd="sng" algn="ctr">
-                      <a:solidFill>
-                        <a:srgbClr val="DCD9D4"/>
-                      </a:solidFill>
-                      <a:prstDash val="solid"/>
-                      <a:round/>
-                      <a:headEnd type="none" w="med" len="med"/>
-                      <a:tailEnd type="none" w="med" len="med"/>
-                    </a:lnR>
-                    <a:lnT w="7620" cap="flat" cmpd="sng" algn="ctr">
-                      <a:solidFill>
-                        <a:srgbClr val="DCD9D4"/>
-                      </a:solidFill>
-                      <a:prstDash val="solid"/>
-                      <a:round/>
-                      <a:headEnd type="none" w="med" len="med"/>
-                      <a:tailEnd type="none" w="med" len="med"/>
-                    </a:lnT>
-                    <a:lnB w="7620" cap="flat" cmpd="sng" algn="ctr">
-                      <a:solidFill>
-                        <a:srgbClr val="DCD9D4"/>
-                      </a:solidFill>
-                      <a:prstDash val="solid"/>
-                      <a:round/>
-                      <a:headEnd type="none" w="med" len="med"/>
-                      <a:tailEnd type="none" w="med" len="med"/>
-                    </a:lnB>
-                    <a:solidFill>
-                      <a:srgbClr val="D9601A"/>
-                    </a:solidFill>
-                  </a:tcPr>
-                </a:tc>
-              </a:tr>
-              <a:tr h="384048">
-                <a:tc>
-                  <a:txBody>
-                    <a:bodyPr/>
-                    <a:lstStyle/>
-                    <a:p>
-                      <a:pPr indent="0" marL="0">
-                        <a:buNone/>
-                      </a:pPr>
-                      <a:r>
-                        <a:rPr lang="en-US" sz="1050" dirty="0">
-                          <a:solidFill>
-                            <a:srgbClr val="3A3A42"/>
-                          </a:solidFill>
-                          <a:latin typeface="Yu Gothic" pitchFamily="34" charset="0"/>
-                          <a:ea typeface="Yu Gothic" pitchFamily="34" charset="-122"/>
-                          <a:cs typeface="Yu Gothic" pitchFamily="34" charset="-120"/>
-                        </a:rPr>
-                        <a:t>快手</a:t>
-                      </a:r>
-                      <a:endParaRPr lang="en-US" sz="1050" dirty="0">
-                        <a:latin typeface="Yu Gothic" charset="0"/>
-                        <a:ea typeface="Yu Gothic"/>
-                        <a:cs typeface="Yu Gothic"/>
-                        <a:ea typeface="Yu Gothic" charset="0"/>
-                        <a:cs typeface="Yu Gothic" charset="0"/>
-                      </a:endParaRPr>
-                    </a:p>
-                  </a:txBody>
-                  <a:tcPr marL="88900" marR="88900" marT="50800" marB="50800" anchor="ctr">
-                    <a:lnL w="7620" cap="flat" cmpd="sng" algn="ctr">
-                      <a:solidFill>
-                        <a:srgbClr val="DCD9D4"/>
-                      </a:solidFill>
-                      <a:prstDash val="solid"/>
-                      <a:round/>
-                      <a:headEnd type="none" w="med" len="med"/>
-                      <a:tailEnd type="none" w="med" len="med"/>
-                    </a:lnL>
-                    <a:lnR w="7620" cap="flat" cmpd="sng" algn="ctr">
-                      <a:solidFill>
-                        <a:srgbClr val="DCD9D4"/>
-                      </a:solidFill>
-                      <a:prstDash val="solid"/>
-                      <a:round/>
-                      <a:headEnd type="none" w="med" len="med"/>
-                      <a:tailEnd type="none" w="med" len="med"/>
-                    </a:lnR>
-                    <a:lnT w="7620" cap="flat" cmpd="sng" algn="ctr">
-                      <a:solidFill>
-                        <a:srgbClr val="DCD9D4"/>
-                      </a:solidFill>
-                      <a:prstDash val="solid"/>
-                      <a:round/>
-                      <a:headEnd type="none" w="med" len="med"/>
-                      <a:tailEnd type="none" w="med" len="med"/>
-                    </a:lnT>
-                    <a:lnB w="7620" cap="flat" cmpd="sng" algn="ctr">
-                      <a:solidFill>
-                        <a:srgbClr val="DCD9D4"/>
-                      </a:solidFill>
-                      <a:prstDash val="solid"/>
-                      <a:round/>
-                      <a:headEnd type="none" w="med" len="med"/>
-                      <a:tailEnd type="none" w="med" len="med"/>
-                    </a:lnB>
-                  </a:tcPr>
-                </a:tc>
-                <a:tc>
-                  <a:txBody>
-                    <a:bodyPr/>
-                    <a:lstStyle/>
-                    <a:p>
-                      <a:pPr indent="0" marL="0">
-                        <a:buNone/>
-                      </a:pPr>
-                      <a:r>
-                        <a:rPr lang="en-US" sz="1050" dirty="0">
-                          <a:solidFill>
-                            <a:srgbClr val="3A3A42"/>
-                          </a:solidFill>
-                          <a:latin typeface="Yu Gothic" pitchFamily="34" charset="0"/>
-                          <a:ea typeface="Yu Gothic" pitchFamily="34" charset="-122"/>
-                          <a:cs typeface="Yu Gothic" pitchFamily="34" charset="-120"/>
-                        </a:rPr>
-                        <a:t>「灵感新纪元」AIGC投資計画</a:t>
-                      </a:r>
-                      <a:endParaRPr lang="en-US" sz="1050" dirty="0">
-                        <a:latin typeface="Yu Gothic" charset="0"/>
-                        <a:ea typeface="Yu Gothic"/>
-                        <a:cs typeface="Yu Gothic"/>
-                        <a:ea typeface="Yu Gothic" charset="0"/>
-                        <a:cs typeface="Yu Gothic" charset="0"/>
-                      </a:endParaRPr>
-                    </a:p>
-                  </a:txBody>
-                  <a:tcPr marL="88900" marR="88900" marT="50800" marB="50800" anchor="ctr">
-                    <a:lnL w="7620" cap="flat" cmpd="sng" algn="ctr">
-                      <a:solidFill>
-                        <a:srgbClr val="DCD9D4"/>
-                      </a:solidFill>
-                      <a:prstDash val="solid"/>
-                      <a:round/>
-                      <a:headEnd type="none" w="med" len="med"/>
-                      <a:tailEnd type="none" w="med" len="med"/>
-                    </a:lnL>
-                    <a:lnR w="7620" cap="flat" cmpd="sng" algn="ctr">
-                      <a:solidFill>
-                        <a:srgbClr val="DCD9D4"/>
-                      </a:solidFill>
-                      <a:prstDash val="solid"/>
-                      <a:round/>
-                      <a:headEnd type="none" w="med" len="med"/>
-                      <a:tailEnd type="none" w="med" len="med"/>
-                    </a:lnR>
-                    <a:lnT w="7620" cap="flat" cmpd="sng" algn="ctr">
-                      <a:solidFill>
-                        <a:srgbClr val="DCD9D4"/>
-                      </a:solidFill>
-                      <a:prstDash val="solid"/>
-                      <a:round/>
-                      <a:headEnd type="none" w="med" len="med"/>
-                      <a:tailEnd type="none" w="med" len="med"/>
-                    </a:lnT>
-                    <a:lnB w="7620" cap="flat" cmpd="sng" algn="ctr">
-                      <a:solidFill>
-                        <a:srgbClr val="DCD9D4"/>
-                      </a:solidFill>
-                      <a:prstDash val="solid"/>
-                      <a:round/>
-                      <a:headEnd type="none" w="med" len="med"/>
-                      <a:tailEnd type="none" w="med" len="med"/>
-                    </a:lnB>
-                  </a:tcPr>
-                </a:tc>
-                <a:tc>
-                  <a:txBody>
-                    <a:bodyPr/>
-                    <a:lstStyle/>
-                    <a:p>
-                      <a:pPr indent="0" marL="0">
-                        <a:buNone/>
-                      </a:pPr>
-                      <a:r>
-                        <a:rPr lang="en-US" sz="1050" b="1" dirty="0">
-                          <a:solidFill>
-                            <a:srgbClr val="B3121B"/>
-                          </a:solidFill>
-                          <a:latin typeface="Yu Gothic" pitchFamily="34" charset="0"/>
-                          <a:ea typeface="Yu Gothic" pitchFamily="34" charset="-122"/>
-                          <a:cs typeface="Yu Gothic" pitchFamily="34" charset="-120"/>
-                        </a:rPr>
-                        <a:t>最大 90%</a:t>
-                      </a:r>
-                      <a:endParaRPr lang="en-US" sz="1050" dirty="0">
-                        <a:latin typeface="Yu Gothic" charset="0"/>
-                        <a:ea typeface="Yu Gothic"/>
-                        <a:cs typeface="Yu Gothic"/>
-                        <a:ea typeface="Yu Gothic" charset="0"/>
-                        <a:cs typeface="Yu Gothic" charset="0"/>
-                      </a:endParaRPr>
-                    </a:p>
-                  </a:txBody>
-                  <a:tcPr marL="88900" marR="88900" marT="50800" marB="50800" anchor="ctr">
-                    <a:lnL w="7620" cap="flat" cmpd="sng" algn="ctr">
-                      <a:solidFill>
-                        <a:srgbClr val="DCD9D4"/>
-                      </a:solidFill>
-                      <a:prstDash val="solid"/>
-                      <a:round/>
-                      <a:headEnd type="none" w="med" len="med"/>
-                      <a:tailEnd type="none" w="med" len="med"/>
-                    </a:lnL>
-                    <a:lnR w="7620" cap="flat" cmpd="sng" algn="ctr">
-                      <a:solidFill>
-                        <a:srgbClr val="DCD9D4"/>
-                      </a:solidFill>
-                      <a:prstDash val="solid"/>
-                      <a:round/>
-                      <a:headEnd type="none" w="med" len="med"/>
-                      <a:tailEnd type="none" w="med" len="med"/>
-                    </a:lnR>
-                    <a:lnT w="7620" cap="flat" cmpd="sng" algn="ctr">
-                      <a:solidFill>
-                        <a:srgbClr val="DCD9D4"/>
-                      </a:solidFill>
-                      <a:prstDash val="solid"/>
-                      <a:round/>
-                      <a:headEnd type="none" w="med" len="med"/>
-                      <a:tailEnd type="none" w="med" len="med"/>
-                    </a:lnT>
-                    <a:lnB w="7620" cap="flat" cmpd="sng" algn="ctr">
-                      <a:solidFill>
-                        <a:srgbClr val="DCD9D4"/>
-                      </a:solidFill>
-                      <a:prstDash val="solid"/>
-                      <a:round/>
-                      <a:headEnd type="none" w="med" len="med"/>
-                      <a:tailEnd type="none" w="med" len="med"/>
-                    </a:lnB>
-                  </a:tcPr>
-                </a:tc>
-                <a:tc>
-                  <a:txBody>
-                    <a:bodyPr/>
-                    <a:lstStyle/>
-                    <a:p>
-                      <a:pPr indent="0" marL="0">
-                        <a:buNone/>
-                      </a:pPr>
-                      <a:r>
-                        <a:rPr lang="en-US" sz="1050" dirty="0">
-                          <a:solidFill>
-                            <a:srgbClr val="3A3A42"/>
-                          </a:solidFill>
-                          <a:latin typeface="Yu Gothic" pitchFamily="34" charset="0"/>
-                          <a:ea typeface="Yu Gothic" pitchFamily="34" charset="-122"/>
-                          <a:cs typeface="Yu Gothic" pitchFamily="34" charset="-120"/>
-                        </a:rPr>
-                        <a:t>1億</a:t>
-                      </a:r>
-                      <a:endParaRPr lang="en-US" sz="1050" dirty="0">
-                        <a:latin typeface="Yu Gothic" charset="0"/>
-                        <a:ea typeface="Yu Gothic"/>
-                        <a:cs typeface="Yu Gothic"/>
-                        <a:ea typeface="Yu Gothic" charset="0"/>
-                        <a:cs typeface="Yu Gothic" charset="0"/>
-                      </a:endParaRPr>
-                    </a:p>
-                  </a:txBody>
-                  <a:tcPr marL="88900" marR="88900" marT="50800" marB="50800" anchor="ctr">
-                    <a:lnL w="7620" cap="flat" cmpd="sng" algn="ctr">
-                      <a:solidFill>
-                        <a:srgbClr val="DCD9D4"/>
-                      </a:solidFill>
-                      <a:prstDash val="solid"/>
-                      <a:round/>
-                      <a:headEnd type="none" w="med" len="med"/>
-                      <a:tailEnd type="none" w="med" len="med"/>
-                    </a:lnL>
-                    <a:lnR w="7620" cap="flat" cmpd="sng" algn="ctr">
-                      <a:solidFill>
-                        <a:srgbClr val="DCD9D4"/>
-                      </a:solidFill>
-                      <a:prstDash val="solid"/>
-                      <a:round/>
-                      <a:headEnd type="none" w="med" len="med"/>
-                      <a:tailEnd type="none" w="med" len="med"/>
-                    </a:lnR>
-                    <a:lnT w="7620" cap="flat" cmpd="sng" algn="ctr">
-                      <a:solidFill>
-                        <a:srgbClr val="DCD9D4"/>
-                      </a:solidFill>
-                      <a:prstDash val="solid"/>
-                      <a:round/>
-                      <a:headEnd type="none" w="med" len="med"/>
-                      <a:tailEnd type="none" w="med" len="med"/>
-                    </a:lnT>
-                    <a:lnB w="7620" cap="flat" cmpd="sng" algn="ctr">
-                      <a:solidFill>
-                        <a:srgbClr val="DCD9D4"/>
-                      </a:solidFill>
-                      <a:prstDash val="solid"/>
-                      <a:round/>
-                      <a:headEnd type="none" w="med" len="med"/>
-                      <a:tailEnd type="none" w="med" len="med"/>
-                    </a:lnB>
-                  </a:tcPr>
-                </a:tc>
-              </a:tr>
-              <a:tr h="384048">
-                <a:tc>
-                  <a:txBody>
-                    <a:bodyPr/>
-                    <a:lstStyle/>
-                    <a:p>
-                      <a:pPr indent="0" marL="0">
-                        <a:buNone/>
-                      </a:pPr>
-                      <a:r>
-                        <a:rPr lang="en-US" sz="1050" dirty="0">
-                          <a:solidFill>
-                            <a:srgbClr val="3A3A42"/>
-                          </a:solidFill>
-                          <a:latin typeface="Yu Gothic" pitchFamily="34" charset="0"/>
-                          <a:ea typeface="Yu Gothic" pitchFamily="34" charset="-122"/>
-                          <a:cs typeface="Yu Gothic" pitchFamily="34" charset="-120"/>
-                        </a:rPr>
-                        <a:t>抖音</a:t>
-                      </a:r>
-                      <a:endParaRPr lang="en-US" sz="1050" dirty="0">
-                        <a:latin typeface="Yu Gothic" charset="0"/>
-                        <a:ea typeface="Yu Gothic"/>
-                        <a:cs typeface="Yu Gothic"/>
-                        <a:ea typeface="Yu Gothic" charset="0"/>
-                        <a:cs typeface="Yu Gothic" charset="0"/>
-                      </a:endParaRPr>
-                    </a:p>
-                  </a:txBody>
-                  <a:tcPr marL="88900" marR="88900" marT="50800" marB="50800" anchor="ctr">
-                    <a:lnL w="7620" cap="flat" cmpd="sng" algn="ctr">
-                      <a:solidFill>
-                        <a:srgbClr val="DCD9D4"/>
-                      </a:solidFill>
-                      <a:prstDash val="solid"/>
-                      <a:round/>
-                      <a:headEnd type="none" w="med" len="med"/>
-                      <a:tailEnd type="none" w="med" len="med"/>
-                    </a:lnL>
-                    <a:lnR w="7620" cap="flat" cmpd="sng" algn="ctr">
-                      <a:solidFill>
-                        <a:srgbClr val="DCD9D4"/>
-                      </a:solidFill>
-                      <a:prstDash val="solid"/>
-                      <a:round/>
-                      <a:headEnd type="none" w="med" len="med"/>
-                      <a:tailEnd type="none" w="med" len="med"/>
-                    </a:lnR>
-                    <a:lnT w="7620" cap="flat" cmpd="sng" algn="ctr">
-                      <a:solidFill>
-                        <a:srgbClr val="DCD9D4"/>
-                      </a:solidFill>
-                      <a:prstDash val="solid"/>
-                      <a:round/>
-                      <a:headEnd type="none" w="med" len="med"/>
-                      <a:tailEnd type="none" w="med" len="med"/>
-                    </a:lnT>
-                    <a:lnB w="7620" cap="flat" cmpd="sng" algn="ctr">
-                      <a:solidFill>
-                        <a:srgbClr val="DCD9D4"/>
-                      </a:solidFill>
-                      <a:prstDash val="solid"/>
-                      <a:round/>
-                      <a:headEnd type="none" w="med" len="med"/>
-                      <a:tailEnd type="none" w="med" len="med"/>
-                    </a:lnB>
-                  </a:tcPr>
-                </a:tc>
-                <a:tc>
-                  <a:txBody>
-                    <a:bodyPr/>
-                    <a:lstStyle/>
-                    <a:p>
-                      <a:pPr indent="0" marL="0">
-                        <a:buNone/>
-                      </a:pPr>
-                      <a:r>
-                        <a:rPr lang="en-US" sz="1050" dirty="0">
-                          <a:solidFill>
-                            <a:srgbClr val="3A3A42"/>
-                          </a:solidFill>
-                          <a:latin typeface="Yu Gothic" pitchFamily="34" charset="0"/>
-                          <a:ea typeface="Yu Gothic" pitchFamily="34" charset="-122"/>
-                          <a:cs typeface="Yu Gothic" pitchFamily="34" charset="-120"/>
-                        </a:rPr>
-                        <a:t>「漫画星河」計画（IP改編）</a:t>
-                      </a:r>
-                      <a:endParaRPr lang="en-US" sz="1050" dirty="0">
-                        <a:latin typeface="Yu Gothic" charset="0"/>
-                        <a:ea typeface="Yu Gothic"/>
-                        <a:cs typeface="Yu Gothic"/>
-                        <a:ea typeface="Yu Gothic" charset="0"/>
-                        <a:cs typeface="Yu Gothic" charset="0"/>
-                      </a:endParaRPr>
-                    </a:p>
-                  </a:txBody>
-                  <a:tcPr marL="88900" marR="88900" marT="50800" marB="50800" anchor="ctr">
-                    <a:lnL w="7620" cap="flat" cmpd="sng" algn="ctr">
-                      <a:solidFill>
-                        <a:srgbClr val="DCD9D4"/>
-                      </a:solidFill>
-                      <a:prstDash val="solid"/>
-                      <a:round/>
-                      <a:headEnd type="none" w="med" len="med"/>
-                      <a:tailEnd type="none" w="med" len="med"/>
-                    </a:lnL>
-                    <a:lnR w="7620" cap="flat" cmpd="sng" algn="ctr">
-                      <a:solidFill>
-                        <a:srgbClr val="DCD9D4"/>
-                      </a:solidFill>
-                      <a:prstDash val="solid"/>
-                      <a:round/>
-                      <a:headEnd type="none" w="med" len="med"/>
-                      <a:tailEnd type="none" w="med" len="med"/>
-                    </a:lnR>
-                    <a:lnT w="7620" cap="flat" cmpd="sng" algn="ctr">
-                      <a:solidFill>
-                        <a:srgbClr val="DCD9D4"/>
-                      </a:solidFill>
-                      <a:prstDash val="solid"/>
-                      <a:round/>
-                      <a:headEnd type="none" w="med" len="med"/>
-                      <a:tailEnd type="none" w="med" len="med"/>
-                    </a:lnT>
-                    <a:lnB w="7620" cap="flat" cmpd="sng" algn="ctr">
-                      <a:solidFill>
-                        <a:srgbClr val="DCD9D4"/>
-                      </a:solidFill>
-                      <a:prstDash val="solid"/>
-                      <a:round/>
-                      <a:headEnd type="none" w="med" len="med"/>
-                      <a:tailEnd type="none" w="med" len="med"/>
-                    </a:lnB>
-                  </a:tcPr>
-                </a:tc>
-                <a:tc>
-                  <a:txBody>
-                    <a:bodyPr/>
-                    <a:lstStyle/>
-                    <a:p>
-                      <a:pPr indent="0" marL="0">
-                        <a:buNone/>
-                      </a:pPr>
-                      <a:r>
-                        <a:rPr lang="en-US" sz="1050" b="1" dirty="0">
-                          <a:solidFill>
-                            <a:srgbClr val="B3121B"/>
-                          </a:solidFill>
-                          <a:latin typeface="Yu Gothic" pitchFamily="34" charset="0"/>
-                          <a:ea typeface="Yu Gothic" pitchFamily="34" charset="-122"/>
-                          <a:cs typeface="Yu Gothic" pitchFamily="34" charset="-120"/>
-                        </a:rPr>
-                        <a:t>純収益の 90%</a:t>
-                      </a:r>
-                      <a:endParaRPr lang="en-US" sz="1050" dirty="0">
-                        <a:latin typeface="Yu Gothic" charset="0"/>
-                        <a:ea typeface="Yu Gothic"/>
-                        <a:cs typeface="Yu Gothic"/>
-                        <a:ea typeface="Yu Gothic" charset="0"/>
-                        <a:cs typeface="Yu Gothic" charset="0"/>
-                      </a:endParaRPr>
-                    </a:p>
-                  </a:txBody>
-                  <a:tcPr marL="88900" marR="88900" marT="50800" marB="50800" anchor="ctr">
-                    <a:lnL w="7620" cap="flat" cmpd="sng" algn="ctr">
-                      <a:solidFill>
-                        <a:srgbClr val="DCD9D4"/>
-                      </a:solidFill>
-                      <a:prstDash val="solid"/>
-                      <a:round/>
-                      <a:headEnd type="none" w="med" len="med"/>
-                      <a:tailEnd type="none" w="med" len="med"/>
-                    </a:lnL>
-                    <a:lnR w="7620" cap="flat" cmpd="sng" algn="ctr">
-                      <a:solidFill>
-                        <a:srgbClr val="DCD9D4"/>
-                      </a:solidFill>
-                      <a:prstDash val="solid"/>
-                      <a:round/>
-                      <a:headEnd type="none" w="med" len="med"/>
-                      <a:tailEnd type="none" w="med" len="med"/>
-                    </a:lnR>
-                    <a:lnT w="7620" cap="flat" cmpd="sng" algn="ctr">
-                      <a:solidFill>
-                        <a:srgbClr val="DCD9D4"/>
-                      </a:solidFill>
-                      <a:prstDash val="solid"/>
-                      <a:round/>
-                      <a:headEnd type="none" w="med" len="med"/>
-                      <a:tailEnd type="none" w="med" len="med"/>
-                    </a:lnT>
-                    <a:lnB w="7620" cap="flat" cmpd="sng" algn="ctr">
-                      <a:solidFill>
-                        <a:srgbClr val="DCD9D4"/>
-                      </a:solidFill>
-                      <a:prstDash val="solid"/>
-                      <a:round/>
-                      <a:headEnd type="none" w="med" len="med"/>
-                      <a:tailEnd type="none" w="med" len="med"/>
-                    </a:lnB>
-                  </a:tcPr>
-                </a:tc>
-                <a:tc>
-                  <a:txBody>
-                    <a:bodyPr/>
-                    <a:lstStyle/>
-                    <a:p>
-                      <a:pPr indent="0" marL="0">
-                        <a:buNone/>
-                      </a:pPr>
-                      <a:r>
-                        <a:rPr lang="en-US" sz="1050" dirty="0">
-                          <a:solidFill>
-                            <a:srgbClr val="3A3A42"/>
-                          </a:solidFill>
-                          <a:latin typeface="Yu Gothic" pitchFamily="34" charset="0"/>
-                          <a:ea typeface="Yu Gothic" pitchFamily="34" charset="-122"/>
-                          <a:cs typeface="Yu Gothic" pitchFamily="34" charset="-120"/>
-                        </a:rPr>
-                        <a:t>—</a:t>
-                      </a:r>
-                      <a:endParaRPr lang="en-US" sz="1050" dirty="0">
-                        <a:latin typeface="Yu Gothic" charset="0"/>
-                        <a:ea typeface="Yu Gothic"/>
-                        <a:cs typeface="Yu Gothic"/>
-                        <a:ea typeface="Yu Gothic" charset="0"/>
-                        <a:cs typeface="Yu Gothic" charset="0"/>
-                      </a:endParaRPr>
-                    </a:p>
-                  </a:txBody>
-                  <a:tcPr marL="88900" marR="88900" marT="50800" marB="50800" anchor="ctr">
-                    <a:lnL w="7620" cap="flat" cmpd="sng" algn="ctr">
-                      <a:solidFill>
-                        <a:srgbClr val="DCD9D4"/>
-                      </a:solidFill>
-                      <a:prstDash val="solid"/>
-                      <a:round/>
-                      <a:headEnd type="none" w="med" len="med"/>
-                      <a:tailEnd type="none" w="med" len="med"/>
-                    </a:lnL>
-                    <a:lnR w="7620" cap="flat" cmpd="sng" algn="ctr">
-                      <a:solidFill>
-                        <a:srgbClr val="DCD9D4"/>
-                      </a:solidFill>
-                      <a:prstDash val="solid"/>
-                      <a:round/>
-                      <a:headEnd type="none" w="med" len="med"/>
-                      <a:tailEnd type="none" w="med" len="med"/>
-                    </a:lnR>
-                    <a:lnT w="7620" cap="flat" cmpd="sng" algn="ctr">
-                      <a:solidFill>
-                        <a:srgbClr val="DCD9D4"/>
-                      </a:solidFill>
-                      <a:prstDash val="solid"/>
-                      <a:round/>
-                      <a:headEnd type="none" w="med" len="med"/>
-                      <a:tailEnd type="none" w="med" len="med"/>
-                    </a:lnT>
-                    <a:lnB w="7620" cap="flat" cmpd="sng" algn="ctr">
-                      <a:solidFill>
-                        <a:srgbClr val="DCD9D4"/>
-                      </a:solidFill>
-                      <a:prstDash val="solid"/>
-                      <a:round/>
-                      <a:headEnd type="none" w="med" len="med"/>
-                      <a:tailEnd type="none" w="med" len="med"/>
-                    </a:lnB>
-                  </a:tcPr>
-                </a:tc>
-              </a:tr>
-              <a:tr h="384048">
-                <a:tc>
-                  <a:txBody>
-                    <a:bodyPr/>
-                    <a:lstStyle/>
-                    <a:p>
-                      <a:pPr indent="0" marL="0">
-                        <a:buNone/>
-                      </a:pPr>
-                      <a:r>
-                        <a:rPr lang="en-US" sz="1050" dirty="0">
-                          <a:solidFill>
-                            <a:srgbClr val="3A3A42"/>
-                          </a:solidFill>
-                          <a:latin typeface="Yu Gothic" pitchFamily="34" charset="0"/>
-                          <a:ea typeface="Yu Gothic" pitchFamily="34" charset="-122"/>
-                          <a:cs typeface="Yu Gothic" pitchFamily="34" charset="-120"/>
-                        </a:rPr>
-                        <a:t>抖音</a:t>
-                      </a:r>
-                      <a:endParaRPr lang="en-US" sz="1050" dirty="0">
-                        <a:latin typeface="Yu Gothic" charset="0"/>
-                        <a:ea typeface="Yu Gothic"/>
-                        <a:cs typeface="Yu Gothic"/>
-                        <a:ea typeface="Yu Gothic" charset="0"/>
-                        <a:cs typeface="Yu Gothic" charset="0"/>
-                      </a:endParaRPr>
-                    </a:p>
-                  </a:txBody>
-                  <a:tcPr marL="88900" marR="88900" marT="50800" marB="50800" anchor="ctr">
-                    <a:lnL w="7620" cap="flat" cmpd="sng" algn="ctr">
-                      <a:solidFill>
-                        <a:srgbClr val="DCD9D4"/>
-                      </a:solidFill>
-                      <a:prstDash val="solid"/>
-                      <a:round/>
-                      <a:headEnd type="none" w="med" len="med"/>
-                      <a:tailEnd type="none" w="med" len="med"/>
-                    </a:lnL>
-                    <a:lnR w="7620" cap="flat" cmpd="sng" algn="ctr">
-                      <a:solidFill>
-                        <a:srgbClr val="DCD9D4"/>
-                      </a:solidFill>
-                      <a:prstDash val="solid"/>
-                      <a:round/>
-                      <a:headEnd type="none" w="med" len="med"/>
-                      <a:tailEnd type="none" w="med" len="med"/>
-                    </a:lnR>
-                    <a:lnT w="7620" cap="flat" cmpd="sng" algn="ctr">
-                      <a:solidFill>
-                        <a:srgbClr val="DCD9D4"/>
-                      </a:solidFill>
-                      <a:prstDash val="solid"/>
-                      <a:round/>
-                      <a:headEnd type="none" w="med" len="med"/>
-                      <a:tailEnd type="none" w="med" len="med"/>
-                    </a:lnT>
-                    <a:lnB w="7620" cap="flat" cmpd="sng" algn="ctr">
-                      <a:solidFill>
-                        <a:srgbClr val="DCD9D4"/>
-                      </a:solidFill>
-                      <a:prstDash val="solid"/>
-                      <a:round/>
-                      <a:headEnd type="none" w="med" len="med"/>
-                      <a:tailEnd type="none" w="med" len="med"/>
-                    </a:lnB>
-                  </a:tcPr>
-                </a:tc>
-                <a:tc>
-                  <a:txBody>
-                    <a:bodyPr/>
-                    <a:lstStyle/>
-                    <a:p>
-                      <a:pPr indent="0" marL="0">
-                        <a:buNone/>
-                      </a:pPr>
-                      <a:r>
-                        <a:rPr lang="en-US" sz="1050" dirty="0">
-                          <a:solidFill>
-                            <a:srgbClr val="3A3A42"/>
-                          </a:solidFill>
-                          <a:latin typeface="Yu Gothic" pitchFamily="34" charset="0"/>
-                          <a:ea typeface="Yu Gothic" pitchFamily="34" charset="-122"/>
-                          <a:cs typeface="Yu Gothic" pitchFamily="34" charset="-120"/>
-                        </a:rPr>
-                        <a:t>AI漫劇 ／ AI実写短劇</a:t>
-                      </a:r>
-                      <a:endParaRPr lang="en-US" sz="1050" dirty="0">
-                        <a:latin typeface="Yu Gothic" charset="0"/>
-                        <a:ea typeface="Yu Gothic"/>
-                        <a:cs typeface="Yu Gothic"/>
-                        <a:ea typeface="Yu Gothic" charset="0"/>
-                        <a:cs typeface="Yu Gothic" charset="0"/>
-                      </a:endParaRPr>
-                    </a:p>
-                  </a:txBody>
-                  <a:tcPr marL="88900" marR="88900" marT="50800" marB="50800" anchor="ctr">
-                    <a:lnL w="7620" cap="flat" cmpd="sng" algn="ctr">
-                      <a:solidFill>
-                        <a:srgbClr val="DCD9D4"/>
-                      </a:solidFill>
-                      <a:prstDash val="solid"/>
-                      <a:round/>
-                      <a:headEnd type="none" w="med" len="med"/>
-                      <a:tailEnd type="none" w="med" len="med"/>
-                    </a:lnL>
-                    <a:lnR w="7620" cap="flat" cmpd="sng" algn="ctr">
-                      <a:solidFill>
-                        <a:srgbClr val="DCD9D4"/>
-                      </a:solidFill>
-                      <a:prstDash val="solid"/>
-                      <a:round/>
-                      <a:headEnd type="none" w="med" len="med"/>
-                      <a:tailEnd type="none" w="med" len="med"/>
-                    </a:lnR>
-                    <a:lnT w="7620" cap="flat" cmpd="sng" algn="ctr">
-                      <a:solidFill>
-                        <a:srgbClr val="DCD9D4"/>
-                      </a:solidFill>
-                      <a:prstDash val="solid"/>
-                      <a:round/>
-                      <a:headEnd type="none" w="med" len="med"/>
-                      <a:tailEnd type="none" w="med" len="med"/>
-                    </a:lnT>
-                    <a:lnB w="7620" cap="flat" cmpd="sng" algn="ctr">
-                      <a:solidFill>
-                        <a:srgbClr val="DCD9D4"/>
-                      </a:solidFill>
-                      <a:prstDash val="solid"/>
-                      <a:round/>
-                      <a:headEnd type="none" w="med" len="med"/>
-                      <a:tailEnd type="none" w="med" len="med"/>
-                    </a:lnB>
-                  </a:tcPr>
-                </a:tc>
-                <a:tc>
-                  <a:txBody>
-                    <a:bodyPr/>
-                    <a:lstStyle/>
-                    <a:p>
-                      <a:pPr indent="0" marL="0">
-                        <a:buNone/>
-                      </a:pPr>
-                      <a:r>
-                        <a:rPr lang="en-US" sz="1050" dirty="0">
-                          <a:solidFill>
-                            <a:srgbClr val="3A3A42"/>
-                          </a:solidFill>
-                          <a:latin typeface="Yu Gothic" pitchFamily="34" charset="0"/>
-                          <a:ea typeface="Yu Gothic" pitchFamily="34" charset="-122"/>
-                          <a:cs typeface="Yu Gothic" pitchFamily="34" charset="-120"/>
-                        </a:rPr>
-                        <a:t>30〜50% ／ 40〜60%</a:t>
-                      </a:r>
-                      <a:endParaRPr lang="en-US" sz="1050" dirty="0">
-                        <a:latin typeface="Yu Gothic" charset="0"/>
-                        <a:ea typeface="Yu Gothic"/>
-                        <a:cs typeface="Yu Gothic"/>
-                        <a:ea typeface="Yu Gothic" charset="0"/>
-                        <a:cs typeface="Yu Gothic" charset="0"/>
-                      </a:endParaRPr>
-                    </a:p>
-                  </a:txBody>
-                  <a:tcPr marL="88900" marR="88900" marT="50800" marB="50800" anchor="ctr">
-                    <a:lnL w="7620" cap="flat" cmpd="sng" algn="ctr">
-                      <a:solidFill>
-                        <a:srgbClr val="DCD9D4"/>
-                      </a:solidFill>
-                      <a:prstDash val="solid"/>
-                      <a:round/>
-                      <a:headEnd type="none" w="med" len="med"/>
-                      <a:tailEnd type="none" w="med" len="med"/>
-                    </a:lnL>
-                    <a:lnR w="7620" cap="flat" cmpd="sng" algn="ctr">
-                      <a:solidFill>
-                        <a:srgbClr val="DCD9D4"/>
-                      </a:solidFill>
-                      <a:prstDash val="solid"/>
-                      <a:round/>
-                      <a:headEnd type="none" w="med" len="med"/>
-                      <a:tailEnd type="none" w="med" len="med"/>
-                    </a:lnR>
-                    <a:lnT w="7620" cap="flat" cmpd="sng" algn="ctr">
-                      <a:solidFill>
-                        <a:srgbClr val="DCD9D4"/>
-                      </a:solidFill>
-                      <a:prstDash val="solid"/>
-                      <a:round/>
-                      <a:headEnd type="none" w="med" len="med"/>
-                      <a:tailEnd type="none" w="med" len="med"/>
-                    </a:lnT>
-                    <a:lnB w="7620" cap="flat" cmpd="sng" algn="ctr">
-                      <a:solidFill>
-                        <a:srgbClr val="DCD9D4"/>
-                      </a:solidFill>
-                      <a:prstDash val="solid"/>
-                      <a:round/>
-                      <a:headEnd type="none" w="med" len="med"/>
-                      <a:tailEnd type="none" w="med" len="med"/>
-                    </a:lnB>
-                  </a:tcPr>
-                </a:tc>
-                <a:tc>
-                  <a:txBody>
-                    <a:bodyPr/>
-                    <a:lstStyle/>
-                    <a:p>
-                      <a:pPr indent="0" marL="0">
-                        <a:buNone/>
-                      </a:pPr>
-                      <a:r>
-                        <a:rPr lang="en-US" sz="1050" dirty="0">
-                          <a:solidFill>
-                            <a:srgbClr val="3A3A42"/>
-                          </a:solidFill>
-                          <a:latin typeface="Yu Gothic" pitchFamily="34" charset="0"/>
-                          <a:ea typeface="Yu Gothic" pitchFamily="34" charset="-122"/>
-                          <a:cs typeface="Yu Gothic" pitchFamily="34" charset="-120"/>
-                        </a:rPr>
-                        <a:t>上位作品は月10万〜50万元</a:t>
-                      </a:r>
-                      <a:endParaRPr lang="en-US" sz="1050" dirty="0">
-                        <a:latin typeface="Yu Gothic" charset="0"/>
-                        <a:ea typeface="Yu Gothic"/>
-                        <a:cs typeface="Yu Gothic"/>
-                        <a:ea typeface="Yu Gothic" charset="0"/>
-                        <a:cs typeface="Yu Gothic" charset="0"/>
-                      </a:endParaRPr>
-                    </a:p>
-                  </a:txBody>
-                  <a:tcPr marL="88900" marR="88900" marT="50800" marB="50800" anchor="ctr">
-                    <a:lnL w="7620" cap="flat" cmpd="sng" algn="ctr">
-                      <a:solidFill>
-                        <a:srgbClr val="DCD9D4"/>
-                      </a:solidFill>
-                      <a:prstDash val="solid"/>
-                      <a:round/>
-                      <a:headEnd type="none" w="med" len="med"/>
-                      <a:tailEnd type="none" w="med" len="med"/>
-                    </a:lnL>
-                    <a:lnR w="7620" cap="flat" cmpd="sng" algn="ctr">
-                      <a:solidFill>
-                        <a:srgbClr val="DCD9D4"/>
-                      </a:solidFill>
-                      <a:prstDash val="solid"/>
-                      <a:round/>
-                      <a:headEnd type="none" w="med" len="med"/>
-                      <a:tailEnd type="none" w="med" len="med"/>
-                    </a:lnR>
-                    <a:lnT w="7620" cap="flat" cmpd="sng" algn="ctr">
-                      <a:solidFill>
-                        <a:srgbClr val="DCD9D4"/>
-                      </a:solidFill>
-                      <a:prstDash val="solid"/>
-                      <a:round/>
-                      <a:headEnd type="none" w="med" len="med"/>
-                      <a:tailEnd type="none" w="med" len="med"/>
-                    </a:lnT>
-                    <a:lnB w="7620" cap="flat" cmpd="sng" algn="ctr">
-                      <a:solidFill>
-                        <a:srgbClr val="DCD9D4"/>
-                      </a:solidFill>
-                      <a:prstDash val="solid"/>
-                      <a:round/>
-                      <a:headEnd type="none" w="med" len="med"/>
-                      <a:tailEnd type="none" w="med" len="med"/>
-                    </a:lnB>
-                  </a:tcPr>
-                </a:tc>
-              </a:tr>
-              <a:tr h="384048">
-                <a:tc>
-                  <a:txBody>
-                    <a:bodyPr/>
-                    <a:lstStyle/>
-                    <a:p>
-                      <a:pPr indent="0" marL="0">
-                        <a:buNone/>
-                      </a:pPr>
-                      <a:r>
-                        <a:rPr lang="en-US" sz="1050" dirty="0">
-                          <a:solidFill>
-                            <a:srgbClr val="3A3A42"/>
-                          </a:solidFill>
-                          <a:latin typeface="Yu Gothic" pitchFamily="34" charset="0"/>
-                          <a:ea typeface="Yu Gothic" pitchFamily="34" charset="-122"/>
-                          <a:cs typeface="Yu Gothic" pitchFamily="34" charset="-120"/>
-                        </a:rPr>
-                        <a:t>Bilibili</a:t>
-                      </a:r>
-                      <a:endParaRPr lang="en-US" sz="1050" dirty="0">
-                        <a:latin typeface="Yu Gothic" charset="0"/>
-                        <a:ea typeface="Yu Gothic"/>
-                        <a:cs typeface="Yu Gothic"/>
-                        <a:ea typeface="Yu Gothic" charset="0"/>
-                        <a:cs typeface="Yu Gothic" charset="0"/>
-                      </a:endParaRPr>
-                    </a:p>
-                  </a:txBody>
-                  <a:tcPr marL="88900" marR="88900" marT="50800" marB="50800" anchor="ctr">
-                    <a:lnL w="7620" cap="flat" cmpd="sng" algn="ctr">
-                      <a:solidFill>
-                        <a:srgbClr val="DCD9D4"/>
-                      </a:solidFill>
-                      <a:prstDash val="solid"/>
-                      <a:round/>
-                      <a:headEnd type="none" w="med" len="med"/>
-                      <a:tailEnd type="none" w="med" len="med"/>
-                    </a:lnL>
-                    <a:lnR w="7620" cap="flat" cmpd="sng" algn="ctr">
-                      <a:solidFill>
-                        <a:srgbClr val="DCD9D4"/>
-                      </a:solidFill>
-                      <a:prstDash val="solid"/>
-                      <a:round/>
-                      <a:headEnd type="none" w="med" len="med"/>
-                      <a:tailEnd type="none" w="med" len="med"/>
-                    </a:lnR>
-                    <a:lnT w="7620" cap="flat" cmpd="sng" algn="ctr">
-                      <a:solidFill>
-                        <a:srgbClr val="DCD9D4"/>
-                      </a:solidFill>
-                      <a:prstDash val="solid"/>
-                      <a:round/>
-                      <a:headEnd type="none" w="med" len="med"/>
-                      <a:tailEnd type="none" w="med" len="med"/>
-                    </a:lnT>
-                    <a:lnB w="7620" cap="flat" cmpd="sng" algn="ctr">
-                      <a:solidFill>
-                        <a:srgbClr val="DCD9D4"/>
-                      </a:solidFill>
-                      <a:prstDash val="solid"/>
-                      <a:round/>
-                      <a:headEnd type="none" w="med" len="med"/>
-                      <a:tailEnd type="none" w="med" len="med"/>
-                    </a:lnB>
-                  </a:tcPr>
-                </a:tc>
-                <a:tc>
-                  <a:txBody>
-                    <a:bodyPr/>
-                    <a:lstStyle/>
-                    <a:p>
-                      <a:pPr indent="0" marL="0">
-                        <a:buNone/>
-                      </a:pPr>
-                      <a:r>
-                        <a:rPr lang="en-US" sz="1050" dirty="0">
-                          <a:solidFill>
-                            <a:srgbClr val="3A3A42"/>
-                          </a:solidFill>
-                          <a:latin typeface="Yu Gothic" pitchFamily="34" charset="0"/>
-                          <a:ea typeface="Yu Gothic" pitchFamily="34" charset="-122"/>
-                          <a:cs typeface="Yu Gothic" pitchFamily="34" charset="-120"/>
-                        </a:rPr>
-                        <a:t>「觉醒计划」</a:t>
-                      </a:r>
-                      <a:endParaRPr lang="en-US" sz="1050" dirty="0">
-                        <a:latin typeface="Yu Gothic" charset="0"/>
-                        <a:ea typeface="Yu Gothic"/>
-                        <a:cs typeface="Yu Gothic"/>
-                        <a:ea typeface="Yu Gothic" charset="0"/>
-                        <a:cs typeface="Yu Gothic" charset="0"/>
-                      </a:endParaRPr>
-                    </a:p>
-                  </a:txBody>
-                  <a:tcPr marL="88900" marR="88900" marT="50800" marB="50800" anchor="ctr">
-                    <a:lnL w="7620" cap="flat" cmpd="sng" algn="ctr">
-                      <a:solidFill>
-                        <a:srgbClr val="DCD9D4"/>
-                      </a:solidFill>
-                      <a:prstDash val="solid"/>
-                      <a:round/>
-                      <a:headEnd type="none" w="med" len="med"/>
-                      <a:tailEnd type="none" w="med" len="med"/>
-                    </a:lnL>
-                    <a:lnR w="7620" cap="flat" cmpd="sng" algn="ctr">
-                      <a:solidFill>
-                        <a:srgbClr val="DCD9D4"/>
-                      </a:solidFill>
-                      <a:prstDash val="solid"/>
-                      <a:round/>
-                      <a:headEnd type="none" w="med" len="med"/>
-                      <a:tailEnd type="none" w="med" len="med"/>
-                    </a:lnR>
-                    <a:lnT w="7620" cap="flat" cmpd="sng" algn="ctr">
-                      <a:solidFill>
-                        <a:srgbClr val="DCD9D4"/>
-                      </a:solidFill>
-                      <a:prstDash val="solid"/>
-                      <a:round/>
-                      <a:headEnd type="none" w="med" len="med"/>
-                      <a:tailEnd type="none" w="med" len="med"/>
-                    </a:lnT>
-                    <a:lnB w="7620" cap="flat" cmpd="sng" algn="ctr">
-                      <a:solidFill>
-                        <a:srgbClr val="DCD9D4"/>
-                      </a:solidFill>
-                      <a:prstDash val="solid"/>
-                      <a:round/>
-                      <a:headEnd type="none" w="med" len="med"/>
-                      <a:tailEnd type="none" w="med" len="med"/>
-                    </a:lnB>
-                  </a:tcPr>
-                </a:tc>
-                <a:tc>
-                  <a:txBody>
-                    <a:bodyPr/>
-                    <a:lstStyle/>
-                    <a:p>
-                      <a:pPr indent="0" marL="0">
-                        <a:buNone/>
-                      </a:pPr>
-                      <a:r>
-                        <a:rPr lang="en-US" sz="1050" b="1" dirty="0">
-                          <a:solidFill>
-                            <a:srgbClr val="B3121B"/>
-                          </a:solidFill>
-                          <a:latin typeface="Yu Gothic" pitchFamily="34" charset="0"/>
-                          <a:ea typeface="Yu Gothic" pitchFamily="34" charset="-122"/>
-                          <a:cs typeface="Yu Gothic" pitchFamily="34" charset="-120"/>
-                        </a:rPr>
-                        <a:t>最大 80%</a:t>
-                      </a:r>
-                      <a:endParaRPr lang="en-US" sz="1050" dirty="0">
-                        <a:latin typeface="Yu Gothic" charset="0"/>
-                        <a:ea typeface="Yu Gothic"/>
-                        <a:cs typeface="Yu Gothic"/>
-                        <a:ea typeface="Yu Gothic" charset="0"/>
-                        <a:cs typeface="Yu Gothic" charset="0"/>
-                      </a:endParaRPr>
-                    </a:p>
-                  </a:txBody>
-                  <a:tcPr marL="88900" marR="88900" marT="50800" marB="50800" anchor="ctr">
-                    <a:lnL w="7620" cap="flat" cmpd="sng" algn="ctr">
-                      <a:solidFill>
-                        <a:srgbClr val="DCD9D4"/>
-                      </a:solidFill>
-                      <a:prstDash val="solid"/>
-                      <a:round/>
-                      <a:headEnd type="none" w="med" len="med"/>
-                      <a:tailEnd type="none" w="med" len="med"/>
-                    </a:lnL>
-                    <a:lnR w="7620" cap="flat" cmpd="sng" algn="ctr">
-                      <a:solidFill>
-                        <a:srgbClr val="DCD9D4"/>
-                      </a:solidFill>
-                      <a:prstDash val="solid"/>
-                      <a:round/>
-                      <a:headEnd type="none" w="med" len="med"/>
-                      <a:tailEnd type="none" w="med" len="med"/>
-                    </a:lnR>
-                    <a:lnT w="7620" cap="flat" cmpd="sng" algn="ctr">
-                      <a:solidFill>
-                        <a:srgbClr val="DCD9D4"/>
-                      </a:solidFill>
-                      <a:prstDash val="solid"/>
-                      <a:round/>
-                      <a:headEnd type="none" w="med" len="med"/>
-                      <a:tailEnd type="none" w="med" len="med"/>
-                    </a:lnT>
-                    <a:lnB w="7620" cap="flat" cmpd="sng" algn="ctr">
-                      <a:solidFill>
-                        <a:srgbClr val="DCD9D4"/>
-                      </a:solidFill>
-                      <a:prstDash val="solid"/>
-                      <a:round/>
-                      <a:headEnd type="none" w="med" len="med"/>
-                      <a:tailEnd type="none" w="med" len="med"/>
-                    </a:lnB>
-                  </a:tcPr>
-                </a:tc>
-                <a:tc>
-                  <a:txBody>
-                    <a:bodyPr/>
-                    <a:lstStyle/>
-                    <a:p>
-                      <a:pPr indent="0" marL="0">
-                        <a:buNone/>
-                      </a:pPr>
-                      <a:r>
-                        <a:rPr lang="en-US" sz="1050" dirty="0">
-                          <a:solidFill>
-                            <a:srgbClr val="3A3A42"/>
-                          </a:solidFill>
-                          <a:latin typeface="Yu Gothic" pitchFamily="34" charset="0"/>
-                          <a:ea typeface="Yu Gothic" pitchFamily="34" charset="-122"/>
-                          <a:cs typeface="Yu Gothic" pitchFamily="34" charset="-120"/>
-                        </a:rPr>
-                        <a:t>数百万</a:t>
-                      </a:r>
-                      <a:endParaRPr lang="en-US" sz="1050" dirty="0">
-                        <a:latin typeface="Yu Gothic" charset="0"/>
-                        <a:ea typeface="Yu Gothic"/>
-                        <a:cs typeface="Yu Gothic"/>
-                        <a:ea typeface="Yu Gothic" charset="0"/>
-                        <a:cs typeface="Yu Gothic" charset="0"/>
-                      </a:endParaRPr>
-                    </a:p>
-                  </a:txBody>
-                  <a:tcPr marL="88900" marR="88900" marT="50800" marB="50800" anchor="ctr">
-                    <a:lnL w="7620" cap="flat" cmpd="sng" algn="ctr">
-                      <a:solidFill>
-                        <a:srgbClr val="DCD9D4"/>
-                      </a:solidFill>
-                      <a:prstDash val="solid"/>
-                      <a:round/>
-                      <a:headEnd type="none" w="med" len="med"/>
-                      <a:tailEnd type="none" w="med" len="med"/>
-                    </a:lnL>
-                    <a:lnR w="7620" cap="flat" cmpd="sng" algn="ctr">
-                      <a:solidFill>
-                        <a:srgbClr val="DCD9D4"/>
-                      </a:solidFill>
-                      <a:prstDash val="solid"/>
-                      <a:round/>
-                      <a:headEnd type="none" w="med" len="med"/>
-                      <a:tailEnd type="none" w="med" len="med"/>
-                    </a:lnR>
-                    <a:lnT w="7620" cap="flat" cmpd="sng" algn="ctr">
-                      <a:solidFill>
-                        <a:srgbClr val="DCD9D4"/>
-                      </a:solidFill>
-                      <a:prstDash val="solid"/>
-                      <a:round/>
-                      <a:headEnd type="none" w="med" len="med"/>
-                      <a:tailEnd type="none" w="med" len="med"/>
-                    </a:lnT>
-                    <a:lnB w="7620" cap="flat" cmpd="sng" algn="ctr">
-                      <a:solidFill>
-                        <a:srgbClr val="DCD9D4"/>
-                      </a:solidFill>
-                      <a:prstDash val="solid"/>
-                      <a:round/>
-                      <a:headEnd type="none" w="med" len="med"/>
-                      <a:tailEnd type="none" w="med" len="med"/>
-                    </a:lnB>
-                  </a:tcPr>
-                </a:tc>
-              </a:tr>
-              <a:tr h="384048">
-                <a:tc>
-                  <a:txBody>
-                    <a:bodyPr/>
-                    <a:lstStyle/>
-                    <a:p>
-                      <a:pPr indent="0" marL="0">
-                        <a:buNone/>
-                      </a:pPr>
-                      <a:r>
-                        <a:rPr lang="en-US" sz="1050" dirty="0">
-                          <a:solidFill>
-                            <a:srgbClr val="3A3A42"/>
-                          </a:solidFill>
-                          <a:latin typeface="Yu Gothic" pitchFamily="34" charset="0"/>
-                          <a:ea typeface="Yu Gothic" pitchFamily="34" charset="-122"/>
-                          <a:cs typeface="Yu Gothic" pitchFamily="34" charset="-120"/>
-                        </a:rPr>
-                        <a:t>百度</a:t>
-                      </a:r>
-                      <a:endParaRPr lang="en-US" sz="1050" dirty="0">
-                        <a:latin typeface="Yu Gothic" charset="0"/>
-                        <a:ea typeface="Yu Gothic"/>
-                        <a:cs typeface="Yu Gothic"/>
-                        <a:ea typeface="Yu Gothic" charset="0"/>
-                        <a:cs typeface="Yu Gothic" charset="0"/>
-                      </a:endParaRPr>
-                    </a:p>
-                  </a:txBody>
-                  <a:tcPr marL="88900" marR="88900" marT="50800" marB="50800" anchor="ctr">
-                    <a:lnL w="7620" cap="flat" cmpd="sng" algn="ctr">
-                      <a:solidFill>
-                        <a:srgbClr val="DCD9D4"/>
-                      </a:solidFill>
-                      <a:prstDash val="solid"/>
-                      <a:round/>
-                      <a:headEnd type="none" w="med" len="med"/>
-                      <a:tailEnd type="none" w="med" len="med"/>
-                    </a:lnL>
-                    <a:lnR w="7620" cap="flat" cmpd="sng" algn="ctr">
-                      <a:solidFill>
-                        <a:srgbClr val="DCD9D4"/>
-                      </a:solidFill>
-                      <a:prstDash val="solid"/>
-                      <a:round/>
-                      <a:headEnd type="none" w="med" len="med"/>
-                      <a:tailEnd type="none" w="med" len="med"/>
-                    </a:lnR>
-                    <a:lnT w="7620" cap="flat" cmpd="sng" algn="ctr">
-                      <a:solidFill>
-                        <a:srgbClr val="DCD9D4"/>
-                      </a:solidFill>
-                      <a:prstDash val="solid"/>
-                      <a:round/>
-                      <a:headEnd type="none" w="med" len="med"/>
-                      <a:tailEnd type="none" w="med" len="med"/>
-                    </a:lnT>
-                    <a:lnB w="7620" cap="flat" cmpd="sng" algn="ctr">
-                      <a:solidFill>
-                        <a:srgbClr val="DCD9D4"/>
-                      </a:solidFill>
-                      <a:prstDash val="solid"/>
-                      <a:round/>
-                      <a:headEnd type="none" w="med" len="med"/>
-                      <a:tailEnd type="none" w="med" len="med"/>
-                    </a:lnB>
-                  </a:tcPr>
-                </a:tc>
-                <a:tc>
-                  <a:txBody>
-                    <a:bodyPr/>
-                    <a:lstStyle/>
-                    <a:p>
-                      <a:pPr indent="0" marL="0">
-                        <a:buNone/>
-                      </a:pPr>
-                      <a:r>
-                        <a:rPr lang="en-US" sz="1050" dirty="0">
-                          <a:solidFill>
-                            <a:srgbClr val="3A3A42"/>
-                          </a:solidFill>
-                          <a:latin typeface="Yu Gothic" pitchFamily="34" charset="0"/>
-                          <a:ea typeface="Yu Gothic" pitchFamily="34" charset="-122"/>
-                          <a:cs typeface="Yu Gothic" pitchFamily="34" charset="-120"/>
-                        </a:rPr>
-                        <a:t>「AI星河計画」</a:t>
-                      </a:r>
-                      <a:endParaRPr lang="en-US" sz="1050" dirty="0">
-                        <a:latin typeface="Yu Gothic" charset="0"/>
-                        <a:ea typeface="Yu Gothic"/>
-                        <a:cs typeface="Yu Gothic"/>
-                        <a:ea typeface="Yu Gothic" charset="0"/>
-                        <a:cs typeface="Yu Gothic" charset="0"/>
-                      </a:endParaRPr>
-                    </a:p>
-                  </a:txBody>
-                  <a:tcPr marL="88900" marR="88900" marT="50800" marB="50800" anchor="ctr">
-                    <a:lnL w="7620" cap="flat" cmpd="sng" algn="ctr">
-                      <a:solidFill>
-                        <a:srgbClr val="DCD9D4"/>
-                      </a:solidFill>
-                      <a:prstDash val="solid"/>
-                      <a:round/>
-                      <a:headEnd type="none" w="med" len="med"/>
-                      <a:tailEnd type="none" w="med" len="med"/>
-                    </a:lnL>
-                    <a:lnR w="7620" cap="flat" cmpd="sng" algn="ctr">
-                      <a:solidFill>
-                        <a:srgbClr val="DCD9D4"/>
-                      </a:solidFill>
-                      <a:prstDash val="solid"/>
-                      <a:round/>
-                      <a:headEnd type="none" w="med" len="med"/>
-                      <a:tailEnd type="none" w="med" len="med"/>
-                    </a:lnR>
-                    <a:lnT w="7620" cap="flat" cmpd="sng" algn="ctr">
-                      <a:solidFill>
-                        <a:srgbClr val="DCD9D4"/>
-                      </a:solidFill>
-                      <a:prstDash val="solid"/>
-                      <a:round/>
-                      <a:headEnd type="none" w="med" len="med"/>
-                      <a:tailEnd type="none" w="med" len="med"/>
-                    </a:lnT>
-                    <a:lnB w="7620" cap="flat" cmpd="sng" algn="ctr">
-                      <a:solidFill>
-                        <a:srgbClr val="DCD9D4"/>
-                      </a:solidFill>
-                      <a:prstDash val="solid"/>
-                      <a:round/>
-                      <a:headEnd type="none" w="med" len="med"/>
-                      <a:tailEnd type="none" w="med" len="med"/>
-                    </a:lnB>
-                  </a:tcPr>
-                </a:tc>
-                <a:tc>
-                  <a:txBody>
-                    <a:bodyPr/>
-                    <a:lstStyle/>
-                    <a:p>
-                      <a:pPr indent="0" marL="0">
-                        <a:buNone/>
-                      </a:pPr>
-                      <a:r>
-                        <a:rPr lang="en-US" sz="1050" b="1" dirty="0">
-                          <a:solidFill>
-                            <a:srgbClr val="B3121B"/>
-                          </a:solidFill>
-                          <a:latin typeface="Yu Gothic" pitchFamily="34" charset="0"/>
-                          <a:ea typeface="Yu Gothic" pitchFamily="34" charset="-122"/>
-                          <a:cs typeface="Yu Gothic" pitchFamily="34" charset="-120"/>
-                        </a:rPr>
-                        <a:t>3倍分成</a:t>
-                      </a:r>
-                      <a:endParaRPr lang="en-US" sz="1050" dirty="0">
-                        <a:latin typeface="Yu Gothic" charset="0"/>
-                        <a:ea typeface="Yu Gothic"/>
-                        <a:cs typeface="Yu Gothic"/>
-                        <a:ea typeface="Yu Gothic" charset="0"/>
-                        <a:cs typeface="Yu Gothic" charset="0"/>
-                      </a:endParaRPr>
-                    </a:p>
-                  </a:txBody>
-                  <a:tcPr marL="88900" marR="88900" marT="50800" marB="50800" anchor="ctr">
-                    <a:lnL w="7620" cap="flat" cmpd="sng" algn="ctr">
-                      <a:solidFill>
-                        <a:srgbClr val="DCD9D4"/>
-                      </a:solidFill>
-                      <a:prstDash val="solid"/>
-                      <a:round/>
-                      <a:headEnd type="none" w="med" len="med"/>
-                      <a:tailEnd type="none" w="med" len="med"/>
-                    </a:lnL>
-                    <a:lnR w="7620" cap="flat" cmpd="sng" algn="ctr">
-                      <a:solidFill>
-                        <a:srgbClr val="DCD9D4"/>
-                      </a:solidFill>
-                      <a:prstDash val="solid"/>
-                      <a:round/>
-                      <a:headEnd type="none" w="med" len="med"/>
-                      <a:tailEnd type="none" w="med" len="med"/>
-                    </a:lnR>
-                    <a:lnT w="7620" cap="flat" cmpd="sng" algn="ctr">
-                      <a:solidFill>
-                        <a:srgbClr val="DCD9D4"/>
-                      </a:solidFill>
-                      <a:prstDash val="solid"/>
-                      <a:round/>
-                      <a:headEnd type="none" w="med" len="med"/>
-                      <a:tailEnd type="none" w="med" len="med"/>
-                    </a:lnT>
-                    <a:lnB w="7620" cap="flat" cmpd="sng" algn="ctr">
-                      <a:solidFill>
-                        <a:srgbClr val="DCD9D4"/>
-                      </a:solidFill>
-                      <a:prstDash val="solid"/>
-                      <a:round/>
-                      <a:headEnd type="none" w="med" len="med"/>
-                      <a:tailEnd type="none" w="med" len="med"/>
-                    </a:lnB>
-                  </a:tcPr>
-                </a:tc>
-                <a:tc>
-                  <a:txBody>
-                    <a:bodyPr/>
-                    <a:lstStyle/>
-                    <a:p>
-                      <a:pPr indent="0" marL="0">
-                        <a:buNone/>
-                      </a:pPr>
-                      <a:r>
-                        <a:rPr lang="en-US" sz="1050" dirty="0">
-                          <a:solidFill>
-                            <a:srgbClr val="3A3A42"/>
-                          </a:solidFill>
-                          <a:latin typeface="Yu Gothic" pitchFamily="34" charset="0"/>
-                          <a:ea typeface="Yu Gothic" pitchFamily="34" charset="-122"/>
-                          <a:cs typeface="Yu Gothic" pitchFamily="34" charset="-120"/>
-                        </a:rPr>
-                        <a:t>10億級のトラフィックプール</a:t>
-                      </a:r>
-                      <a:endParaRPr lang="en-US" sz="1050" dirty="0">
-                        <a:latin typeface="Yu Gothic" charset="0"/>
-                        <a:ea typeface="Yu Gothic"/>
-                        <a:cs typeface="Yu Gothic"/>
-                        <a:ea typeface="Yu Gothic" charset="0"/>
-                        <a:cs typeface="Yu Gothic" charset="0"/>
-                      </a:endParaRPr>
-                    </a:p>
-                  </a:txBody>
-                  <a:tcPr marL="88900" marR="88900" marT="50800" marB="50800" anchor="ctr">
-                    <a:lnL w="7620" cap="flat" cmpd="sng" algn="ctr">
-                      <a:solidFill>
-                        <a:srgbClr val="DCD9D4"/>
-                      </a:solidFill>
-                      <a:prstDash val="solid"/>
-                      <a:round/>
-                      <a:headEnd type="none" w="med" len="med"/>
-                      <a:tailEnd type="none" w="med" len="med"/>
-                    </a:lnL>
-                    <a:lnR w="7620" cap="flat" cmpd="sng" algn="ctr">
-                      <a:solidFill>
-                        <a:srgbClr val="DCD9D4"/>
-                      </a:solidFill>
-                      <a:prstDash val="solid"/>
-                      <a:round/>
-                      <a:headEnd type="none" w="med" len="med"/>
-                      <a:tailEnd type="none" w="med" len="med"/>
-                    </a:lnR>
-                    <a:lnT w="7620" cap="flat" cmpd="sng" algn="ctr">
-                      <a:solidFill>
-                        <a:srgbClr val="DCD9D4"/>
-                      </a:solidFill>
-                      <a:prstDash val="solid"/>
-                      <a:round/>
-                      <a:headEnd type="none" w="med" len="med"/>
-                      <a:tailEnd type="none" w="med" len="med"/>
-                    </a:lnT>
-                    <a:lnB w="7620" cap="flat" cmpd="sng" algn="ctr">
-                      <a:solidFill>
-                        <a:srgbClr val="DCD9D4"/>
-                      </a:solidFill>
-                      <a:prstDash val="solid"/>
-                      <a:round/>
-                      <a:headEnd type="none" w="med" len="med"/>
-                      <a:tailEnd type="none" w="med" len="med"/>
-                    </a:lnB>
-                  </a:tcPr>
-                </a:tc>
-              </a:tr>
-            </a:tbl>
-          </a:graphicData>
-        </a:graphic>
-      </p:graphicFrame>
-      <p:sp>
-        <p:nvSpPr>
-          <p:cNvPr id="7" name="Shape 4"/>
+      <p:sp>
+        <p:nvSpPr>
+          <p:cNvPr id="6" name="Text 4"/>
+          <p:cNvSpPr txBox="1"/>
+          <p:nvPr/>
+        </p:nvSpPr>
+        <p:spPr>
+          <a:xfrm>
+            <a:off x="594360" y="1426464"/>
+            <a:ext cx="6035040" cy="274320"/>
+          </a:xfrm>
+          <a:prstGeom prst="rect">
+            <a:avLst/>
+          </a:prstGeom>
+          <a:noFill/>
+          <a:ln/>
+        </p:spPr>
+        <p:txBody>
+          <a:bodyPr wrap="square" lIns="0" tIns="0" rIns="0" bIns="0" rtlCol="0" anchor="ctr"/>
+          <a:lstStyle/>
+          <a:p>
+            <a:pPr indent="0" marL="0">
+              <a:buNone/>
+            </a:pPr>
+            <a:r>
+              <a:rPr lang="en-US" sz="1100" b="1" dirty="0">
+                <a:solidFill>
+                  <a:srgbClr val="16161A"/>
+                </a:solidFill>
+                <a:latin typeface="Yu Gothic" pitchFamily="34" charset="0"/>
+                <a:ea typeface="Yu Gothic" pitchFamily="34" charset="-122"/>
+                <a:cs typeface="Yu Gothic" pitchFamily="34" charset="-120"/>
+              </a:rPr>
+              <a:t>各社が提示している分成率</a:t>
+            </a:r>
+            <a:endParaRPr lang="en-US" sz="1100" dirty="0"/>
+          </a:p>
+        </p:txBody>
+      </p:sp>
+      <p:sp>
+        <p:nvSpPr>
+          <p:cNvPr id="7" name="Text 5"/>
+          <p:cNvSpPr txBox="1"/>
+          <p:nvPr/>
+        </p:nvSpPr>
+        <p:spPr>
+          <a:xfrm>
+            <a:off x="594360" y="1783080"/>
+            <a:ext cx="2148840" cy="402336"/>
+          </a:xfrm>
+          <a:prstGeom prst="rect">
+            <a:avLst/>
+          </a:prstGeom>
+          <a:noFill/>
+          <a:ln/>
+        </p:spPr>
+        <p:txBody>
+          <a:bodyPr wrap="square" lIns="0" tIns="0" rIns="0" bIns="0" rtlCol="0" anchor="ctr"/>
+          <a:lstStyle/>
+          <a:p>
+            <a:pPr indent="0" marL="0">
+              <a:buNone/>
+            </a:pPr>
+            <a:r>
+              <a:rPr lang="en-US" sz="950" dirty="0">
+                <a:solidFill>
+                  <a:srgbClr val="3A3A42"/>
+                </a:solidFill>
+                <a:latin typeface="Yu Gothic" pitchFamily="34" charset="0"/>
+                <a:ea typeface="Yu Gothic" pitchFamily="34" charset="-122"/>
+                <a:cs typeface="Yu Gothic" pitchFamily="34" charset="-120"/>
+              </a:rPr>
+              <a:t>快手「灵感新纪元」</a:t>
+            </a:r>
+            <a:endParaRPr lang="en-US" sz="950" dirty="0"/>
+          </a:p>
+        </p:txBody>
+      </p:sp>
+      <p:sp>
+        <p:nvSpPr>
+          <p:cNvPr id="8" name="Shape 6"/>
           <p:cNvSpPr/>
           <p:nvPr/>
         </p:nvSpPr>
         <p:spPr>
           <a:xfrm>
-            <a:off x="594360" y="3968496"/>
-            <a:ext cx="5362956" cy="2011680"/>
+            <a:off x="2852928" y="1883664"/>
+            <a:ext cx="2674620" cy="201168"/>
+          </a:xfrm>
+          <a:prstGeom prst="rect">
+            <a:avLst/>
+          </a:prstGeom>
+          <a:solidFill>
+            <a:srgbClr val="B3121B"/>
+          </a:solidFill>
+          <a:ln/>
+        </p:spPr>
+      </p:sp>
+      <p:sp>
+        <p:nvSpPr>
+          <p:cNvPr id="9" name="Text 7"/>
+          <p:cNvSpPr txBox="1"/>
+          <p:nvPr/>
+        </p:nvSpPr>
+        <p:spPr>
+          <a:xfrm>
+            <a:off x="5760720" y="1783080"/>
+            <a:ext cx="868680" cy="402336"/>
+          </a:xfrm>
+          <a:prstGeom prst="rect">
+            <a:avLst/>
+          </a:prstGeom>
+          <a:noFill/>
+          <a:ln/>
+        </p:spPr>
+        <p:txBody>
+          <a:bodyPr wrap="square" lIns="0" tIns="0" rIns="0" bIns="0" rtlCol="0" anchor="ctr"/>
+          <a:lstStyle/>
+          <a:p>
+            <a:pPr algn="r" indent="0" marL="0">
+              <a:buNone/>
+            </a:pPr>
+            <a:r>
+              <a:rPr lang="en-US" sz="950" b="1" dirty="0">
+                <a:solidFill>
+                  <a:srgbClr val="16161A"/>
+                </a:solidFill>
+                <a:latin typeface="Yu Gothic" pitchFamily="34" charset="0"/>
+                <a:ea typeface="Yu Gothic" pitchFamily="34" charset="-122"/>
+                <a:cs typeface="Yu Gothic" pitchFamily="34" charset="-120"/>
+              </a:rPr>
+              <a:t>最大 90%</a:t>
+            </a:r>
+            <a:endParaRPr lang="en-US" sz="950" dirty="0"/>
+          </a:p>
+        </p:txBody>
+      </p:sp>
+      <p:sp>
+        <p:nvSpPr>
+          <p:cNvPr id="10" name="Text 8"/>
+          <p:cNvSpPr txBox="1"/>
+          <p:nvPr/>
+        </p:nvSpPr>
+        <p:spPr>
+          <a:xfrm>
+            <a:off x="594360" y="2240280"/>
+            <a:ext cx="2148840" cy="402336"/>
+          </a:xfrm>
+          <a:prstGeom prst="rect">
+            <a:avLst/>
+          </a:prstGeom>
+          <a:noFill/>
+          <a:ln/>
+        </p:spPr>
+        <p:txBody>
+          <a:bodyPr wrap="square" lIns="0" tIns="0" rIns="0" bIns="0" rtlCol="0" anchor="ctr"/>
+          <a:lstStyle/>
+          <a:p>
+            <a:pPr indent="0" marL="0">
+              <a:buNone/>
+            </a:pPr>
+            <a:r>
+              <a:rPr lang="en-US" sz="950" dirty="0">
+                <a:solidFill>
+                  <a:srgbClr val="3A3A42"/>
+                </a:solidFill>
+                <a:latin typeface="Yu Gothic" pitchFamily="34" charset="0"/>
+                <a:ea typeface="Yu Gothic" pitchFamily="34" charset="-122"/>
+                <a:cs typeface="Yu Gothic" pitchFamily="34" charset="-120"/>
+              </a:rPr>
+              <a:t>抖音「漫画星河」</a:t>
+            </a:r>
+            <a:endParaRPr lang="en-US" sz="950" dirty="0"/>
+          </a:p>
+        </p:txBody>
+      </p:sp>
+      <p:sp>
+        <p:nvSpPr>
+          <p:cNvPr id="11" name="Shape 9"/>
+          <p:cNvSpPr/>
+          <p:nvPr/>
+        </p:nvSpPr>
+        <p:spPr>
+          <a:xfrm>
+            <a:off x="2852928" y="2340864"/>
+            <a:ext cx="2674620" cy="201168"/>
+          </a:xfrm>
+          <a:prstGeom prst="rect">
+            <a:avLst/>
+          </a:prstGeom>
+          <a:solidFill>
+            <a:srgbClr val="B3121B"/>
+          </a:solidFill>
+          <a:ln/>
+        </p:spPr>
+      </p:sp>
+      <p:sp>
+        <p:nvSpPr>
+          <p:cNvPr id="12" name="Text 10"/>
+          <p:cNvSpPr txBox="1"/>
+          <p:nvPr/>
+        </p:nvSpPr>
+        <p:spPr>
+          <a:xfrm>
+            <a:off x="5760720" y="2240280"/>
+            <a:ext cx="868680" cy="402336"/>
+          </a:xfrm>
+          <a:prstGeom prst="rect">
+            <a:avLst/>
+          </a:prstGeom>
+          <a:noFill/>
+          <a:ln/>
+        </p:spPr>
+        <p:txBody>
+          <a:bodyPr wrap="square" lIns="0" tIns="0" rIns="0" bIns="0" rtlCol="0" anchor="ctr"/>
+          <a:lstStyle/>
+          <a:p>
+            <a:pPr algn="r" indent="0" marL="0">
+              <a:buNone/>
+            </a:pPr>
+            <a:r>
+              <a:rPr lang="en-US" sz="950" b="1" dirty="0">
+                <a:solidFill>
+                  <a:srgbClr val="16161A"/>
+                </a:solidFill>
+                <a:latin typeface="Yu Gothic" pitchFamily="34" charset="0"/>
+                <a:ea typeface="Yu Gothic" pitchFamily="34" charset="-122"/>
+                <a:cs typeface="Yu Gothic" pitchFamily="34" charset="-120"/>
+              </a:rPr>
+              <a:t>純収益の 90%</a:t>
+            </a:r>
+            <a:endParaRPr lang="en-US" sz="950" dirty="0"/>
+          </a:p>
+        </p:txBody>
+      </p:sp>
+      <p:sp>
+        <p:nvSpPr>
+          <p:cNvPr id="13" name="Text 11"/>
+          <p:cNvSpPr txBox="1"/>
+          <p:nvPr/>
+        </p:nvSpPr>
+        <p:spPr>
+          <a:xfrm>
+            <a:off x="594360" y="2697480"/>
+            <a:ext cx="2148840" cy="402336"/>
+          </a:xfrm>
+          <a:prstGeom prst="rect">
+            <a:avLst/>
+          </a:prstGeom>
+          <a:noFill/>
+          <a:ln/>
+        </p:spPr>
+        <p:txBody>
+          <a:bodyPr wrap="square" lIns="0" tIns="0" rIns="0" bIns="0" rtlCol="0" anchor="ctr"/>
+          <a:lstStyle/>
+          <a:p>
+            <a:pPr indent="0" marL="0">
+              <a:buNone/>
+            </a:pPr>
+            <a:r>
+              <a:rPr lang="en-US" sz="950" dirty="0">
+                <a:solidFill>
+                  <a:srgbClr val="3A3A42"/>
+                </a:solidFill>
+                <a:latin typeface="Yu Gothic" pitchFamily="34" charset="0"/>
+                <a:ea typeface="Yu Gothic" pitchFamily="34" charset="-122"/>
+                <a:cs typeface="Yu Gothic" pitchFamily="34" charset="-120"/>
+              </a:rPr>
+              <a:t>Bilibili「觉醒计划」</a:t>
+            </a:r>
+            <a:endParaRPr lang="en-US" sz="950" dirty="0"/>
+          </a:p>
+        </p:txBody>
+      </p:sp>
+      <p:sp>
+        <p:nvSpPr>
+          <p:cNvPr id="14" name="Shape 12"/>
+          <p:cNvSpPr/>
+          <p:nvPr/>
+        </p:nvSpPr>
+        <p:spPr>
+          <a:xfrm>
+            <a:off x="2852928" y="2798064"/>
+            <a:ext cx="2377440" cy="201168"/>
+          </a:xfrm>
+          <a:prstGeom prst="rect">
+            <a:avLst/>
+          </a:prstGeom>
+          <a:solidFill>
+            <a:srgbClr val="B3121B"/>
+          </a:solidFill>
+          <a:ln/>
+        </p:spPr>
+      </p:sp>
+      <p:sp>
+        <p:nvSpPr>
+          <p:cNvPr id="15" name="Text 13"/>
+          <p:cNvSpPr txBox="1"/>
+          <p:nvPr/>
+        </p:nvSpPr>
+        <p:spPr>
+          <a:xfrm>
+            <a:off x="5760720" y="2697480"/>
+            <a:ext cx="868680" cy="402336"/>
+          </a:xfrm>
+          <a:prstGeom prst="rect">
+            <a:avLst/>
+          </a:prstGeom>
+          <a:noFill/>
+          <a:ln/>
+        </p:spPr>
+        <p:txBody>
+          <a:bodyPr wrap="square" lIns="0" tIns="0" rIns="0" bIns="0" rtlCol="0" anchor="ctr"/>
+          <a:lstStyle/>
+          <a:p>
+            <a:pPr algn="r" indent="0" marL="0">
+              <a:buNone/>
+            </a:pPr>
+            <a:r>
+              <a:rPr lang="en-US" sz="950" b="1" dirty="0">
+                <a:solidFill>
+                  <a:srgbClr val="16161A"/>
+                </a:solidFill>
+                <a:latin typeface="Yu Gothic" pitchFamily="34" charset="0"/>
+                <a:ea typeface="Yu Gothic" pitchFamily="34" charset="-122"/>
+                <a:cs typeface="Yu Gothic" pitchFamily="34" charset="-120"/>
+              </a:rPr>
+              <a:t>最大 80%</a:t>
+            </a:r>
+            <a:endParaRPr lang="en-US" sz="950" dirty="0"/>
+          </a:p>
+        </p:txBody>
+      </p:sp>
+      <p:sp>
+        <p:nvSpPr>
+          <p:cNvPr id="16" name="Text 14"/>
+          <p:cNvSpPr txBox="1"/>
+          <p:nvPr/>
+        </p:nvSpPr>
+        <p:spPr>
+          <a:xfrm>
+            <a:off x="594360" y="3154680"/>
+            <a:ext cx="2148840" cy="402336"/>
+          </a:xfrm>
+          <a:prstGeom prst="rect">
+            <a:avLst/>
+          </a:prstGeom>
+          <a:noFill/>
+          <a:ln/>
+        </p:spPr>
+        <p:txBody>
+          <a:bodyPr wrap="square" lIns="0" tIns="0" rIns="0" bIns="0" rtlCol="0" anchor="ctr"/>
+          <a:lstStyle/>
+          <a:p>
+            <a:pPr indent="0" marL="0">
+              <a:buNone/>
+            </a:pPr>
+            <a:r>
+              <a:rPr lang="en-US" sz="950" dirty="0">
+                <a:solidFill>
+                  <a:srgbClr val="3A3A42"/>
+                </a:solidFill>
+                <a:latin typeface="Yu Gothic" pitchFamily="34" charset="0"/>
+                <a:ea typeface="Yu Gothic" pitchFamily="34" charset="-122"/>
+                <a:cs typeface="Yu Gothic" pitchFamily="34" charset="-120"/>
+              </a:rPr>
+              <a:t>抖音 AI実写短劇</a:t>
+            </a:r>
+            <a:endParaRPr lang="en-US" sz="950" dirty="0"/>
+          </a:p>
+        </p:txBody>
+      </p:sp>
+      <p:sp>
+        <p:nvSpPr>
+          <p:cNvPr id="17" name="Shape 15"/>
+          <p:cNvSpPr/>
+          <p:nvPr/>
+        </p:nvSpPr>
+        <p:spPr>
+          <a:xfrm>
+            <a:off x="2852928" y="3255264"/>
+            <a:ext cx="1783080" cy="201168"/>
+          </a:xfrm>
+          <a:prstGeom prst="rect">
+            <a:avLst/>
+          </a:prstGeom>
+          <a:solidFill>
+            <a:srgbClr val="2A3563"/>
+          </a:solidFill>
+          <a:ln/>
+        </p:spPr>
+      </p:sp>
+      <p:sp>
+        <p:nvSpPr>
+          <p:cNvPr id="18" name="Text 16"/>
+          <p:cNvSpPr txBox="1"/>
+          <p:nvPr/>
+        </p:nvSpPr>
+        <p:spPr>
+          <a:xfrm>
+            <a:off x="5760720" y="3154680"/>
+            <a:ext cx="868680" cy="402336"/>
+          </a:xfrm>
+          <a:prstGeom prst="rect">
+            <a:avLst/>
+          </a:prstGeom>
+          <a:noFill/>
+          <a:ln/>
+        </p:spPr>
+        <p:txBody>
+          <a:bodyPr wrap="square" lIns="0" tIns="0" rIns="0" bIns="0" rtlCol="0" anchor="ctr"/>
+          <a:lstStyle/>
+          <a:p>
+            <a:pPr algn="r" indent="0" marL="0">
+              <a:buNone/>
+            </a:pPr>
+            <a:r>
+              <a:rPr lang="en-US" sz="950" b="1" dirty="0">
+                <a:solidFill>
+                  <a:srgbClr val="16161A"/>
+                </a:solidFill>
+                <a:latin typeface="Yu Gothic" pitchFamily="34" charset="0"/>
+                <a:ea typeface="Yu Gothic" pitchFamily="34" charset="-122"/>
+                <a:cs typeface="Yu Gothic" pitchFamily="34" charset="-120"/>
+              </a:rPr>
+              <a:t>40〜60%</a:t>
+            </a:r>
+            <a:endParaRPr lang="en-US" sz="950" dirty="0"/>
+          </a:p>
+        </p:txBody>
+      </p:sp>
+      <p:sp>
+        <p:nvSpPr>
+          <p:cNvPr id="19" name="Text 17"/>
+          <p:cNvSpPr txBox="1"/>
+          <p:nvPr/>
+        </p:nvSpPr>
+        <p:spPr>
+          <a:xfrm>
+            <a:off x="594360" y="3611880"/>
+            <a:ext cx="2148840" cy="402336"/>
+          </a:xfrm>
+          <a:prstGeom prst="rect">
+            <a:avLst/>
+          </a:prstGeom>
+          <a:noFill/>
+          <a:ln/>
+        </p:spPr>
+        <p:txBody>
+          <a:bodyPr wrap="square" lIns="0" tIns="0" rIns="0" bIns="0" rtlCol="0" anchor="ctr"/>
+          <a:lstStyle/>
+          <a:p>
+            <a:pPr indent="0" marL="0">
+              <a:buNone/>
+            </a:pPr>
+            <a:r>
+              <a:rPr lang="en-US" sz="950" dirty="0">
+                <a:solidFill>
+                  <a:srgbClr val="3A3A42"/>
+                </a:solidFill>
+                <a:latin typeface="Yu Gothic" pitchFamily="34" charset="0"/>
+                <a:ea typeface="Yu Gothic" pitchFamily="34" charset="-122"/>
+                <a:cs typeface="Yu Gothic" pitchFamily="34" charset="-120"/>
+              </a:rPr>
+              <a:t>抖音 AI漫劇</a:t>
+            </a:r>
+            <a:endParaRPr lang="en-US" sz="950" dirty="0"/>
+          </a:p>
+        </p:txBody>
+      </p:sp>
+      <p:sp>
+        <p:nvSpPr>
+          <p:cNvPr id="20" name="Shape 18"/>
+          <p:cNvSpPr/>
+          <p:nvPr/>
+        </p:nvSpPr>
+        <p:spPr>
+          <a:xfrm>
+            <a:off x="2852928" y="3712464"/>
+            <a:ext cx="1485900" cy="201168"/>
+          </a:xfrm>
+          <a:prstGeom prst="rect">
+            <a:avLst/>
+          </a:prstGeom>
+          <a:solidFill>
+            <a:srgbClr val="2A3563"/>
+          </a:solidFill>
+          <a:ln/>
+        </p:spPr>
+      </p:sp>
+      <p:sp>
+        <p:nvSpPr>
+          <p:cNvPr id="21" name="Text 19"/>
+          <p:cNvSpPr txBox="1"/>
+          <p:nvPr/>
+        </p:nvSpPr>
+        <p:spPr>
+          <a:xfrm>
+            <a:off x="5760720" y="3611880"/>
+            <a:ext cx="868680" cy="402336"/>
+          </a:xfrm>
+          <a:prstGeom prst="rect">
+            <a:avLst/>
+          </a:prstGeom>
+          <a:noFill/>
+          <a:ln/>
+        </p:spPr>
+        <p:txBody>
+          <a:bodyPr wrap="square" lIns="0" tIns="0" rIns="0" bIns="0" rtlCol="0" anchor="ctr"/>
+          <a:lstStyle/>
+          <a:p>
+            <a:pPr algn="r" indent="0" marL="0">
+              <a:buNone/>
+            </a:pPr>
+            <a:r>
+              <a:rPr lang="en-US" sz="950" b="1" dirty="0">
+                <a:solidFill>
+                  <a:srgbClr val="16161A"/>
+                </a:solidFill>
+                <a:latin typeface="Yu Gothic" pitchFamily="34" charset="0"/>
+                <a:ea typeface="Yu Gothic" pitchFamily="34" charset="-122"/>
+                <a:cs typeface="Yu Gothic" pitchFamily="34" charset="-120"/>
+              </a:rPr>
+              <a:t>30〜50%</a:t>
+            </a:r>
+            <a:endParaRPr lang="en-US" sz="950" dirty="0"/>
+          </a:p>
+        </p:txBody>
+      </p:sp>
+      <p:sp>
+        <p:nvSpPr>
+          <p:cNvPr id="22" name="Shape 20"/>
+          <p:cNvSpPr/>
+          <p:nvPr/>
+        </p:nvSpPr>
+        <p:spPr>
+          <a:xfrm>
+            <a:off x="594360" y="4133088"/>
+            <a:ext cx="6035040" cy="0"/>
+          </a:xfrm>
+          <a:prstGeom prst="line">
+            <a:avLst/>
+          </a:prstGeom>
+          <a:noFill/>
+          <a:ln w="12700">
+            <a:solidFill>
+              <a:srgbClr val="DCD9D4"/>
+            </a:solidFill>
+            <a:prstDash val="dash"/>
+          </a:ln>
+        </p:spPr>
+      </p:sp>
+      <p:sp>
+        <p:nvSpPr>
+          <p:cNvPr id="23" name="Shape 21"/>
+          <p:cNvSpPr/>
+          <p:nvPr/>
+        </p:nvSpPr>
+        <p:spPr>
+          <a:xfrm>
+            <a:off x="594360" y="4261104"/>
+            <a:ext cx="6035040" cy="475488"/>
+          </a:xfrm>
+          <a:prstGeom prst="rect">
+            <a:avLst/>
+          </a:prstGeom>
+          <a:solidFill>
+            <a:srgbClr val="F4F2EF"/>
+          </a:solidFill>
+          <a:ln/>
+        </p:spPr>
+      </p:sp>
+      <p:sp>
+        <p:nvSpPr>
+          <p:cNvPr id="24" name="Text 22"/>
+          <p:cNvSpPr txBox="1"/>
+          <p:nvPr/>
+        </p:nvSpPr>
+        <p:spPr>
+          <a:xfrm>
+            <a:off x="740664" y="4261104"/>
+            <a:ext cx="2011680" cy="475488"/>
+          </a:xfrm>
+          <a:prstGeom prst="rect">
+            <a:avLst/>
+          </a:prstGeom>
+          <a:noFill/>
+          <a:ln/>
+        </p:spPr>
+        <p:txBody>
+          <a:bodyPr wrap="square" lIns="0" tIns="0" rIns="0" bIns="0" rtlCol="0" anchor="ctr"/>
+          <a:lstStyle/>
+          <a:p>
+            <a:pPr indent="0" marL="0">
+              <a:buNone/>
+            </a:pPr>
+            <a:r>
+              <a:rPr lang="en-US" sz="1000" b="1" dirty="0">
+                <a:solidFill>
+                  <a:srgbClr val="16161A"/>
+                </a:solidFill>
+                <a:latin typeface="Yu Gothic" pitchFamily="34" charset="0"/>
+                <a:ea typeface="Yu Gothic" pitchFamily="34" charset="-122"/>
+                <a:cs typeface="Yu Gothic" pitchFamily="34" charset="-120"/>
+              </a:rPr>
+              <a:t>当社</a:t>
+            </a:r>
+            <a:endParaRPr lang="en-US" sz="1000" dirty="0"/>
+          </a:p>
+        </p:txBody>
+      </p:sp>
+      <p:sp>
+        <p:nvSpPr>
+          <p:cNvPr id="25" name="Text 23"/>
+          <p:cNvSpPr txBox="1"/>
+          <p:nvPr/>
+        </p:nvSpPr>
+        <p:spPr>
+          <a:xfrm>
+            <a:off x="2880360" y="4261104"/>
+            <a:ext cx="3602736" cy="475488"/>
+          </a:xfrm>
+          <a:prstGeom prst="rect">
+            <a:avLst/>
+          </a:prstGeom>
+          <a:noFill/>
+          <a:ln/>
+        </p:spPr>
+        <p:txBody>
+          <a:bodyPr wrap="square" lIns="0" tIns="0" rIns="0" bIns="0" rtlCol="0" anchor="ctr"/>
+          <a:lstStyle/>
+          <a:p>
+            <a:pPr indent="0" marL="0">
+              <a:buNone/>
+            </a:pPr>
+            <a:r>
+              <a:rPr lang="en-US" sz="1000" b="1" dirty="0">
+                <a:solidFill>
+                  <a:srgbClr val="B3121B"/>
+                </a:solidFill>
+                <a:latin typeface="Yu Gothic" pitchFamily="34" charset="0"/>
+                <a:ea typeface="Yu Gothic" pitchFamily="34" charset="-122"/>
+                <a:cs typeface="Yu Gothic" pitchFamily="34" charset="-120"/>
+              </a:rPr>
+              <a:t>分成率では戦いません（右）</a:t>
+            </a:r>
+            <a:endParaRPr lang="en-US" sz="1000" dirty="0"/>
+          </a:p>
+        </p:txBody>
+      </p:sp>
+      <p:sp>
+        <p:nvSpPr>
+          <p:cNvPr id="26" name="Text 24"/>
+          <p:cNvSpPr txBox="1"/>
+          <p:nvPr/>
+        </p:nvSpPr>
+        <p:spPr>
+          <a:xfrm>
+            <a:off x="594360" y="4882896"/>
+            <a:ext cx="6035040" cy="640080"/>
+          </a:xfrm>
+          <a:prstGeom prst="rect">
+            <a:avLst/>
+          </a:prstGeom>
+          <a:noFill/>
+          <a:ln/>
+        </p:spPr>
+        <p:txBody>
+          <a:bodyPr wrap="square" lIns="0" tIns="0" rIns="0" bIns="0" rtlCol="0" anchor="t"/>
+          <a:lstStyle/>
+          <a:p>
+            <a:pPr indent="0" marL="0">
+              <a:lnSpc>
+                <a:spcPct val="130000"/>
+              </a:lnSpc>
+              <a:buNone/>
+            </a:pPr>
+            <a:r>
+              <a:rPr lang="en-US" sz="950" dirty="0">
+                <a:solidFill>
+                  <a:srgbClr val="6E6E76"/>
+                </a:solidFill>
+                <a:latin typeface="Yu Gothic" pitchFamily="34" charset="0"/>
+                <a:ea typeface="Yu Gothic" pitchFamily="34" charset="-122"/>
+                <a:cs typeface="Yu Gothic" pitchFamily="34" charset="-120"/>
+              </a:rPr>
+              <a:t>トラフィック支援も桁が違います — 快手 1億／Bilibili 数百万／百度 10億級のトラフィックプール。</a:t>
+            </a:r>
+            <a:endParaRPr lang="en-US" sz="950" dirty="0"/>
+          </a:p>
+          <a:p>
+            <a:pPr indent="0" marL="0">
+              <a:lnSpc>
+                <a:spcPct val="130000"/>
+              </a:lnSpc>
+              <a:buNone/>
+            </a:pPr>
+            <a:r>
+              <a:rPr lang="en-US" sz="950" dirty="0">
+                <a:solidFill>
+                  <a:srgbClr val="6E6E76"/>
+                </a:solidFill>
+                <a:latin typeface="Yu Gothic" pitchFamily="34" charset="0"/>
+                <a:ea typeface="Yu Gothic" pitchFamily="34" charset="-122"/>
+                <a:cs typeface="Yu Gothic" pitchFamily="34" charset="-120"/>
+              </a:rPr>
+              <a:t>抖音の上位作品は月10万〜50万元。</a:t>
+            </a:r>
+            <a:endParaRPr lang="en-US" sz="950" dirty="0"/>
+          </a:p>
+        </p:txBody>
+      </p:sp>
+      <p:sp>
+        <p:nvSpPr>
+          <p:cNvPr id="27" name="Shape 25"/>
+          <p:cNvSpPr/>
+          <p:nvPr/>
+        </p:nvSpPr>
+        <p:spPr>
+          <a:xfrm>
+            <a:off x="6903720" y="1737360"/>
+            <a:ext cx="4690872" cy="1773936"/>
           </a:xfrm>
           <a:prstGeom prst="rect">
             <a:avLst/>
@@ -5008,14 +4056,14 @@
       </p:sp>
       <p:sp>
         <p:nvSpPr>
-          <p:cNvPr id="8" name="Shape 5"/>
+          <p:cNvPr id="28" name="Shape 26"/>
           <p:cNvSpPr/>
           <p:nvPr/>
         </p:nvSpPr>
         <p:spPr>
           <a:xfrm>
-            <a:off x="594360" y="3968496"/>
-            <a:ext cx="45720" cy="2011680"/>
+            <a:off x="6903720" y="1737360"/>
+            <a:ext cx="45720" cy="1773936"/>
           </a:xfrm>
           <a:prstGeom prst="rect">
             <a:avLst/>
@@ -5028,14 +4076,14 @@
       </p:sp>
       <p:sp>
         <p:nvSpPr>
-          <p:cNvPr id="9" name="Text 6"/>
+          <p:cNvPr id="29" name="Text 27"/>
           <p:cNvSpPr txBox="1"/>
           <p:nvPr/>
         </p:nvSpPr>
         <p:spPr>
           <a:xfrm>
-            <a:off x="850392" y="4114800"/>
-            <a:ext cx="4905756" cy="274320"/>
+            <a:off x="7159752" y="1883664"/>
+            <a:ext cx="4233672" cy="274320"/>
           </a:xfrm>
           <a:prstGeom prst="rect">
             <a:avLst/>
@@ -5067,14 +4115,14 @@
       </p:sp>
       <p:sp>
         <p:nvSpPr>
-          <p:cNvPr id="10" name="Text 7"/>
+          <p:cNvPr id="30" name="Text 28"/>
           <p:cNvSpPr txBox="1"/>
           <p:nvPr/>
         </p:nvSpPr>
         <p:spPr>
           <a:xfrm>
-            <a:off x="850392" y="4443984"/>
-            <a:ext cx="4905756" cy="1389888"/>
+            <a:off x="7159752" y="2212848"/>
+            <a:ext cx="4233672" cy="1152144"/>
           </a:xfrm>
           <a:prstGeom prst="rect">
             <a:avLst/>
@@ -5129,14 +4177,14 @@
       </p:sp>
       <p:sp>
         <p:nvSpPr>
-          <p:cNvPr id="11" name="Shape 8"/>
+          <p:cNvPr id="31" name="Shape 29"/>
           <p:cNvSpPr/>
           <p:nvPr/>
         </p:nvSpPr>
         <p:spPr>
           <a:xfrm>
-            <a:off x="6231636" y="3968496"/>
-            <a:ext cx="5362956" cy="2011680"/>
+            <a:off x="6903720" y="3675888"/>
+            <a:ext cx="4690872" cy="2231136"/>
           </a:xfrm>
           <a:prstGeom prst="rect">
             <a:avLst/>
@@ -5149,13 +4197,13 @@
       </p:sp>
       <p:sp>
         <p:nvSpPr>
-          <p:cNvPr id="12" name="Shape 9"/>
+          <p:cNvPr id="32" name="Shape 30"/>
           <p:cNvSpPr/>
           <p:nvPr/>
         </p:nvSpPr>
         <p:spPr>
           <a:xfrm>
-            <a:off x="6451092" y="4224528"/>
+            <a:off x="7123176" y="3931920"/>
             <a:ext cx="109728" cy="109728"/>
           </a:xfrm>
           <a:prstGeom prst="rect">
@@ -5169,14 +4217,14 @@
       </p:sp>
       <p:sp>
         <p:nvSpPr>
-          <p:cNvPr id="13" name="Text 10"/>
+          <p:cNvPr id="33" name="Text 31"/>
           <p:cNvSpPr txBox="1"/>
           <p:nvPr/>
         </p:nvSpPr>
         <p:spPr>
           <a:xfrm>
-            <a:off x="6670548" y="4133088"/>
-            <a:ext cx="4704588" cy="292608"/>
+            <a:off x="7342632" y="3840480"/>
+            <a:ext cx="4032504" cy="292608"/>
           </a:xfrm>
           <a:prstGeom prst="rect">
             <a:avLst/>
@@ -5208,14 +4256,14 @@
       </p:sp>
       <p:sp>
         <p:nvSpPr>
-          <p:cNvPr id="14" name="Text 11"/>
+          <p:cNvPr id="34" name="Text 32"/>
           <p:cNvSpPr txBox="1"/>
           <p:nvPr/>
         </p:nvSpPr>
         <p:spPr>
           <a:xfrm>
-            <a:off x="6670548" y="4480560"/>
-            <a:ext cx="4704588" cy="1316736"/>
+            <a:off x="7342632" y="4187952"/>
+            <a:ext cx="4032504" cy="1536192"/>
           </a:xfrm>
           <a:prstGeom prst="rect">
             <a:avLst/>
@@ -5293,6 +4341,15 @@
               </a:lnSpc>
               <a:buNone/>
             </a:pPr>
+            <a:endParaRPr lang="en-US" sz="1050" dirty="0"/>
+          </a:p>
+          <a:p>
+            <a:pPr indent="0" marL="0">
+              <a:lnSpc>
+                <a:spcPct val="126000"/>
+              </a:lnSpc>
+              <a:buNone/>
+            </a:pPr>
             <a:r>
               <a:rPr lang="en-US" sz="1050" dirty="0">
                 <a:solidFill>
@@ -5310,7 +4367,7 @@
       </p:sp>
       <p:sp>
         <p:nvSpPr>
-          <p:cNvPr id="15" name="Text 12"/>
+          <p:cNvPr id="35" name="Text 33"/>
           <p:cNvSpPr txBox="1"/>
           <p:nvPr/>
         </p:nvSpPr>
@@ -5349,7 +4406,7 @@
       </p:sp>
       <p:sp>
         <p:nvSpPr>
-          <p:cNvPr id="16" name="Text 13"/>
+          <p:cNvPr id="36" name="Text 34"/>
           <p:cNvSpPr txBox="1"/>
           <p:nvPr/>
         </p:nvSpPr>
@@ -6567,9 +5624,502 @@
                 <a:ea typeface="Yu Gothic" pitchFamily="34" charset="-122"/>
                 <a:cs typeface="Yu Gothic" pitchFamily="34" charset="-120"/>
               </a:rPr>
-              <a:t>プラットフォーム事業に転換したことで生じた課題を含めて開示します</a:t>
+              <a:t>最大の課題は両面市場のコールドスタート。②の企業案件が、この輪を回り始める前に断ちます</a:t>
             </a:r>
             <a:endParaRPr lang="en-US" sz="1200" dirty="0"/>
+          </a:p>
+        </p:txBody>
+      </p:sp>
+      <p:sp>
+        <p:nvSpPr>
+          <p:cNvPr id="6" name="Shape 4"/>
+          <p:cNvSpPr/>
+          <p:nvPr/>
+        </p:nvSpPr>
+        <p:spPr>
+          <a:xfrm>
+            <a:off x="3474720" y="1389888"/>
+            <a:ext cx="2331720" cy="548640"/>
+          </a:xfrm>
+          <a:prstGeom prst="rect">
+            <a:avLst/>
+          </a:prstGeom>
+          <a:solidFill>
+            <a:srgbClr val="B3121B"/>
+          </a:solidFill>
+          <a:ln/>
+        </p:spPr>
+      </p:sp>
+      <p:sp>
+        <p:nvSpPr>
+          <p:cNvPr id="7" name="Text 5"/>
+          <p:cNvSpPr txBox="1"/>
+          <p:nvPr/>
+        </p:nvSpPr>
+        <p:spPr>
+          <a:xfrm>
+            <a:off x="3474720" y="1389888"/>
+            <a:ext cx="2331720" cy="548640"/>
+          </a:xfrm>
+          <a:prstGeom prst="rect">
+            <a:avLst/>
+          </a:prstGeom>
+          <a:noFill/>
+          <a:ln/>
+        </p:spPr>
+        <p:txBody>
+          <a:bodyPr wrap="square" lIns="0" tIns="0" rIns="0" bIns="0" rtlCol="0" anchor="ctr"/>
+          <a:lstStyle/>
+          <a:p>
+            <a:pPr algn="ctr" indent="0" marL="0">
+              <a:buNone/>
+            </a:pPr>
+            <a:r>
+              <a:rPr lang="en-US" sz="1050" b="1" dirty="0">
+                <a:solidFill>
+                  <a:srgbClr val="FFFFFF"/>
+                </a:solidFill>
+                <a:latin typeface="Yu Gothic" pitchFamily="34" charset="0"/>
+                <a:ea typeface="Yu Gothic" pitchFamily="34" charset="-122"/>
+                <a:cs typeface="Yu Gothic" pitchFamily="34" charset="-120"/>
+              </a:rPr>
+              <a:t>② 企業案件で原資を入れる</a:t>
+            </a:r>
+            <a:endParaRPr lang="en-US" sz="1050" dirty="0"/>
+          </a:p>
+        </p:txBody>
+      </p:sp>
+      <p:sp>
+        <p:nvSpPr>
+          <p:cNvPr id="8" name="Shape 6"/>
+          <p:cNvSpPr/>
+          <p:nvPr/>
+        </p:nvSpPr>
+        <p:spPr>
+          <a:xfrm>
+            <a:off x="4535424" y="1975104"/>
+            <a:ext cx="219456" cy="237744"/>
+          </a:xfrm>
+          <a:prstGeom prst="downArrow">
+            <a:avLst/>
+          </a:prstGeom>
+          <a:solidFill>
+            <a:srgbClr val="B3121B"/>
+          </a:solidFill>
+          <a:ln/>
+        </p:spPr>
+      </p:sp>
+      <p:sp>
+        <p:nvSpPr>
+          <p:cNvPr id="9" name="Shape 7"/>
+          <p:cNvSpPr/>
+          <p:nvPr/>
+        </p:nvSpPr>
+        <p:spPr>
+          <a:xfrm>
+            <a:off x="594360" y="2267712"/>
+            <a:ext cx="2331720" cy="713232"/>
+          </a:xfrm>
+          <a:prstGeom prst="rect">
+            <a:avLst/>
+          </a:prstGeom>
+          <a:solidFill>
+            <a:srgbClr val="F4F2EF"/>
+          </a:solidFill>
+          <a:ln/>
+        </p:spPr>
+      </p:sp>
+      <p:sp>
+        <p:nvSpPr>
+          <p:cNvPr id="10" name="Text 8"/>
+          <p:cNvSpPr txBox="1"/>
+          <p:nvPr/>
+        </p:nvSpPr>
+        <p:spPr>
+          <a:xfrm>
+            <a:off x="722376" y="2267712"/>
+            <a:ext cx="2075688" cy="713232"/>
+          </a:xfrm>
+          <a:prstGeom prst="rect">
+            <a:avLst/>
+          </a:prstGeom>
+          <a:noFill/>
+          <a:ln/>
+        </p:spPr>
+        <p:txBody>
+          <a:bodyPr wrap="square" lIns="0" tIns="0" rIns="0" bIns="0" rtlCol="0" anchor="ctr"/>
+          <a:lstStyle/>
+          <a:p>
+            <a:pPr algn="ctr" indent="0" marL="0">
+              <a:buNone/>
+            </a:pPr>
+            <a:r>
+              <a:rPr lang="en-US" sz="1150" b="1" dirty="0">
+                <a:solidFill>
+                  <a:srgbClr val="16161A"/>
+                </a:solidFill>
+                <a:latin typeface="Yu Gothic" pitchFamily="34" charset="0"/>
+                <a:ea typeface="Yu Gothic" pitchFamily="34" charset="-122"/>
+                <a:cs typeface="Yu Gothic" pitchFamily="34" charset="-120"/>
+              </a:rPr>
+              <a:t>視聴者がいない</a:t>
+            </a:r>
+            <a:endParaRPr lang="en-US" sz="1150" dirty="0"/>
+          </a:p>
+        </p:txBody>
+      </p:sp>
+      <p:sp>
+        <p:nvSpPr>
+          <p:cNvPr id="11" name="Shape 9"/>
+          <p:cNvSpPr/>
+          <p:nvPr/>
+        </p:nvSpPr>
+        <p:spPr>
+          <a:xfrm>
+            <a:off x="3035808" y="2514600"/>
+            <a:ext cx="329184" cy="219456"/>
+          </a:xfrm>
+          <a:prstGeom prst="rightArrow">
+            <a:avLst/>
+          </a:prstGeom>
+          <a:solidFill>
+            <a:srgbClr val="6E6E76"/>
+          </a:solidFill>
+          <a:ln/>
+        </p:spPr>
+      </p:sp>
+      <p:sp>
+        <p:nvSpPr>
+          <p:cNvPr id="12" name="Shape 10"/>
+          <p:cNvSpPr/>
+          <p:nvPr/>
+        </p:nvSpPr>
+        <p:spPr>
+          <a:xfrm>
+            <a:off x="3474720" y="2267712"/>
+            <a:ext cx="2331720" cy="713232"/>
+          </a:xfrm>
+          <a:prstGeom prst="rect">
+            <a:avLst/>
+          </a:prstGeom>
+          <a:solidFill>
+            <a:srgbClr val="FBF1F1"/>
+          </a:solidFill>
+          <a:ln/>
+        </p:spPr>
+      </p:sp>
+      <p:sp>
+        <p:nvSpPr>
+          <p:cNvPr id="13" name="Shape 11"/>
+          <p:cNvSpPr/>
+          <p:nvPr/>
+        </p:nvSpPr>
+        <p:spPr>
+          <a:xfrm>
+            <a:off x="3474720" y="2267712"/>
+            <a:ext cx="45720" cy="713232"/>
+          </a:xfrm>
+          <a:prstGeom prst="rect">
+            <a:avLst/>
+          </a:prstGeom>
+          <a:solidFill>
+            <a:srgbClr val="B3121B"/>
+          </a:solidFill>
+          <a:ln/>
+        </p:spPr>
+      </p:sp>
+      <p:sp>
+        <p:nvSpPr>
+          <p:cNvPr id="14" name="Text 12"/>
+          <p:cNvSpPr txBox="1"/>
+          <p:nvPr/>
+        </p:nvSpPr>
+        <p:spPr>
+          <a:xfrm>
+            <a:off x="3602736" y="2267712"/>
+            <a:ext cx="2075688" cy="713232"/>
+          </a:xfrm>
+          <a:prstGeom prst="rect">
+            <a:avLst/>
+          </a:prstGeom>
+          <a:noFill/>
+          <a:ln/>
+        </p:spPr>
+        <p:txBody>
+          <a:bodyPr wrap="square" lIns="0" tIns="0" rIns="0" bIns="0" rtlCol="0" anchor="ctr"/>
+          <a:lstStyle/>
+          <a:p>
+            <a:pPr algn="ctr" indent="0" marL="0">
+              <a:buNone/>
+            </a:pPr>
+            <a:r>
+              <a:rPr lang="en-US" sz="1150" b="1" dirty="0">
+                <a:solidFill>
+                  <a:srgbClr val="B3121B"/>
+                </a:solidFill>
+                <a:latin typeface="Yu Gothic" pitchFamily="34" charset="0"/>
+                <a:ea typeface="Yu Gothic" pitchFamily="34" charset="-122"/>
+                <a:cs typeface="Yu Gothic" pitchFamily="34" charset="-120"/>
+              </a:rPr>
+              <a:t>分配の原資が出ない</a:t>
+            </a:r>
+            <a:endParaRPr lang="en-US" sz="1150" dirty="0"/>
+          </a:p>
+        </p:txBody>
+      </p:sp>
+      <p:sp>
+        <p:nvSpPr>
+          <p:cNvPr id="15" name="Shape 13"/>
+          <p:cNvSpPr/>
+          <p:nvPr/>
+        </p:nvSpPr>
+        <p:spPr>
+          <a:xfrm>
+            <a:off x="5916168" y="2514600"/>
+            <a:ext cx="329184" cy="219456"/>
+          </a:xfrm>
+          <a:prstGeom prst="rightArrow">
+            <a:avLst/>
+          </a:prstGeom>
+          <a:solidFill>
+            <a:srgbClr val="6E6E76"/>
+          </a:solidFill>
+          <a:ln/>
+        </p:spPr>
+      </p:sp>
+      <p:sp>
+        <p:nvSpPr>
+          <p:cNvPr id="16" name="Shape 14"/>
+          <p:cNvSpPr/>
+          <p:nvPr/>
+        </p:nvSpPr>
+        <p:spPr>
+          <a:xfrm>
+            <a:off x="6355080" y="2267712"/>
+            <a:ext cx="2331720" cy="713232"/>
+          </a:xfrm>
+          <a:prstGeom prst="rect">
+            <a:avLst/>
+          </a:prstGeom>
+          <a:solidFill>
+            <a:srgbClr val="F4F2EF"/>
+          </a:solidFill>
+          <a:ln/>
+        </p:spPr>
+      </p:sp>
+      <p:sp>
+        <p:nvSpPr>
+          <p:cNvPr id="17" name="Text 15"/>
+          <p:cNvSpPr txBox="1"/>
+          <p:nvPr/>
+        </p:nvSpPr>
+        <p:spPr>
+          <a:xfrm>
+            <a:off x="6483096" y="2267712"/>
+            <a:ext cx="2075688" cy="713232"/>
+          </a:xfrm>
+          <a:prstGeom prst="rect">
+            <a:avLst/>
+          </a:prstGeom>
+          <a:noFill/>
+          <a:ln/>
+        </p:spPr>
+        <p:txBody>
+          <a:bodyPr wrap="square" lIns="0" tIns="0" rIns="0" bIns="0" rtlCol="0" anchor="ctr"/>
+          <a:lstStyle/>
+          <a:p>
+            <a:pPr algn="ctr" indent="0" marL="0">
+              <a:buNone/>
+            </a:pPr>
+            <a:r>
+              <a:rPr lang="en-US" sz="1150" b="1" dirty="0">
+                <a:solidFill>
+                  <a:srgbClr val="16161A"/>
+                </a:solidFill>
+                <a:latin typeface="Yu Gothic" pitchFamily="34" charset="0"/>
+                <a:ea typeface="Yu Gothic" pitchFamily="34" charset="-122"/>
+                <a:cs typeface="Yu Gothic" pitchFamily="34" charset="-120"/>
+              </a:rPr>
+              <a:t>クリエイターが去る</a:t>
+            </a:r>
+            <a:endParaRPr lang="en-US" sz="1150" dirty="0"/>
+          </a:p>
+        </p:txBody>
+      </p:sp>
+      <p:sp>
+        <p:nvSpPr>
+          <p:cNvPr id="18" name="Shape 16"/>
+          <p:cNvSpPr/>
+          <p:nvPr/>
+        </p:nvSpPr>
+        <p:spPr>
+          <a:xfrm>
+            <a:off x="8796528" y="2514600"/>
+            <a:ext cx="329184" cy="219456"/>
+          </a:xfrm>
+          <a:prstGeom prst="rightArrow">
+            <a:avLst/>
+          </a:prstGeom>
+          <a:solidFill>
+            <a:srgbClr val="6E6E76"/>
+          </a:solidFill>
+          <a:ln/>
+        </p:spPr>
+      </p:sp>
+      <p:sp>
+        <p:nvSpPr>
+          <p:cNvPr id="19" name="Shape 17"/>
+          <p:cNvSpPr/>
+          <p:nvPr/>
+        </p:nvSpPr>
+        <p:spPr>
+          <a:xfrm>
+            <a:off x="9235440" y="2267712"/>
+            <a:ext cx="2331720" cy="713232"/>
+          </a:xfrm>
+          <a:prstGeom prst="rect">
+            <a:avLst/>
+          </a:prstGeom>
+          <a:solidFill>
+            <a:srgbClr val="F4F2EF"/>
+          </a:solidFill>
+          <a:ln/>
+        </p:spPr>
+      </p:sp>
+      <p:sp>
+        <p:nvSpPr>
+          <p:cNvPr id="20" name="Text 18"/>
+          <p:cNvSpPr txBox="1"/>
+          <p:nvPr/>
+        </p:nvSpPr>
+        <p:spPr>
+          <a:xfrm>
+            <a:off x="9363456" y="2267712"/>
+            <a:ext cx="2075688" cy="713232"/>
+          </a:xfrm>
+          <a:prstGeom prst="rect">
+            <a:avLst/>
+          </a:prstGeom>
+          <a:noFill/>
+          <a:ln/>
+        </p:spPr>
+        <p:txBody>
+          <a:bodyPr wrap="square" lIns="0" tIns="0" rIns="0" bIns="0" rtlCol="0" anchor="ctr"/>
+          <a:lstStyle/>
+          <a:p>
+            <a:pPr algn="ctr" indent="0" marL="0">
+              <a:buNone/>
+            </a:pPr>
+            <a:r>
+              <a:rPr lang="en-US" sz="1150" b="1" dirty="0">
+                <a:solidFill>
+                  <a:srgbClr val="16161A"/>
+                </a:solidFill>
+                <a:latin typeface="Yu Gothic" pitchFamily="34" charset="0"/>
+                <a:ea typeface="Yu Gothic" pitchFamily="34" charset="-122"/>
+                <a:cs typeface="Yu Gothic" pitchFamily="34" charset="-120"/>
+              </a:rPr>
+              <a:t>コンテンツが減る</a:t>
+            </a:r>
+            <a:endParaRPr lang="en-US" sz="1150" dirty="0"/>
+          </a:p>
+        </p:txBody>
+      </p:sp>
+      <p:sp>
+        <p:nvSpPr>
+          <p:cNvPr id="21" name="Shape 19"/>
+          <p:cNvSpPr/>
+          <p:nvPr/>
+        </p:nvSpPr>
+        <p:spPr>
+          <a:xfrm>
+            <a:off x="914400" y="3127248"/>
+            <a:ext cx="10332720" cy="274320"/>
+          </a:xfrm>
+          <a:prstGeom prst="leftArrow">
+            <a:avLst/>
+          </a:prstGeom>
+          <a:solidFill>
+            <a:srgbClr val="DCD9D4"/>
+          </a:solidFill>
+          <a:ln/>
+        </p:spPr>
+      </p:sp>
+      <p:sp>
+        <p:nvSpPr>
+          <p:cNvPr id="22" name="Text 20"/>
+          <p:cNvSpPr txBox="1"/>
+          <p:nvPr/>
+        </p:nvSpPr>
+        <p:spPr>
+          <a:xfrm>
+            <a:off x="1417320" y="3127248"/>
+            <a:ext cx="9326880" cy="274320"/>
+          </a:xfrm>
+          <a:prstGeom prst="rect">
+            <a:avLst/>
+          </a:prstGeom>
+          <a:noFill/>
+          <a:ln/>
+        </p:spPr>
+        <p:txBody>
+          <a:bodyPr wrap="square" lIns="0" tIns="0" rIns="0" bIns="0" rtlCol="0" anchor="ctr"/>
+          <a:lstStyle/>
+          <a:p>
+            <a:pPr algn="ctr" indent="0" marL="0">
+              <a:buNone/>
+            </a:pPr>
+            <a:r>
+              <a:rPr lang="en-US" sz="950" b="1" dirty="0">
+                <a:solidFill>
+                  <a:srgbClr val="3A3A42"/>
+                </a:solidFill>
+                <a:latin typeface="Yu Gothic" pitchFamily="34" charset="0"/>
+                <a:ea typeface="Yu Gothic" pitchFamily="34" charset="-122"/>
+                <a:cs typeface="Yu Gothic" pitchFamily="34" charset="-120"/>
+              </a:rPr>
+              <a:t>この輪が回り続けるのが、両面市場のコールドスタートです</a:t>
+            </a:r>
+            <a:endParaRPr lang="en-US" sz="950" dirty="0"/>
+          </a:p>
+        </p:txBody>
+      </p:sp>
+      <p:sp>
+        <p:nvSpPr>
+          <p:cNvPr id="23" name="Text 21"/>
+          <p:cNvSpPr txBox="1"/>
+          <p:nvPr/>
+        </p:nvSpPr>
+        <p:spPr>
+          <a:xfrm>
+            <a:off x="594360" y="3493008"/>
+            <a:ext cx="11000232" cy="256032"/>
+          </a:xfrm>
+          <a:prstGeom prst="rect">
+            <a:avLst/>
+          </a:prstGeom>
+          <a:noFill/>
+          <a:ln/>
+        </p:spPr>
+        <p:txBody>
+          <a:bodyPr wrap="square" lIns="0" tIns="0" rIns="0" bIns="0" rtlCol="0" anchor="ctr"/>
+          <a:lstStyle/>
+          <a:p>
+            <a:pPr algn="ctr" indent="0" marL="0">
+              <a:buNone/>
+            </a:pPr>
+            <a:r>
+              <a:rPr lang="en-US" sz="1000" b="1" dirty="0">
+                <a:solidFill>
+                  <a:srgbClr val="B3121B"/>
+                </a:solidFill>
+                <a:latin typeface="Yu Gothic" pitchFamily="34" charset="0"/>
+                <a:ea typeface="Yu Gothic" pitchFamily="34" charset="-122"/>
+                <a:cs typeface="Yu Gothic" pitchFamily="34" charset="-120"/>
+              </a:rPr>
+              <a:t>② は視聴者を必要としません。案件を配ればクリエイターは集まり、その作品が①の初期コンテンツになります。だから②を先に、①と並走させます。</a:t>
+            </a:r>
+            <a:endParaRPr lang="en-US" sz="1000" dirty="0"/>
           </a:p>
         </p:txBody>
       </p:sp>
@@ -6588,7 +6138,7 @@
           </p:nvPr>
         </p:nvGraphicFramePr>
         <p:xfrm>
-          <a:off x="594360" y="1463040"/>
+          <a:off x="594360" y="3913632"/>
           <a:ext cx="11000232" cy="914400"/>
         </p:xfrm>
         <a:graphic>
@@ -6599,7 +6149,7 @@
                 <a:gridCol w="3931920"/>
                 <a:gridCol w="7068312"/>
               </a:tblGrid>
-              <a:tr h="658368">
+              <a:tr h="457200">
                 <a:tc>
                   <a:txBody>
                     <a:bodyPr/>
@@ -6617,7 +6167,7 @@
                           <a:ea typeface="Yu Gothic" pitchFamily="34" charset="-122"/>
                           <a:cs typeface="Yu Gothic" pitchFamily="34" charset="-120"/>
                         </a:rPr>
-                        <a:t>課題</a:t>
+                        <a:t>残りの課題</a:t>
                       </a:r>
                       <a:endParaRPr lang="en-US" sz="950" dirty="0">
                         <a:latin typeface="Yu Gothic" charset="0"/>
@@ -6741,7 +6291,7 @@
                   </a:tcPr>
                 </a:tc>
               </a:tr>
-              <a:tr h="658368">
+              <a:tr h="457200">
                 <a:tc>
                   <a:txBody>
                     <a:bodyPr/>
@@ -6751,7 +6301,7 @@
                         <a:buNone/>
                       </a:pPr>
                       <a:r>
-                        <a:rPr lang="en-US" sz="1100" b="1" dirty="0">
+                        <a:rPr lang="en-US" sz="1050" b="1" dirty="0">
                           <a:solidFill>
                             <a:srgbClr val="16161A"/>
                           </a:solidFill>
@@ -6759,9 +6309,9 @@
                           <a:ea typeface="Yu Gothic" pitchFamily="34" charset="-122"/>
                           <a:cs typeface="Yu Gothic" pitchFamily="34" charset="-120"/>
                         </a:rPr>
-                        <a:t>両面市場のコールドスタート</a:t>
+                        <a:t>分成率で大手に勝てない</a:t>
                       </a:r>
-                      <a:endParaRPr lang="en-US" sz="1100" dirty="0">
+                      <a:endParaRPr lang="en-US" sz="1050" dirty="0">
                         <a:latin typeface="Yu Gothic" charset="0"/>
                         <a:ea typeface="Yu Gothic"/>
                         <a:cs typeface="Yu Gothic"/>
@@ -6818,7 +6368,7 @@
                         <a:buNone/>
                       </a:pPr>
                       <a:r>
-                        <a:rPr lang="en-US" sz="1100" dirty="0">
+                        <a:rPr lang="en-US" sz="1050" dirty="0">
                           <a:solidFill>
                             <a:srgbClr val="3A3A42"/>
                           </a:solidFill>
@@ -6826,9 +6376,9 @@
                           <a:ea typeface="Yu Gothic" pitchFamily="34" charset="-122"/>
                           <a:cs typeface="Yu Gothic" pitchFamily="34" charset="-120"/>
                         </a:rPr>
-                        <a:t>②の企業案件を先に回す。視聴者ゼロでもクリエイターに報酬が出る状態を初日から作る</a:t>
+                        <a:t>分成率では戦わない。企業案件・AIを冷遇しない方針・日本市場への窓の3点で選ばれる設計にする</a:t>
                       </a:r>
-                      <a:endParaRPr lang="en-US" sz="1100" dirty="0">
+                      <a:endParaRPr lang="en-US" sz="1050" dirty="0">
                         <a:latin typeface="Yu Gothic" charset="0"/>
                         <a:ea typeface="Yu Gothic"/>
                         <a:cs typeface="Yu Gothic"/>
@@ -6877,7 +6427,7 @@
                   </a:tcPr>
                 </a:tc>
               </a:tr>
-              <a:tr h="658368">
+              <a:tr h="457200">
                 <a:tc>
                   <a:txBody>
                     <a:bodyPr/>
@@ -6887,7 +6437,7 @@
                         <a:buNone/>
                       </a:pPr>
                       <a:r>
-                        <a:rPr lang="en-US" sz="1100" b="1" dirty="0">
+                        <a:rPr lang="en-US" sz="1050" b="1" dirty="0">
                           <a:solidFill>
                             <a:srgbClr val="16161A"/>
                           </a:solidFill>
@@ -6895,9 +6445,9 @@
                           <a:ea typeface="Yu Gothic" pitchFamily="34" charset="-122"/>
                           <a:cs typeface="Yu Gothic" pitchFamily="34" charset="-120"/>
                         </a:rPr>
-                        <a:t>分成率で大手に勝てない</a:t>
+                        <a:t>視聴者獲得が最大の支出</a:t>
                       </a:r>
-                      <a:endParaRPr lang="en-US" sz="1100" dirty="0">
+                      <a:endParaRPr lang="en-US" sz="1050" dirty="0">
                         <a:latin typeface="Yu Gothic" charset="0"/>
                         <a:ea typeface="Yu Gothic"/>
                         <a:cs typeface="Yu Gothic"/>
@@ -6954,7 +6504,7 @@
                         <a:buNone/>
                       </a:pPr>
                       <a:r>
-                        <a:rPr lang="en-US" sz="1100" dirty="0">
+                        <a:rPr lang="en-US" sz="1050" dirty="0">
                           <a:solidFill>
                             <a:srgbClr val="3A3A42"/>
                           </a:solidFill>
@@ -6962,9 +6512,9 @@
                           <a:ea typeface="Yu Gothic" pitchFamily="34" charset="-122"/>
                           <a:cs typeface="Yu Gothic" pitchFamily="34" charset="-120"/>
                         </a:rPr>
-                        <a:t>分成率では戦わない。企業案件・AIを冷遇しない方針・日本市場への窓の3点で選ばれる設計にする</a:t>
+                        <a:t>PF公開（6ヶ月目）まで投下しない。公開後に集中投下し、CPIを実測してから増減させる</a:t>
                       </a:r>
-                      <a:endParaRPr lang="en-US" sz="1100" dirty="0">
+                      <a:endParaRPr lang="en-US" sz="1050" dirty="0">
                         <a:latin typeface="Yu Gothic" charset="0"/>
                         <a:ea typeface="Yu Gothic"/>
                         <a:cs typeface="Yu Gothic"/>
@@ -7013,7 +6563,7 @@
                   </a:tcPr>
                 </a:tc>
               </a:tr>
-              <a:tr h="658368">
+              <a:tr h="457200">
                 <a:tc>
                   <a:txBody>
                     <a:bodyPr/>
@@ -7023,7 +6573,7 @@
                         <a:buNone/>
                       </a:pPr>
                       <a:r>
-                        <a:rPr lang="en-US" sz="1100" b="1" dirty="0">
+                        <a:rPr lang="en-US" sz="1050" b="1" dirty="0">
                           <a:solidFill>
                             <a:srgbClr val="16161A"/>
                           </a:solidFill>
@@ -7031,9 +6581,9 @@
                           <a:ea typeface="Yu Gothic" pitchFamily="34" charset="-122"/>
                           <a:cs typeface="Yu Gothic" pitchFamily="34" charset="-120"/>
                         </a:rPr>
-                        <a:t>分配の原資が初期はゼロ</a:t>
+                        <a:t>中国本土から当社PFに接続できない可能性</a:t>
                       </a:r>
-                      <a:endParaRPr lang="en-US" sz="1100" dirty="0">
+                      <a:endParaRPr lang="en-US" sz="1050" dirty="0">
                         <a:latin typeface="Yu Gothic" charset="0"/>
                         <a:ea typeface="Yu Gothic"/>
                         <a:cs typeface="Yu Gothic"/>
@@ -7090,7 +6640,7 @@
                         <a:buNone/>
                       </a:pPr>
                       <a:r>
-                        <a:rPr lang="en-US" sz="1100" dirty="0">
+                        <a:rPr lang="en-US" sz="1050" dirty="0">
                           <a:solidFill>
                             <a:srgbClr val="3A3A42"/>
                           </a:solidFill>
@@ -7098,9 +6648,9 @@
                           <a:ea typeface="Yu Gothic" pitchFamily="34" charset="-122"/>
                           <a:cs typeface="Yu Gothic" pitchFamily="34" charset="-120"/>
                         </a:rPr>
-                        <a:t>調達額に分配原資を明示的に積む（1年目1,500万）。課金モデルを主にし、広告分配は補助に置く</a:t>
+                        <a:t>投稿・決済の経路を設計段階で検証。国内向けミラーまたは提携PF経由の投稿導線を用意する</a:t>
                       </a:r>
-                      <a:endParaRPr lang="en-US" sz="1100" dirty="0">
+                      <a:endParaRPr lang="en-US" sz="1050" dirty="0">
                         <a:latin typeface="Yu Gothic" charset="0"/>
                         <a:ea typeface="Yu Gothic"/>
                         <a:cs typeface="Yu Gothic"/>
@@ -7149,7 +6699,7 @@
                   </a:tcPr>
                 </a:tc>
               </a:tr>
-              <a:tr h="658368">
+              <a:tr h="457200">
                 <a:tc>
                   <a:txBody>
                     <a:bodyPr/>
@@ -7159,7 +6709,7 @@
                         <a:buNone/>
                       </a:pPr>
                       <a:r>
-                        <a:rPr lang="en-US" sz="1100" b="1" dirty="0">
+                        <a:rPr lang="en-US" sz="1050" b="1" dirty="0">
                           <a:solidFill>
                             <a:srgbClr val="16161A"/>
                           </a:solidFill>
@@ -7167,9 +6717,9 @@
                           <a:ea typeface="Yu Gothic" pitchFamily="34" charset="-122"/>
                           <a:cs typeface="Yu Gothic" pitchFamily="34" charset="-120"/>
                         </a:rPr>
-                        <a:t>視聴者獲得が最大の支出</a:t>
+                        <a:t>「AIっぽさ」が視聴維持率を下げる</a:t>
                       </a:r>
-                      <a:endParaRPr lang="en-US" sz="1100" dirty="0">
+                      <a:endParaRPr lang="en-US" sz="1050" dirty="0">
                         <a:latin typeface="Yu Gothic" charset="0"/>
                         <a:ea typeface="Yu Gothic"/>
                         <a:cs typeface="Yu Gothic"/>
@@ -7226,7 +6776,7 @@
                         <a:buNone/>
                       </a:pPr>
                       <a:r>
-                        <a:rPr lang="en-US" sz="1100" dirty="0">
+                        <a:rPr lang="en-US" sz="1050" dirty="0">
                           <a:solidFill>
                             <a:srgbClr val="3A3A42"/>
                           </a:solidFill>
@@ -7234,9 +6784,9 @@
                           <a:ea typeface="Yu Gothic" pitchFamily="34" charset="-122"/>
                           <a:cs typeface="Yu Gothic" pitchFamily="34" charset="-120"/>
                         </a:rPr>
-                        <a:t>PF公開（6ヶ月目）まで投下しない。公開後に集中投下し、CPIを実測してから増減させる</a:t>
+                        <a:t>審査基準に組み込み、品質判定の自動化を特許①として出願。視聴維持率データを学習側に回す</a:t>
                       </a:r>
-                      <a:endParaRPr lang="en-US" sz="1100" dirty="0">
+                      <a:endParaRPr lang="en-US" sz="1050" dirty="0">
                         <a:latin typeface="Yu Gothic" charset="0"/>
                         <a:ea typeface="Yu Gothic"/>
                         <a:cs typeface="Yu Gothic"/>
@@ -7285,285 +6835,13 @@
                   </a:tcPr>
                 </a:tc>
               </a:tr>
-              <a:tr h="658368">
-                <a:tc>
-                  <a:txBody>
-                    <a:bodyPr/>
-                    <a:lstStyle/>
-                    <a:p>
-                      <a:pPr indent="0" marL="0">
-                        <a:buNone/>
-                      </a:pPr>
-                      <a:r>
-                        <a:rPr lang="en-US" sz="1100" b="1" dirty="0">
-                          <a:solidFill>
-                            <a:srgbClr val="16161A"/>
-                          </a:solidFill>
-                          <a:latin typeface="Yu Gothic" pitchFamily="34" charset="0"/>
-                          <a:ea typeface="Yu Gothic" pitchFamily="34" charset="-122"/>
-                          <a:cs typeface="Yu Gothic" pitchFamily="34" charset="-120"/>
-                        </a:rPr>
-                        <a:t>中国本土から当社PFに接続できない可能性</a:t>
-                      </a:r>
-                      <a:endParaRPr lang="en-US" sz="1100" dirty="0">
-                        <a:latin typeface="Yu Gothic" charset="0"/>
-                        <a:ea typeface="Yu Gothic"/>
-                        <a:cs typeface="Yu Gothic"/>
-                        <a:ea typeface="Yu Gothic" charset="0"/>
-                        <a:cs typeface="Yu Gothic" charset="0"/>
-                      </a:endParaRPr>
-                    </a:p>
-                  </a:txBody>
-                  <a:tcPr marL="88900" marR="88900" marT="50800" marB="50800" anchor="ctr">
-                    <a:lnL w="7620" cap="flat" cmpd="sng" algn="ctr">
-                      <a:solidFill>
-                        <a:srgbClr val="DCD9D4"/>
-                      </a:solidFill>
-                      <a:prstDash val="solid"/>
-                      <a:round/>
-                      <a:headEnd type="none" w="med" len="med"/>
-                      <a:tailEnd type="none" w="med" len="med"/>
-                    </a:lnL>
-                    <a:lnR w="7620" cap="flat" cmpd="sng" algn="ctr">
-                      <a:solidFill>
-                        <a:srgbClr val="DCD9D4"/>
-                      </a:solidFill>
-                      <a:prstDash val="solid"/>
-                      <a:round/>
-                      <a:headEnd type="none" w="med" len="med"/>
-                      <a:tailEnd type="none" w="med" len="med"/>
-                    </a:lnR>
-                    <a:lnT w="7620" cap="flat" cmpd="sng" algn="ctr">
-                      <a:solidFill>
-                        <a:srgbClr val="DCD9D4"/>
-                      </a:solidFill>
-                      <a:prstDash val="solid"/>
-                      <a:round/>
-                      <a:headEnd type="none" w="med" len="med"/>
-                      <a:tailEnd type="none" w="med" len="med"/>
-                    </a:lnT>
-                    <a:lnB w="7620" cap="flat" cmpd="sng" algn="ctr">
-                      <a:solidFill>
-                        <a:srgbClr val="DCD9D4"/>
-                      </a:solidFill>
-                      <a:prstDash val="solid"/>
-                      <a:round/>
-                      <a:headEnd type="none" w="med" len="med"/>
-                      <a:tailEnd type="none" w="med" len="med"/>
-                    </a:lnB>
-                  </a:tcPr>
-                </a:tc>
-                <a:tc>
-                  <a:txBody>
-                    <a:bodyPr/>
-                    <a:lstStyle/>
-                    <a:p>
-                      <a:pPr indent="0" marL="0">
-                        <a:buNone/>
-                      </a:pPr>
-                      <a:r>
-                        <a:rPr lang="en-US" sz="1100" dirty="0">
-                          <a:solidFill>
-                            <a:srgbClr val="3A3A42"/>
-                          </a:solidFill>
-                          <a:latin typeface="Yu Gothic" pitchFamily="34" charset="0"/>
-                          <a:ea typeface="Yu Gothic" pitchFamily="34" charset="-122"/>
-                          <a:cs typeface="Yu Gothic" pitchFamily="34" charset="-120"/>
-                        </a:rPr>
-                        <a:t>投稿・決済の経路を設計段階で検証。国内向けミラーまたは提携PF経由の投稿導線を用意する</a:t>
-                      </a:r>
-                      <a:endParaRPr lang="en-US" sz="1100" dirty="0">
-                        <a:latin typeface="Yu Gothic" charset="0"/>
-                        <a:ea typeface="Yu Gothic"/>
-                        <a:cs typeface="Yu Gothic"/>
-                        <a:ea typeface="Yu Gothic" charset="0"/>
-                        <a:cs typeface="Yu Gothic" charset="0"/>
-                      </a:endParaRPr>
-                    </a:p>
-                  </a:txBody>
-                  <a:tcPr marL="88900" marR="88900" marT="50800" marB="50800" anchor="ctr">
-                    <a:lnL w="7620" cap="flat" cmpd="sng" algn="ctr">
-                      <a:solidFill>
-                        <a:srgbClr val="DCD9D4"/>
-                      </a:solidFill>
-                      <a:prstDash val="solid"/>
-                      <a:round/>
-                      <a:headEnd type="none" w="med" len="med"/>
-                      <a:tailEnd type="none" w="med" len="med"/>
-                    </a:lnL>
-                    <a:lnR w="7620" cap="flat" cmpd="sng" algn="ctr">
-                      <a:solidFill>
-                        <a:srgbClr val="DCD9D4"/>
-                      </a:solidFill>
-                      <a:prstDash val="solid"/>
-                      <a:round/>
-                      <a:headEnd type="none" w="med" len="med"/>
-                      <a:tailEnd type="none" w="med" len="med"/>
-                    </a:lnR>
-                    <a:lnT w="7620" cap="flat" cmpd="sng" algn="ctr">
-                      <a:solidFill>
-                        <a:srgbClr val="DCD9D4"/>
-                      </a:solidFill>
-                      <a:prstDash val="solid"/>
-                      <a:round/>
-                      <a:headEnd type="none" w="med" len="med"/>
-                      <a:tailEnd type="none" w="med" len="med"/>
-                    </a:lnT>
-                    <a:lnB w="7620" cap="flat" cmpd="sng" algn="ctr">
-                      <a:solidFill>
-                        <a:srgbClr val="DCD9D4"/>
-                      </a:solidFill>
-                      <a:prstDash val="solid"/>
-                      <a:round/>
-                      <a:headEnd type="none" w="med" len="med"/>
-                      <a:tailEnd type="none" w="med" len="med"/>
-                    </a:lnB>
-                  </a:tcPr>
-                </a:tc>
-              </a:tr>
-              <a:tr h="658368">
-                <a:tc>
-                  <a:txBody>
-                    <a:bodyPr/>
-                    <a:lstStyle/>
-                    <a:p>
-                      <a:pPr indent="0" marL="0">
-                        <a:buNone/>
-                      </a:pPr>
-                      <a:r>
-                        <a:rPr lang="en-US" sz="1100" b="1" dirty="0">
-                          <a:solidFill>
-                            <a:srgbClr val="16161A"/>
-                          </a:solidFill>
-                          <a:latin typeface="Yu Gothic" pitchFamily="34" charset="0"/>
-                          <a:ea typeface="Yu Gothic" pitchFamily="34" charset="-122"/>
-                          <a:cs typeface="Yu Gothic" pitchFamily="34" charset="-120"/>
-                        </a:rPr>
-                        <a:t>「AIっぽさ」が視聴維持率を下げる</a:t>
-                      </a:r>
-                      <a:endParaRPr lang="en-US" sz="1100" dirty="0">
-                        <a:latin typeface="Yu Gothic" charset="0"/>
-                        <a:ea typeface="Yu Gothic"/>
-                        <a:cs typeface="Yu Gothic"/>
-                        <a:ea typeface="Yu Gothic" charset="0"/>
-                        <a:cs typeface="Yu Gothic" charset="0"/>
-                      </a:endParaRPr>
-                    </a:p>
-                  </a:txBody>
-                  <a:tcPr marL="88900" marR="88900" marT="50800" marB="50800" anchor="ctr">
-                    <a:lnL w="7620" cap="flat" cmpd="sng" algn="ctr">
-                      <a:solidFill>
-                        <a:srgbClr val="DCD9D4"/>
-                      </a:solidFill>
-                      <a:prstDash val="solid"/>
-                      <a:round/>
-                      <a:headEnd type="none" w="med" len="med"/>
-                      <a:tailEnd type="none" w="med" len="med"/>
-                    </a:lnL>
-                    <a:lnR w="7620" cap="flat" cmpd="sng" algn="ctr">
-                      <a:solidFill>
-                        <a:srgbClr val="DCD9D4"/>
-                      </a:solidFill>
-                      <a:prstDash val="solid"/>
-                      <a:round/>
-                      <a:headEnd type="none" w="med" len="med"/>
-                      <a:tailEnd type="none" w="med" len="med"/>
-                    </a:lnR>
-                    <a:lnT w="7620" cap="flat" cmpd="sng" algn="ctr">
-                      <a:solidFill>
-                        <a:srgbClr val="DCD9D4"/>
-                      </a:solidFill>
-                      <a:prstDash val="solid"/>
-                      <a:round/>
-                      <a:headEnd type="none" w="med" len="med"/>
-                      <a:tailEnd type="none" w="med" len="med"/>
-                    </a:lnT>
-                    <a:lnB w="7620" cap="flat" cmpd="sng" algn="ctr">
-                      <a:solidFill>
-                        <a:srgbClr val="DCD9D4"/>
-                      </a:solidFill>
-                      <a:prstDash val="solid"/>
-                      <a:round/>
-                      <a:headEnd type="none" w="med" len="med"/>
-                      <a:tailEnd type="none" w="med" len="med"/>
-                    </a:lnB>
-                  </a:tcPr>
-                </a:tc>
-                <a:tc>
-                  <a:txBody>
-                    <a:bodyPr/>
-                    <a:lstStyle/>
-                    <a:p>
-                      <a:pPr indent="0" marL="0">
-                        <a:buNone/>
-                      </a:pPr>
-                      <a:r>
-                        <a:rPr lang="en-US" sz="1100" dirty="0">
-                          <a:solidFill>
-                            <a:srgbClr val="3A3A42"/>
-                          </a:solidFill>
-                          <a:latin typeface="Yu Gothic" pitchFamily="34" charset="0"/>
-                          <a:ea typeface="Yu Gothic" pitchFamily="34" charset="-122"/>
-                          <a:cs typeface="Yu Gothic" pitchFamily="34" charset="-120"/>
-                        </a:rPr>
-                        <a:t>審査基準に組み込み、品質判定の自動化を特許①として出願。視聴維持率データを学習側に回す</a:t>
-                      </a:r>
-                      <a:endParaRPr lang="en-US" sz="1100" dirty="0">
-                        <a:latin typeface="Yu Gothic" charset="0"/>
-                        <a:ea typeface="Yu Gothic"/>
-                        <a:cs typeface="Yu Gothic"/>
-                        <a:ea typeface="Yu Gothic" charset="0"/>
-                        <a:cs typeface="Yu Gothic" charset="0"/>
-                      </a:endParaRPr>
-                    </a:p>
-                  </a:txBody>
-                  <a:tcPr marL="88900" marR="88900" marT="50800" marB="50800" anchor="ctr">
-                    <a:lnL w="7620" cap="flat" cmpd="sng" algn="ctr">
-                      <a:solidFill>
-                        <a:srgbClr val="DCD9D4"/>
-                      </a:solidFill>
-                      <a:prstDash val="solid"/>
-                      <a:round/>
-                      <a:headEnd type="none" w="med" len="med"/>
-                      <a:tailEnd type="none" w="med" len="med"/>
-                    </a:lnL>
-                    <a:lnR w="7620" cap="flat" cmpd="sng" algn="ctr">
-                      <a:solidFill>
-                        <a:srgbClr val="DCD9D4"/>
-                      </a:solidFill>
-                      <a:prstDash val="solid"/>
-                      <a:round/>
-                      <a:headEnd type="none" w="med" len="med"/>
-                      <a:tailEnd type="none" w="med" len="med"/>
-                    </a:lnR>
-                    <a:lnT w="7620" cap="flat" cmpd="sng" algn="ctr">
-                      <a:solidFill>
-                        <a:srgbClr val="DCD9D4"/>
-                      </a:solidFill>
-                      <a:prstDash val="solid"/>
-                      <a:round/>
-                      <a:headEnd type="none" w="med" len="med"/>
-                      <a:tailEnd type="none" w="med" len="med"/>
-                    </a:lnT>
-                    <a:lnB w="7620" cap="flat" cmpd="sng" algn="ctr">
-                      <a:solidFill>
-                        <a:srgbClr val="DCD9D4"/>
-                      </a:solidFill>
-                      <a:prstDash val="solid"/>
-                      <a:round/>
-                      <a:headEnd type="none" w="med" len="med"/>
-                      <a:tailEnd type="none" w="med" len="med"/>
-                    </a:lnB>
-                  </a:tcPr>
-                </a:tc>
-              </a:tr>
             </a:tbl>
           </a:graphicData>
         </a:graphic>
       </p:graphicFrame>
       <p:sp>
         <p:nvSpPr>
-          <p:cNvPr id="7" name="Text 4"/>
+          <p:cNvPr id="25" name="Text 22"/>
           <p:cNvSpPr txBox="1"/>
           <p:nvPr/>
         </p:nvSpPr>
@@ -7602,7 +6880,7 @@
       </p:sp>
       <p:sp>
         <p:nvSpPr>
-          <p:cNvPr id="8" name="Text 5"/>
+          <p:cNvPr id="26" name="Text 23"/>
           <p:cNvSpPr txBox="1"/>
           <p:nvPr/>
         </p:nvSpPr>
@@ -13122,9 +12400,461 @@
                 <a:ea typeface="Yu Gothic" pitchFamily="34" charset="-122"/>
                 <a:cs typeface="Yu Gothic" pitchFamily="34" charset="-120"/>
               </a:rPr>
-              <a:t>各フェーズを、次へ進むための「ゲート条件」で管理します</a:t>
+              <a:t>各フェーズは「ゲート条件」で区切ります。満たさない限り、次へは進みません</a:t>
             </a:r>
             <a:endParaRPr lang="en-US" sz="1200" dirty="0"/>
+          </a:p>
+        </p:txBody>
+      </p:sp>
+      <p:sp>
+        <p:nvSpPr>
+          <p:cNvPr id="6" name="Shape 4"/>
+          <p:cNvSpPr/>
+          <p:nvPr/>
+        </p:nvSpPr>
+        <p:spPr>
+          <a:xfrm>
+            <a:off x="594360" y="1408176"/>
+            <a:ext cx="1664208" cy="603504"/>
+          </a:xfrm>
+          <a:prstGeom prst="chevron">
+            <a:avLst/>
+          </a:prstGeom>
+          <a:solidFill>
+            <a:srgbClr val="F4F2EF"/>
+          </a:solidFill>
+          <a:ln/>
+        </p:spPr>
+      </p:sp>
+      <p:sp>
+        <p:nvSpPr>
+          <p:cNvPr id="7" name="Text 5"/>
+          <p:cNvSpPr txBox="1"/>
+          <p:nvPr/>
+        </p:nvSpPr>
+        <p:spPr>
+          <a:xfrm>
+            <a:off x="758952" y="1408176"/>
+            <a:ext cx="1371600" cy="603504"/>
+          </a:xfrm>
+          <a:prstGeom prst="rect">
+            <a:avLst/>
+          </a:prstGeom>
+          <a:noFill/>
+          <a:ln/>
+        </p:spPr>
+        <p:txBody>
+          <a:bodyPr wrap="square" lIns="0" tIns="0" rIns="0" bIns="0" rtlCol="0" anchor="ctr"/>
+          <a:lstStyle/>
+          <a:p>
+            <a:pPr algn="ctr" indent="0" marL="0">
+              <a:buNone/>
+            </a:pPr>
+            <a:r>
+              <a:rPr lang="en-US" sz="1000" b="1" dirty="0">
+                <a:solidFill>
+                  <a:srgbClr val="16161A"/>
+                </a:solidFill>
+                <a:latin typeface="Yu Gothic" pitchFamily="34" charset="0"/>
+                <a:ea typeface="Yu Gothic" pitchFamily="34" charset="-122"/>
+                <a:cs typeface="Yu Gothic" pitchFamily="34" charset="-120"/>
+              </a:rPr>
+              <a:t>〜2026/12</a:t>
+            </a:r>
+            <a:endParaRPr lang="en-US" sz="1000" dirty="0"/>
+          </a:p>
+        </p:txBody>
+      </p:sp>
+      <p:sp>
+        <p:nvSpPr>
+          <p:cNvPr id="8" name="Shape 6"/>
+          <p:cNvSpPr/>
+          <p:nvPr/>
+        </p:nvSpPr>
+        <p:spPr>
+          <a:xfrm>
+            <a:off x="2148840" y="1408176"/>
+            <a:ext cx="1664208" cy="603504"/>
+          </a:xfrm>
+          <a:prstGeom prst="chevron">
+            <a:avLst/>
+          </a:prstGeom>
+          <a:solidFill>
+            <a:srgbClr val="F4F2EF"/>
+          </a:solidFill>
+          <a:ln/>
+        </p:spPr>
+      </p:sp>
+      <p:sp>
+        <p:nvSpPr>
+          <p:cNvPr id="9" name="Text 7"/>
+          <p:cNvSpPr txBox="1"/>
+          <p:nvPr/>
+        </p:nvSpPr>
+        <p:spPr>
+          <a:xfrm>
+            <a:off x="2313432" y="1408176"/>
+            <a:ext cx="1371600" cy="603504"/>
+          </a:xfrm>
+          <a:prstGeom prst="rect">
+            <a:avLst/>
+          </a:prstGeom>
+          <a:noFill/>
+          <a:ln/>
+        </p:spPr>
+        <p:txBody>
+          <a:bodyPr wrap="square" lIns="0" tIns="0" rIns="0" bIns="0" rtlCol="0" anchor="ctr"/>
+          <a:lstStyle/>
+          <a:p>
+            <a:pPr algn="ctr" indent="0" marL="0">
+              <a:buNone/>
+            </a:pPr>
+            <a:r>
+              <a:rPr lang="en-US" sz="1000" b="1" dirty="0">
+                <a:solidFill>
+                  <a:srgbClr val="16161A"/>
+                </a:solidFill>
+                <a:latin typeface="Yu Gothic" pitchFamily="34" charset="0"/>
+                <a:ea typeface="Yu Gothic" pitchFamily="34" charset="-122"/>
+                <a:cs typeface="Yu Gothic" pitchFamily="34" charset="-120"/>
+              </a:rPr>
+              <a:t>2027/1-3</a:t>
+            </a:r>
+            <a:endParaRPr lang="en-US" sz="1000" dirty="0"/>
+          </a:p>
+        </p:txBody>
+      </p:sp>
+      <p:sp>
+        <p:nvSpPr>
+          <p:cNvPr id="10" name="Shape 8"/>
+          <p:cNvSpPr/>
+          <p:nvPr/>
+        </p:nvSpPr>
+        <p:spPr>
+          <a:xfrm>
+            <a:off x="3703320" y="1408176"/>
+            <a:ext cx="1664208" cy="603504"/>
+          </a:xfrm>
+          <a:prstGeom prst="chevron">
+            <a:avLst/>
+          </a:prstGeom>
+          <a:solidFill>
+            <a:srgbClr val="F0DCC9"/>
+          </a:solidFill>
+          <a:ln/>
+        </p:spPr>
+      </p:sp>
+      <p:sp>
+        <p:nvSpPr>
+          <p:cNvPr id="11" name="Text 9"/>
+          <p:cNvSpPr txBox="1"/>
+          <p:nvPr/>
+        </p:nvSpPr>
+        <p:spPr>
+          <a:xfrm>
+            <a:off x="3867912" y="1408176"/>
+            <a:ext cx="1371600" cy="603504"/>
+          </a:xfrm>
+          <a:prstGeom prst="rect">
+            <a:avLst/>
+          </a:prstGeom>
+          <a:noFill/>
+          <a:ln/>
+        </p:spPr>
+        <p:txBody>
+          <a:bodyPr wrap="square" lIns="0" tIns="0" rIns="0" bIns="0" rtlCol="0" anchor="ctr"/>
+          <a:lstStyle/>
+          <a:p>
+            <a:pPr algn="ctr" indent="0" marL="0">
+              <a:buNone/>
+            </a:pPr>
+            <a:r>
+              <a:rPr lang="en-US" sz="1000" b="1" dirty="0">
+                <a:solidFill>
+                  <a:srgbClr val="16161A"/>
+                </a:solidFill>
+                <a:latin typeface="Yu Gothic" pitchFamily="34" charset="0"/>
+                <a:ea typeface="Yu Gothic" pitchFamily="34" charset="-122"/>
+                <a:cs typeface="Yu Gothic" pitchFamily="34" charset="-120"/>
+              </a:rPr>
+              <a:t>2027/4-9</a:t>
+            </a:r>
+            <a:endParaRPr lang="en-US" sz="1000" dirty="0"/>
+          </a:p>
+        </p:txBody>
+      </p:sp>
+      <p:sp>
+        <p:nvSpPr>
+          <p:cNvPr id="12" name="Shape 10"/>
+          <p:cNvSpPr/>
+          <p:nvPr/>
+        </p:nvSpPr>
+        <p:spPr>
+          <a:xfrm>
+            <a:off x="5257800" y="1408176"/>
+            <a:ext cx="1664208" cy="603504"/>
+          </a:xfrm>
+          <a:prstGeom prst="chevron">
+            <a:avLst/>
+          </a:prstGeom>
+          <a:solidFill>
+            <a:srgbClr val="F4F2EF"/>
+          </a:solidFill>
+          <a:ln/>
+        </p:spPr>
+      </p:sp>
+      <p:sp>
+        <p:nvSpPr>
+          <p:cNvPr id="13" name="Text 11"/>
+          <p:cNvSpPr txBox="1"/>
+          <p:nvPr/>
+        </p:nvSpPr>
+        <p:spPr>
+          <a:xfrm>
+            <a:off x="5422392" y="1408176"/>
+            <a:ext cx="1371600" cy="603504"/>
+          </a:xfrm>
+          <a:prstGeom prst="rect">
+            <a:avLst/>
+          </a:prstGeom>
+          <a:noFill/>
+          <a:ln/>
+        </p:spPr>
+        <p:txBody>
+          <a:bodyPr wrap="square" lIns="0" tIns="0" rIns="0" bIns="0" rtlCol="0" anchor="ctr"/>
+          <a:lstStyle/>
+          <a:p>
+            <a:pPr algn="ctr" indent="0" marL="0">
+              <a:buNone/>
+            </a:pPr>
+            <a:r>
+              <a:rPr lang="en-US" sz="1000" b="1" dirty="0">
+                <a:solidFill>
+                  <a:srgbClr val="16161A"/>
+                </a:solidFill>
+                <a:latin typeface="Yu Gothic" pitchFamily="34" charset="0"/>
+                <a:ea typeface="Yu Gothic" pitchFamily="34" charset="-122"/>
+                <a:cs typeface="Yu Gothic" pitchFamily="34" charset="-120"/>
+              </a:rPr>
+              <a:t>2期</a:t>
+            </a:r>
+            <a:endParaRPr lang="en-US" sz="1000" dirty="0"/>
+          </a:p>
+        </p:txBody>
+      </p:sp>
+      <p:sp>
+        <p:nvSpPr>
+          <p:cNvPr id="14" name="Shape 12"/>
+          <p:cNvSpPr/>
+          <p:nvPr/>
+        </p:nvSpPr>
+        <p:spPr>
+          <a:xfrm>
+            <a:off x="6812280" y="1408176"/>
+            <a:ext cx="1664208" cy="603504"/>
+          </a:xfrm>
+          <a:prstGeom prst="chevron">
+            <a:avLst/>
+          </a:prstGeom>
+          <a:solidFill>
+            <a:srgbClr val="F4F2EF"/>
+          </a:solidFill>
+          <a:ln/>
+        </p:spPr>
+      </p:sp>
+      <p:sp>
+        <p:nvSpPr>
+          <p:cNvPr id="15" name="Text 13"/>
+          <p:cNvSpPr txBox="1"/>
+          <p:nvPr/>
+        </p:nvSpPr>
+        <p:spPr>
+          <a:xfrm>
+            <a:off x="6976872" y="1408176"/>
+            <a:ext cx="1371600" cy="603504"/>
+          </a:xfrm>
+          <a:prstGeom prst="rect">
+            <a:avLst/>
+          </a:prstGeom>
+          <a:noFill/>
+          <a:ln/>
+        </p:spPr>
+        <p:txBody>
+          <a:bodyPr wrap="square" lIns="0" tIns="0" rIns="0" bIns="0" rtlCol="0" anchor="ctr"/>
+          <a:lstStyle/>
+          <a:p>
+            <a:pPr algn="ctr" indent="0" marL="0">
+              <a:buNone/>
+            </a:pPr>
+            <a:r>
+              <a:rPr lang="en-US" sz="1000" b="1" dirty="0">
+                <a:solidFill>
+                  <a:srgbClr val="16161A"/>
+                </a:solidFill>
+                <a:latin typeface="Yu Gothic" pitchFamily="34" charset="0"/>
+                <a:ea typeface="Yu Gothic" pitchFamily="34" charset="-122"/>
+                <a:cs typeface="Yu Gothic" pitchFamily="34" charset="-120"/>
+              </a:rPr>
+              <a:t>3期</a:t>
+            </a:r>
+            <a:endParaRPr lang="en-US" sz="1000" dirty="0"/>
+          </a:p>
+        </p:txBody>
+      </p:sp>
+      <p:sp>
+        <p:nvSpPr>
+          <p:cNvPr id="16" name="Shape 14"/>
+          <p:cNvSpPr/>
+          <p:nvPr/>
+        </p:nvSpPr>
+        <p:spPr>
+          <a:xfrm>
+            <a:off x="8366760" y="1408176"/>
+            <a:ext cx="1664208" cy="603504"/>
+          </a:xfrm>
+          <a:prstGeom prst="chevron">
+            <a:avLst/>
+          </a:prstGeom>
+          <a:solidFill>
+            <a:srgbClr val="F4F2EF"/>
+          </a:solidFill>
+          <a:ln/>
+        </p:spPr>
+      </p:sp>
+      <p:sp>
+        <p:nvSpPr>
+          <p:cNvPr id="17" name="Text 15"/>
+          <p:cNvSpPr txBox="1"/>
+          <p:nvPr/>
+        </p:nvSpPr>
+        <p:spPr>
+          <a:xfrm>
+            <a:off x="8531352" y="1408176"/>
+            <a:ext cx="1371600" cy="603504"/>
+          </a:xfrm>
+          <a:prstGeom prst="rect">
+            <a:avLst/>
+          </a:prstGeom>
+          <a:noFill/>
+          <a:ln/>
+        </p:spPr>
+        <p:txBody>
+          <a:bodyPr wrap="square" lIns="0" tIns="0" rIns="0" bIns="0" rtlCol="0" anchor="ctr"/>
+          <a:lstStyle/>
+          <a:p>
+            <a:pPr algn="ctr" indent="0" marL="0">
+              <a:buNone/>
+            </a:pPr>
+            <a:r>
+              <a:rPr lang="en-US" sz="1000" b="1" dirty="0">
+                <a:solidFill>
+                  <a:srgbClr val="16161A"/>
+                </a:solidFill>
+                <a:latin typeface="Yu Gothic" pitchFamily="34" charset="0"/>
+                <a:ea typeface="Yu Gothic" pitchFamily="34" charset="-122"/>
+                <a:cs typeface="Yu Gothic" pitchFamily="34" charset="-120"/>
+              </a:rPr>
+              <a:t>4期</a:t>
+            </a:r>
+            <a:endParaRPr lang="en-US" sz="1000" dirty="0"/>
+          </a:p>
+        </p:txBody>
+      </p:sp>
+      <p:sp>
+        <p:nvSpPr>
+          <p:cNvPr id="18" name="Shape 16"/>
+          <p:cNvSpPr/>
+          <p:nvPr/>
+        </p:nvSpPr>
+        <p:spPr>
+          <a:xfrm>
+            <a:off x="9921240" y="1408176"/>
+            <a:ext cx="1664208" cy="603504"/>
+          </a:xfrm>
+          <a:prstGeom prst="chevron">
+            <a:avLst/>
+          </a:prstGeom>
+          <a:solidFill>
+            <a:srgbClr val="B3121B"/>
+          </a:solidFill>
+          <a:ln/>
+        </p:spPr>
+      </p:sp>
+      <p:sp>
+        <p:nvSpPr>
+          <p:cNvPr id="19" name="Text 17"/>
+          <p:cNvSpPr txBox="1"/>
+          <p:nvPr/>
+        </p:nvSpPr>
+        <p:spPr>
+          <a:xfrm>
+            <a:off x="10085832" y="1408176"/>
+            <a:ext cx="1371600" cy="603504"/>
+          </a:xfrm>
+          <a:prstGeom prst="rect">
+            <a:avLst/>
+          </a:prstGeom>
+          <a:noFill/>
+          <a:ln/>
+        </p:spPr>
+        <p:txBody>
+          <a:bodyPr wrap="square" lIns="0" tIns="0" rIns="0" bIns="0" rtlCol="0" anchor="ctr"/>
+          <a:lstStyle/>
+          <a:p>
+            <a:pPr algn="ctr" indent="0" marL="0">
+              <a:buNone/>
+            </a:pPr>
+            <a:r>
+              <a:rPr lang="en-US" sz="1000" b="1" dirty="0">
+                <a:solidFill>
+                  <a:srgbClr val="FFFFFF"/>
+                </a:solidFill>
+                <a:latin typeface="Yu Gothic" pitchFamily="34" charset="0"/>
+                <a:ea typeface="Yu Gothic" pitchFamily="34" charset="-122"/>
+                <a:cs typeface="Yu Gothic" pitchFamily="34" charset="-120"/>
+              </a:rPr>
+              <a:t>5期</a:t>
+            </a:r>
+            <a:endParaRPr lang="en-US" sz="1000" dirty="0"/>
+          </a:p>
+        </p:txBody>
+      </p:sp>
+      <p:sp>
+        <p:nvSpPr>
+          <p:cNvPr id="20" name="Text 18"/>
+          <p:cNvSpPr txBox="1"/>
+          <p:nvPr/>
+        </p:nvSpPr>
+        <p:spPr>
+          <a:xfrm>
+            <a:off x="594360" y="2066544"/>
+            <a:ext cx="11000232" cy="237744"/>
+          </a:xfrm>
+          <a:prstGeom prst="rect">
+            <a:avLst/>
+          </a:prstGeom>
+          <a:noFill/>
+          <a:ln/>
+        </p:spPr>
+        <p:txBody>
+          <a:bodyPr wrap="square" lIns="0" tIns="0" rIns="0" bIns="0" rtlCol="0" anchor="ctr"/>
+          <a:lstStyle/>
+          <a:p>
+            <a:pPr indent="0" marL="0">
+              <a:buNone/>
+            </a:pPr>
+            <a:r>
+              <a:rPr lang="en-US" sz="900" dirty="0">
+                <a:solidFill>
+                  <a:srgbClr val="6E6E76"/>
+                </a:solidFill>
+                <a:latin typeface="Yu Gothic" pitchFamily="34" charset="0"/>
+                <a:ea typeface="Yu Gothic" pitchFamily="34" charset="-122"/>
+                <a:cs typeface="Yu Gothic" pitchFamily="34" charset="-120"/>
+              </a:rPr>
+              <a:t>◆ 各フェーズの間にゲートがあります</a:t>
+            </a:r>
+            <a:endParaRPr lang="en-US" sz="900" dirty="0"/>
           </a:p>
         </p:txBody>
       </p:sp>
@@ -13143,7 +12873,7 @@
           </p:nvPr>
         </p:nvGraphicFramePr>
         <p:xfrm>
-          <a:off x="594360" y="1463040"/>
+          <a:off x="594360" y="2395728"/>
           <a:ext cx="11000232" cy="914400"/>
         </p:xfrm>
         <a:graphic>
@@ -13155,7 +12885,7 @@
                 <a:gridCol w="4937760"/>
                 <a:gridCol w="4599432"/>
               </a:tblGrid>
-              <a:tr h="475488">
+              <a:tr h="457200">
                 <a:tc>
                   <a:txBody>
                     <a:bodyPr/>
@@ -13313,7 +13043,7 @@
                           <a:ea typeface="Yu Gothic" pitchFamily="34" charset="-122"/>
                           <a:cs typeface="Yu Gothic" pitchFamily="34" charset="-120"/>
                         </a:rPr>
-                        <a:t>次へ進むゲート条件</a:t>
+                        <a:t>◆ 次へ進むゲート条件</a:t>
                       </a:r>
                       <a:endParaRPr lang="en-US" sz="950" dirty="0">
                         <a:latin typeface="Yu Gothic" charset="0"/>
@@ -13367,7 +13097,7 @@
                   </a:tcPr>
                 </a:tc>
               </a:tr>
-              <a:tr h="475488">
+              <a:tr h="457200">
                 <a:tc>
                   <a:txBody>
                     <a:bodyPr/>
@@ -13570,7 +13300,7 @@
                   </a:tcPr>
                 </a:tc>
               </a:tr>
-              <a:tr h="475488">
+              <a:tr h="457200">
                 <a:tc>
                   <a:txBody>
                     <a:bodyPr/>
@@ -13773,7 +13503,7 @@
                   </a:tcPr>
                 </a:tc>
               </a:tr>
-              <a:tr h="475488">
+              <a:tr h="457200">
                 <a:tc>
                   <a:txBody>
                     <a:bodyPr/>
@@ -13976,7 +13706,7 @@
                   </a:tcPr>
                 </a:tc>
               </a:tr>
-              <a:tr h="475488">
+              <a:tr h="457200">
                 <a:tc>
                   <a:txBody>
                     <a:bodyPr/>
@@ -14179,7 +13909,7 @@
                   </a:tcPr>
                 </a:tc>
               </a:tr>
-              <a:tr h="475488">
+              <a:tr h="457200">
                 <a:tc>
                   <a:txBody>
                     <a:bodyPr/>
@@ -14382,7 +14112,7 @@
                   </a:tcPr>
                 </a:tc>
               </a:tr>
-              <a:tr h="475488">
+              <a:tr h="457200">
                 <a:tc>
                   <a:txBody>
                     <a:bodyPr/>
@@ -14585,7 +14315,7 @@
                   </a:tcPr>
                 </a:tc>
               </a:tr>
-              <a:tr h="475488">
+              <a:tr h="457200">
                 <a:tc>
                   <a:txBody>
                     <a:bodyPr/>
@@ -14597,7 +14327,7 @@
                       <a:r>
                         <a:rPr lang="en-US" sz="1050" b="1" dirty="0">
                           <a:solidFill>
-                            <a:srgbClr val="C9962C"/>
+                            <a:srgbClr val="B3121B"/>
                           </a:solidFill>
                           <a:latin typeface="Yu Gothic" pitchFamily="34" charset="0"/>
                           <a:ea typeface="Yu Gothic" pitchFamily="34" charset="-122"/>
@@ -14794,54 +14524,14 @@
       </p:graphicFrame>
       <p:sp>
         <p:nvSpPr>
-          <p:cNvPr id="7" name="Shape 4"/>
-          <p:cNvSpPr/>
-          <p:nvPr/>
-        </p:nvSpPr>
-        <p:spPr>
-          <a:xfrm>
-            <a:off x="594360" y="5230368"/>
-            <a:ext cx="11000232" cy="859536"/>
-          </a:xfrm>
-          <a:prstGeom prst="rect">
-            <a:avLst/>
-          </a:prstGeom>
-          <a:solidFill>
-            <a:srgbClr val="F4F2EF"/>
-          </a:solidFill>
-          <a:ln/>
-        </p:spPr>
-      </p:sp>
-      <p:sp>
-        <p:nvSpPr>
-          <p:cNvPr id="8" name="Shape 5"/>
-          <p:cNvSpPr/>
-          <p:nvPr/>
-        </p:nvSpPr>
-        <p:spPr>
-          <a:xfrm>
-            <a:off x="813816" y="5486400"/>
-            <a:ext cx="109728" cy="109728"/>
-          </a:xfrm>
-          <a:prstGeom prst="rect">
-            <a:avLst/>
-          </a:prstGeom>
-          <a:solidFill>
-            <a:srgbClr val="B3121B"/>
-          </a:solidFill>
-          <a:ln/>
-        </p:spPr>
-      </p:sp>
-      <p:sp>
-        <p:nvSpPr>
-          <p:cNvPr id="9" name="Text 6"/>
+          <p:cNvPr id="22" name="Text 19"/>
           <p:cNvSpPr txBox="1"/>
           <p:nvPr/>
         </p:nvSpPr>
         <p:spPr>
           <a:xfrm>
-            <a:off x="1033272" y="5394960"/>
-            <a:ext cx="10341864" cy="292608"/>
+            <a:off x="594360" y="6336792"/>
+            <a:ext cx="9902952" cy="310896"/>
           </a:xfrm>
           <a:prstGeom prst="rect">
             <a:avLst/>
@@ -14857,65 +14547,23 @@
               <a:buNone/>
             </a:pPr>
             <a:r>
-              <a:rPr lang="en-US" sz="1250" b="1" dirty="0">
-                <a:solidFill>
-                  <a:srgbClr val="16161A"/>
-                </a:solidFill>
-                <a:latin typeface="Yu Gothic" pitchFamily="34" charset="0"/>
-                <a:ea typeface="Yu Gothic" pitchFamily="34" charset="-122"/>
-                <a:cs typeface="Yu Gothic" pitchFamily="34" charset="-120"/>
-              </a:rPr>
-              <a:t>ゲート条件を満たさない場合は次フェーズに進まず、前提を引き直します</a:t>
-            </a:r>
-            <a:endParaRPr lang="en-US" sz="1250" dirty="0"/>
-          </a:p>
-        </p:txBody>
-      </p:sp>
-      <p:sp>
-        <p:nvSpPr>
-          <p:cNvPr id="10" name="Text 7"/>
-          <p:cNvSpPr txBox="1"/>
-          <p:nvPr/>
-        </p:nvSpPr>
-        <p:spPr>
-          <a:xfrm>
-            <a:off x="1033272" y="5742432"/>
-            <a:ext cx="10341864" cy="164592"/>
-          </a:xfrm>
-          <a:prstGeom prst="rect">
-            <a:avLst/>
-          </a:prstGeom>
-          <a:noFill/>
-          <a:ln/>
-        </p:spPr>
-        <p:txBody>
-          <a:bodyPr wrap="square" lIns="0" tIns="0" rIns="0" bIns="0" rtlCol="0" anchor="t"/>
-          <a:lstStyle/>
-          <a:p>
-            <a:pPr indent="0" marL="0">
-              <a:lnSpc>
-                <a:spcPct val="126000"/>
-              </a:lnSpc>
-              <a:buNone/>
-            </a:pPr>
-            <a:r>
-              <a:rPr lang="en-US" sz="1050" dirty="0">
-                <a:solidFill>
-                  <a:srgbClr val="3A3A42"/>
-                </a:solidFill>
-                <a:latin typeface="Yu Gothic" pitchFamily="34" charset="0"/>
-                <a:ea typeface="Yu Gothic" pitchFamily="34" charset="-122"/>
-                <a:cs typeface="Yu Gothic" pitchFamily="34" charset="-120"/>
-              </a:rPr>
-              <a:t>とくに「課金率の初回実測」（2027/4-9）は、以降のすべての売上計画が乗る数字です。</a:t>
-            </a:r>
-            <a:endParaRPr lang="en-US" sz="1050" dirty="0"/>
-          </a:p>
-        </p:txBody>
-      </p:sp>
-      <p:sp>
-        <p:nvSpPr>
-          <p:cNvPr id="11" name="Text 8"/>
+              <a:rPr lang="en-US" sz="850" dirty="0">
+                <a:solidFill>
+                  <a:srgbClr val="6E6E76"/>
+                </a:solidFill>
+                <a:latin typeface="Yu Gothic" pitchFamily="34" charset="0"/>
+                <a:ea typeface="Yu Gothic" pitchFamily="34" charset="-122"/>
+                <a:cs typeface="Yu Gothic" pitchFamily="34" charset="-120"/>
+              </a:rPr>
+              <a:t>ゲート条件を満たさない場合は次フェーズに進まず、前提を引き直します。とくに「課金率の初回実測」（2027/4-9）は、以降のすべての売上計画が乗る数字です</a:t>
+            </a:r>
+            <a:endParaRPr lang="en-US" sz="850" dirty="0"/>
+          </a:p>
+        </p:txBody>
+      </p:sp>
+      <p:sp>
+        <p:nvSpPr>
+          <p:cNvPr id="23" name="Text 20"/>
           <p:cNvSpPr txBox="1"/>
           <p:nvPr/>
         </p:nvSpPr>
@@ -16786,9 +16434,619 @@
                 <a:ea typeface="Yu Gothic" pitchFamily="34" charset="-122"/>
                 <a:cs typeface="Yu Gothic" pitchFamily="34" charset="-120"/>
               </a:rPr>
-              <a:t>把握しているリスクを、影響度の高い順に開示します</a:t>
+              <a:t>影響度と発生確率で並べています。右上の2つが、この事業の生死を分けます</a:t>
             </a:r>
             <a:endParaRPr lang="en-US" sz="1200" dirty="0"/>
+          </a:p>
+        </p:txBody>
+      </p:sp>
+      <p:sp>
+        <p:nvSpPr>
+          <p:cNvPr id="6" name="Text 4"/>
+          <p:cNvSpPr txBox="1"/>
+          <p:nvPr/>
+        </p:nvSpPr>
+        <p:spPr>
+          <a:xfrm>
+            <a:off x="594360" y="1408176"/>
+            <a:ext cx="4937760" cy="274320"/>
+          </a:xfrm>
+          <a:prstGeom prst="rect">
+            <a:avLst/>
+          </a:prstGeom>
+          <a:noFill/>
+          <a:ln/>
+        </p:spPr>
+        <p:txBody>
+          <a:bodyPr wrap="square" lIns="0" tIns="0" rIns="0" bIns="0" rtlCol="0" anchor="ctr"/>
+          <a:lstStyle/>
+          <a:p>
+            <a:pPr indent="0" marL="0">
+              <a:buNone/>
+            </a:pPr>
+            <a:r>
+              <a:rPr lang="en-US" sz="1100" b="1" dirty="0">
+                <a:solidFill>
+                  <a:srgbClr val="16161A"/>
+                </a:solidFill>
+                <a:latin typeface="Yu Gothic" pitchFamily="34" charset="0"/>
+                <a:ea typeface="Yu Gothic" pitchFamily="34" charset="-122"/>
+                <a:cs typeface="Yu Gothic" pitchFamily="34" charset="-120"/>
+              </a:rPr>
+              <a:t>リスクマップ（影響度 × 発生確率）</a:t>
+            </a:r>
+            <a:endParaRPr lang="en-US" sz="1100" dirty="0"/>
+          </a:p>
+        </p:txBody>
+      </p:sp>
+      <p:sp>
+        <p:nvSpPr>
+          <p:cNvPr id="7" name="Shape 5"/>
+          <p:cNvSpPr/>
+          <p:nvPr/>
+        </p:nvSpPr>
+        <p:spPr>
+          <a:xfrm>
+            <a:off x="1325880" y="1810512"/>
+            <a:ext cx="2057400" cy="1600200"/>
+          </a:xfrm>
+          <a:prstGeom prst="rect">
+            <a:avLst/>
+          </a:prstGeom>
+          <a:solidFill>
+            <a:srgbClr val="F4F2EF"/>
+          </a:solidFill>
+          <a:ln w="19050">
+            <a:solidFill>
+              <a:srgbClr val="FFFFFF"/>
+            </a:solidFill>
+            <a:prstDash val="solid"/>
+          </a:ln>
+        </p:spPr>
+      </p:sp>
+      <p:sp>
+        <p:nvSpPr>
+          <p:cNvPr id="8" name="Shape 6"/>
+          <p:cNvSpPr/>
+          <p:nvPr/>
+        </p:nvSpPr>
+        <p:spPr>
+          <a:xfrm>
+            <a:off x="3383280" y="1810512"/>
+            <a:ext cx="2057400" cy="1600200"/>
+          </a:xfrm>
+          <a:prstGeom prst="rect">
+            <a:avLst/>
+          </a:prstGeom>
+          <a:solidFill>
+            <a:srgbClr val="F8E6E6"/>
+          </a:solidFill>
+          <a:ln w="19050">
+            <a:solidFill>
+              <a:srgbClr val="FFFFFF"/>
+            </a:solidFill>
+            <a:prstDash val="solid"/>
+          </a:ln>
+        </p:spPr>
+      </p:sp>
+      <p:sp>
+        <p:nvSpPr>
+          <p:cNvPr id="9" name="Shape 7"/>
+          <p:cNvSpPr/>
+          <p:nvPr/>
+        </p:nvSpPr>
+        <p:spPr>
+          <a:xfrm>
+            <a:off x="1325880" y="3410712"/>
+            <a:ext cx="2057400" cy="1600200"/>
+          </a:xfrm>
+          <a:prstGeom prst="rect">
+            <a:avLst/>
+          </a:prstGeom>
+          <a:solidFill>
+            <a:srgbClr val="F4F2EF"/>
+          </a:solidFill>
+          <a:ln w="19050">
+            <a:solidFill>
+              <a:srgbClr val="FFFFFF"/>
+            </a:solidFill>
+            <a:prstDash val="solid"/>
+          </a:ln>
+        </p:spPr>
+      </p:sp>
+      <p:sp>
+        <p:nvSpPr>
+          <p:cNvPr id="10" name="Shape 8"/>
+          <p:cNvSpPr/>
+          <p:nvPr/>
+        </p:nvSpPr>
+        <p:spPr>
+          <a:xfrm>
+            <a:off x="3383280" y="3410712"/>
+            <a:ext cx="2057400" cy="1600200"/>
+          </a:xfrm>
+          <a:prstGeom prst="rect">
+            <a:avLst/>
+          </a:prstGeom>
+          <a:solidFill>
+            <a:srgbClr val="F4F2EF"/>
+          </a:solidFill>
+          <a:ln w="19050">
+            <a:solidFill>
+              <a:srgbClr val="FFFFFF"/>
+            </a:solidFill>
+            <a:prstDash val="solid"/>
+          </a:ln>
+        </p:spPr>
+      </p:sp>
+      <p:sp>
+        <p:nvSpPr>
+          <p:cNvPr id="11" name="Text 9"/>
+          <p:cNvSpPr txBox="1"/>
+          <p:nvPr/>
+        </p:nvSpPr>
+        <p:spPr>
+          <a:xfrm>
+            <a:off x="4590288" y="1865376"/>
+            <a:ext cx="777240" cy="237744"/>
+          </a:xfrm>
+          <a:prstGeom prst="rect">
+            <a:avLst/>
+          </a:prstGeom>
+          <a:noFill/>
+          <a:ln/>
+        </p:spPr>
+        <p:txBody>
+          <a:bodyPr wrap="square" lIns="0" tIns="0" rIns="0" bIns="0" rtlCol="0" anchor="ctr"/>
+          <a:lstStyle/>
+          <a:p>
+            <a:pPr algn="r" indent="0" marL="0">
+              <a:buNone/>
+            </a:pPr>
+            <a:r>
+              <a:rPr lang="en-US" sz="900" b="1" dirty="0">
+                <a:solidFill>
+                  <a:srgbClr val="B3121B"/>
+                </a:solidFill>
+                <a:latin typeface="Yu Gothic" pitchFamily="34" charset="0"/>
+                <a:ea typeface="Yu Gothic" pitchFamily="34" charset="-122"/>
+                <a:cs typeface="Yu Gothic" pitchFamily="34" charset="-120"/>
+              </a:rPr>
+              <a:t>最優先</a:t>
+            </a:r>
+            <a:endParaRPr lang="en-US" sz="900" dirty="0"/>
+          </a:p>
+        </p:txBody>
+      </p:sp>
+      <p:sp>
+        <p:nvSpPr>
+          <p:cNvPr id="12" name="Text 10"/>
+          <p:cNvSpPr txBox="1"/>
+          <p:nvPr/>
+        </p:nvSpPr>
+        <p:spPr>
+          <a:xfrm>
+            <a:off x="594360" y="1847088"/>
+            <a:ext cx="694944" cy="274320"/>
+          </a:xfrm>
+          <a:prstGeom prst="rect">
+            <a:avLst/>
+          </a:prstGeom>
+          <a:noFill/>
+          <a:ln/>
+        </p:spPr>
+        <p:txBody>
+          <a:bodyPr wrap="square" lIns="0" tIns="0" rIns="0" bIns="0" rtlCol="0" anchor="ctr"/>
+          <a:lstStyle/>
+          <a:p>
+            <a:pPr indent="0" marL="0">
+              <a:buNone/>
+            </a:pPr>
+            <a:r>
+              <a:rPr lang="en-US" sz="850" dirty="0">
+                <a:solidFill>
+                  <a:srgbClr val="6E6E76"/>
+                </a:solidFill>
+                <a:latin typeface="Yu Gothic" pitchFamily="34" charset="0"/>
+                <a:ea typeface="Yu Gothic" pitchFamily="34" charset="-122"/>
+                <a:cs typeface="Yu Gothic" pitchFamily="34" charset="-120"/>
+              </a:rPr>
+              <a:t>↑ 影響度</a:t>
+            </a:r>
+            <a:endParaRPr lang="en-US" sz="850" dirty="0"/>
+          </a:p>
+        </p:txBody>
+      </p:sp>
+      <p:sp>
+        <p:nvSpPr>
+          <p:cNvPr id="13" name="Text 11"/>
+          <p:cNvSpPr txBox="1"/>
+          <p:nvPr/>
+        </p:nvSpPr>
+        <p:spPr>
+          <a:xfrm>
+            <a:off x="1325880" y="5065776"/>
+            <a:ext cx="1828800" cy="256032"/>
+          </a:xfrm>
+          <a:prstGeom prst="rect">
+            <a:avLst/>
+          </a:prstGeom>
+          <a:noFill/>
+          <a:ln/>
+        </p:spPr>
+        <p:txBody>
+          <a:bodyPr wrap="square" lIns="0" tIns="0" rIns="0" bIns="0" rtlCol="0" anchor="ctr"/>
+          <a:lstStyle/>
+          <a:p>
+            <a:pPr indent="0" marL="0">
+              <a:buNone/>
+            </a:pPr>
+            <a:r>
+              <a:rPr lang="en-US" sz="850" dirty="0">
+                <a:solidFill>
+                  <a:srgbClr val="6E6E76"/>
+                </a:solidFill>
+                <a:latin typeface="Yu Gothic" pitchFamily="34" charset="0"/>
+                <a:ea typeface="Yu Gothic" pitchFamily="34" charset="-122"/>
+                <a:cs typeface="Yu Gothic" pitchFamily="34" charset="-120"/>
+              </a:rPr>
+              <a:t>発生確率 →</a:t>
+            </a:r>
+            <a:endParaRPr lang="en-US" sz="850" dirty="0"/>
+          </a:p>
+        </p:txBody>
+      </p:sp>
+      <p:sp>
+        <p:nvSpPr>
+          <p:cNvPr id="14" name="Shape 12"/>
+          <p:cNvSpPr/>
+          <p:nvPr/>
+        </p:nvSpPr>
+        <p:spPr>
+          <a:xfrm>
+            <a:off x="4434840" y="2103120"/>
+            <a:ext cx="329184" cy="329184"/>
+          </a:xfrm>
+          <a:prstGeom prst="ellipse">
+            <a:avLst/>
+          </a:prstGeom>
+          <a:solidFill>
+            <a:srgbClr val="B3121B"/>
+          </a:solidFill>
+          <a:ln/>
+        </p:spPr>
+      </p:sp>
+      <p:sp>
+        <p:nvSpPr>
+          <p:cNvPr id="15" name="Text 13"/>
+          <p:cNvSpPr txBox="1"/>
+          <p:nvPr/>
+        </p:nvSpPr>
+        <p:spPr>
+          <a:xfrm>
+            <a:off x="4434840" y="2103120"/>
+            <a:ext cx="329184" cy="329184"/>
+          </a:xfrm>
+          <a:prstGeom prst="rect">
+            <a:avLst/>
+          </a:prstGeom>
+          <a:noFill/>
+          <a:ln/>
+        </p:spPr>
+        <p:txBody>
+          <a:bodyPr wrap="square" lIns="0" tIns="0" rIns="0" bIns="0" rtlCol="0" anchor="ctr"/>
+          <a:lstStyle/>
+          <a:p>
+            <a:pPr algn="ctr" indent="0" marL="0">
+              <a:buNone/>
+            </a:pPr>
+            <a:r>
+              <a:rPr lang="en-US" sz="1000" b="1" dirty="0">
+                <a:solidFill>
+                  <a:srgbClr val="FFFFFF"/>
+                </a:solidFill>
+                <a:latin typeface="Yu Gothic" pitchFamily="34" charset="0"/>
+                <a:ea typeface="Yu Gothic" pitchFamily="34" charset="-122"/>
+                <a:cs typeface="Yu Gothic" pitchFamily="34" charset="-120"/>
+              </a:rPr>
+              <a:t>1</a:t>
+            </a:r>
+            <a:endParaRPr lang="en-US" sz="1000" dirty="0"/>
+          </a:p>
+        </p:txBody>
+      </p:sp>
+      <p:sp>
+        <p:nvSpPr>
+          <p:cNvPr id="16" name="Shape 14"/>
+          <p:cNvSpPr/>
+          <p:nvPr/>
+        </p:nvSpPr>
+        <p:spPr>
+          <a:xfrm>
+            <a:off x="4846320" y="2487168"/>
+            <a:ext cx="329184" cy="329184"/>
+          </a:xfrm>
+          <a:prstGeom prst="ellipse">
+            <a:avLst/>
+          </a:prstGeom>
+          <a:solidFill>
+            <a:srgbClr val="B3121B"/>
+          </a:solidFill>
+          <a:ln/>
+        </p:spPr>
+      </p:sp>
+      <p:sp>
+        <p:nvSpPr>
+          <p:cNvPr id="17" name="Text 15"/>
+          <p:cNvSpPr txBox="1"/>
+          <p:nvPr/>
+        </p:nvSpPr>
+        <p:spPr>
+          <a:xfrm>
+            <a:off x="4846320" y="2487168"/>
+            <a:ext cx="329184" cy="329184"/>
+          </a:xfrm>
+          <a:prstGeom prst="rect">
+            <a:avLst/>
+          </a:prstGeom>
+          <a:noFill/>
+          <a:ln/>
+        </p:spPr>
+        <p:txBody>
+          <a:bodyPr wrap="square" lIns="0" tIns="0" rIns="0" bIns="0" rtlCol="0" anchor="ctr"/>
+          <a:lstStyle/>
+          <a:p>
+            <a:pPr algn="ctr" indent="0" marL="0">
+              <a:buNone/>
+            </a:pPr>
+            <a:r>
+              <a:rPr lang="en-US" sz="1000" b="1" dirty="0">
+                <a:solidFill>
+                  <a:srgbClr val="FFFFFF"/>
+                </a:solidFill>
+                <a:latin typeface="Yu Gothic" pitchFamily="34" charset="0"/>
+                <a:ea typeface="Yu Gothic" pitchFamily="34" charset="-122"/>
+                <a:cs typeface="Yu Gothic" pitchFamily="34" charset="-120"/>
+              </a:rPr>
+              <a:t>2</a:t>
+            </a:r>
+            <a:endParaRPr lang="en-US" sz="1000" dirty="0"/>
+          </a:p>
+        </p:txBody>
+      </p:sp>
+      <p:sp>
+        <p:nvSpPr>
+          <p:cNvPr id="18" name="Shape 16"/>
+          <p:cNvSpPr/>
+          <p:nvPr/>
+        </p:nvSpPr>
+        <p:spPr>
+          <a:xfrm>
+            <a:off x="3703320" y="2231136"/>
+            <a:ext cx="329184" cy="329184"/>
+          </a:xfrm>
+          <a:prstGeom prst="ellipse">
+            <a:avLst/>
+          </a:prstGeom>
+          <a:solidFill>
+            <a:srgbClr val="B3121B"/>
+          </a:solidFill>
+          <a:ln/>
+        </p:spPr>
+      </p:sp>
+      <p:sp>
+        <p:nvSpPr>
+          <p:cNvPr id="19" name="Text 17"/>
+          <p:cNvSpPr txBox="1"/>
+          <p:nvPr/>
+        </p:nvSpPr>
+        <p:spPr>
+          <a:xfrm>
+            <a:off x="3703320" y="2231136"/>
+            <a:ext cx="329184" cy="329184"/>
+          </a:xfrm>
+          <a:prstGeom prst="rect">
+            <a:avLst/>
+          </a:prstGeom>
+          <a:noFill/>
+          <a:ln/>
+        </p:spPr>
+        <p:txBody>
+          <a:bodyPr wrap="square" lIns="0" tIns="0" rIns="0" bIns="0" rtlCol="0" anchor="ctr"/>
+          <a:lstStyle/>
+          <a:p>
+            <a:pPr algn="ctr" indent="0" marL="0">
+              <a:buNone/>
+            </a:pPr>
+            <a:r>
+              <a:rPr lang="en-US" sz="1000" b="1" dirty="0">
+                <a:solidFill>
+                  <a:srgbClr val="FFFFFF"/>
+                </a:solidFill>
+                <a:latin typeface="Yu Gothic" pitchFamily="34" charset="0"/>
+                <a:ea typeface="Yu Gothic" pitchFamily="34" charset="-122"/>
+                <a:cs typeface="Yu Gothic" pitchFamily="34" charset="-120"/>
+              </a:rPr>
+              <a:t>3</a:t>
+            </a:r>
+            <a:endParaRPr lang="en-US" sz="1000" dirty="0"/>
+          </a:p>
+        </p:txBody>
+      </p:sp>
+      <p:sp>
+        <p:nvSpPr>
+          <p:cNvPr id="20" name="Shape 18"/>
+          <p:cNvSpPr/>
+          <p:nvPr/>
+        </p:nvSpPr>
+        <p:spPr>
+          <a:xfrm>
+            <a:off x="3584448" y="2816352"/>
+            <a:ext cx="329184" cy="329184"/>
+          </a:xfrm>
+          <a:prstGeom prst="ellipse">
+            <a:avLst/>
+          </a:prstGeom>
+          <a:solidFill>
+            <a:srgbClr val="B3121B"/>
+          </a:solidFill>
+          <a:ln/>
+        </p:spPr>
+      </p:sp>
+      <p:sp>
+        <p:nvSpPr>
+          <p:cNvPr id="21" name="Text 19"/>
+          <p:cNvSpPr txBox="1"/>
+          <p:nvPr/>
+        </p:nvSpPr>
+        <p:spPr>
+          <a:xfrm>
+            <a:off x="3584448" y="2816352"/>
+            <a:ext cx="329184" cy="329184"/>
+          </a:xfrm>
+          <a:prstGeom prst="rect">
+            <a:avLst/>
+          </a:prstGeom>
+          <a:noFill/>
+          <a:ln/>
+        </p:spPr>
+        <p:txBody>
+          <a:bodyPr wrap="square" lIns="0" tIns="0" rIns="0" bIns="0" rtlCol="0" anchor="ctr"/>
+          <a:lstStyle/>
+          <a:p>
+            <a:pPr algn="ctr" indent="0" marL="0">
+              <a:buNone/>
+            </a:pPr>
+            <a:r>
+              <a:rPr lang="en-US" sz="1000" b="1" dirty="0">
+                <a:solidFill>
+                  <a:srgbClr val="FFFFFF"/>
+                </a:solidFill>
+                <a:latin typeface="Yu Gothic" pitchFamily="34" charset="0"/>
+                <a:ea typeface="Yu Gothic" pitchFamily="34" charset="-122"/>
+                <a:cs typeface="Yu Gothic" pitchFamily="34" charset="-120"/>
+              </a:rPr>
+              <a:t>4</a:t>
+            </a:r>
+            <a:endParaRPr lang="en-US" sz="1000" dirty="0"/>
+          </a:p>
+        </p:txBody>
+      </p:sp>
+      <p:sp>
+        <p:nvSpPr>
+          <p:cNvPr id="22" name="Shape 20"/>
+          <p:cNvSpPr/>
+          <p:nvPr/>
+        </p:nvSpPr>
+        <p:spPr>
+          <a:xfrm>
+            <a:off x="4663440" y="3675888"/>
+            <a:ext cx="329184" cy="329184"/>
+          </a:xfrm>
+          <a:prstGeom prst="ellipse">
+            <a:avLst/>
+          </a:prstGeom>
+          <a:solidFill>
+            <a:srgbClr val="6E6E76"/>
+          </a:solidFill>
+          <a:ln/>
+        </p:spPr>
+      </p:sp>
+      <p:sp>
+        <p:nvSpPr>
+          <p:cNvPr id="23" name="Text 21"/>
+          <p:cNvSpPr txBox="1"/>
+          <p:nvPr/>
+        </p:nvSpPr>
+        <p:spPr>
+          <a:xfrm>
+            <a:off x="4663440" y="3675888"/>
+            <a:ext cx="329184" cy="329184"/>
+          </a:xfrm>
+          <a:prstGeom prst="rect">
+            <a:avLst/>
+          </a:prstGeom>
+          <a:noFill/>
+          <a:ln/>
+        </p:spPr>
+        <p:txBody>
+          <a:bodyPr wrap="square" lIns="0" tIns="0" rIns="0" bIns="0" rtlCol="0" anchor="ctr"/>
+          <a:lstStyle/>
+          <a:p>
+            <a:pPr algn="ctr" indent="0" marL="0">
+              <a:buNone/>
+            </a:pPr>
+            <a:r>
+              <a:rPr lang="en-US" sz="1000" b="1" dirty="0">
+                <a:solidFill>
+                  <a:srgbClr val="FFFFFF"/>
+                </a:solidFill>
+                <a:latin typeface="Yu Gothic" pitchFamily="34" charset="0"/>
+                <a:ea typeface="Yu Gothic" pitchFamily="34" charset="-122"/>
+                <a:cs typeface="Yu Gothic" pitchFamily="34" charset="-120"/>
+              </a:rPr>
+              <a:t>5</a:t>
+            </a:r>
+            <a:endParaRPr lang="en-US" sz="1000" dirty="0"/>
+          </a:p>
+        </p:txBody>
+      </p:sp>
+      <p:sp>
+        <p:nvSpPr>
+          <p:cNvPr id="24" name="Shape 22"/>
+          <p:cNvSpPr/>
+          <p:nvPr/>
+        </p:nvSpPr>
+        <p:spPr>
+          <a:xfrm>
+            <a:off x="2761488" y="3877056"/>
+            <a:ext cx="329184" cy="329184"/>
+          </a:xfrm>
+          <a:prstGeom prst="ellipse">
+            <a:avLst/>
+          </a:prstGeom>
+          <a:solidFill>
+            <a:srgbClr val="6E6E76"/>
+          </a:solidFill>
+          <a:ln/>
+        </p:spPr>
+      </p:sp>
+      <p:sp>
+        <p:nvSpPr>
+          <p:cNvPr id="25" name="Text 23"/>
+          <p:cNvSpPr txBox="1"/>
+          <p:nvPr/>
+        </p:nvSpPr>
+        <p:spPr>
+          <a:xfrm>
+            <a:off x="2761488" y="3877056"/>
+            <a:ext cx="329184" cy="329184"/>
+          </a:xfrm>
+          <a:prstGeom prst="rect">
+            <a:avLst/>
+          </a:prstGeom>
+          <a:noFill/>
+          <a:ln/>
+        </p:spPr>
+        <p:txBody>
+          <a:bodyPr wrap="square" lIns="0" tIns="0" rIns="0" bIns="0" rtlCol="0" anchor="ctr"/>
+          <a:lstStyle/>
+          <a:p>
+            <a:pPr algn="ctr" indent="0" marL="0">
+              <a:buNone/>
+            </a:pPr>
+            <a:r>
+              <a:rPr lang="en-US" sz="1000" b="1" dirty="0">
+                <a:solidFill>
+                  <a:srgbClr val="FFFFFF"/>
+                </a:solidFill>
+                <a:latin typeface="Yu Gothic" pitchFamily="34" charset="0"/>
+                <a:ea typeface="Yu Gothic" pitchFamily="34" charset="-122"/>
+                <a:cs typeface="Yu Gothic" pitchFamily="34" charset="-120"/>
+              </a:rPr>
+              <a:t>6</a:t>
+            </a:r>
+            <a:endParaRPr lang="en-US" sz="1000" dirty="0"/>
           </a:p>
         </p:txBody>
       </p:sp>
@@ -16807,20 +17065,90 @@
           </p:nvPr>
         </p:nvGraphicFramePr>
         <p:xfrm>
-          <a:off x="594360" y="1463040"/>
-          <a:ext cx="11000232" cy="914400"/>
+          <a:off x="6035040" y="1737360"/>
+          <a:ext cx="5559552" cy="914400"/>
         </p:xfrm>
         <a:graphic>
           <a:graphicData uri="http://schemas.openxmlformats.org/drawingml/2006/table">
             <a:tbl>
               <a:tblPr/>
               <a:tblGrid>
-                <a:gridCol w="502920"/>
-                <a:gridCol w="2560320"/>
-                <a:gridCol w="3291840"/>
-                <a:gridCol w="4645152"/>
+                <a:gridCol w="347472"/>
+                <a:gridCol w="402336"/>
+                <a:gridCol w="1965960"/>
+                <a:gridCol w="2843784"/>
               </a:tblGrid>
-              <a:tr h="658368">
+              <a:tr h="603504">
+                <a:tc>
+                  <a:txBody>
+                    <a:bodyPr/>
+                    <a:lstStyle/>
+                    <a:p>
+                      <a:pPr indent="0" marL="0">
+                        <a:buNone/>
+                      </a:pPr>
+                      <a:r>
+                        <a:rPr lang="en-US" sz="950" b="1" dirty="0">
+                          <a:solidFill>
+                            <a:srgbClr val="FFFFFF"/>
+                          </a:solidFill>
+                          <a:latin typeface="Yu Gothic" pitchFamily="34" charset="0"/>
+                          <a:ea typeface="Yu Gothic" pitchFamily="34" charset="-122"/>
+                          <a:cs typeface="Yu Gothic" pitchFamily="34" charset="-120"/>
+                        </a:rPr>
+                        <a:t>#</a:t>
+                      </a:r>
+                      <a:endParaRPr lang="en-US" sz="950" dirty="0">
+                        <a:latin typeface="Yu Gothic" charset="0"/>
+                        <a:ea typeface="Yu Gothic"/>
+                        <a:cs typeface="Yu Gothic"/>
+                        <a:ea typeface="Yu Gothic" charset="0"/>
+                        <a:cs typeface="Yu Gothic" charset="0"/>
+                      </a:endParaRPr>
+                    </a:p>
+                  </a:txBody>
+                  <a:tcPr marL="88900" marR="88900" marT="50800" marB="50800" anchor="ctr">
+                    <a:lnL w="7620" cap="flat" cmpd="sng" algn="ctr">
+                      <a:solidFill>
+                        <a:srgbClr val="DCD9D4"/>
+                      </a:solidFill>
+                      <a:prstDash val="solid"/>
+                      <a:round/>
+                      <a:headEnd type="none" w="med" len="med"/>
+                      <a:tailEnd type="none" w="med" len="med"/>
+                    </a:lnL>
+                    <a:lnR w="7620" cap="flat" cmpd="sng" algn="ctr">
+                      <a:solidFill>
+                        <a:srgbClr val="DCD9D4"/>
+                      </a:solidFill>
+                      <a:prstDash val="solid"/>
+                      <a:round/>
+                      <a:headEnd type="none" w="med" len="med"/>
+                      <a:tailEnd type="none" w="med" len="med"/>
+                    </a:lnR>
+                    <a:lnT w="7620" cap="flat" cmpd="sng" algn="ctr">
+                      <a:solidFill>
+                        <a:srgbClr val="DCD9D4"/>
+                      </a:solidFill>
+                      <a:prstDash val="solid"/>
+                      <a:round/>
+                      <a:headEnd type="none" w="med" len="med"/>
+                      <a:tailEnd type="none" w="med" len="med"/>
+                    </a:lnT>
+                    <a:lnB w="7620" cap="flat" cmpd="sng" algn="ctr">
+                      <a:solidFill>
+                        <a:srgbClr val="DCD9D4"/>
+                      </a:solidFill>
+                      <a:prstDash val="solid"/>
+                      <a:round/>
+                      <a:headEnd type="none" w="med" len="med"/>
+                      <a:tailEnd type="none" w="med" len="med"/>
+                    </a:lnB>
+                    <a:solidFill>
+                      <a:srgbClr val="D9601A"/>
+                    </a:solidFill>
+                  </a:tcPr>
+                </a:tc>
                 <a:tc>
                   <a:txBody>
                     <a:bodyPr/>
@@ -16967,76 +17295,6 @@
                           <a:ea typeface="Yu Gothic" pitchFamily="34" charset="-122"/>
                           <a:cs typeface="Yu Gothic" pitchFamily="34" charset="-120"/>
                         </a:rPr>
-                        <a:t>中身</a:t>
-                      </a:r>
-                      <a:endParaRPr lang="en-US" sz="950" dirty="0">
-                        <a:latin typeface="Yu Gothic" charset="0"/>
-                        <a:ea typeface="Yu Gothic"/>
-                        <a:cs typeface="Yu Gothic"/>
-                        <a:ea typeface="Yu Gothic" charset="0"/>
-                        <a:cs typeface="Yu Gothic" charset="0"/>
-                      </a:endParaRPr>
-                    </a:p>
-                  </a:txBody>
-                  <a:tcPr marL="88900" marR="88900" marT="50800" marB="50800" anchor="ctr">
-                    <a:lnL w="7620" cap="flat" cmpd="sng" algn="ctr">
-                      <a:solidFill>
-                        <a:srgbClr val="DCD9D4"/>
-                      </a:solidFill>
-                      <a:prstDash val="solid"/>
-                      <a:round/>
-                      <a:headEnd type="none" w="med" len="med"/>
-                      <a:tailEnd type="none" w="med" len="med"/>
-                    </a:lnL>
-                    <a:lnR w="7620" cap="flat" cmpd="sng" algn="ctr">
-                      <a:solidFill>
-                        <a:srgbClr val="DCD9D4"/>
-                      </a:solidFill>
-                      <a:prstDash val="solid"/>
-                      <a:round/>
-                      <a:headEnd type="none" w="med" len="med"/>
-                      <a:tailEnd type="none" w="med" len="med"/>
-                    </a:lnR>
-                    <a:lnT w="7620" cap="flat" cmpd="sng" algn="ctr">
-                      <a:solidFill>
-                        <a:srgbClr val="DCD9D4"/>
-                      </a:solidFill>
-                      <a:prstDash val="solid"/>
-                      <a:round/>
-                      <a:headEnd type="none" w="med" len="med"/>
-                      <a:tailEnd type="none" w="med" len="med"/>
-                    </a:lnT>
-                    <a:lnB w="7620" cap="flat" cmpd="sng" algn="ctr">
-                      <a:solidFill>
-                        <a:srgbClr val="DCD9D4"/>
-                      </a:solidFill>
-                      <a:prstDash val="solid"/>
-                      <a:round/>
-                      <a:headEnd type="none" w="med" len="med"/>
-                      <a:tailEnd type="none" w="med" len="med"/>
-                    </a:lnB>
-                    <a:solidFill>
-                      <a:srgbClr val="D9601A"/>
-                    </a:solidFill>
-                  </a:tcPr>
-                </a:tc>
-                <a:tc>
-                  <a:txBody>
-                    <a:bodyPr/>
-                    <a:lstStyle/>
-                    <a:p>
-                      <a:pPr indent="0" marL="0">
-                        <a:buNone/>
-                      </a:pPr>
-                      <a:r>
-                        <a:rPr lang="en-US" sz="950" b="1" dirty="0">
-                          <a:solidFill>
-                            <a:srgbClr val="FFFFFF"/>
-                          </a:solidFill>
-                          <a:latin typeface="Yu Gothic" pitchFamily="34" charset="0"/>
-                          <a:ea typeface="Yu Gothic" pitchFamily="34" charset="-122"/>
-                          <a:cs typeface="Yu Gothic" pitchFamily="34" charset="-120"/>
-                        </a:rPr>
                         <a:t>対策</a:t>
                       </a:r>
                       <a:endParaRPr lang="en-US" sz="950" dirty="0">
@@ -17091,7 +17349,7 @@
                   </a:tcPr>
                 </a:tc>
               </a:tr>
-              <a:tr h="658368">
+              <a:tr h="603504">
                 <a:tc>
                   <a:txBody>
                     <a:bodyPr/>
@@ -17101,7 +17359,74 @@
                         <a:buNone/>
                       </a:pPr>
                       <a:r>
-                        <a:rPr lang="en-US" sz="950" b="1" dirty="0">
+                        <a:rPr lang="en-US" sz="900" b="1" dirty="0">
+                          <a:solidFill>
+                            <a:srgbClr val="B3121B"/>
+                          </a:solidFill>
+                          <a:latin typeface="Yu Gothic" pitchFamily="34" charset="0"/>
+                          <a:ea typeface="Yu Gothic" pitchFamily="34" charset="-122"/>
+                          <a:cs typeface="Yu Gothic" pitchFamily="34" charset="-120"/>
+                        </a:rPr>
+                        <a:t>1</a:t>
+                      </a:r>
+                      <a:endParaRPr lang="en-US" sz="900" dirty="0">
+                        <a:latin typeface="Yu Gothic" charset="0"/>
+                        <a:ea typeface="Yu Gothic"/>
+                        <a:cs typeface="Yu Gothic"/>
+                        <a:ea typeface="Yu Gothic" charset="0"/>
+                        <a:cs typeface="Yu Gothic" charset="0"/>
+                      </a:endParaRPr>
+                    </a:p>
+                  </a:txBody>
+                  <a:tcPr marL="88900" marR="88900" marT="50800" marB="50800" anchor="ctr">
+                    <a:lnL w="7620" cap="flat" cmpd="sng" algn="ctr">
+                      <a:solidFill>
+                        <a:srgbClr val="DCD9D4"/>
+                      </a:solidFill>
+                      <a:prstDash val="solid"/>
+                      <a:round/>
+                      <a:headEnd type="none" w="med" len="med"/>
+                      <a:tailEnd type="none" w="med" len="med"/>
+                    </a:lnL>
+                    <a:lnR w="7620" cap="flat" cmpd="sng" algn="ctr">
+                      <a:solidFill>
+                        <a:srgbClr val="DCD9D4"/>
+                      </a:solidFill>
+                      <a:prstDash val="solid"/>
+                      <a:round/>
+                      <a:headEnd type="none" w="med" len="med"/>
+                      <a:tailEnd type="none" w="med" len="med"/>
+                    </a:lnR>
+                    <a:lnT w="7620" cap="flat" cmpd="sng" algn="ctr">
+                      <a:solidFill>
+                        <a:srgbClr val="DCD9D4"/>
+                      </a:solidFill>
+                      <a:prstDash val="solid"/>
+                      <a:round/>
+                      <a:headEnd type="none" w="med" len="med"/>
+                      <a:tailEnd type="none" w="med" len="med"/>
+                    </a:lnT>
+                    <a:lnB w="7620" cap="flat" cmpd="sng" algn="ctr">
+                      <a:solidFill>
+                        <a:srgbClr val="DCD9D4"/>
+                      </a:solidFill>
+                      <a:prstDash val="solid"/>
+                      <a:round/>
+                      <a:headEnd type="none" w="med" len="med"/>
+                      <a:tailEnd type="none" w="med" len="med"/>
+                    </a:lnB>
+                  </a:tcPr>
+                </a:tc>
+                <a:tc>
+                  <a:txBody>
+                    <a:bodyPr/>
+                    <a:lstStyle/>
+                    <a:p>
+                      <a:pPr algn="ctr" indent="0" marL="0">
+                        <a:buNone/>
+                      </a:pPr>
+                      <a:r>
+                        <a:rPr lang="en-US" sz="900" b="1" dirty="0">
                           <a:solidFill>
                             <a:srgbClr val="FFFFFF"/>
                           </a:solidFill>
@@ -17111,7 +17436,7 @@
                         </a:rPr>
                         <a:t>高</a:t>
                       </a:r>
-                      <a:endParaRPr lang="en-US" sz="950" dirty="0">
+                      <a:endParaRPr lang="en-US" sz="900" dirty="0">
                         <a:latin typeface="Yu Gothic" charset="0"/>
                         <a:ea typeface="Yu Gothic"/>
                         <a:cs typeface="Yu Gothic"/>
@@ -17171,7 +17496,7 @@
                         <a:buNone/>
                       </a:pPr>
                       <a:r>
-                        <a:rPr lang="en-US" sz="950" b="1" dirty="0">
+                        <a:rPr lang="en-US" sz="900" b="1" dirty="0">
                           <a:solidFill>
                             <a:srgbClr val="3A3A42"/>
                           </a:solidFill>
@@ -17181,7 +17506,7 @@
                         </a:rPr>
                         <a:t>視聴者が集まらない</a:t>
                       </a:r>
-                      <a:endParaRPr lang="en-US" sz="950" dirty="0">
+                      <a:endParaRPr lang="en-US" sz="900" dirty="0">
                         <a:latin typeface="Yu Gothic" charset="0"/>
                         <a:ea typeface="Yu Gothic"/>
                         <a:cs typeface="Yu Gothic"/>
@@ -17238,7 +17563,7 @@
                         <a:buNone/>
                       </a:pPr>
                       <a:r>
-                        <a:rPr lang="en-US" sz="950" dirty="0">
+                        <a:rPr lang="en-US" sz="900" dirty="0">
                           <a:solidFill>
                             <a:srgbClr val="3A3A42"/>
                           </a:solidFill>
@@ -17246,9 +17571,9 @@
                           <a:ea typeface="Yu Gothic" pitchFamily="34" charset="-122"/>
                           <a:cs typeface="Yu Gothic" pitchFamily="34" charset="-120"/>
                         </a:rPr>
-                        <a:t>中国発アプリが日本のシェア9割超。CPIが未実測</a:t>
+                        <a:t>PF公開まで流量投放を投下しない。公開後にCPIを実測し、閾値を超えたら企業案件（②）に軸足を戻す</a:t>
                       </a:r>
-                      <a:endParaRPr lang="en-US" sz="950" dirty="0">
+                      <a:endParaRPr lang="en-US" sz="900" dirty="0">
                         <a:latin typeface="Yu Gothic" charset="0"/>
                         <a:ea typeface="Yu Gothic"/>
                         <a:cs typeface="Yu Gothic"/>
@@ -17296,26 +17621,28 @@
                     </a:lnB>
                   </a:tcPr>
                 </a:tc>
+              </a:tr>
+              <a:tr h="603504">
                 <a:tc>
                   <a:txBody>
                     <a:bodyPr/>
                     <a:lstStyle/>
                     <a:p>
-                      <a:pPr indent="0" marL="0">
+                      <a:pPr algn="ctr" indent="0" marL="0">
                         <a:buNone/>
                       </a:pPr>
                       <a:r>
-                        <a:rPr lang="en-US" sz="950" dirty="0">
+                        <a:rPr lang="en-US" sz="900" b="1" dirty="0">
                           <a:solidFill>
-                            <a:srgbClr val="3A3A42"/>
+                            <a:srgbClr val="B3121B"/>
                           </a:solidFill>
                           <a:latin typeface="Yu Gothic" pitchFamily="34" charset="0"/>
                           <a:ea typeface="Yu Gothic" pitchFamily="34" charset="-122"/>
                           <a:cs typeface="Yu Gothic" pitchFamily="34" charset="-120"/>
                         </a:rPr>
-                        <a:t>PF公開まで流量投放を投下しない。公開後にCPIを実測し、閾値を超えたら企業案件（②）に軸足を戻す</a:t>
+                        <a:t>2</a:t>
                       </a:r>
-                      <a:endParaRPr lang="en-US" sz="950" dirty="0">
+                      <a:endParaRPr lang="en-US" sz="900" dirty="0">
                         <a:latin typeface="Yu Gothic" charset="0"/>
                         <a:ea typeface="Yu Gothic"/>
                         <a:cs typeface="Yu Gothic"/>
@@ -17363,8 +17690,6 @@
                     </a:lnB>
                   </a:tcPr>
                 </a:tc>
-              </a:tr>
-              <a:tr h="658368">
                 <a:tc>
                   <a:txBody>
                     <a:bodyPr/>
@@ -17374,7 +17699,7 @@
                         <a:buNone/>
                       </a:pPr>
                       <a:r>
-                        <a:rPr lang="en-US" sz="950" b="1" dirty="0">
+                        <a:rPr lang="en-US" sz="900" b="1" dirty="0">
                           <a:solidFill>
                             <a:srgbClr val="FFFFFF"/>
                           </a:solidFill>
@@ -17384,7 +17709,7 @@
                         </a:rPr>
                         <a:t>高</a:t>
                       </a:r>
-                      <a:endParaRPr lang="en-US" sz="950" dirty="0">
+                      <a:endParaRPr lang="en-US" sz="900" dirty="0">
                         <a:latin typeface="Yu Gothic" charset="0"/>
                         <a:ea typeface="Yu Gothic"/>
                         <a:cs typeface="Yu Gothic"/>
@@ -17444,7 +17769,7 @@
                         <a:buNone/>
                       </a:pPr>
                       <a:r>
-                        <a:rPr lang="en-US" sz="950" b="1" dirty="0">
+                        <a:rPr lang="en-US" sz="900" b="1" dirty="0">
                           <a:solidFill>
                             <a:srgbClr val="3A3A42"/>
                           </a:solidFill>
@@ -17454,7 +17779,7 @@
                         </a:rPr>
                         <a:t>クリエイターが集まらない</a:t>
                       </a:r>
-                      <a:endParaRPr lang="en-US" sz="950" dirty="0">
+                      <a:endParaRPr lang="en-US" sz="900" dirty="0">
                         <a:latin typeface="Yu Gothic" charset="0"/>
                         <a:ea typeface="Yu Gothic"/>
                         <a:cs typeface="Yu Gothic"/>
@@ -17511,7 +17836,7 @@
                         <a:buNone/>
                       </a:pPr>
                       <a:r>
-                        <a:rPr lang="en-US" sz="950" dirty="0">
+                        <a:rPr lang="en-US" sz="900" dirty="0">
                           <a:solidFill>
                             <a:srgbClr val="3A3A42"/>
                           </a:solidFill>
@@ -17519,9 +17844,9 @@
                           <a:ea typeface="Yu Gothic" pitchFamily="34" charset="-122"/>
                           <a:cs typeface="Yu Gothic" pitchFamily="34" charset="-120"/>
                         </a:rPr>
-                        <a:t>快手は最大90%分成＋1億トラフィックを提示</a:t>
+                        <a:t>分成率で戦わない。企業案件・AIを冷遇しない方針・日本市場への窓の3点で選ばれる設計にする</a:t>
                       </a:r>
-                      <a:endParaRPr lang="en-US" sz="950" dirty="0">
+                      <a:endParaRPr lang="en-US" sz="900" dirty="0">
                         <a:latin typeface="Yu Gothic" charset="0"/>
                         <a:ea typeface="Yu Gothic"/>
                         <a:cs typeface="Yu Gothic"/>
@@ -17569,26 +17894,28 @@
                     </a:lnB>
                   </a:tcPr>
                 </a:tc>
+              </a:tr>
+              <a:tr h="603504">
                 <a:tc>
                   <a:txBody>
                     <a:bodyPr/>
                     <a:lstStyle/>
                     <a:p>
-                      <a:pPr indent="0" marL="0">
+                      <a:pPr algn="ctr" indent="0" marL="0">
                         <a:buNone/>
                       </a:pPr>
                       <a:r>
-                        <a:rPr lang="en-US" sz="950" dirty="0">
+                        <a:rPr lang="en-US" sz="900" b="1" dirty="0">
                           <a:solidFill>
-                            <a:srgbClr val="3A3A42"/>
+                            <a:srgbClr val="B3121B"/>
                           </a:solidFill>
                           <a:latin typeface="Yu Gothic" pitchFamily="34" charset="0"/>
                           <a:ea typeface="Yu Gothic" pitchFamily="34" charset="-122"/>
                           <a:cs typeface="Yu Gothic" pitchFamily="34" charset="-120"/>
                         </a:rPr>
-                        <a:t>分成率で戦わない。企業案件・AIを冷遇しない方針・日本市場への窓の3点で選ばれる設計にする</a:t>
+                        <a:t>3</a:t>
                       </a:r>
-                      <a:endParaRPr lang="en-US" sz="950" dirty="0">
+                      <a:endParaRPr lang="en-US" sz="900" dirty="0">
                         <a:latin typeface="Yu Gothic" charset="0"/>
                         <a:ea typeface="Yu Gothic"/>
                         <a:cs typeface="Yu Gothic"/>
@@ -17636,8 +17963,6 @@
                     </a:lnB>
                   </a:tcPr>
                 </a:tc>
-              </a:tr>
-              <a:tr h="658368">
                 <a:tc>
                   <a:txBody>
                     <a:bodyPr/>
@@ -17647,7 +17972,7 @@
                         <a:buNone/>
                       </a:pPr>
                       <a:r>
-                        <a:rPr lang="en-US" sz="950" b="1" dirty="0">
+                        <a:rPr lang="en-US" sz="900" b="1" dirty="0">
                           <a:solidFill>
                             <a:srgbClr val="FFFFFF"/>
                           </a:solidFill>
@@ -17657,7 +17982,7 @@
                         </a:rPr>
                         <a:t>高</a:t>
                       </a:r>
-                      <a:endParaRPr lang="en-US" sz="950" dirty="0">
+                      <a:endParaRPr lang="en-US" sz="900" dirty="0">
                         <a:latin typeface="Yu Gothic" charset="0"/>
                         <a:ea typeface="Yu Gothic"/>
                         <a:cs typeface="Yu Gothic"/>
@@ -17717,7 +18042,7 @@
                         <a:buNone/>
                       </a:pPr>
                       <a:r>
-                        <a:rPr lang="en-US" sz="950" b="1" dirty="0">
+                        <a:rPr lang="en-US" sz="900" b="1" dirty="0">
                           <a:solidFill>
                             <a:srgbClr val="3A3A42"/>
                           </a:solidFill>
@@ -17727,7 +18052,7 @@
                         </a:rPr>
                         <a:t>中国PFが分成圧縮を撤回する</a:t>
                       </a:r>
-                      <a:endParaRPr lang="en-US" sz="950" dirty="0">
+                      <a:endParaRPr lang="en-US" sz="900" dirty="0">
                         <a:latin typeface="Yu Gothic" charset="0"/>
                         <a:ea typeface="Yu Gothic"/>
                         <a:cs typeface="Yu Gothic"/>
@@ -17784,7 +18109,7 @@
                         <a:buNone/>
                       </a:pPr>
                       <a:r>
-                        <a:rPr lang="en-US" sz="950" dirty="0">
+                        <a:rPr lang="en-US" sz="900" dirty="0">
                           <a:solidFill>
                             <a:srgbClr val="3A3A42"/>
                           </a:solidFill>
@@ -17792,9 +18117,9 @@
                           <a:ea typeface="Yu Gothic" pitchFamily="34" charset="-122"/>
                           <a:cs typeface="Yu Gothic" pitchFamily="34" charset="-120"/>
                         </a:rPr>
-                        <a:t>2026年の隙間は時限付き。方針が戻れば消える</a:t>
+                        <a:t>四半期ごとに各PFの分成条件を追跡。撤回の兆候が出たら獲得を前倒しする</a:t>
                       </a:r>
-                      <a:endParaRPr lang="en-US" sz="950" dirty="0">
+                      <a:endParaRPr lang="en-US" sz="900" dirty="0">
                         <a:latin typeface="Yu Gothic" charset="0"/>
                         <a:ea typeface="Yu Gothic"/>
                         <a:cs typeface="Yu Gothic"/>
@@ -17842,26 +18167,28 @@
                     </a:lnB>
                   </a:tcPr>
                 </a:tc>
+              </a:tr>
+              <a:tr h="603504">
                 <a:tc>
                   <a:txBody>
                     <a:bodyPr/>
                     <a:lstStyle/>
                     <a:p>
-                      <a:pPr indent="0" marL="0">
+                      <a:pPr algn="ctr" indent="0" marL="0">
                         <a:buNone/>
                       </a:pPr>
                       <a:r>
-                        <a:rPr lang="en-US" sz="950" dirty="0">
+                        <a:rPr lang="en-US" sz="900" b="1" dirty="0">
                           <a:solidFill>
-                            <a:srgbClr val="3A3A42"/>
+                            <a:srgbClr val="B3121B"/>
                           </a:solidFill>
                           <a:latin typeface="Yu Gothic" pitchFamily="34" charset="0"/>
                           <a:ea typeface="Yu Gothic" pitchFamily="34" charset="-122"/>
                           <a:cs typeface="Yu Gothic" pitchFamily="34" charset="-120"/>
                         </a:rPr>
-                        <a:t>四半期ごとに各PFの分成条件を追跡。撤回の兆候が出たら獲得を前倒しする</a:t>
+                        <a:t>4</a:t>
                       </a:r>
-                      <a:endParaRPr lang="en-US" sz="950" dirty="0">
+                      <a:endParaRPr lang="en-US" sz="900" dirty="0">
                         <a:latin typeface="Yu Gothic" charset="0"/>
                         <a:ea typeface="Yu Gothic"/>
                         <a:cs typeface="Yu Gothic"/>
@@ -17909,8 +18236,6 @@
                     </a:lnB>
                   </a:tcPr>
                 </a:tc>
-              </a:tr>
-              <a:tr h="658368">
                 <a:tc>
                   <a:txBody>
                     <a:bodyPr/>
@@ -17920,7 +18245,7 @@
                         <a:buNone/>
                       </a:pPr>
                       <a:r>
-                        <a:rPr lang="en-US" sz="950" b="1" dirty="0">
+                        <a:rPr lang="en-US" sz="900" b="1" dirty="0">
                           <a:solidFill>
                             <a:srgbClr val="FFFFFF"/>
                           </a:solidFill>
@@ -17930,7 +18255,7 @@
                         </a:rPr>
                         <a:t>高</a:t>
                       </a:r>
-                      <a:endParaRPr lang="en-US" sz="950" dirty="0">
+                      <a:endParaRPr lang="en-US" sz="900" dirty="0">
                         <a:latin typeface="Yu Gothic" charset="0"/>
                         <a:ea typeface="Yu Gothic"/>
                         <a:cs typeface="Yu Gothic"/>
@@ -17990,7 +18315,7 @@
                         <a:buNone/>
                       </a:pPr>
                       <a:r>
-                        <a:rPr lang="en-US" sz="950" b="1" dirty="0">
+                        <a:rPr lang="en-US" sz="900" b="1" dirty="0">
                           <a:solidFill>
                             <a:srgbClr val="3A3A42"/>
                           </a:solidFill>
@@ -18000,7 +18325,7 @@
                         </a:rPr>
                         <a:t>追加調達が続かない</a:t>
                       </a:r>
-                      <a:endParaRPr lang="en-US" sz="950" dirty="0">
+                      <a:endParaRPr lang="en-US" sz="900" dirty="0">
                         <a:latin typeface="Yu Gothic" charset="0"/>
                         <a:ea typeface="Yu Gothic"/>
                         <a:cs typeface="Yu Gothic"/>
@@ -18057,7 +18382,7 @@
                         <a:buNone/>
                       </a:pPr>
                       <a:r>
-                        <a:rPr lang="en-US" sz="950" dirty="0">
+                        <a:rPr lang="en-US" sz="900" dirty="0">
                           <a:solidFill>
                             <a:srgbClr val="3A3A42"/>
                           </a:solidFill>
@@ -18065,9 +18390,9 @@
                           <a:ea typeface="Yu Gothic" pitchFamily="34" charset="-122"/>
                           <a:cs typeface="Yu Gothic" pitchFamily="34" charset="-120"/>
                         </a:rPr>
-                        <a:t>3期まで赤字。シリーズA・Bが前提</a:t>
+                        <a:t>企業案件（②）を単独で黒字化できる水準まで育て、最悪ケースでも事業が止まらない構造にする</a:t>
                       </a:r>
-                      <a:endParaRPr lang="en-US" sz="950" dirty="0">
+                      <a:endParaRPr lang="en-US" sz="900" dirty="0">
                         <a:latin typeface="Yu Gothic" charset="0"/>
                         <a:ea typeface="Yu Gothic"/>
                         <a:cs typeface="Yu Gothic"/>
@@ -18115,26 +18440,28 @@
                     </a:lnB>
                   </a:tcPr>
                 </a:tc>
+              </a:tr>
+              <a:tr h="603504">
                 <a:tc>
                   <a:txBody>
                     <a:bodyPr/>
                     <a:lstStyle/>
                     <a:p>
-                      <a:pPr indent="0" marL="0">
+                      <a:pPr algn="ctr" indent="0" marL="0">
                         <a:buNone/>
                       </a:pPr>
                       <a:r>
-                        <a:rPr lang="en-US" sz="950" dirty="0">
+                        <a:rPr lang="en-US" sz="900" b="1" dirty="0">
                           <a:solidFill>
-                            <a:srgbClr val="3A3A42"/>
+                            <a:srgbClr val="6E6E76"/>
                           </a:solidFill>
                           <a:latin typeface="Yu Gothic" pitchFamily="34" charset="0"/>
                           <a:ea typeface="Yu Gothic" pitchFamily="34" charset="-122"/>
                           <a:cs typeface="Yu Gothic" pitchFamily="34" charset="-120"/>
                         </a:rPr>
-                        <a:t>企業案件（②）を単独で黒字化できる水準まで育て、最悪ケースでも事業が止まらない構造にする</a:t>
+                        <a:t>5</a:t>
                       </a:r>
-                      <a:endParaRPr lang="en-US" sz="950" dirty="0">
+                      <a:endParaRPr lang="en-US" sz="900" dirty="0">
                         <a:latin typeface="Yu Gothic" charset="0"/>
                         <a:ea typeface="Yu Gothic"/>
                         <a:cs typeface="Yu Gothic"/>
@@ -18182,8 +18509,6 @@
                     </a:lnB>
                   </a:tcPr>
                 </a:tc>
-              </a:tr>
-              <a:tr h="658368">
                 <a:tc>
                   <a:txBody>
                     <a:bodyPr/>
@@ -18193,7 +18518,7 @@
                         <a:buNone/>
                       </a:pPr>
                       <a:r>
-                        <a:rPr lang="en-US" sz="950" b="1" dirty="0">
+                        <a:rPr lang="en-US" sz="900" b="1" dirty="0">
                           <a:solidFill>
                             <a:srgbClr val="FFFFFF"/>
                           </a:solidFill>
@@ -18203,7 +18528,7 @@
                         </a:rPr>
                         <a:t>中</a:t>
                       </a:r>
-                      <a:endParaRPr lang="en-US" sz="950" dirty="0">
+                      <a:endParaRPr lang="en-US" sz="900" dirty="0">
                         <a:latin typeface="Yu Gothic" charset="0"/>
                         <a:ea typeface="Yu Gothic"/>
                         <a:cs typeface="Yu Gothic"/>
@@ -18263,7 +18588,7 @@
                         <a:buNone/>
                       </a:pPr>
                       <a:r>
-                        <a:rPr lang="en-US" sz="950" b="1" dirty="0">
+                        <a:rPr lang="en-US" sz="900" b="1" dirty="0">
                           <a:solidFill>
                             <a:srgbClr val="3A3A42"/>
                           </a:solidFill>
@@ -18273,7 +18598,7 @@
                         </a:rPr>
                         <a:t>資金決済法・UGC対応の義務</a:t>
                       </a:r>
-                      <a:endParaRPr lang="en-US" sz="950" dirty="0">
+                      <a:endParaRPr lang="en-US" sz="900" dirty="0">
                         <a:latin typeface="Yu Gothic" charset="0"/>
                         <a:ea typeface="Yu Gothic"/>
                         <a:cs typeface="Yu Gothic"/>
@@ -18330,7 +18655,7 @@
                         <a:buNone/>
                       </a:pPr>
                       <a:r>
-                        <a:rPr lang="en-US" sz="950" dirty="0">
+                        <a:rPr lang="en-US" sz="900" dirty="0">
                           <a:solidFill>
                             <a:srgbClr val="3A3A42"/>
                           </a:solidFill>
@@ -18338,9 +18663,9 @@
                           <a:ea typeface="Yu Gothic" pitchFamily="34" charset="-122"/>
                           <a:cs typeface="Yu Gothic" pitchFamily="34" charset="-120"/>
                         </a:rPr>
-                        <a:t>前払式支払手段の届出／登録、削除要請・発信者情報開示</a:t>
+                        <a:t>PF設計の前に弁護士へ確認。法務費用300万を初年度に計上済み</a:t>
                       </a:r>
-                      <a:endParaRPr lang="en-US" sz="950" dirty="0">
+                      <a:endParaRPr lang="en-US" sz="900" dirty="0">
                         <a:latin typeface="Yu Gothic" charset="0"/>
                         <a:ea typeface="Yu Gothic"/>
                         <a:cs typeface="Yu Gothic"/>
@@ -18388,26 +18713,28 @@
                     </a:lnB>
                   </a:tcPr>
                 </a:tc>
+              </a:tr>
+              <a:tr h="603504">
                 <a:tc>
                   <a:txBody>
                     <a:bodyPr/>
                     <a:lstStyle/>
                     <a:p>
-                      <a:pPr indent="0" marL="0">
+                      <a:pPr algn="ctr" indent="0" marL="0">
                         <a:buNone/>
                       </a:pPr>
                       <a:r>
-                        <a:rPr lang="en-US" sz="950" dirty="0">
+                        <a:rPr lang="en-US" sz="900" b="1" dirty="0">
                           <a:solidFill>
-                            <a:srgbClr val="3A3A42"/>
+                            <a:srgbClr val="6E6E76"/>
                           </a:solidFill>
                           <a:latin typeface="Yu Gothic" pitchFamily="34" charset="0"/>
                           <a:ea typeface="Yu Gothic" pitchFamily="34" charset="-122"/>
                           <a:cs typeface="Yu Gothic" pitchFamily="34" charset="-120"/>
                         </a:rPr>
-                        <a:t>PF設計の前に弁護士へ確認。法務費用300万を初年度に計上済み</a:t>
+                        <a:t>6</a:t>
                       </a:r>
-                      <a:endParaRPr lang="en-US" sz="950" dirty="0">
+                      <a:endParaRPr lang="en-US" sz="900" dirty="0">
                         <a:latin typeface="Yu Gothic" charset="0"/>
                         <a:ea typeface="Yu Gothic"/>
                         <a:cs typeface="Yu Gothic"/>
@@ -18455,8 +18782,6 @@
                     </a:lnB>
                   </a:tcPr>
                 </a:tc>
-              </a:tr>
-              <a:tr h="658368">
                 <a:tc>
                   <a:txBody>
                     <a:bodyPr/>
@@ -18466,7 +18791,7 @@
                         <a:buNone/>
                       </a:pPr>
                       <a:r>
-                        <a:rPr lang="en-US" sz="950" b="1" dirty="0">
+                        <a:rPr lang="en-US" sz="900" b="1" dirty="0">
                           <a:solidFill>
                             <a:srgbClr val="FFFFFF"/>
                           </a:solidFill>
@@ -18476,7 +18801,7 @@
                         </a:rPr>
                         <a:t>中</a:t>
                       </a:r>
-                      <a:endParaRPr lang="en-US" sz="950" dirty="0">
+                      <a:endParaRPr lang="en-US" sz="900" dirty="0">
                         <a:latin typeface="Yu Gothic" charset="0"/>
                         <a:ea typeface="Yu Gothic"/>
                         <a:cs typeface="Yu Gothic"/>
@@ -18536,7 +18861,7 @@
                         <a:buNone/>
                       </a:pPr>
                       <a:r>
-                        <a:rPr lang="en-US" sz="950" b="1" dirty="0">
+                        <a:rPr lang="en-US" sz="900" b="1" dirty="0">
                           <a:solidFill>
                             <a:srgbClr val="3A3A42"/>
                           </a:solidFill>
@@ -18546,7 +18871,7 @@
                         </a:rPr>
                         <a:t>中国本土から当社PFに接続できない</a:t>
                       </a:r>
-                      <a:endParaRPr lang="en-US" sz="950" dirty="0">
+                      <a:endParaRPr lang="en-US" sz="900" dirty="0">
                         <a:latin typeface="Yu Gothic" charset="0"/>
                         <a:ea typeface="Yu Gothic"/>
                         <a:cs typeface="Yu Gothic"/>
@@ -18603,7 +18928,7 @@
                         <a:buNone/>
                       </a:pPr>
                       <a:r>
-                        <a:rPr lang="en-US" sz="950" dirty="0">
+                        <a:rPr lang="en-US" sz="900" dirty="0">
                           <a:solidFill>
                             <a:srgbClr val="3A3A42"/>
                           </a:solidFill>
@@ -18611,9 +18936,9 @@
                           <a:ea typeface="Yu Gothic" pitchFamily="34" charset="-122"/>
                           <a:cs typeface="Yu Gothic" pitchFamily="34" charset="-120"/>
                         </a:rPr>
-                        <a:t>投稿・決済の経路がGFWの影響を受けうる</a:t>
+                        <a:t>設計段階で検証。国内向けミラーまたは提携PF経由の投稿導線を用意</a:t>
                       </a:r>
-                      <a:endParaRPr lang="en-US" sz="950" dirty="0">
+                      <a:endParaRPr lang="en-US" sz="900" dirty="0">
                         <a:latin typeface="Yu Gothic" charset="0"/>
                         <a:ea typeface="Yu Gothic"/>
                         <a:cs typeface="Yu Gothic"/>
@@ -18661,73 +18986,6 @@
                     </a:lnB>
                   </a:tcPr>
                 </a:tc>
-                <a:tc>
-                  <a:txBody>
-                    <a:bodyPr/>
-                    <a:lstStyle/>
-                    <a:p>
-                      <a:pPr indent="0" marL="0">
-                        <a:buNone/>
-                      </a:pPr>
-                      <a:r>
-                        <a:rPr lang="en-US" sz="950" dirty="0">
-                          <a:solidFill>
-                            <a:srgbClr val="3A3A42"/>
-                          </a:solidFill>
-                          <a:latin typeface="Yu Gothic" pitchFamily="34" charset="0"/>
-                          <a:ea typeface="Yu Gothic" pitchFamily="34" charset="-122"/>
-                          <a:cs typeface="Yu Gothic" pitchFamily="34" charset="-120"/>
-                        </a:rPr>
-                        <a:t>設計段階で検証。国内向けミラーまたは提携PF経由の投稿導線を用意</a:t>
-                      </a:r>
-                      <a:endParaRPr lang="en-US" sz="950" dirty="0">
-                        <a:latin typeface="Yu Gothic" charset="0"/>
-                        <a:ea typeface="Yu Gothic"/>
-                        <a:cs typeface="Yu Gothic"/>
-                        <a:ea typeface="Yu Gothic" charset="0"/>
-                        <a:cs typeface="Yu Gothic" charset="0"/>
-                      </a:endParaRPr>
-                    </a:p>
-                  </a:txBody>
-                  <a:tcPr marL="88900" marR="88900" marT="50800" marB="50800" anchor="ctr">
-                    <a:lnL w="7620" cap="flat" cmpd="sng" algn="ctr">
-                      <a:solidFill>
-                        <a:srgbClr val="DCD9D4"/>
-                      </a:solidFill>
-                      <a:prstDash val="solid"/>
-                      <a:round/>
-                      <a:headEnd type="none" w="med" len="med"/>
-                      <a:tailEnd type="none" w="med" len="med"/>
-                    </a:lnL>
-                    <a:lnR w="7620" cap="flat" cmpd="sng" algn="ctr">
-                      <a:solidFill>
-                        <a:srgbClr val="DCD9D4"/>
-                      </a:solidFill>
-                      <a:prstDash val="solid"/>
-                      <a:round/>
-                      <a:headEnd type="none" w="med" len="med"/>
-                      <a:tailEnd type="none" w="med" len="med"/>
-                    </a:lnR>
-                    <a:lnT w="7620" cap="flat" cmpd="sng" algn="ctr">
-                      <a:solidFill>
-                        <a:srgbClr val="DCD9D4"/>
-                      </a:solidFill>
-                      <a:prstDash val="solid"/>
-                      <a:round/>
-                      <a:headEnd type="none" w="med" len="med"/>
-                      <a:tailEnd type="none" w="med" len="med"/>
-                    </a:lnT>
-                    <a:lnB w="7620" cap="flat" cmpd="sng" algn="ctr">
-                      <a:solidFill>
-                        <a:srgbClr val="DCD9D4"/>
-                      </a:solidFill>
-                      <a:prstDash val="solid"/>
-                      <a:round/>
-                      <a:headEnd type="none" w="med" len="med"/>
-                      <a:tailEnd type="none" w="med" len="med"/>
-                    </a:lnB>
-                  </a:tcPr>
-                </a:tc>
               </a:tr>
             </a:tbl>
           </a:graphicData>
@@ -18735,7 +18993,7 @@
       </p:graphicFrame>
       <p:sp>
         <p:nvSpPr>
-          <p:cNvPr id="7" name="Text 4"/>
+          <p:cNvPr id="27" name="Text 24"/>
           <p:cNvSpPr txBox="1"/>
           <p:nvPr/>
         </p:nvSpPr>
@@ -18774,7 +19032,7 @@
       </p:sp>
       <p:sp>
         <p:nvSpPr>
-          <p:cNvPr id="8" name="Text 5"/>
+          <p:cNvPr id="28" name="Text 25"/>
           <p:cNvSpPr txBox="1"/>
           <p:nvPr/>
         </p:nvSpPr>
@@ -30956,7 +31214,7 @@
                 <a:ea typeface="Yu Gothic" pitchFamily="34" charset="-122"/>
                 <a:cs typeface="Yu Gothic" pitchFamily="34" charset="-120"/>
               </a:rPr>
-              <a:t>プラットフォームに載せる「当社発の看板コンテンツ」の作り方。版権コストの安い順に着手します</a:t>
+              <a:t>版権コストの安い順に着手します。D から始め、課金収益が立ってから A へ</a:t>
             </a:r>
             <a:endParaRPr lang="en-US" sz="1200" dirty="0"/>
           </a:p>
@@ -30977,7 +31235,7 @@
           </p:nvPr>
         </p:nvGraphicFramePr>
         <p:xfrm>
-          <a:off x="594360" y="1426464"/>
+          <a:off x="594360" y="1408176"/>
           <a:ext cx="11000232" cy="914400"/>
         </p:xfrm>
         <a:graphic>
@@ -30986,12 +31244,12 @@
               <a:tblPr/>
               <a:tblGrid>
                 <a:gridCol w="566928"/>
-                <a:gridCol w="2743200"/>
-                <a:gridCol w="3520440"/>
+                <a:gridCol w="2651760"/>
+                <a:gridCol w="3429000"/>
                 <a:gridCol w="1828800"/>
-                <a:gridCol w="2340864"/>
+                <a:gridCol w="2523744"/>
               </a:tblGrid>
-              <a:tr h="566928">
+              <a:tr h="457200">
                 <a:tc>
                   <a:txBody>
                     <a:bodyPr/>
@@ -31332,7 +31590,7 @@
                   </a:tcPr>
                 </a:tc>
               </a:tr>
-              <a:tr h="566928">
+              <a:tr h="457200">
                 <a:tc>
                   <a:txBody>
                     <a:bodyPr/>
@@ -31669,7 +31927,7 @@
                   </a:tcPr>
                 </a:tc>
               </a:tr>
-              <a:tr h="566928">
+              <a:tr h="457200">
                 <a:tc>
                   <a:txBody>
                     <a:bodyPr/>
@@ -32006,7 +32264,7 @@
                   </a:tcPr>
                 </a:tc>
               </a:tr>
-              <a:tr h="566928">
+              <a:tr h="457200">
                 <a:tc>
                   <a:txBody>
                     <a:bodyPr/>
@@ -32343,7 +32601,7 @@
                   </a:tcPr>
                 </a:tc>
               </a:tr>
-              <a:tr h="566928">
+              <a:tr h="457200">
                 <a:tc>
                   <a:txBody>
                     <a:bodyPr/>
@@ -32686,23 +32944,42 @@
       </p:graphicFrame>
       <p:sp>
         <p:nvSpPr>
-          <p:cNvPr id="7" name="Shape 4"/>
-          <p:cNvSpPr/>
-          <p:nvPr/>
-        </p:nvSpPr>
-        <p:spPr>
-          <a:xfrm>
-            <a:off x="594360" y="4407408"/>
-            <a:ext cx="5362956" cy="1609344"/>
-          </a:xfrm>
-          <a:prstGeom prst="rect">
-            <a:avLst/>
-          </a:prstGeom>
-          <a:solidFill>
-            <a:srgbClr val="F4F2EF"/>
-          </a:solidFill>
-          <a:ln/>
-        </p:spPr>
+          <p:cNvPr id="7" name="Text 4"/>
+          <p:cNvSpPr txBox="1"/>
+          <p:nvPr/>
+        </p:nvSpPr>
+        <p:spPr>
+          <a:xfrm>
+            <a:off x="594360" y="3803904"/>
+            <a:ext cx="6053328" cy="274320"/>
+          </a:xfrm>
+          <a:prstGeom prst="rect">
+            <a:avLst/>
+          </a:prstGeom>
+          <a:noFill/>
+          <a:ln/>
+        </p:spPr>
+        <p:txBody>
+          <a:bodyPr wrap="square" lIns="0" tIns="0" rIns="0" bIns="0" rtlCol="0" anchor="ctr"/>
+          <a:lstStyle/>
+          <a:p>
+            <a:pPr indent="0" marL="0">
+              <a:buNone/>
+            </a:pPr>
+            <a:r>
+              <a:rPr lang="en-US" sz="1100" b="1" dirty="0">
+                <a:solidFill>
+                  <a:srgbClr val="16161A"/>
+                </a:solidFill>
+                <a:latin typeface="Yu Gothic" pitchFamily="34" charset="0"/>
+                <a:ea typeface="Yu Gothic" pitchFamily="34" charset="-122"/>
+                <a:cs typeface="Yu Gothic" pitchFamily="34" charset="-120"/>
+              </a:rPr>
+              <a:t>着手の順序 — 版権コストの安い順に積み上げる</a:t>
+            </a:r>
+            <a:endParaRPr lang="en-US" sz="1100" dirty="0"/>
+          </a:p>
+        </p:txBody>
       </p:sp>
       <p:sp>
         <p:nvSpPr>
@@ -32712,8 +32989,8 @@
         </p:nvSpPr>
         <p:spPr>
           <a:xfrm>
-            <a:off x="813816" y="4663440"/>
-            <a:ext cx="109728" cy="109728"/>
+            <a:off x="594360" y="5175504"/>
+            <a:ext cx="1444752" cy="658368"/>
           </a:xfrm>
           <a:prstGeom prst="rect">
             <a:avLst/>
@@ -32732,8 +33009,8 @@
         </p:nvSpPr>
         <p:spPr>
           <a:xfrm>
-            <a:off x="1033272" y="4572000"/>
-            <a:ext cx="4704588" cy="292608"/>
+            <a:off x="594360" y="5230368"/>
+            <a:ext cx="1444752" cy="310896"/>
           </a:xfrm>
           <a:prstGeom prst="rect">
             <a:avLst/>
@@ -32745,21 +33022,21 @@
           <a:bodyPr wrap="square" lIns="0" tIns="0" rIns="0" bIns="0" rtlCol="0" anchor="ctr"/>
           <a:lstStyle/>
           <a:p>
-            <a:pPr indent="0" marL="0">
-              <a:buNone/>
-            </a:pPr>
-            <a:r>
-              <a:rPr lang="en-US" sz="1250" b="1" dirty="0">
-                <a:solidFill>
-                  <a:srgbClr val="16161A"/>
-                </a:solidFill>
-                <a:latin typeface="Yu Gothic" pitchFamily="34" charset="0"/>
-                <a:ea typeface="Yu Gothic" pitchFamily="34" charset="-122"/>
-                <a:cs typeface="Yu Gothic" pitchFamily="34" charset="-120"/>
-              </a:rPr>
-              <a:t>着手の順序は D → B → C → A</a:t>
-            </a:r>
-            <a:endParaRPr lang="en-US" sz="1250" dirty="0"/>
+            <a:pPr algn="ctr" indent="0" marL="0">
+              <a:buNone/>
+            </a:pPr>
+            <a:r>
+              <a:rPr lang="en-US" sz="1500" b="1" dirty="0">
+                <a:solidFill>
+                  <a:srgbClr val="FFFFFF"/>
+                </a:solidFill>
+                <a:latin typeface="Yu Gothic" pitchFamily="34" charset="0"/>
+                <a:ea typeface="Yu Gothic" pitchFamily="34" charset="-122"/>
+                <a:cs typeface="Yu Gothic" pitchFamily="34" charset="-120"/>
+              </a:rPr>
+              <a:t>D</a:t>
+            </a:r>
+            <a:endParaRPr lang="en-US" sz="1500" dirty="0"/>
           </a:p>
         </p:txBody>
       </p:sp>
@@ -32771,8 +33048,659 @@
         </p:nvSpPr>
         <p:spPr>
           <a:xfrm>
-            <a:off x="1033272" y="4919472"/>
-            <a:ext cx="4704588" cy="914400"/>
+            <a:off x="594360" y="5522976"/>
+            <a:ext cx="1444752" cy="274320"/>
+          </a:xfrm>
+          <a:prstGeom prst="rect">
+            <a:avLst/>
+          </a:prstGeom>
+          <a:noFill/>
+          <a:ln/>
+        </p:spPr>
+        <p:txBody>
+          <a:bodyPr wrap="square" lIns="0" tIns="0" rIns="0" bIns="0" rtlCol="0" anchor="ctr"/>
+          <a:lstStyle/>
+          <a:p>
+            <a:pPr algn="ctr" indent="0" marL="0">
+              <a:buNone/>
+            </a:pPr>
+            <a:r>
+              <a:rPr lang="en-US" sz="900" b="1" dirty="0">
+                <a:solidFill>
+                  <a:srgbClr val="FFFFFF"/>
+                </a:solidFill>
+                <a:latin typeface="Yu Gothic" pitchFamily="34" charset="0"/>
+                <a:ea typeface="Yu Gothic" pitchFamily="34" charset="-122"/>
+                <a:cs typeface="Yu Gothic" pitchFamily="34" charset="-120"/>
+              </a:rPr>
+              <a:t>版権ゼロ</a:t>
+            </a:r>
+            <a:endParaRPr lang="en-US" sz="900" dirty="0"/>
+          </a:p>
+        </p:txBody>
+      </p:sp>
+      <p:sp>
+        <p:nvSpPr>
+          <p:cNvPr id="11" name="Text 8"/>
+          <p:cNvSpPr txBox="1"/>
+          <p:nvPr/>
+        </p:nvSpPr>
+        <p:spPr>
+          <a:xfrm>
+            <a:off x="594360" y="5870448"/>
+            <a:ext cx="1444752" cy="256032"/>
+          </a:xfrm>
+          <a:prstGeom prst="rect">
+            <a:avLst/>
+          </a:prstGeom>
+          <a:noFill/>
+          <a:ln/>
+        </p:spPr>
+        <p:txBody>
+          <a:bodyPr wrap="square" lIns="0" tIns="0" rIns="0" bIns="0" rtlCol="0" anchor="ctr"/>
+          <a:lstStyle/>
+          <a:p>
+            <a:pPr algn="ctr" indent="0" marL="0">
+              <a:buNone/>
+            </a:pPr>
+            <a:r>
+              <a:rPr lang="en-US" sz="850" dirty="0">
+                <a:solidFill>
+                  <a:srgbClr val="3A3A42"/>
+                </a:solidFill>
+                <a:latin typeface="Yu Gothic" pitchFamily="34" charset="0"/>
+                <a:ea typeface="Yu Gothic" pitchFamily="34" charset="-122"/>
+                <a:cs typeface="Yu Gothic" pitchFamily="34" charset="-120"/>
+              </a:rPr>
+              <a:t>パブリックドメイン</a:t>
+            </a:r>
+            <a:endParaRPr lang="en-US" sz="850" dirty="0"/>
+          </a:p>
+        </p:txBody>
+      </p:sp>
+      <p:sp>
+        <p:nvSpPr>
+          <p:cNvPr id="12" name="Shape 9"/>
+          <p:cNvSpPr/>
+          <p:nvPr/>
+        </p:nvSpPr>
+        <p:spPr>
+          <a:xfrm>
+            <a:off x="2057400" y="4956048"/>
+            <a:ext cx="91440" cy="182880"/>
+          </a:xfrm>
+          <a:prstGeom prst="rightArrow">
+            <a:avLst/>
+          </a:prstGeom>
+          <a:solidFill>
+            <a:srgbClr val="6E6E76"/>
+          </a:solidFill>
+          <a:ln/>
+        </p:spPr>
+      </p:sp>
+      <p:sp>
+        <p:nvSpPr>
+          <p:cNvPr id="13" name="Shape 10"/>
+          <p:cNvSpPr/>
+          <p:nvPr/>
+        </p:nvSpPr>
+        <p:spPr>
+          <a:xfrm>
+            <a:off x="2130552" y="4937760"/>
+            <a:ext cx="1444752" cy="896112"/>
+          </a:xfrm>
+          <a:prstGeom prst="rect">
+            <a:avLst/>
+          </a:prstGeom>
+          <a:solidFill>
+            <a:srgbClr val="2A3563"/>
+          </a:solidFill>
+          <a:ln/>
+        </p:spPr>
+      </p:sp>
+      <p:sp>
+        <p:nvSpPr>
+          <p:cNvPr id="14" name="Text 11"/>
+          <p:cNvSpPr txBox="1"/>
+          <p:nvPr/>
+        </p:nvSpPr>
+        <p:spPr>
+          <a:xfrm>
+            <a:off x="2130552" y="4992624"/>
+            <a:ext cx="1444752" cy="310896"/>
+          </a:xfrm>
+          <a:prstGeom prst="rect">
+            <a:avLst/>
+          </a:prstGeom>
+          <a:noFill/>
+          <a:ln/>
+        </p:spPr>
+        <p:txBody>
+          <a:bodyPr wrap="square" lIns="0" tIns="0" rIns="0" bIns="0" rtlCol="0" anchor="ctr"/>
+          <a:lstStyle/>
+          <a:p>
+            <a:pPr algn="ctr" indent="0" marL="0">
+              <a:buNone/>
+            </a:pPr>
+            <a:r>
+              <a:rPr lang="en-US" sz="1500" b="1" dirty="0">
+                <a:solidFill>
+                  <a:srgbClr val="FFFFFF"/>
+                </a:solidFill>
+                <a:latin typeface="Yu Gothic" pitchFamily="34" charset="0"/>
+                <a:ea typeface="Yu Gothic" pitchFamily="34" charset="-122"/>
+                <a:cs typeface="Yu Gothic" pitchFamily="34" charset="-120"/>
+              </a:rPr>
+              <a:t>B</a:t>
+            </a:r>
+            <a:endParaRPr lang="en-US" sz="1500" dirty="0"/>
+          </a:p>
+        </p:txBody>
+      </p:sp>
+      <p:sp>
+        <p:nvSpPr>
+          <p:cNvPr id="15" name="Text 12"/>
+          <p:cNvSpPr txBox="1"/>
+          <p:nvPr/>
+        </p:nvSpPr>
+        <p:spPr>
+          <a:xfrm>
+            <a:off x="2130552" y="5522976"/>
+            <a:ext cx="1444752" cy="274320"/>
+          </a:xfrm>
+          <a:prstGeom prst="rect">
+            <a:avLst/>
+          </a:prstGeom>
+          <a:noFill/>
+          <a:ln/>
+        </p:spPr>
+        <p:txBody>
+          <a:bodyPr wrap="square" lIns="0" tIns="0" rIns="0" bIns="0" rtlCol="0" anchor="ctr"/>
+          <a:lstStyle/>
+          <a:p>
+            <a:pPr algn="ctr" indent="0" marL="0">
+              <a:buNone/>
+            </a:pPr>
+            <a:r>
+              <a:rPr lang="en-US" sz="900" b="1" dirty="0">
+                <a:solidFill>
+                  <a:srgbClr val="FFFFFF"/>
+                </a:solidFill>
+                <a:latin typeface="Yu Gothic" pitchFamily="34" charset="0"/>
+                <a:ea typeface="Yu Gothic" pitchFamily="34" charset="-122"/>
+                <a:cs typeface="Yu Gothic" pitchFamily="34" charset="-120"/>
+              </a:rPr>
+              <a:t>先方負担</a:t>
+            </a:r>
+            <a:endParaRPr lang="en-US" sz="900" dirty="0"/>
+          </a:p>
+        </p:txBody>
+      </p:sp>
+      <p:sp>
+        <p:nvSpPr>
+          <p:cNvPr id="16" name="Text 13"/>
+          <p:cNvSpPr txBox="1"/>
+          <p:nvPr/>
+        </p:nvSpPr>
+        <p:spPr>
+          <a:xfrm>
+            <a:off x="2130552" y="5870448"/>
+            <a:ext cx="1444752" cy="256032"/>
+          </a:xfrm>
+          <a:prstGeom prst="rect">
+            <a:avLst/>
+          </a:prstGeom>
+          <a:noFill/>
+          <a:ln/>
+        </p:spPr>
+        <p:txBody>
+          <a:bodyPr wrap="square" lIns="0" tIns="0" rIns="0" bIns="0" rtlCol="0" anchor="ctr"/>
+          <a:lstStyle/>
+          <a:p>
+            <a:pPr algn="ctr" indent="0" marL="0">
+              <a:buNone/>
+            </a:pPr>
+            <a:r>
+              <a:rPr lang="en-US" sz="850" dirty="0">
+                <a:solidFill>
+                  <a:srgbClr val="3A3A42"/>
+                </a:solidFill>
+                <a:latin typeface="Yu Gothic" pitchFamily="34" charset="0"/>
+                <a:ea typeface="Yu Gothic" pitchFamily="34" charset="-122"/>
+                <a:cs typeface="Yu Gothic" pitchFamily="34" charset="-120"/>
+              </a:rPr>
+              <a:t>自治体・企業キャラ</a:t>
+            </a:r>
+            <a:endParaRPr lang="en-US" sz="850" dirty="0"/>
+          </a:p>
+        </p:txBody>
+      </p:sp>
+      <p:sp>
+        <p:nvSpPr>
+          <p:cNvPr id="17" name="Shape 14"/>
+          <p:cNvSpPr/>
+          <p:nvPr/>
+        </p:nvSpPr>
+        <p:spPr>
+          <a:xfrm>
+            <a:off x="3593592" y="4718304"/>
+            <a:ext cx="91440" cy="182880"/>
+          </a:xfrm>
+          <a:prstGeom prst="rightArrow">
+            <a:avLst/>
+          </a:prstGeom>
+          <a:solidFill>
+            <a:srgbClr val="6E6E76"/>
+          </a:solidFill>
+          <a:ln/>
+        </p:spPr>
+      </p:sp>
+      <p:sp>
+        <p:nvSpPr>
+          <p:cNvPr id="18" name="Shape 15"/>
+          <p:cNvSpPr/>
+          <p:nvPr/>
+        </p:nvSpPr>
+        <p:spPr>
+          <a:xfrm>
+            <a:off x="3666744" y="4608576"/>
+            <a:ext cx="1444752" cy="1225296"/>
+          </a:xfrm>
+          <a:prstGeom prst="rect">
+            <a:avLst/>
+          </a:prstGeom>
+          <a:solidFill>
+            <a:srgbClr val="C9962C"/>
+          </a:solidFill>
+          <a:ln/>
+        </p:spPr>
+      </p:sp>
+      <p:sp>
+        <p:nvSpPr>
+          <p:cNvPr id="19" name="Text 16"/>
+          <p:cNvSpPr txBox="1"/>
+          <p:nvPr/>
+        </p:nvSpPr>
+        <p:spPr>
+          <a:xfrm>
+            <a:off x="3666744" y="4663440"/>
+            <a:ext cx="1444752" cy="310896"/>
+          </a:xfrm>
+          <a:prstGeom prst="rect">
+            <a:avLst/>
+          </a:prstGeom>
+          <a:noFill/>
+          <a:ln/>
+        </p:spPr>
+        <p:txBody>
+          <a:bodyPr wrap="square" lIns="0" tIns="0" rIns="0" bIns="0" rtlCol="0" anchor="ctr"/>
+          <a:lstStyle/>
+          <a:p>
+            <a:pPr algn="ctr" indent="0" marL="0">
+              <a:buNone/>
+            </a:pPr>
+            <a:r>
+              <a:rPr lang="en-US" sz="1500" b="1" dirty="0">
+                <a:solidFill>
+                  <a:srgbClr val="FFFFFF"/>
+                </a:solidFill>
+                <a:latin typeface="Yu Gothic" pitchFamily="34" charset="0"/>
+                <a:ea typeface="Yu Gothic" pitchFamily="34" charset="-122"/>
+                <a:cs typeface="Yu Gothic" pitchFamily="34" charset="-120"/>
+              </a:rPr>
+              <a:t>C</a:t>
+            </a:r>
+            <a:endParaRPr lang="en-US" sz="1500" dirty="0"/>
+          </a:p>
+        </p:txBody>
+      </p:sp>
+      <p:sp>
+        <p:nvSpPr>
+          <p:cNvPr id="20" name="Text 17"/>
+          <p:cNvSpPr txBox="1"/>
+          <p:nvPr/>
+        </p:nvSpPr>
+        <p:spPr>
+          <a:xfrm>
+            <a:off x="3666744" y="5522976"/>
+            <a:ext cx="1444752" cy="274320"/>
+          </a:xfrm>
+          <a:prstGeom prst="rect">
+            <a:avLst/>
+          </a:prstGeom>
+          <a:noFill/>
+          <a:ln/>
+        </p:spPr>
+        <p:txBody>
+          <a:bodyPr wrap="square" lIns="0" tIns="0" rIns="0" bIns="0" rtlCol="0" anchor="ctr"/>
+          <a:lstStyle/>
+          <a:p>
+            <a:pPr algn="ctr" indent="0" marL="0">
+              <a:buNone/>
+            </a:pPr>
+            <a:r>
+              <a:rPr lang="en-US" sz="900" b="1" dirty="0">
+                <a:solidFill>
+                  <a:srgbClr val="FFFFFF"/>
+                </a:solidFill>
+                <a:latin typeface="Yu Gothic" pitchFamily="34" charset="0"/>
+                <a:ea typeface="Yu Gothic" pitchFamily="34" charset="-122"/>
+                <a:cs typeface="Yu Gothic" pitchFamily="34" charset="-120"/>
+              </a:rPr>
+              <a:t>成功報酬</a:t>
+            </a:r>
+            <a:endParaRPr lang="en-US" sz="900" dirty="0"/>
+          </a:p>
+        </p:txBody>
+      </p:sp>
+      <p:sp>
+        <p:nvSpPr>
+          <p:cNvPr id="21" name="Text 18"/>
+          <p:cNvSpPr txBox="1"/>
+          <p:nvPr/>
+        </p:nvSpPr>
+        <p:spPr>
+          <a:xfrm>
+            <a:off x="3666744" y="5870448"/>
+            <a:ext cx="1444752" cy="256032"/>
+          </a:xfrm>
+          <a:prstGeom prst="rect">
+            <a:avLst/>
+          </a:prstGeom>
+          <a:noFill/>
+          <a:ln/>
+        </p:spPr>
+        <p:txBody>
+          <a:bodyPr wrap="square" lIns="0" tIns="0" rIns="0" bIns="0" rtlCol="0" anchor="ctr"/>
+          <a:lstStyle/>
+          <a:p>
+            <a:pPr algn="ctr" indent="0" marL="0">
+              <a:buNone/>
+            </a:pPr>
+            <a:r>
+              <a:rPr lang="en-US" sz="850" dirty="0">
+                <a:solidFill>
+                  <a:srgbClr val="3A3A42"/>
+                </a:solidFill>
+                <a:latin typeface="Yu Gothic" pitchFamily="34" charset="0"/>
+                <a:ea typeface="Yu Gothic" pitchFamily="34" charset="-122"/>
+                <a:cs typeface="Yu Gothic" pitchFamily="34" charset="-120"/>
+              </a:rPr>
+              <a:t>個人作家・Web小説</a:t>
+            </a:r>
+            <a:endParaRPr lang="en-US" sz="850" dirty="0"/>
+          </a:p>
+        </p:txBody>
+      </p:sp>
+      <p:sp>
+        <p:nvSpPr>
+          <p:cNvPr id="22" name="Shape 19"/>
+          <p:cNvSpPr/>
+          <p:nvPr/>
+        </p:nvSpPr>
+        <p:spPr>
+          <a:xfrm>
+            <a:off x="5129784" y="4389120"/>
+            <a:ext cx="91440" cy="182880"/>
+          </a:xfrm>
+          <a:prstGeom prst="rightArrow">
+            <a:avLst/>
+          </a:prstGeom>
+          <a:solidFill>
+            <a:srgbClr val="6E6E76"/>
+          </a:solidFill>
+          <a:ln/>
+        </p:spPr>
+      </p:sp>
+      <p:sp>
+        <p:nvSpPr>
+          <p:cNvPr id="23" name="Shape 20"/>
+          <p:cNvSpPr/>
+          <p:nvPr/>
+        </p:nvSpPr>
+        <p:spPr>
+          <a:xfrm>
+            <a:off x="5202936" y="4206240"/>
+            <a:ext cx="1444752" cy="1627632"/>
+          </a:xfrm>
+          <a:prstGeom prst="rect">
+            <a:avLst/>
+          </a:prstGeom>
+          <a:solidFill>
+            <a:srgbClr val="B3121B"/>
+          </a:solidFill>
+          <a:ln/>
+        </p:spPr>
+      </p:sp>
+      <p:sp>
+        <p:nvSpPr>
+          <p:cNvPr id="24" name="Text 21"/>
+          <p:cNvSpPr txBox="1"/>
+          <p:nvPr/>
+        </p:nvSpPr>
+        <p:spPr>
+          <a:xfrm>
+            <a:off x="5202936" y="4261104"/>
+            <a:ext cx="1444752" cy="310896"/>
+          </a:xfrm>
+          <a:prstGeom prst="rect">
+            <a:avLst/>
+          </a:prstGeom>
+          <a:noFill/>
+          <a:ln/>
+        </p:spPr>
+        <p:txBody>
+          <a:bodyPr wrap="square" lIns="0" tIns="0" rIns="0" bIns="0" rtlCol="0" anchor="ctr"/>
+          <a:lstStyle/>
+          <a:p>
+            <a:pPr algn="ctr" indent="0" marL="0">
+              <a:buNone/>
+            </a:pPr>
+            <a:r>
+              <a:rPr lang="en-US" sz="1500" b="1" dirty="0">
+                <a:solidFill>
+                  <a:srgbClr val="FFFFFF"/>
+                </a:solidFill>
+                <a:latin typeface="Yu Gothic" pitchFamily="34" charset="0"/>
+                <a:ea typeface="Yu Gothic" pitchFamily="34" charset="-122"/>
+                <a:cs typeface="Yu Gothic" pitchFamily="34" charset="-120"/>
+              </a:rPr>
+              <a:t>A</a:t>
+            </a:r>
+            <a:endParaRPr lang="en-US" sz="1500" dirty="0"/>
+          </a:p>
+        </p:txBody>
+      </p:sp>
+      <p:sp>
+        <p:nvSpPr>
+          <p:cNvPr id="25" name="Text 22"/>
+          <p:cNvSpPr txBox="1"/>
+          <p:nvPr/>
+        </p:nvSpPr>
+        <p:spPr>
+          <a:xfrm>
+            <a:off x="5202936" y="5522976"/>
+            <a:ext cx="1444752" cy="274320"/>
+          </a:xfrm>
+          <a:prstGeom prst="rect">
+            <a:avLst/>
+          </a:prstGeom>
+          <a:noFill/>
+          <a:ln/>
+        </p:spPr>
+        <p:txBody>
+          <a:bodyPr wrap="square" lIns="0" tIns="0" rIns="0" bIns="0" rtlCol="0" anchor="ctr"/>
+          <a:lstStyle/>
+          <a:p>
+            <a:pPr algn="ctr" indent="0" marL="0">
+              <a:buNone/>
+            </a:pPr>
+            <a:r>
+              <a:rPr lang="en-US" sz="900" b="1" dirty="0">
+                <a:solidFill>
+                  <a:srgbClr val="FFFFFF"/>
+                </a:solidFill>
+                <a:latin typeface="Yu Gothic" pitchFamily="34" charset="0"/>
+                <a:ea typeface="Yu Gothic" pitchFamily="34" charset="-122"/>
+                <a:cs typeface="Yu Gothic" pitchFamily="34" charset="-120"/>
+              </a:rPr>
+              <a:t>数万〜数十万</a:t>
+            </a:r>
+            <a:endParaRPr lang="en-US" sz="900" dirty="0"/>
+          </a:p>
+        </p:txBody>
+      </p:sp>
+      <p:sp>
+        <p:nvSpPr>
+          <p:cNvPr id="26" name="Text 23"/>
+          <p:cNvSpPr txBox="1"/>
+          <p:nvPr/>
+        </p:nvSpPr>
+        <p:spPr>
+          <a:xfrm>
+            <a:off x="5202936" y="5870448"/>
+            <a:ext cx="1444752" cy="256032"/>
+          </a:xfrm>
+          <a:prstGeom prst="rect">
+            <a:avLst/>
+          </a:prstGeom>
+          <a:noFill/>
+          <a:ln/>
+        </p:spPr>
+        <p:txBody>
+          <a:bodyPr wrap="square" lIns="0" tIns="0" rIns="0" bIns="0" rtlCol="0" anchor="ctr"/>
+          <a:lstStyle/>
+          <a:p>
+            <a:pPr algn="ctr" indent="0" marL="0">
+              <a:buNone/>
+            </a:pPr>
+            <a:r>
+              <a:rPr lang="en-US" sz="850" dirty="0">
+                <a:solidFill>
+                  <a:srgbClr val="3A3A42"/>
+                </a:solidFill>
+                <a:latin typeface="Yu Gothic" pitchFamily="34" charset="0"/>
+                <a:ea typeface="Yu Gothic" pitchFamily="34" charset="-122"/>
+                <a:cs typeface="Yu Gothic" pitchFamily="34" charset="-120"/>
+              </a:rPr>
+              <a:t>中小出版社マンガ</a:t>
+            </a:r>
+            <a:endParaRPr lang="en-US" sz="850" dirty="0"/>
+          </a:p>
+        </p:txBody>
+      </p:sp>
+      <p:sp>
+        <p:nvSpPr>
+          <p:cNvPr id="27" name="Shape 24"/>
+          <p:cNvSpPr/>
+          <p:nvPr/>
+        </p:nvSpPr>
+        <p:spPr>
+          <a:xfrm>
+            <a:off x="594360" y="5833872"/>
+            <a:ext cx="6053328" cy="0"/>
+          </a:xfrm>
+          <a:prstGeom prst="line">
+            <a:avLst/>
+          </a:prstGeom>
+          <a:noFill/>
+          <a:ln w="12700">
+            <a:solidFill>
+              <a:srgbClr val="DCD9D4"/>
+            </a:solidFill>
+            <a:prstDash val="solid"/>
+          </a:ln>
+        </p:spPr>
+      </p:sp>
+      <p:sp>
+        <p:nvSpPr>
+          <p:cNvPr id="28" name="Shape 25"/>
+          <p:cNvSpPr/>
+          <p:nvPr/>
+        </p:nvSpPr>
+        <p:spPr>
+          <a:xfrm>
+            <a:off x="6903720" y="3803904"/>
+            <a:ext cx="4690872" cy="2084832"/>
+          </a:xfrm>
+          <a:prstGeom prst="rect">
+            <a:avLst/>
+          </a:prstGeom>
+          <a:solidFill>
+            <a:srgbClr val="FBF1F1"/>
+          </a:solidFill>
+          <a:ln/>
+        </p:spPr>
+      </p:sp>
+      <p:sp>
+        <p:nvSpPr>
+          <p:cNvPr id="29" name="Shape 26"/>
+          <p:cNvSpPr/>
+          <p:nvPr/>
+        </p:nvSpPr>
+        <p:spPr>
+          <a:xfrm>
+            <a:off x="6903720" y="3803904"/>
+            <a:ext cx="45720" cy="2084832"/>
+          </a:xfrm>
+          <a:prstGeom prst="rect">
+            <a:avLst/>
+          </a:prstGeom>
+          <a:solidFill>
+            <a:srgbClr val="B3121B"/>
+          </a:solidFill>
+          <a:ln/>
+        </p:spPr>
+      </p:sp>
+      <p:sp>
+        <p:nvSpPr>
+          <p:cNvPr id="30" name="Text 27"/>
+          <p:cNvSpPr txBox="1"/>
+          <p:nvPr/>
+        </p:nvSpPr>
+        <p:spPr>
+          <a:xfrm>
+            <a:off x="7159752" y="3950208"/>
+            <a:ext cx="4233672" cy="274320"/>
+          </a:xfrm>
+          <a:prstGeom prst="rect">
+            <a:avLst/>
+          </a:prstGeom>
+          <a:noFill/>
+          <a:ln/>
+        </p:spPr>
+        <p:txBody>
+          <a:bodyPr wrap="square" lIns="0" tIns="0" rIns="0" bIns="0" rtlCol="0" anchor="ctr"/>
+          <a:lstStyle/>
+          <a:p>
+            <a:pPr indent="0" marL="0">
+              <a:buNone/>
+            </a:pPr>
+            <a:r>
+              <a:rPr lang="en-US" sz="1200" b="1" dirty="0">
+                <a:solidFill>
+                  <a:srgbClr val="B3121B"/>
+                </a:solidFill>
+                <a:latin typeface="Yu Gothic" pitchFamily="34" charset="0"/>
+                <a:ea typeface="Yu Gothic" pitchFamily="34" charset="-122"/>
+                <a:cs typeface="Yu Gothic" pitchFamily="34" charset="-120"/>
+              </a:rPr>
+              <a:t>⚠ IPホルダーはAI生成を警戒します</a:t>
+            </a:r>
+            <a:endParaRPr lang="en-US" sz="1200" dirty="0"/>
+          </a:p>
+        </p:txBody>
+      </p:sp>
+      <p:sp>
+        <p:nvSpPr>
+          <p:cNvPr id="31" name="Text 28"/>
+          <p:cNvSpPr txBox="1"/>
+          <p:nvPr/>
+        </p:nvSpPr>
+        <p:spPr>
+          <a:xfrm>
+            <a:off x="7159752" y="4279392"/>
+            <a:ext cx="4233672" cy="1463040"/>
           </a:xfrm>
           <a:prstGeom prst="rect">
             <a:avLst/>
@@ -32791,7 +33719,7 @@
               <a:buNone/>
             </a:pPr>
             <a:r>
-              <a:rPr lang="en-US" sz="1050" dirty="0">
+              <a:rPr lang="en-US" sz="1000" dirty="0">
                 <a:solidFill>
                   <a:srgbClr val="3A3A42"/>
                 </a:solidFill>
@@ -32799,9 +33727,9 @@
                 <a:ea typeface="Yu Gothic" pitchFamily="34" charset="-122"/>
                 <a:cs typeface="Yu Gothic" pitchFamily="34" charset="-120"/>
               </a:rPr>
-              <a:t>D は版権コストがゼロなので、プラットフォーム公開前から積み上げられます。</a:t>
-            </a:r>
-            <a:endParaRPr lang="en-US" sz="1050" dirty="0"/>
+              <a:t>原作ファンの反発が、原作そのものの価値を毀損しかねません。</a:t>
+            </a:r>
+            <a:endParaRPr lang="en-US" sz="1000" dirty="0"/>
           </a:p>
           <a:p>
             <a:pPr indent="0" marL="0">
@@ -32811,7 +33739,7 @@
               <a:buNone/>
             </a:pPr>
             <a:r>
-              <a:rPr lang="en-US" sz="1050" dirty="0">
+              <a:rPr lang="en-US" sz="1000" dirty="0">
                 <a:solidFill>
                   <a:srgbClr val="3A3A42"/>
                 </a:solidFill>
@@ -32819,9 +33747,9 @@
                 <a:ea typeface="Yu Gothic" pitchFamily="34" charset="-122"/>
                 <a:cs typeface="Yu Gothic" pitchFamily="34" charset="-120"/>
               </a:rPr>
-              <a:t>ローンチ時に「見るものがある」状態をつくる唯一の方法です。</a:t>
-            </a:r>
-            <a:endParaRPr lang="en-US" sz="1050" dirty="0"/>
+              <a:t>契約に「AI利用の可否と開示方法」を必ず明記します。</a:t>
+            </a:r>
+            <a:endParaRPr lang="en-US" sz="1000" dirty="0"/>
           </a:p>
           <a:p>
             <a:pPr indent="0" marL="0">
@@ -32831,7 +33759,7 @@
               <a:buNone/>
             </a:pPr>
             <a:r>
-              <a:rPr lang="en-US" sz="1050" dirty="0">
+              <a:rPr lang="en-US" sz="1000" dirty="0">
                 <a:solidFill>
                   <a:srgbClr val="3A3A42"/>
                 </a:solidFill>
@@ -32839,111 +33767,10 @@
                 <a:ea typeface="Yu Gothic" pitchFamily="34" charset="-122"/>
                 <a:cs typeface="Yu Gothic" pitchFamily="34" charset="-120"/>
               </a:rPr>
-              <a:t>A は看板になりますが前払いが必要なため、課金収益が立ってから。</a:t>
-            </a:r>
-            <a:endParaRPr lang="en-US" sz="1050" dirty="0"/>
-          </a:p>
-        </p:txBody>
-      </p:sp>
-      <p:sp>
-        <p:nvSpPr>
-          <p:cNvPr id="11" name="Shape 8"/>
-          <p:cNvSpPr/>
-          <p:nvPr/>
-        </p:nvSpPr>
-        <p:spPr>
-          <a:xfrm>
-            <a:off x="6231636" y="4407408"/>
-            <a:ext cx="5362956" cy="1609344"/>
-          </a:xfrm>
-          <a:prstGeom prst="rect">
-            <a:avLst/>
-          </a:prstGeom>
-          <a:solidFill>
-            <a:srgbClr val="FBF1F1"/>
-          </a:solidFill>
-          <a:ln/>
-        </p:spPr>
-      </p:sp>
-      <p:sp>
-        <p:nvSpPr>
-          <p:cNvPr id="12" name="Shape 9"/>
-          <p:cNvSpPr/>
-          <p:nvPr/>
-        </p:nvSpPr>
-        <p:spPr>
-          <a:xfrm>
-            <a:off x="6231636" y="4407408"/>
-            <a:ext cx="45720" cy="1609344"/>
-          </a:xfrm>
-          <a:prstGeom prst="rect">
-            <a:avLst/>
-          </a:prstGeom>
-          <a:solidFill>
-            <a:srgbClr val="B3121B"/>
-          </a:solidFill>
-          <a:ln/>
-        </p:spPr>
-      </p:sp>
-      <p:sp>
-        <p:nvSpPr>
-          <p:cNvPr id="13" name="Text 10"/>
-          <p:cNvSpPr txBox="1"/>
-          <p:nvPr/>
-        </p:nvSpPr>
-        <p:spPr>
-          <a:xfrm>
-            <a:off x="6487668" y="4553712"/>
-            <a:ext cx="4905756" cy="274320"/>
-          </a:xfrm>
-          <a:prstGeom prst="rect">
-            <a:avLst/>
-          </a:prstGeom>
-          <a:noFill/>
-          <a:ln/>
-        </p:spPr>
-        <p:txBody>
-          <a:bodyPr wrap="square" lIns="0" tIns="0" rIns="0" bIns="0" rtlCol="0" anchor="ctr"/>
-          <a:lstStyle/>
-          <a:p>
-            <a:pPr indent="0" marL="0">
-              <a:buNone/>
-            </a:pPr>
-            <a:r>
-              <a:rPr lang="en-US" sz="1200" b="1" dirty="0">
-                <a:solidFill>
-                  <a:srgbClr val="B3121B"/>
-                </a:solidFill>
-                <a:latin typeface="Yu Gothic" pitchFamily="34" charset="0"/>
-                <a:ea typeface="Yu Gothic" pitchFamily="34" charset="-122"/>
-                <a:cs typeface="Yu Gothic" pitchFamily="34" charset="-120"/>
-              </a:rPr>
-              <a:t>⚠ IPホルダーはAI生成を警戒します</a:t>
-            </a:r>
-            <a:endParaRPr lang="en-US" sz="1200" dirty="0"/>
-          </a:p>
-        </p:txBody>
-      </p:sp>
-      <p:sp>
-        <p:nvSpPr>
-          <p:cNvPr id="14" name="Text 11"/>
-          <p:cNvSpPr txBox="1"/>
-          <p:nvPr/>
-        </p:nvSpPr>
-        <p:spPr>
-          <a:xfrm>
-            <a:off x="6487668" y="4882896"/>
-            <a:ext cx="4905756" cy="987552"/>
-          </a:xfrm>
-          <a:prstGeom prst="rect">
-            <a:avLst/>
-          </a:prstGeom>
-          <a:noFill/>
-          <a:ln/>
-        </p:spPr>
-        <p:txBody>
-          <a:bodyPr wrap="square" lIns="0" tIns="0" rIns="0" bIns="0" rtlCol="0" anchor="t"/>
-          <a:lstStyle/>
+              <a:t>JIAA調査でも受容条件1位は「AI利用が明記されている」37.6%。開示を前提に設計します。</a:t>
+            </a:r>
+            <a:endParaRPr lang="en-US" sz="1000" dirty="0"/>
+          </a:p>
           <a:p>
             <a:pPr indent="0" marL="0">
               <a:lnSpc>
@@ -32951,17 +33778,6 @@
               </a:lnSpc>
               <a:buNone/>
             </a:pPr>
-            <a:r>
-              <a:rPr lang="en-US" sz="1000" dirty="0">
-                <a:solidFill>
-                  <a:srgbClr val="3A3A42"/>
-                </a:solidFill>
-                <a:latin typeface="Yu Gothic" pitchFamily="34" charset="0"/>
-                <a:ea typeface="Yu Gothic" pitchFamily="34" charset="-122"/>
-                <a:cs typeface="Yu Gothic" pitchFamily="34" charset="-120"/>
-              </a:rPr>
-              <a:t>原作ファンの反発が、原作そのものの価値を毀損しかねません。</a:t>
-            </a:r>
             <a:endParaRPr lang="en-US" sz="1000" dirty="0"/>
           </a:p>
           <a:p>
@@ -32980,35 +33796,15 @@
                 <a:ea typeface="Yu Gothic" pitchFamily="34" charset="-122"/>
                 <a:cs typeface="Yu Gothic" pitchFamily="34" charset="-120"/>
               </a:rPr>
-              <a:t>契約に「AI利用の可否と開示方法」を必ず明記します。</a:t>
+              <a:t>⚠ D は版権コストがゼロなので、PF公開前から積み上げられます。ローンチ時に「見るものがある」状態をつくる唯一の方法です。</a:t>
             </a:r>
             <a:endParaRPr lang="en-US" sz="1000" dirty="0"/>
           </a:p>
-          <a:p>
-            <a:pPr indent="0" marL="0">
-              <a:lnSpc>
-                <a:spcPct val="126000"/>
-              </a:lnSpc>
-              <a:buNone/>
-            </a:pPr>
-            <a:r>
-              <a:rPr lang="en-US" sz="1000" dirty="0">
-                <a:solidFill>
-                  <a:srgbClr val="3A3A42"/>
-                </a:solidFill>
-                <a:latin typeface="Yu Gothic" pitchFamily="34" charset="0"/>
-                <a:ea typeface="Yu Gothic" pitchFamily="34" charset="-122"/>
-                <a:cs typeface="Yu Gothic" pitchFamily="34" charset="-120"/>
-              </a:rPr>
-              <a:t>JIAA調査でも受容条件1位は「AI利用が明記されている」37.6%。開示を前提に設計します。</a:t>
-            </a:r>
-            <a:endParaRPr lang="en-US" sz="1000" dirty="0"/>
-          </a:p>
-        </p:txBody>
-      </p:sp>
-      <p:sp>
-        <p:nvSpPr>
-          <p:cNvPr id="15" name="Text 12"/>
+        </p:txBody>
+      </p:sp>
+      <p:sp>
+        <p:nvSpPr>
+          <p:cNvPr id="32" name="Text 29"/>
           <p:cNvSpPr txBox="1"/>
           <p:nvPr/>
         </p:nvSpPr>
@@ -33047,7 +33843,7 @@
       </p:sp>
       <p:sp>
         <p:nvSpPr>
-          <p:cNvPr id="16" name="Text 13"/>
+          <p:cNvPr id="33" name="Text 30"/>
           <p:cNvSpPr txBox="1"/>
           <p:nvPr/>
         </p:nvSpPr>
